--- a/output/Module02_V06_Updated.pptx
+++ b/output/Module02_V06_Updated.pptx
@@ -5,19 +5,20 @@
     <p:sldMasterId id="2147483648" r:id="rId1"/>
   </p:sldMasterIdLst>
   <p:sldIdLst>
-    <p:sldId id="256" r:id="rId2"/>
-    <p:sldId id="257" r:id="rId3"/>
-    <p:sldId id="266" r:id="rId4"/>
-    <p:sldId id="267" r:id="rId5"/>
-    <p:sldId id="258" r:id="rId6"/>
-    <p:sldId id="259" r:id="rId7"/>
-    <p:sldId id="260" r:id="rId8"/>
-    <p:sldId id="261" r:id="rId9"/>
-    <p:sldId id="262" r:id="rId10"/>
-    <p:sldId id="263" r:id="rId11"/>
-    <p:sldId id="264" r:id="rId12"/>
+    <p:sldId id="256" r:id="rId7"/>
+    <p:sldId id="257" r:id="rId8"/>
+    <p:sldId id="266" r:id="rId17"/>
+    <p:sldId id="267" r:id="rId18"/>
+    <p:sldId id="258" r:id="rId9"/>
+    <p:sldId id="259" r:id="rId10"/>
+    <p:sldId id="260" r:id="rId11"/>
+    <p:sldId id="261" r:id="rId12"/>
+    <p:sldId id="262" r:id="rId13"/>
+    <p:sldId id="263" r:id="rId14"/>
+    <p:sldId id="264" r:id="rId15"/>
+    <p:sldId id="265" r:id="rId16"/>
   </p:sldIdLst>
-  <p:sldSz cx="12192000" cy="6858000"/>
+  <p:sldSz cx="12191695" cy="6858000" type="screen4x3"/>
   <p:notesSz cx="6858000" cy="9144000"/>
   <p:defaultTextStyle>
     <a:defPPr>
@@ -114,22 +115,6 @@
       </a:defRPr>
     </a:lvl9pPr>
   </p:defaultTextStyle>
-  <p:extLst>
-    <p:ext uri="{EFAFB233-063F-42B5-8137-9DF3F51BA10A}">
-      <p15:sldGuideLst xmlns:p15="http://schemas.microsoft.com/office/powerpoint/2012/main">
-        <p15:guide id="1" orient="horz" pos="2160">
-          <p15:clr>
-            <a:srgbClr val="A4A3A4"/>
-          </p15:clr>
-        </p15:guide>
-        <p15:guide id="2" pos="2880">
-          <p15:clr>
-            <a:srgbClr val="A4A3A4"/>
-          </p15:clr>
-        </p15:guide>
-      </p15:sldGuideLst>
-    </p:ext>
-  </p:extLst>
 </p:presentation>
 </file>
 
@@ -171,9 +156,10 @@
           <a:lstStyle/>
           <a:p>
             <a:r>
-              <a:rPr lang="en-US"/>
+              <a:rPr lang="en-US" smtClean="0"/>
               <a:t>Click to edit Master title style</a:t>
             </a:r>
+            <a:endParaRPr lang="en-US"/>
           </a:p>
         </p:txBody>
       </p:sp>
@@ -289,9 +275,10 @@
           </a:lstStyle>
           <a:p>
             <a:r>
-              <a:rPr lang="en-US"/>
+              <a:rPr lang="en-US" smtClean="0"/>
               <a:t>Click to edit Master subtitle style</a:t>
             </a:r>
+            <a:endParaRPr lang="en-US"/>
           </a:p>
         </p:txBody>
       </p:sp>
@@ -312,7 +299,7 @@
           <a:p>
             <a:fld id="{5BCAD085-E8A6-8845-BD4E-CB4CCA059FC4}" type="datetimeFigureOut">
               <a:rPr lang="en-US" smtClean="0"/>
-              <a:t>9/9/26</a:t>
+              <a:t>1/27/13</a:t>
             </a:fld>
             <a:endParaRPr lang="en-US"/>
           </a:p>
@@ -406,9 +393,10 @@
           <a:lstStyle/>
           <a:p>
             <a:r>
-              <a:rPr lang="en-US"/>
+              <a:rPr lang="en-US" smtClean="0"/>
               <a:t>Click to edit Master title style</a:t>
             </a:r>
+            <a:endParaRPr lang="en-US"/>
           </a:p>
         </p:txBody>
       </p:sp>
@@ -429,37 +417,38 @@
           <a:p>
             <a:pPr lvl="0"/>
             <a:r>
-              <a:rPr lang="en-US"/>
+              <a:rPr lang="en-US" smtClean="0"/>
               <a:t>Click to edit Master text styles</a:t>
             </a:r>
           </a:p>
           <a:p>
             <a:pPr lvl="1"/>
             <a:r>
-              <a:rPr lang="en-US"/>
+              <a:rPr lang="en-US" smtClean="0"/>
               <a:t>Second level</a:t>
             </a:r>
           </a:p>
           <a:p>
             <a:pPr lvl="2"/>
             <a:r>
-              <a:rPr lang="en-US"/>
+              <a:rPr lang="en-US" smtClean="0"/>
               <a:t>Third level</a:t>
             </a:r>
           </a:p>
           <a:p>
             <a:pPr lvl="3"/>
             <a:r>
-              <a:rPr lang="en-US"/>
+              <a:rPr lang="en-US" smtClean="0"/>
               <a:t>Fourth level</a:t>
             </a:r>
           </a:p>
           <a:p>
             <a:pPr lvl="4"/>
             <a:r>
-              <a:rPr lang="en-US"/>
+              <a:rPr lang="en-US" smtClean="0"/>
               <a:t>Fifth level</a:t>
             </a:r>
+            <a:endParaRPr lang="en-US"/>
           </a:p>
         </p:txBody>
       </p:sp>
@@ -480,7 +469,7 @@
           <a:p>
             <a:fld id="{5BCAD085-E8A6-8845-BD4E-CB4CCA059FC4}" type="datetimeFigureOut">
               <a:rPr lang="en-US" smtClean="0"/>
-              <a:t>9/9/26</a:t>
+              <a:t>1/27/13</a:t>
             </a:fld>
             <a:endParaRPr lang="en-US"/>
           </a:p>
@@ -579,9 +568,10 @@
           <a:lstStyle/>
           <a:p>
             <a:r>
-              <a:rPr lang="en-US"/>
+              <a:rPr lang="en-US" smtClean="0"/>
               <a:t>Click to edit Master title style</a:t>
             </a:r>
+            <a:endParaRPr lang="en-US"/>
           </a:p>
         </p:txBody>
       </p:sp>
@@ -607,37 +597,38 @@
           <a:p>
             <a:pPr lvl="0"/>
             <a:r>
-              <a:rPr lang="en-US"/>
+              <a:rPr lang="en-US" smtClean="0"/>
               <a:t>Click to edit Master text styles</a:t>
             </a:r>
           </a:p>
           <a:p>
             <a:pPr lvl="1"/>
             <a:r>
-              <a:rPr lang="en-US"/>
+              <a:rPr lang="en-US" smtClean="0"/>
               <a:t>Second level</a:t>
             </a:r>
           </a:p>
           <a:p>
             <a:pPr lvl="2"/>
             <a:r>
-              <a:rPr lang="en-US"/>
+              <a:rPr lang="en-US" smtClean="0"/>
               <a:t>Third level</a:t>
             </a:r>
           </a:p>
           <a:p>
             <a:pPr lvl="3"/>
             <a:r>
-              <a:rPr lang="en-US"/>
+              <a:rPr lang="en-US" smtClean="0"/>
               <a:t>Fourth level</a:t>
             </a:r>
           </a:p>
           <a:p>
             <a:pPr lvl="4"/>
             <a:r>
-              <a:rPr lang="en-US"/>
+              <a:rPr lang="en-US" smtClean="0"/>
               <a:t>Fifth level</a:t>
             </a:r>
+            <a:endParaRPr lang="en-US"/>
           </a:p>
         </p:txBody>
       </p:sp>
@@ -658,7 +649,7 @@
           <a:p>
             <a:fld id="{5BCAD085-E8A6-8845-BD4E-CB4CCA059FC4}" type="datetimeFigureOut">
               <a:rPr lang="en-US" smtClean="0"/>
-              <a:t>9/9/26</a:t>
+              <a:t>1/27/13</a:t>
             </a:fld>
             <a:endParaRPr lang="en-US"/>
           </a:p>
@@ -752,9 +743,10 @@
           <a:lstStyle/>
           <a:p>
             <a:r>
-              <a:rPr lang="en-US"/>
+              <a:rPr lang="en-US" smtClean="0"/>
               <a:t>Click to edit Master title style</a:t>
             </a:r>
+            <a:endParaRPr lang="en-US"/>
           </a:p>
         </p:txBody>
       </p:sp>
@@ -775,37 +767,38 @@
           <a:p>
             <a:pPr lvl="0"/>
             <a:r>
-              <a:rPr lang="en-US"/>
+              <a:rPr lang="en-US" smtClean="0"/>
               <a:t>Click to edit Master text styles</a:t>
             </a:r>
           </a:p>
           <a:p>
             <a:pPr lvl="1"/>
             <a:r>
-              <a:rPr lang="en-US"/>
+              <a:rPr lang="en-US" smtClean="0"/>
               <a:t>Second level</a:t>
             </a:r>
           </a:p>
           <a:p>
             <a:pPr lvl="2"/>
             <a:r>
-              <a:rPr lang="en-US"/>
+              <a:rPr lang="en-US" smtClean="0"/>
               <a:t>Third level</a:t>
             </a:r>
           </a:p>
           <a:p>
             <a:pPr lvl="3"/>
             <a:r>
-              <a:rPr lang="en-US"/>
+              <a:rPr lang="en-US" smtClean="0"/>
               <a:t>Fourth level</a:t>
             </a:r>
           </a:p>
           <a:p>
             <a:pPr lvl="4"/>
             <a:r>
-              <a:rPr lang="en-US"/>
+              <a:rPr lang="en-US" smtClean="0"/>
               <a:t>Fifth level</a:t>
             </a:r>
+            <a:endParaRPr lang="en-US"/>
           </a:p>
         </p:txBody>
       </p:sp>
@@ -826,7 +819,7 @@
           <a:p>
             <a:fld id="{5BCAD085-E8A6-8845-BD4E-CB4CCA059FC4}" type="datetimeFigureOut">
               <a:rPr lang="en-US" smtClean="0"/>
-              <a:t>9/9/26</a:t>
+              <a:t>1/27/13</a:t>
             </a:fld>
             <a:endParaRPr lang="en-US"/>
           </a:p>
@@ -929,9 +922,10 @@
           </a:lstStyle>
           <a:p>
             <a:r>
-              <a:rPr lang="en-US"/>
+              <a:rPr lang="en-US" smtClean="0"/>
               <a:t>Click to edit Master title style</a:t>
             </a:r>
+            <a:endParaRPr lang="en-US"/>
           </a:p>
         </p:txBody>
       </p:sp>
@@ -1048,7 +1042,7 @@
           <a:p>
             <a:pPr lvl="0"/>
             <a:r>
-              <a:rPr lang="en-US"/>
+              <a:rPr lang="en-US" smtClean="0"/>
               <a:t>Click to edit Master text styles</a:t>
             </a:r>
           </a:p>
@@ -1071,7 +1065,7 @@
           <a:p>
             <a:fld id="{5BCAD085-E8A6-8845-BD4E-CB4CCA059FC4}" type="datetimeFigureOut">
               <a:rPr lang="en-US" smtClean="0"/>
-              <a:t>9/9/26</a:t>
+              <a:t>1/27/13</a:t>
             </a:fld>
             <a:endParaRPr lang="en-US"/>
           </a:p>
@@ -1165,9 +1159,10 @@
           <a:lstStyle/>
           <a:p>
             <a:r>
-              <a:rPr lang="en-US"/>
+              <a:rPr lang="en-US" smtClean="0"/>
               <a:t>Click to edit Master title style</a:t>
             </a:r>
+            <a:endParaRPr lang="en-US"/>
           </a:p>
         </p:txBody>
       </p:sp>
@@ -1221,37 +1216,38 @@
           <a:p>
             <a:pPr lvl="0"/>
             <a:r>
-              <a:rPr lang="en-US"/>
+              <a:rPr lang="en-US" smtClean="0"/>
               <a:t>Click to edit Master text styles</a:t>
             </a:r>
           </a:p>
           <a:p>
             <a:pPr lvl="1"/>
             <a:r>
-              <a:rPr lang="en-US"/>
+              <a:rPr lang="en-US" smtClean="0"/>
               <a:t>Second level</a:t>
             </a:r>
           </a:p>
           <a:p>
             <a:pPr lvl="2"/>
             <a:r>
-              <a:rPr lang="en-US"/>
+              <a:rPr lang="en-US" smtClean="0"/>
               <a:t>Third level</a:t>
             </a:r>
           </a:p>
           <a:p>
             <a:pPr lvl="3"/>
             <a:r>
-              <a:rPr lang="en-US"/>
+              <a:rPr lang="en-US" smtClean="0"/>
               <a:t>Fourth level</a:t>
             </a:r>
           </a:p>
           <a:p>
             <a:pPr lvl="4"/>
             <a:r>
-              <a:rPr lang="en-US"/>
+              <a:rPr lang="en-US" smtClean="0"/>
               <a:t>Fifth level</a:t>
             </a:r>
+            <a:endParaRPr lang="en-US"/>
           </a:p>
         </p:txBody>
       </p:sp>
@@ -1305,37 +1301,38 @@
           <a:p>
             <a:pPr lvl="0"/>
             <a:r>
-              <a:rPr lang="en-US"/>
+              <a:rPr lang="en-US" smtClean="0"/>
               <a:t>Click to edit Master text styles</a:t>
             </a:r>
           </a:p>
           <a:p>
             <a:pPr lvl="1"/>
             <a:r>
-              <a:rPr lang="en-US"/>
+              <a:rPr lang="en-US" smtClean="0"/>
               <a:t>Second level</a:t>
             </a:r>
           </a:p>
           <a:p>
             <a:pPr lvl="2"/>
             <a:r>
-              <a:rPr lang="en-US"/>
+              <a:rPr lang="en-US" smtClean="0"/>
               <a:t>Third level</a:t>
             </a:r>
           </a:p>
           <a:p>
             <a:pPr lvl="3"/>
             <a:r>
-              <a:rPr lang="en-US"/>
+              <a:rPr lang="en-US" smtClean="0"/>
               <a:t>Fourth level</a:t>
             </a:r>
           </a:p>
           <a:p>
             <a:pPr lvl="4"/>
             <a:r>
-              <a:rPr lang="en-US"/>
+              <a:rPr lang="en-US" smtClean="0"/>
               <a:t>Fifth level</a:t>
             </a:r>
+            <a:endParaRPr lang="en-US"/>
           </a:p>
         </p:txBody>
       </p:sp>
@@ -1356,7 +1353,7 @@
           <a:p>
             <a:fld id="{5BCAD085-E8A6-8845-BD4E-CB4CCA059FC4}" type="datetimeFigureOut">
               <a:rPr lang="en-US" smtClean="0"/>
-              <a:t>9/9/26</a:t>
+              <a:t>1/27/13</a:t>
             </a:fld>
             <a:endParaRPr lang="en-US"/>
           </a:p>
@@ -1454,9 +1451,10 @@
           </a:lstStyle>
           <a:p>
             <a:r>
-              <a:rPr lang="en-US"/>
+              <a:rPr lang="en-US" smtClean="0"/>
               <a:t>Click to edit Master title style</a:t>
             </a:r>
+            <a:endParaRPr lang="en-US"/>
           </a:p>
         </p:txBody>
       </p:sp>
@@ -1519,7 +1517,7 @@
           <a:p>
             <a:pPr lvl="0"/>
             <a:r>
-              <a:rPr lang="en-US"/>
+              <a:rPr lang="en-US" smtClean="0"/>
               <a:t>Click to edit Master text styles</a:t>
             </a:r>
           </a:p>
@@ -1575,37 +1573,38 @@
           <a:p>
             <a:pPr lvl="0"/>
             <a:r>
-              <a:rPr lang="en-US"/>
+              <a:rPr lang="en-US" smtClean="0"/>
               <a:t>Click to edit Master text styles</a:t>
             </a:r>
           </a:p>
           <a:p>
             <a:pPr lvl="1"/>
             <a:r>
-              <a:rPr lang="en-US"/>
+              <a:rPr lang="en-US" smtClean="0"/>
               <a:t>Second level</a:t>
             </a:r>
           </a:p>
           <a:p>
             <a:pPr lvl="2"/>
             <a:r>
-              <a:rPr lang="en-US"/>
+              <a:rPr lang="en-US" smtClean="0"/>
               <a:t>Third level</a:t>
             </a:r>
           </a:p>
           <a:p>
             <a:pPr lvl="3"/>
             <a:r>
-              <a:rPr lang="en-US"/>
+              <a:rPr lang="en-US" smtClean="0"/>
               <a:t>Fourth level</a:t>
             </a:r>
           </a:p>
           <a:p>
             <a:pPr lvl="4"/>
             <a:r>
-              <a:rPr lang="en-US"/>
+              <a:rPr lang="en-US" smtClean="0"/>
               <a:t>Fifth level</a:t>
             </a:r>
+            <a:endParaRPr lang="en-US"/>
           </a:p>
         </p:txBody>
       </p:sp>
@@ -1668,7 +1667,7 @@
           <a:p>
             <a:pPr lvl="0"/>
             <a:r>
-              <a:rPr lang="en-US"/>
+              <a:rPr lang="en-US" smtClean="0"/>
               <a:t>Click to edit Master text styles</a:t>
             </a:r>
           </a:p>
@@ -1724,37 +1723,38 @@
           <a:p>
             <a:pPr lvl="0"/>
             <a:r>
-              <a:rPr lang="en-US"/>
+              <a:rPr lang="en-US" smtClean="0"/>
               <a:t>Click to edit Master text styles</a:t>
             </a:r>
           </a:p>
           <a:p>
             <a:pPr lvl="1"/>
             <a:r>
-              <a:rPr lang="en-US"/>
+              <a:rPr lang="en-US" smtClean="0"/>
               <a:t>Second level</a:t>
             </a:r>
           </a:p>
           <a:p>
             <a:pPr lvl="2"/>
             <a:r>
-              <a:rPr lang="en-US"/>
+              <a:rPr lang="en-US" smtClean="0"/>
               <a:t>Third level</a:t>
             </a:r>
           </a:p>
           <a:p>
             <a:pPr lvl="3"/>
             <a:r>
-              <a:rPr lang="en-US"/>
+              <a:rPr lang="en-US" smtClean="0"/>
               <a:t>Fourth level</a:t>
             </a:r>
           </a:p>
           <a:p>
             <a:pPr lvl="4"/>
             <a:r>
-              <a:rPr lang="en-US"/>
+              <a:rPr lang="en-US" smtClean="0"/>
               <a:t>Fifth level</a:t>
             </a:r>
+            <a:endParaRPr lang="en-US"/>
           </a:p>
         </p:txBody>
       </p:sp>
@@ -1775,7 +1775,7 @@
           <a:p>
             <a:fld id="{5BCAD085-E8A6-8845-BD4E-CB4CCA059FC4}" type="datetimeFigureOut">
               <a:rPr lang="en-US" smtClean="0"/>
-              <a:t>9/9/26</a:t>
+              <a:t>1/27/13</a:t>
             </a:fld>
             <a:endParaRPr lang="en-US"/>
           </a:p>
@@ -1869,9 +1869,10 @@
           <a:lstStyle/>
           <a:p>
             <a:r>
-              <a:rPr lang="en-US"/>
+              <a:rPr lang="en-US" smtClean="0"/>
               <a:t>Click to edit Master title style</a:t>
             </a:r>
+            <a:endParaRPr lang="en-US"/>
           </a:p>
         </p:txBody>
       </p:sp>
@@ -1892,7 +1893,7 @@
           <a:p>
             <a:fld id="{5BCAD085-E8A6-8845-BD4E-CB4CCA059FC4}" type="datetimeFigureOut">
               <a:rPr lang="en-US" smtClean="0"/>
-              <a:t>9/9/26</a:t>
+              <a:t>1/27/13</a:t>
             </a:fld>
             <a:endParaRPr lang="en-US"/>
           </a:p>
@@ -1987,7 +1988,7 @@
           <a:p>
             <a:fld id="{5BCAD085-E8A6-8845-BD4E-CB4CCA059FC4}" type="datetimeFigureOut">
               <a:rPr lang="en-US" smtClean="0"/>
-              <a:t>9/9/26</a:t>
+              <a:t>1/27/13</a:t>
             </a:fld>
             <a:endParaRPr lang="en-US"/>
           </a:p>
@@ -2090,9 +2091,10 @@
           </a:lstStyle>
           <a:p>
             <a:r>
-              <a:rPr lang="en-US"/>
+              <a:rPr lang="en-US" smtClean="0"/>
               <a:t>Click to edit Master title style</a:t>
             </a:r>
+            <a:endParaRPr lang="en-US"/>
           </a:p>
         </p:txBody>
       </p:sp>
@@ -2146,37 +2148,38 @@
           <a:p>
             <a:pPr lvl="0"/>
             <a:r>
-              <a:rPr lang="en-US"/>
+              <a:rPr lang="en-US" smtClean="0"/>
               <a:t>Click to edit Master text styles</a:t>
             </a:r>
           </a:p>
           <a:p>
             <a:pPr lvl="1"/>
             <a:r>
-              <a:rPr lang="en-US"/>
+              <a:rPr lang="en-US" smtClean="0"/>
               <a:t>Second level</a:t>
             </a:r>
           </a:p>
           <a:p>
             <a:pPr lvl="2"/>
             <a:r>
-              <a:rPr lang="en-US"/>
+              <a:rPr lang="en-US" smtClean="0"/>
               <a:t>Third level</a:t>
             </a:r>
           </a:p>
           <a:p>
             <a:pPr lvl="3"/>
             <a:r>
-              <a:rPr lang="en-US"/>
+              <a:rPr lang="en-US" smtClean="0"/>
               <a:t>Fourth level</a:t>
             </a:r>
           </a:p>
           <a:p>
             <a:pPr lvl="4"/>
             <a:r>
-              <a:rPr lang="en-US"/>
+              <a:rPr lang="en-US" smtClean="0"/>
               <a:t>Fifth level</a:t>
             </a:r>
+            <a:endParaRPr lang="en-US"/>
           </a:p>
         </p:txBody>
       </p:sp>
@@ -2239,7 +2242,7 @@
           <a:p>
             <a:pPr lvl="0"/>
             <a:r>
-              <a:rPr lang="en-US"/>
+              <a:rPr lang="en-US" smtClean="0"/>
               <a:t>Click to edit Master text styles</a:t>
             </a:r>
           </a:p>
@@ -2262,7 +2265,7 @@
           <a:p>
             <a:fld id="{5BCAD085-E8A6-8845-BD4E-CB4CCA059FC4}" type="datetimeFigureOut">
               <a:rPr lang="en-US" smtClean="0"/>
-              <a:t>9/9/26</a:t>
+              <a:t>1/27/13</a:t>
             </a:fld>
             <a:endParaRPr lang="en-US"/>
           </a:p>
@@ -2365,9 +2368,10 @@
           </a:lstStyle>
           <a:p>
             <a:r>
-              <a:rPr lang="en-US"/>
+              <a:rPr lang="en-US" smtClean="0"/>
               <a:t>Click to edit Master title style</a:t>
             </a:r>
+            <a:endParaRPr lang="en-US"/>
           </a:p>
         </p:txBody>
       </p:sp>
@@ -2491,7 +2495,7 @@
           <a:p>
             <a:pPr lvl="0"/>
             <a:r>
-              <a:rPr lang="en-US"/>
+              <a:rPr lang="en-US" smtClean="0"/>
               <a:t>Click to edit Master text styles</a:t>
             </a:r>
           </a:p>
@@ -2514,7 +2518,7 @@
           <a:p>
             <a:fld id="{5BCAD085-E8A6-8845-BD4E-CB4CCA059FC4}" type="datetimeFigureOut">
               <a:rPr lang="en-US" smtClean="0"/>
-              <a:t>9/9/26</a:t>
+              <a:t>1/27/13</a:t>
             </a:fld>
             <a:endParaRPr lang="en-US"/>
           </a:p>
@@ -2623,9 +2627,10 @@
           <a:lstStyle/>
           <a:p>
             <a:r>
-              <a:rPr lang="en-US"/>
+              <a:rPr lang="en-US" smtClean="0"/>
               <a:t>Click to edit Master title style</a:t>
             </a:r>
+            <a:endParaRPr lang="en-US"/>
           </a:p>
         </p:txBody>
       </p:sp>
@@ -2656,37 +2661,38 @@
           <a:p>
             <a:pPr lvl="0"/>
             <a:r>
-              <a:rPr lang="en-US"/>
+              <a:rPr lang="en-US" smtClean="0"/>
               <a:t>Click to edit Master text styles</a:t>
             </a:r>
           </a:p>
           <a:p>
             <a:pPr lvl="1"/>
             <a:r>
-              <a:rPr lang="en-US"/>
+              <a:rPr lang="en-US" smtClean="0"/>
               <a:t>Second level</a:t>
             </a:r>
           </a:p>
           <a:p>
             <a:pPr lvl="2"/>
             <a:r>
-              <a:rPr lang="en-US"/>
+              <a:rPr lang="en-US" smtClean="0"/>
               <a:t>Third level</a:t>
             </a:r>
           </a:p>
           <a:p>
             <a:pPr lvl="3"/>
             <a:r>
-              <a:rPr lang="en-US"/>
+              <a:rPr lang="en-US" smtClean="0"/>
               <a:t>Fourth level</a:t>
             </a:r>
           </a:p>
           <a:p>
             <a:pPr lvl="4"/>
             <a:r>
-              <a:rPr lang="en-US"/>
+              <a:rPr lang="en-US" smtClean="0"/>
               <a:t>Fifth level</a:t>
             </a:r>
+            <a:endParaRPr lang="en-US"/>
           </a:p>
         </p:txBody>
       </p:sp>
@@ -2725,7 +2731,7 @@
           <a:p>
             <a:fld id="{5BCAD085-E8A6-8845-BD4E-CB4CCA059FC4}" type="datetimeFigureOut">
               <a:rPr lang="en-US" smtClean="0"/>
-              <a:t>9/9/26</a:t>
+              <a:t>1/27/13</a:t>
             </a:fld>
             <a:endParaRPr lang="en-US"/>
           </a:p>
@@ -3084,7 +3090,7 @@
 </file>
 
 <file path=ppt/slides/slide1.xml><?xml version="1.0" encoding="utf-8"?>
-<p:sld xmlns:a="http://schemas.openxmlformats.org/drawingml/2006/main" xmlns:r="http://schemas.openxmlformats.org/officeDocument/2006/relationships" xmlns:p="http://schemas.openxmlformats.org/presentationml/2006/main">
+<p:sld xmlns:a="http://schemas.openxmlformats.org/drawingml/2006/main" xmlns:p="http://schemas.openxmlformats.org/presentationml/2006/main" xmlns:r="http://schemas.openxmlformats.org/officeDocument/2006/relationships">
   <p:cSld>
     <p:bg>
       <p:bgPr>
@@ -3100,14 +3106,7 @@
         <p:cNvGrpSpPr/>
         <p:nvPr/>
       </p:nvGrpSpPr>
-      <p:grpSpPr>
-        <a:xfrm>
-          <a:off x="0" y="0"/>
-          <a:ext cx="0" cy="0"/>
-          <a:chOff x="0" y="0"/>
-          <a:chExt cx="0" cy="0"/>
-        </a:xfrm>
-      </p:grpSpPr>
+      <p:grpSpPr/>
       <p:sp>
         <p:nvSpPr>
           <p:cNvPr id="2" name="TextBox 1"/>
@@ -3116,8 +3115,8 @@
         </p:nvSpPr>
         <p:spPr>
           <a:xfrm>
-            <a:off x="822960" y="1280160"/>
-            <a:ext cx="10515600" cy="731520"/>
+            <a:off x="822960" y="1097280"/>
+            <a:ext cx="10515600" cy="640080"/>
           </a:xfrm>
           <a:prstGeom prst="rect">
             <a:avLst/>
@@ -3130,15 +3129,15 @@
           </a:bodyPr>
           <a:lstStyle/>
           <a:p>
-            <a:pPr algn="r" rtl="1"/>
-            <a:r>
-              <a:rPr sz="3400" b="1">
+            <a:pPr algn="l" rtl="0"/>
+            <a:r>
+              <a:rPr sz="2800" b="1">
                 <a:solidFill>
                   <a:srgbClr val="1F4E79"/>
                 </a:solidFill>
                 <a:latin typeface="Calibri"/>
               </a:rPr>
-              <a:t>V06</a:t>
+              <a:t>Module 02  |  V06</a:t>
             </a:r>
           </a:p>
         </p:txBody>
@@ -3151,7 +3150,7 @@
         </p:nvSpPr>
         <p:spPr>
           <a:xfrm>
-            <a:off x="822960" y="2194560"/>
+            <a:off x="822960" y="1920240"/>
             <a:ext cx="10515600" cy="1097280"/>
           </a:xfrm>
           <a:prstGeom prst="rect">
@@ -3167,11 +3166,11 @@
           <a:p>
             <a:pPr algn="r" rtl="1"/>
             <a:r>
-              <a:rPr sz="4800" b="1">
+              <a:rPr sz="4400" b="1">
                 <a:solidFill>
                   <a:srgbClr val="1F3B5C"/>
                 </a:solidFill>
-                <a:latin typeface="Calibri"/>
+                <a:latin typeface="Arial"/>
               </a:rPr>
               <a:t>أساسيات البيانات</a:t>
             </a:r>
@@ -3186,7 +3185,7 @@
         </p:nvSpPr>
         <p:spPr>
           <a:xfrm>
-            <a:off x="822960" y="3566160"/>
+            <a:off x="822960" y="3200400"/>
             <a:ext cx="10515600" cy="914400"/>
           </a:xfrm>
           <a:prstGeom prst="rect">
@@ -3200,9 +3199,9 @@
           </a:bodyPr>
           <a:lstStyle/>
           <a:p>
-            <a:pPr algn="r" rtl="0"/>
-            <a:r>
-              <a:rPr sz="3400" b="0">
+            <a:pPr algn="l" rtl="0"/>
+            <a:r>
+              <a:rPr sz="3000" b="0">
                 <a:solidFill>
                   <a:srgbClr val="333333"/>
                 </a:solidFill>
@@ -3221,7 +3220,7 @@
         </p:nvSpPr>
         <p:spPr>
           <a:xfrm>
-            <a:off x="822960" y="5120640"/>
+            <a:off x="822960" y="4937760"/>
             <a:ext cx="10515600" cy="548640"/>
           </a:xfrm>
           <a:prstGeom prst="rect">
@@ -3241,9 +3240,254 @@
                 <a:solidFill>
                   <a:srgbClr val="666666"/>
                 </a:solidFill>
+                <a:latin typeface="Arial"/>
+              </a:rPr>
+              <a:t>Module 02 — Data &amp; AI Engineering Track  |  الوحدة الثانية</a:t>
+            </a:r>
+          </a:p>
+        </p:txBody>
+      </p:sp>
+      <p:sp>
+        <p:nvSpPr>
+          <p:cNvPr id="6" name="TextBox 5"/>
+          <p:cNvSpPr txBox="1"/>
+          <p:nvPr/>
+        </p:nvSpPr>
+        <p:spPr>
+          <a:xfrm>
+            <a:off x="822960" y="5486400"/>
+            <a:ext cx="10515600" cy="457200"/>
+          </a:xfrm>
+          <a:prstGeom prst="rect">
+            <a:avLst/>
+          </a:prstGeom>
+          <a:noFill/>
+        </p:spPr>
+        <p:txBody>
+          <a:bodyPr wrap="square">
+            <a:spAutoFit/>
+          </a:bodyPr>
+          <a:lstStyle/>
+          <a:p>
+            <a:pPr algn="l" rtl="0"/>
+            <a:r>
+              <a:rPr sz="1400" b="0">
+                <a:solidFill>
+                  <a:srgbClr val="666666"/>
+                </a:solidFill>
                 <a:latin typeface="Calibri"/>
               </a:rPr>
+              <a:t>Light theme  |  Bilingual AR/EN  |  Ready to present</a:t>
+            </a:r>
+          </a:p>
+        </p:txBody>
+      </p:sp>
+      <p:sp>
+        <p:nvSpPr>
+          <p:cNvPr id="7" name="TextBox 6"/>
+          <p:cNvSpPr txBox="1"/>
+          <p:nvPr/>
+        </p:nvSpPr>
+        <p:spPr>
+          <a:xfrm>
+            <a:off x="640080" y="6400800"/>
+            <a:ext cx="8686800" cy="320040"/>
+          </a:xfrm>
+          <a:prstGeom prst="rect">
+            <a:avLst/>
+          </a:prstGeom>
+          <a:noFill/>
+        </p:spPr>
+        <p:txBody>
+          <a:bodyPr wrap="square">
+            <a:spAutoFit/>
+          </a:bodyPr>
+          <a:lstStyle/>
+          <a:p>
+            <a:pPr algn="r" rtl="1"/>
+            <a:r>
+              <a:rPr sz="1000" b="0">
+                <a:solidFill>
+                  <a:srgbClr val="666666"/>
+                </a:solidFill>
+                <a:latin typeface="Arial"/>
+              </a:rPr>
               <a:t>Module 02 — Data &amp; AI Engineering Track  |  الوحدة الثانية</a:t>
+            </a:r>
+          </a:p>
+        </p:txBody>
+      </p:sp>
+      <p:sp>
+        <p:nvSpPr>
+          <p:cNvPr id="8" name="TextBox 7"/>
+          <p:cNvSpPr txBox="1"/>
+          <p:nvPr/>
+        </p:nvSpPr>
+        <p:spPr>
+          <a:xfrm>
+            <a:off x="9601200" y="6400800"/>
+            <a:ext cx="1920240" cy="320040"/>
+          </a:xfrm>
+          <a:prstGeom prst="rect">
+            <a:avLst/>
+          </a:prstGeom>
+          <a:noFill/>
+        </p:spPr>
+        <p:txBody>
+          <a:bodyPr wrap="square">
+            <a:spAutoFit/>
+          </a:bodyPr>
+          <a:lstStyle/>
+          <a:p>
+            <a:pPr algn="l" rtl="0"/>
+            <a:r>
+              <a:rPr sz="1000" b="0">
+                <a:solidFill>
+                  <a:srgbClr val="666666"/>
+                </a:solidFill>
+                <a:latin typeface="Calibri"/>
+              </a:rPr>
+              <a:t>V06  •  1/13</a:t>
+            </a:r>
+          </a:p>
+        </p:txBody>
+      </p:sp>
+      <p:sp>
+        <p:nvSpPr>
+          <p:cNvPr id="9" name="TextBox 8"/>
+          <p:cNvSpPr txBox="1"/>
+          <p:nvPr/>
+        </p:nvSpPr>
+        <p:spPr>
+          <a:xfrm>
+            <a:off x="640080" y="6400800"/>
+            <a:ext cx="8686800" cy="320040"/>
+          </a:xfrm>
+          <a:prstGeom prst="rect">
+            <a:avLst/>
+          </a:prstGeom>
+          <a:noFill/>
+        </p:spPr>
+        <p:txBody>
+          <a:bodyPr wrap="square">
+            <a:spAutoFit/>
+          </a:bodyPr>
+          <a:lstStyle/>
+          <a:p>
+            <a:pPr algn="r" rtl="1"/>
+            <a:r>
+              <a:rPr sz="1000" b="0">
+                <a:solidFill>
+                  <a:srgbClr val="666666"/>
+                </a:solidFill>
+                <a:latin typeface="Arial"/>
+              </a:rPr>
+              <a:t>Module 02 — Data &amp; AI Engineering Track  |  الوحدة الثانية</a:t>
+            </a:r>
+          </a:p>
+        </p:txBody>
+      </p:sp>
+      <p:sp>
+        <p:nvSpPr>
+          <p:cNvPr id="10" name="TextBox 9"/>
+          <p:cNvSpPr txBox="1"/>
+          <p:nvPr/>
+        </p:nvSpPr>
+        <p:spPr>
+          <a:xfrm>
+            <a:off x="9601200" y="6400800"/>
+            <a:ext cx="1920240" cy="320040"/>
+          </a:xfrm>
+          <a:prstGeom prst="rect">
+            <a:avLst/>
+          </a:prstGeom>
+          <a:noFill/>
+        </p:spPr>
+        <p:txBody>
+          <a:bodyPr wrap="square">
+            <a:spAutoFit/>
+          </a:bodyPr>
+          <a:lstStyle/>
+          <a:p>
+            <a:pPr algn="l" rtl="0"/>
+            <a:r>
+              <a:rPr sz="1000" b="0">
+                <a:solidFill>
+                  <a:srgbClr val="666666"/>
+                </a:solidFill>
+                <a:latin typeface="Calibri"/>
+              </a:rPr>
+              <a:t>06_  •  1/12</a:t>
+            </a:r>
+          </a:p>
+        </p:txBody>
+      </p:sp>
+      <p:sp>
+        <p:nvSpPr>
+          <p:cNvPr id="11" name="TextBox 10"/>
+          <p:cNvSpPr txBox="1"/>
+          <p:nvPr/>
+        </p:nvSpPr>
+        <p:spPr>
+          <a:xfrm>
+            <a:off x="640080" y="6400800"/>
+            <a:ext cx="8686800" cy="320040"/>
+          </a:xfrm>
+          <a:prstGeom prst="rect">
+            <a:avLst/>
+          </a:prstGeom>
+          <a:noFill/>
+        </p:spPr>
+        <p:txBody>
+          <a:bodyPr wrap="square">
+            <a:spAutoFit/>
+          </a:bodyPr>
+          <a:lstStyle/>
+          <a:p>
+            <a:pPr algn="r" rtl="1"/>
+            <a:r>
+              <a:rPr sz="1000" b="0">
+                <a:solidFill>
+                  <a:srgbClr val="666666"/>
+                </a:solidFill>
+                <a:latin typeface="Arial"/>
+              </a:rPr>
+              <a:t>Module 02 — Data &amp; AI Engineering Track  |  الوحدة الثانية</a:t>
+            </a:r>
+          </a:p>
+        </p:txBody>
+      </p:sp>
+      <p:sp>
+        <p:nvSpPr>
+          <p:cNvPr id="12" name="TextBox 11"/>
+          <p:cNvSpPr txBox="1"/>
+          <p:nvPr/>
+        </p:nvSpPr>
+        <p:spPr>
+          <a:xfrm>
+            <a:off x="9601200" y="6400800"/>
+            <a:ext cx="1920240" cy="320040"/>
+          </a:xfrm>
+          <a:prstGeom prst="rect">
+            <a:avLst/>
+          </a:prstGeom>
+          <a:noFill/>
+        </p:spPr>
+        <p:txBody>
+          <a:bodyPr wrap="square">
+            <a:spAutoFit/>
+          </a:bodyPr>
+          <a:lstStyle/>
+          <a:p>
+            <a:pPr algn="l" rtl="0"/>
+            <a:r>
+              <a:rPr sz="1000" b="0">
+                <a:solidFill>
+                  <a:srgbClr val="666666"/>
+                </a:solidFill>
+                <a:latin typeface="Calibri"/>
+              </a:rPr>
+              <a:t>06_  •  1/12</a:t>
             </a:r>
           </a:p>
         </p:txBody>
@@ -3257,7 +3501,7 @@
 </file>
 
 <file path=ppt/slides/slide10.xml><?xml version="1.0" encoding="utf-8"?>
-<p:sld xmlns:a="http://schemas.openxmlformats.org/drawingml/2006/main" xmlns:r="http://schemas.openxmlformats.org/officeDocument/2006/relationships" xmlns:p="http://schemas.openxmlformats.org/presentationml/2006/main">
+<p:sld xmlns:a="http://schemas.openxmlformats.org/drawingml/2006/main" xmlns:p="http://schemas.openxmlformats.org/presentationml/2006/main" xmlns:r="http://schemas.openxmlformats.org/officeDocument/2006/relationships">
   <p:cSld>
     <p:bg>
       <p:bgPr>
@@ -3273,14 +3517,7 @@
         <p:cNvGrpSpPr/>
         <p:nvPr/>
       </p:nvGrpSpPr>
-      <p:grpSpPr>
-        <a:xfrm>
-          <a:off x="0" y="0"/>
-          <a:ext cx="0" cy="0"/>
-          <a:chOff x="0" y="0"/>
-          <a:chExt cx="0" cy="0"/>
-        </a:xfrm>
-      </p:grpSpPr>
+      <p:grpSpPr/>
       <p:sp>
         <p:nvSpPr>
           <p:cNvPr id="2" name="Rectangle 1"/>
@@ -3324,7 +3561,6 @@
           <a:lstStyle/>
           <a:p>
             <a:pPr algn="ctr"/>
-            <a:endParaRPr/>
           </a:p>
         </p:txBody>
       </p:sp>
@@ -3356,7 +3592,7 @@
                 <a:solidFill>
                   <a:srgbClr val="1F3B5C"/>
                 </a:solidFill>
-                <a:latin typeface="Calibri"/>
+                <a:latin typeface="Arial"/>
               </a:rPr>
               <a:t>اختبار قصير / Quick Quiz</a:t>
             </a:r>
@@ -3386,6 +3622,9 @@
           <a:lstStyle/>
           <a:p>
             <a:pPr algn="r" rtl="1">
+              <a:spcBef>
+                <a:spcPts val="200"/>
+              </a:spcBef>
               <a:spcAft>
                 <a:spcPts val="1000"/>
               </a:spcAft>
@@ -3395,29 +3634,35 @@
                 <a:solidFill>
                   <a:srgbClr val="333333"/>
                 </a:solidFill>
-                <a:latin typeface="Calibri"/>
+                <a:latin typeface="Arial"/>
               </a:rPr>
               <a:t>• 1. ما الفرق الجوهري بين ETL وELT؟</a:t>
             </a:r>
           </a:p>
           <a:p>
-            <a:pPr algn="r" rtl="0">
+            <a:pPr algn="l" rtl="0">
+              <a:spcBef>
+                <a:spcPts val="200"/>
+              </a:spcBef>
               <a:spcAft>
                 <a:spcPts val="1000"/>
               </a:spcAft>
             </a:pPr>
             <a:r>
-              <a:rPr sz="2000">
+              <a:rPr sz="1700">
                 <a:solidFill>
                   <a:srgbClr val="666666"/>
                 </a:solidFill>
                 <a:latin typeface="Calibri"/>
               </a:rPr>
-              <a:t>   What is the key difference between ETL and ELT?</a:t>
+              <a:t>• What is the key difference between ETL and ELT?</a:t>
             </a:r>
           </a:p>
           <a:p>
             <a:pPr algn="r" rtl="1">
+              <a:spcBef>
+                <a:spcPts val="200"/>
+              </a:spcBef>
               <a:spcAft>
                 <a:spcPts val="1000"/>
               </a:spcAft>
@@ -3427,29 +3672,35 @@
                 <a:solidFill>
                   <a:srgbClr val="333333"/>
                 </a:solidFill>
-                <a:latin typeface="Calibri"/>
+                <a:latin typeface="Arial"/>
               </a:rPr>
               <a:t>• 2. أين تُستخدم طبقة Gold في المعمارية المتدرِّجة؟</a:t>
             </a:r>
           </a:p>
           <a:p>
-            <a:pPr algn="r" rtl="0">
+            <a:pPr algn="l" rtl="0">
+              <a:spcBef>
+                <a:spcPts val="200"/>
+              </a:spcBef>
               <a:spcAft>
                 <a:spcPts val="1000"/>
               </a:spcAft>
             </a:pPr>
             <a:r>
-              <a:rPr sz="2000">
+              <a:rPr sz="1700">
                 <a:solidFill>
                   <a:srgbClr val="666666"/>
                 </a:solidFill>
                 <a:latin typeface="Calibri"/>
               </a:rPr>
-              <a:t>   Where is the Gold layer used in the Medallion architecture?</a:t>
+              <a:t>• Where is the Gold layer used in the Medallion architecture?</a:t>
             </a:r>
           </a:p>
           <a:p>
             <a:pPr algn="r" rtl="1">
+              <a:spcBef>
+                <a:spcPts val="200"/>
+              </a:spcBef>
               <a:spcAft>
                 <a:spcPts val="1000"/>
               </a:spcAft>
@@ -3459,29 +3710,35 @@
                 <a:solidFill>
                   <a:srgbClr val="333333"/>
                 </a:solidFill>
-                <a:latin typeface="Calibri"/>
+                <a:latin typeface="Arial"/>
               </a:rPr>
               <a:t>• 3. أي نمط يناسب مؤسسة كبيرة بفرق مستقلة وملكية لامركزية؟</a:t>
             </a:r>
           </a:p>
           <a:p>
-            <a:pPr algn="r" rtl="0">
+            <a:pPr algn="l" rtl="0">
+              <a:spcBef>
+                <a:spcPts val="200"/>
+              </a:spcBef>
               <a:spcAft>
                 <a:spcPts val="1000"/>
               </a:spcAft>
             </a:pPr>
             <a:r>
-              <a:rPr sz="2000">
+              <a:rPr sz="1700">
                 <a:solidFill>
                   <a:srgbClr val="666666"/>
                 </a:solidFill>
                 <a:latin typeface="Calibri"/>
               </a:rPr>
-              <a:t>   Which pattern suits a large organization with independent, decentralized teams?</a:t>
+              <a:t>• Which pattern suits a large organization with independent, decentralized teams?</a:t>
             </a:r>
           </a:p>
           <a:p>
             <a:pPr algn="r" rtl="1">
+              <a:spcBef>
+                <a:spcPts val="200"/>
+              </a:spcBef>
               <a:spcAft>
                 <a:spcPts val="1000"/>
               </a:spcAft>
@@ -3491,25 +3748,238 @@
                 <a:solidFill>
                   <a:srgbClr val="333333"/>
                 </a:solidFill>
-                <a:latin typeface="Calibri"/>
+                <a:latin typeface="Arial"/>
               </a:rPr>
               <a:t>• 4. ما التنسيق الأنسب للتحليلات عالية الأداء ولماذا؟</a:t>
             </a:r>
           </a:p>
           <a:p>
-            <a:pPr algn="r" rtl="0">
+            <a:pPr algn="l" rtl="0">
+              <a:spcBef>
+                <a:spcPts val="200"/>
+              </a:spcBef>
               <a:spcAft>
                 <a:spcPts val="1000"/>
               </a:spcAft>
             </a:pPr>
             <a:r>
-              <a:rPr sz="2000">
+              <a:rPr sz="1700">
                 <a:solidFill>
                   <a:srgbClr val="666666"/>
                 </a:solidFill>
                 <a:latin typeface="Calibri"/>
               </a:rPr>
-              <a:t>   Which format suits high-performance analytics and why?</a:t>
+              <a:t>• Which format suits high-performance analytics and why?</a:t>
+            </a:r>
+          </a:p>
+        </p:txBody>
+      </p:sp>
+      <p:sp>
+        <p:nvSpPr>
+          <p:cNvPr id="5" name="TextBox 4"/>
+          <p:cNvSpPr txBox="1"/>
+          <p:nvPr/>
+        </p:nvSpPr>
+        <p:spPr>
+          <a:xfrm>
+            <a:off x="640080" y="6400800"/>
+            <a:ext cx="8686800" cy="320040"/>
+          </a:xfrm>
+          <a:prstGeom prst="rect">
+            <a:avLst/>
+          </a:prstGeom>
+          <a:noFill/>
+        </p:spPr>
+        <p:txBody>
+          <a:bodyPr wrap="square">
+            <a:spAutoFit/>
+          </a:bodyPr>
+          <a:lstStyle/>
+          <a:p>
+            <a:pPr algn="r" rtl="1"/>
+            <a:r>
+              <a:rPr sz="1000" b="0">
+                <a:solidFill>
+                  <a:srgbClr val="666666"/>
+                </a:solidFill>
+                <a:latin typeface="Arial"/>
+              </a:rPr>
+              <a:t>Module 02 — Data &amp; AI Engineering Track  |  الوحدة الثانية</a:t>
+            </a:r>
+          </a:p>
+        </p:txBody>
+      </p:sp>
+      <p:sp>
+        <p:nvSpPr>
+          <p:cNvPr id="6" name="TextBox 5"/>
+          <p:cNvSpPr txBox="1"/>
+          <p:nvPr/>
+        </p:nvSpPr>
+        <p:spPr>
+          <a:xfrm>
+            <a:off x="9601200" y="6400800"/>
+            <a:ext cx="1920240" cy="320040"/>
+          </a:xfrm>
+          <a:prstGeom prst="rect">
+            <a:avLst/>
+          </a:prstGeom>
+          <a:noFill/>
+        </p:spPr>
+        <p:txBody>
+          <a:bodyPr wrap="square">
+            <a:spAutoFit/>
+          </a:bodyPr>
+          <a:lstStyle/>
+          <a:p>
+            <a:pPr algn="l" rtl="0"/>
+            <a:r>
+              <a:rPr sz="1000" b="0">
+                <a:solidFill>
+                  <a:srgbClr val="666666"/>
+                </a:solidFill>
+                <a:latin typeface="Calibri"/>
+              </a:rPr>
+              <a:t>V06  •  8/13</a:t>
+            </a:r>
+          </a:p>
+        </p:txBody>
+      </p:sp>
+      <p:sp>
+        <p:nvSpPr>
+          <p:cNvPr id="7" name="TextBox 6"/>
+          <p:cNvSpPr txBox="1"/>
+          <p:nvPr/>
+        </p:nvSpPr>
+        <p:spPr>
+          <a:xfrm>
+            <a:off x="640080" y="6400800"/>
+            <a:ext cx="8686800" cy="320040"/>
+          </a:xfrm>
+          <a:prstGeom prst="rect">
+            <a:avLst/>
+          </a:prstGeom>
+          <a:noFill/>
+        </p:spPr>
+        <p:txBody>
+          <a:bodyPr wrap="square">
+            <a:spAutoFit/>
+          </a:bodyPr>
+          <a:lstStyle/>
+          <a:p>
+            <a:pPr algn="r" rtl="1"/>
+            <a:r>
+              <a:rPr sz="1000" b="0">
+                <a:solidFill>
+                  <a:srgbClr val="666666"/>
+                </a:solidFill>
+                <a:latin typeface="Arial"/>
+              </a:rPr>
+              <a:t>Module 02 — Data &amp; AI Engineering Track  |  الوحدة الثانية</a:t>
+            </a:r>
+          </a:p>
+        </p:txBody>
+      </p:sp>
+      <p:sp>
+        <p:nvSpPr>
+          <p:cNvPr id="8" name="TextBox 7"/>
+          <p:cNvSpPr txBox="1"/>
+          <p:nvPr/>
+        </p:nvSpPr>
+        <p:spPr>
+          <a:xfrm>
+            <a:off x="9601200" y="6400800"/>
+            <a:ext cx="1920240" cy="320040"/>
+          </a:xfrm>
+          <a:prstGeom prst="rect">
+            <a:avLst/>
+          </a:prstGeom>
+          <a:noFill/>
+        </p:spPr>
+        <p:txBody>
+          <a:bodyPr wrap="square">
+            <a:spAutoFit/>
+          </a:bodyPr>
+          <a:lstStyle/>
+          <a:p>
+            <a:pPr algn="l" rtl="0"/>
+            <a:r>
+              <a:rPr sz="1000" b="0">
+                <a:solidFill>
+                  <a:srgbClr val="666666"/>
+                </a:solidFill>
+                <a:latin typeface="Calibri"/>
+              </a:rPr>
+              <a:t>06_  •  10/12</a:t>
+            </a:r>
+          </a:p>
+        </p:txBody>
+      </p:sp>
+      <p:sp>
+        <p:nvSpPr>
+          <p:cNvPr id="9" name="TextBox 8"/>
+          <p:cNvSpPr txBox="1"/>
+          <p:nvPr/>
+        </p:nvSpPr>
+        <p:spPr>
+          <a:xfrm>
+            <a:off x="640080" y="6400800"/>
+            <a:ext cx="8686800" cy="320040"/>
+          </a:xfrm>
+          <a:prstGeom prst="rect">
+            <a:avLst/>
+          </a:prstGeom>
+          <a:noFill/>
+        </p:spPr>
+        <p:txBody>
+          <a:bodyPr wrap="square">
+            <a:spAutoFit/>
+          </a:bodyPr>
+          <a:lstStyle/>
+          <a:p>
+            <a:pPr algn="r" rtl="1"/>
+            <a:r>
+              <a:rPr sz="1000" b="0">
+                <a:solidFill>
+                  <a:srgbClr val="666666"/>
+                </a:solidFill>
+                <a:latin typeface="Arial"/>
+              </a:rPr>
+              <a:t>Module 02 — Data &amp; AI Engineering Track  |  الوحدة الثانية</a:t>
+            </a:r>
+          </a:p>
+        </p:txBody>
+      </p:sp>
+      <p:sp>
+        <p:nvSpPr>
+          <p:cNvPr id="10" name="TextBox 9"/>
+          <p:cNvSpPr txBox="1"/>
+          <p:nvPr/>
+        </p:nvSpPr>
+        <p:spPr>
+          <a:xfrm>
+            <a:off x="9601200" y="6400800"/>
+            <a:ext cx="1920240" cy="320040"/>
+          </a:xfrm>
+          <a:prstGeom prst="rect">
+            <a:avLst/>
+          </a:prstGeom>
+          <a:noFill/>
+        </p:spPr>
+        <p:txBody>
+          <a:bodyPr wrap="square">
+            <a:spAutoFit/>
+          </a:bodyPr>
+          <a:lstStyle/>
+          <a:p>
+            <a:pPr algn="l" rtl="0"/>
+            <a:r>
+              <a:rPr sz="1000" b="0">
+                <a:solidFill>
+                  <a:srgbClr val="666666"/>
+                </a:solidFill>
+                <a:latin typeface="Calibri"/>
+              </a:rPr>
+              <a:t>06_  •  10/12</a:t>
             </a:r>
           </a:p>
         </p:txBody>
@@ -3523,7 +3993,7 @@
 </file>
 
 <file path=ppt/slides/slide11.xml><?xml version="1.0" encoding="utf-8"?>
-<p:sld xmlns:a="http://schemas.openxmlformats.org/drawingml/2006/main" xmlns:r="http://schemas.openxmlformats.org/officeDocument/2006/relationships" xmlns:p="http://schemas.openxmlformats.org/presentationml/2006/main">
+<p:sld xmlns:a="http://schemas.openxmlformats.org/drawingml/2006/main" xmlns:p="http://schemas.openxmlformats.org/presentationml/2006/main" xmlns:r="http://schemas.openxmlformats.org/officeDocument/2006/relationships">
   <p:cSld>
     <p:bg>
       <p:bgPr>
@@ -3539,14 +4009,7 @@
         <p:cNvGrpSpPr/>
         <p:nvPr/>
       </p:nvGrpSpPr>
-      <p:grpSpPr>
-        <a:xfrm>
-          <a:off x="0" y="0"/>
-          <a:ext cx="0" cy="0"/>
-          <a:chOff x="0" y="0"/>
-          <a:chExt cx="0" cy="0"/>
-        </a:xfrm>
-      </p:grpSpPr>
+      <p:grpSpPr/>
       <p:sp>
         <p:nvSpPr>
           <p:cNvPr id="2" name="Rectangle 1"/>
@@ -3590,7 +4053,6 @@
           <a:lstStyle/>
           <a:p>
             <a:pPr algn="ctr"/>
-            <a:endParaRPr/>
           </a:p>
         </p:txBody>
       </p:sp>
@@ -3622,9 +4084,9 @@
                 <a:solidFill>
                   <a:srgbClr val="1F3B5C"/>
                 </a:solidFill>
-                <a:latin typeface="Calibri"/>
-              </a:rPr>
-              <a:t>للاستزادة / Further Reading</a:t>
+                <a:latin typeface="Arial"/>
+              </a:rPr>
+              <a:t>إجابات الاختبار / Quiz Answers</a:t>
             </a:r>
           </a:p>
         </p:txBody>
@@ -3652,98 +4114,364 @@
           <a:lstStyle/>
           <a:p>
             <a:pPr algn="r" rtl="1">
+              <a:spcBef>
+                <a:spcPts val="200"/>
+              </a:spcBef>
               <a:spcAft>
                 <a:spcPts val="1000"/>
               </a:spcAft>
             </a:pPr>
             <a:r>
-              <a:rPr sz="2000">
+              <a:rPr sz="1800">
                 <a:solidFill>
                   <a:srgbClr val="333333"/>
                 </a:solidFill>
-                <a:latin typeface="Calibri"/>
-              </a:rPr>
-              <a:t>• توثيق Databricks — المعمارية المتدرِّجة Medallion.</a:t>
-            </a:r>
-          </a:p>
-          <a:p>
-            <a:pPr algn="r" rtl="0">
+                <a:latin typeface="Arial"/>
+              </a:rPr>
+              <a:t>• 1. ETL يحوّل قبل التحميل؛ ELT يحمّل أولاً ثم يحوّل داخل المنصة الهدف.</a:t>
+            </a:r>
+          </a:p>
+          <a:p>
+            <a:pPr algn="l" rtl="0">
+              <a:spcBef>
+                <a:spcPts val="200"/>
+              </a:spcBef>
               <a:spcAft>
                 <a:spcPts val="1000"/>
               </a:spcAft>
             </a:pPr>
             <a:r>
-              <a:rPr sz="2000">
+              <a:rPr sz="1500">
                 <a:solidFill>
                   <a:srgbClr val="666666"/>
                 </a:solidFill>
                 <a:latin typeface="Calibri"/>
               </a:rPr>
-              <a:t>   Databricks docs — Medallion architecture.</a:t>
+              <a:t>• ETL transforms before loading; ELT loads first and transforms inside the target platform.</a:t>
             </a:r>
           </a:p>
           <a:p>
             <a:pPr algn="r" rtl="1">
+              <a:spcBef>
+                <a:spcPts val="200"/>
+              </a:spcBef>
               <a:spcAft>
                 <a:spcPts val="1000"/>
               </a:spcAft>
             </a:pPr>
             <a:r>
-              <a:rPr sz="2000">
+              <a:rPr sz="1800">
                 <a:solidFill>
                   <a:srgbClr val="333333"/>
                 </a:solidFill>
-                <a:latin typeface="Calibri"/>
-              </a:rPr>
-              <a:t>• مقالات Data Mesh — Zhamak Dehghani.</a:t>
-            </a:r>
-          </a:p>
-          <a:p>
-            <a:pPr algn="r" rtl="0">
+                <a:latin typeface="Arial"/>
+              </a:rPr>
+              <a:t>• 2. تجميعات على مستوى الأعمال جاهزة للتحليل.</a:t>
+            </a:r>
+          </a:p>
+          <a:p>
+            <a:pPr algn="l" rtl="0">
+              <a:spcBef>
+                <a:spcPts val="200"/>
+              </a:spcBef>
               <a:spcAft>
                 <a:spcPts val="1000"/>
               </a:spcAft>
             </a:pPr>
             <a:r>
-              <a:rPr sz="2000">
+              <a:rPr sz="1500">
                 <a:solidFill>
                   <a:srgbClr val="666666"/>
                 </a:solidFill>
                 <a:latin typeface="Calibri"/>
               </a:rPr>
-              <a:t>   Data Mesh articles — Zhamak Dehghani.</a:t>
+              <a:t>• Business-level aggregates that are analytics-ready.</a:t>
             </a:r>
           </a:p>
           <a:p>
             <a:pPr algn="r" rtl="1">
+              <a:spcBef>
+                <a:spcPts val="200"/>
+              </a:spcBef>
               <a:spcAft>
                 <a:spcPts val="1000"/>
               </a:spcAft>
             </a:pPr>
             <a:r>
-              <a:rPr sz="2000">
+              <a:rPr sz="1800">
                 <a:solidFill>
                   <a:srgbClr val="333333"/>
                 </a:solidFill>
-                <a:latin typeface="Calibri"/>
-              </a:rPr>
-              <a:t>• توثيق Apache Parquet.</a:t>
-            </a:r>
-          </a:p>
-          <a:p>
-            <a:pPr algn="r" rtl="0">
+                <a:latin typeface="Arial"/>
+              </a:rPr>
+              <a:t>• 3. شبكة البيانات Data Mesh.</a:t>
+            </a:r>
+          </a:p>
+          <a:p>
+            <a:pPr algn="l" rtl="0">
+              <a:spcBef>
+                <a:spcPts val="200"/>
+              </a:spcBef>
               <a:spcAft>
                 <a:spcPts val="1000"/>
               </a:spcAft>
             </a:pPr>
             <a:r>
-              <a:rPr sz="2000">
+              <a:rPr sz="1500">
                 <a:solidFill>
                   <a:srgbClr val="666666"/>
                 </a:solidFill>
                 <a:latin typeface="Calibri"/>
               </a:rPr>
-              <a:t>   Apache Parquet documentation.</a:t>
+              <a:t>• Data mesh.</a:t>
+            </a:r>
+          </a:p>
+          <a:p>
+            <a:pPr algn="r" rtl="1">
+              <a:spcBef>
+                <a:spcPts val="200"/>
+              </a:spcBef>
+              <a:spcAft>
+                <a:spcPts val="1000"/>
+              </a:spcAft>
+            </a:pPr>
+            <a:r>
+              <a:rPr sz="1800">
+                <a:solidFill>
+                  <a:srgbClr val="333333"/>
+                </a:solidFill>
+                <a:latin typeface="Arial"/>
+              </a:rPr>
+              <a:t>• 4. Parquet — تنسيق عمودي يقلل الحجم ويسرّع القراءة.</a:t>
+            </a:r>
+          </a:p>
+          <a:p>
+            <a:pPr algn="l" rtl="0">
+              <a:spcBef>
+                <a:spcPts val="200"/>
+              </a:spcBef>
+              <a:spcAft>
+                <a:spcPts val="1000"/>
+              </a:spcAft>
+            </a:pPr>
+            <a:r>
+              <a:rPr sz="1500">
+                <a:solidFill>
+                  <a:srgbClr val="666666"/>
+                </a:solidFill>
+                <a:latin typeface="Calibri"/>
+              </a:rPr>
+              <a:t>• Parquet — columnar, smaller and faster for analytical reads.</a:t>
+            </a:r>
+          </a:p>
+        </p:txBody>
+      </p:sp>
+      <p:sp>
+        <p:nvSpPr>
+          <p:cNvPr id="5" name="TextBox 4"/>
+          <p:cNvSpPr txBox="1"/>
+          <p:nvPr/>
+        </p:nvSpPr>
+        <p:spPr>
+          <a:xfrm>
+            <a:off x="640080" y="6400800"/>
+            <a:ext cx="8686800" cy="320040"/>
+          </a:xfrm>
+          <a:prstGeom prst="rect">
+            <a:avLst/>
+          </a:prstGeom>
+          <a:noFill/>
+        </p:spPr>
+        <p:txBody>
+          <a:bodyPr wrap="square">
+            <a:spAutoFit/>
+          </a:bodyPr>
+          <a:lstStyle/>
+          <a:p>
+            <a:pPr algn="r" rtl="1"/>
+            <a:r>
+              <a:rPr sz="1000" b="0">
+                <a:solidFill>
+                  <a:srgbClr val="666666"/>
+                </a:solidFill>
+                <a:latin typeface="Arial"/>
+              </a:rPr>
+              <a:t>Module 02 — Data &amp; AI Engineering Track  |  الوحدة الثانية</a:t>
+            </a:r>
+          </a:p>
+        </p:txBody>
+      </p:sp>
+      <p:sp>
+        <p:nvSpPr>
+          <p:cNvPr id="6" name="TextBox 5"/>
+          <p:cNvSpPr txBox="1"/>
+          <p:nvPr/>
+        </p:nvSpPr>
+        <p:spPr>
+          <a:xfrm>
+            <a:off x="9601200" y="6400800"/>
+            <a:ext cx="1920240" cy="320040"/>
+          </a:xfrm>
+          <a:prstGeom prst="rect">
+            <a:avLst/>
+          </a:prstGeom>
+          <a:noFill/>
+        </p:spPr>
+        <p:txBody>
+          <a:bodyPr wrap="square">
+            <a:spAutoFit/>
+          </a:bodyPr>
+          <a:lstStyle/>
+          <a:p>
+            <a:pPr algn="l" rtl="0"/>
+            <a:r>
+              <a:rPr sz="1000" b="0">
+                <a:solidFill>
+                  <a:srgbClr val="666666"/>
+                </a:solidFill>
+                <a:latin typeface="Calibri"/>
+              </a:rPr>
+              <a:t>V06  •  9/13</a:t>
+            </a:r>
+          </a:p>
+        </p:txBody>
+      </p:sp>
+      <p:sp>
+        <p:nvSpPr>
+          <p:cNvPr id="7" name="TextBox 6"/>
+          <p:cNvSpPr txBox="1"/>
+          <p:nvPr/>
+        </p:nvSpPr>
+        <p:spPr>
+          <a:xfrm>
+            <a:off x="640080" y="6400800"/>
+            <a:ext cx="8686800" cy="320040"/>
+          </a:xfrm>
+          <a:prstGeom prst="rect">
+            <a:avLst/>
+          </a:prstGeom>
+          <a:noFill/>
+        </p:spPr>
+        <p:txBody>
+          <a:bodyPr wrap="square">
+            <a:spAutoFit/>
+          </a:bodyPr>
+          <a:lstStyle/>
+          <a:p>
+            <a:pPr algn="r" rtl="1"/>
+            <a:r>
+              <a:rPr sz="1000" b="0">
+                <a:solidFill>
+                  <a:srgbClr val="666666"/>
+                </a:solidFill>
+                <a:latin typeface="Arial"/>
+              </a:rPr>
+              <a:t>Module 02 — Data &amp; AI Engineering Track  |  الوحدة الثانية</a:t>
+            </a:r>
+          </a:p>
+        </p:txBody>
+      </p:sp>
+      <p:sp>
+        <p:nvSpPr>
+          <p:cNvPr id="8" name="TextBox 7"/>
+          <p:cNvSpPr txBox="1"/>
+          <p:nvPr/>
+        </p:nvSpPr>
+        <p:spPr>
+          <a:xfrm>
+            <a:off x="9601200" y="6400800"/>
+            <a:ext cx="1920240" cy="320040"/>
+          </a:xfrm>
+          <a:prstGeom prst="rect">
+            <a:avLst/>
+          </a:prstGeom>
+          <a:noFill/>
+        </p:spPr>
+        <p:txBody>
+          <a:bodyPr wrap="square">
+            <a:spAutoFit/>
+          </a:bodyPr>
+          <a:lstStyle/>
+          <a:p>
+            <a:pPr algn="l" rtl="0"/>
+            <a:r>
+              <a:rPr sz="1000" b="0">
+                <a:solidFill>
+                  <a:srgbClr val="666666"/>
+                </a:solidFill>
+                <a:latin typeface="Calibri"/>
+              </a:rPr>
+              <a:t>06_  •  11/12</a:t>
+            </a:r>
+          </a:p>
+        </p:txBody>
+      </p:sp>
+      <p:sp>
+        <p:nvSpPr>
+          <p:cNvPr id="9" name="TextBox 8"/>
+          <p:cNvSpPr txBox="1"/>
+          <p:nvPr/>
+        </p:nvSpPr>
+        <p:spPr>
+          <a:xfrm>
+            <a:off x="640080" y="6400800"/>
+            <a:ext cx="8686800" cy="320040"/>
+          </a:xfrm>
+          <a:prstGeom prst="rect">
+            <a:avLst/>
+          </a:prstGeom>
+          <a:noFill/>
+        </p:spPr>
+        <p:txBody>
+          <a:bodyPr wrap="square">
+            <a:spAutoFit/>
+          </a:bodyPr>
+          <a:lstStyle/>
+          <a:p>
+            <a:pPr algn="r" rtl="1"/>
+            <a:r>
+              <a:rPr sz="1000" b="0">
+                <a:solidFill>
+                  <a:srgbClr val="666666"/>
+                </a:solidFill>
+                <a:latin typeface="Arial"/>
+              </a:rPr>
+              <a:t>Module 02 — Data &amp; AI Engineering Track  |  الوحدة الثانية</a:t>
+            </a:r>
+          </a:p>
+        </p:txBody>
+      </p:sp>
+      <p:sp>
+        <p:nvSpPr>
+          <p:cNvPr id="10" name="TextBox 9"/>
+          <p:cNvSpPr txBox="1"/>
+          <p:nvPr/>
+        </p:nvSpPr>
+        <p:spPr>
+          <a:xfrm>
+            <a:off x="9601200" y="6400800"/>
+            <a:ext cx="1920240" cy="320040"/>
+          </a:xfrm>
+          <a:prstGeom prst="rect">
+            <a:avLst/>
+          </a:prstGeom>
+          <a:noFill/>
+        </p:spPr>
+        <p:txBody>
+          <a:bodyPr wrap="square">
+            <a:spAutoFit/>
+          </a:bodyPr>
+          <a:lstStyle/>
+          <a:p>
+            <a:pPr algn="l" rtl="0"/>
+            <a:r>
+              <a:rPr sz="1000" b="0">
+                <a:solidFill>
+                  <a:srgbClr val="666666"/>
+                </a:solidFill>
+                <a:latin typeface="Calibri"/>
+              </a:rPr>
+              <a:t>06_  •  11/12</a:t>
             </a:r>
           </a:p>
         </p:txBody>
@@ -3756,8 +4484,8 @@
 </p:sld>
 </file>
 
-<file path=ppt/slides/slide2.xml><?xml version="1.0" encoding="utf-8"?>
-<p:sld xmlns:a="http://schemas.openxmlformats.org/drawingml/2006/main" xmlns:r="http://schemas.openxmlformats.org/officeDocument/2006/relationships" xmlns:p="http://schemas.openxmlformats.org/presentationml/2006/main">
+<file path=ppt/slides/slide12.xml><?xml version="1.0" encoding="utf-8"?>
+<p:sld xmlns:a="http://schemas.openxmlformats.org/drawingml/2006/main" xmlns:p="http://schemas.openxmlformats.org/presentationml/2006/main" xmlns:r="http://schemas.openxmlformats.org/officeDocument/2006/relationships">
   <p:cSld>
     <p:bg>
       <p:bgPr>
@@ -3773,14 +4501,7 @@
         <p:cNvGrpSpPr/>
         <p:nvPr/>
       </p:nvGrpSpPr>
-      <p:grpSpPr>
-        <a:xfrm>
-          <a:off x="0" y="0"/>
-          <a:ext cx="0" cy="0"/>
-          <a:chOff x="0" y="0"/>
-          <a:chExt cx="0" cy="0"/>
-        </a:xfrm>
-      </p:grpSpPr>
+      <p:grpSpPr/>
       <p:sp>
         <p:nvSpPr>
           <p:cNvPr id="2" name="Rectangle 1"/>
@@ -3824,7 +4545,6 @@
           <a:lstStyle/>
           <a:p>
             <a:pPr algn="ctr"/>
-            <a:endParaRPr/>
           </a:p>
         </p:txBody>
       </p:sp>
@@ -3856,9 +4576,9 @@
                 <a:solidFill>
                   <a:srgbClr val="1F3B5C"/>
                 </a:solidFill>
-                <a:latin typeface="Calibri"/>
-              </a:rPr>
-              <a:t>خريطة المسار / Roadmap</a:t>
+                <a:latin typeface="Arial"/>
+              </a:rPr>
+              <a:t>للاستزادة / Further Reading</a:t>
             </a:r>
           </a:p>
         </p:txBody>
@@ -3886,66 +4606,326 @@
           <a:lstStyle/>
           <a:p>
             <a:pPr algn="r" rtl="1">
+              <a:spcBef>
+                <a:spcPts val="200"/>
+              </a:spcBef>
               <a:spcAft>
                 <a:spcPts val="1000"/>
               </a:spcAft>
             </a:pPr>
             <a:r>
-              <a:rPr sz="1900">
+              <a:rPr sz="2000">
                 <a:solidFill>
                   <a:srgbClr val="333333"/>
                 </a:solidFill>
-                <a:latin typeface="Calibri"/>
-              </a:rPr>
-              <a:t>• رحلة الوحدة: البيانات → التخزين → الخصائص → الفهارس المتجهية → التصنيف → الحوكمة → MLOps → المختبر.</a:t>
-            </a:r>
-          </a:p>
-          <a:p>
-            <a:pPr algn="r" rtl="0">
+                <a:latin typeface="Arial"/>
+              </a:rPr>
+              <a:t>• توثيق Databricks — المعمارية المتدرِّجة Medallion.</a:t>
+            </a:r>
+          </a:p>
+          <a:p>
+            <a:pPr algn="l" rtl="0">
+              <a:spcBef>
+                <a:spcPts val="200"/>
+              </a:spcBef>
               <a:spcAft>
                 <a:spcPts val="1000"/>
               </a:spcAft>
             </a:pPr>
             <a:r>
-              <a:rPr sz="1900">
+              <a:rPr sz="1700">
                 <a:solidFill>
                   <a:srgbClr val="666666"/>
                 </a:solidFill>
                 <a:latin typeface="Calibri"/>
               </a:rPr>
-              <a:t>   Module journey: data → storage → features → vector indexes → labeling → governance → MLOps → lab.</a:t>
+              <a:t>• Databricks docs — Medallion architecture.</a:t>
             </a:r>
           </a:p>
           <a:p>
             <a:pPr algn="r" rtl="1">
+              <a:spcBef>
+                <a:spcPts val="200"/>
+              </a:spcBef>
               <a:spcAft>
                 <a:spcPts val="1000"/>
               </a:spcAft>
             </a:pPr>
             <a:r>
-              <a:rPr sz="1900">
+              <a:rPr sz="2000">
                 <a:solidFill>
                   <a:srgbClr val="333333"/>
                 </a:solidFill>
-                <a:latin typeface="Calibri"/>
-              </a:rPr>
-              <a:t>• شريحة الخريطة تمنح المتعلم الصورة الكاملة من اليوم الأول.</a:t>
-            </a:r>
-          </a:p>
-          <a:p>
-            <a:pPr algn="r" rtl="0">
+                <a:latin typeface="Arial"/>
+              </a:rPr>
+              <a:t>• مقالات Data Mesh — Zhamak Dehghani.</a:t>
+            </a:r>
+          </a:p>
+          <a:p>
+            <a:pPr algn="l" rtl="0">
+              <a:spcBef>
+                <a:spcPts val="200"/>
+              </a:spcBef>
               <a:spcAft>
                 <a:spcPts val="1000"/>
               </a:spcAft>
             </a:pPr>
             <a:r>
-              <a:rPr sz="1900">
+              <a:rPr sz="1700">
                 <a:solidFill>
                   <a:srgbClr val="666666"/>
                 </a:solidFill>
                 <a:latin typeface="Calibri"/>
               </a:rPr>
-              <a:t>   This roadmap gives learners the full picture from day one.</a:t>
+              <a:t>• Data Mesh articles — Zhamak Dehghani.</a:t>
+            </a:r>
+          </a:p>
+          <a:p>
+            <a:pPr algn="r" rtl="1">
+              <a:spcBef>
+                <a:spcPts val="200"/>
+              </a:spcBef>
+              <a:spcAft>
+                <a:spcPts val="1000"/>
+              </a:spcAft>
+            </a:pPr>
+            <a:r>
+              <a:rPr sz="2000">
+                <a:solidFill>
+                  <a:srgbClr val="333333"/>
+                </a:solidFill>
+                <a:latin typeface="Arial"/>
+              </a:rPr>
+              <a:t>• توثيق Apache Parquet.</a:t>
+            </a:r>
+          </a:p>
+          <a:p>
+            <a:pPr algn="l" rtl="0">
+              <a:spcBef>
+                <a:spcPts val="200"/>
+              </a:spcBef>
+              <a:spcAft>
+                <a:spcPts val="1000"/>
+              </a:spcAft>
+            </a:pPr>
+            <a:r>
+              <a:rPr sz="1700">
+                <a:solidFill>
+                  <a:srgbClr val="666666"/>
+                </a:solidFill>
+                <a:latin typeface="Calibri"/>
+              </a:rPr>
+              <a:t>• Apache Parquet documentation.</a:t>
+            </a:r>
+          </a:p>
+        </p:txBody>
+      </p:sp>
+      <p:sp>
+        <p:nvSpPr>
+          <p:cNvPr id="5" name="TextBox 4"/>
+          <p:cNvSpPr txBox="1"/>
+          <p:nvPr/>
+        </p:nvSpPr>
+        <p:spPr>
+          <a:xfrm>
+            <a:off x="640080" y="6400800"/>
+            <a:ext cx="8686800" cy="320040"/>
+          </a:xfrm>
+          <a:prstGeom prst="rect">
+            <a:avLst/>
+          </a:prstGeom>
+          <a:noFill/>
+        </p:spPr>
+        <p:txBody>
+          <a:bodyPr wrap="square">
+            <a:spAutoFit/>
+          </a:bodyPr>
+          <a:lstStyle/>
+          <a:p>
+            <a:pPr algn="r" rtl="1"/>
+            <a:r>
+              <a:rPr sz="1000" b="0">
+                <a:solidFill>
+                  <a:srgbClr val="666666"/>
+                </a:solidFill>
+                <a:latin typeface="Arial"/>
+              </a:rPr>
+              <a:t>Module 02 — Data &amp; AI Engineering Track  |  الوحدة الثانية</a:t>
+            </a:r>
+          </a:p>
+        </p:txBody>
+      </p:sp>
+      <p:sp>
+        <p:nvSpPr>
+          <p:cNvPr id="6" name="TextBox 5"/>
+          <p:cNvSpPr txBox="1"/>
+          <p:nvPr/>
+        </p:nvSpPr>
+        <p:spPr>
+          <a:xfrm>
+            <a:off x="9601200" y="6400800"/>
+            <a:ext cx="1920240" cy="320040"/>
+          </a:xfrm>
+          <a:prstGeom prst="rect">
+            <a:avLst/>
+          </a:prstGeom>
+          <a:noFill/>
+        </p:spPr>
+        <p:txBody>
+          <a:bodyPr wrap="square">
+            <a:spAutoFit/>
+          </a:bodyPr>
+          <a:lstStyle/>
+          <a:p>
+            <a:pPr algn="l" rtl="0"/>
+            <a:r>
+              <a:rPr sz="1000" b="0">
+                <a:solidFill>
+                  <a:srgbClr val="666666"/>
+                </a:solidFill>
+                <a:latin typeface="Calibri"/>
+              </a:rPr>
+              <a:t>V06  •  10/13</a:t>
+            </a:r>
+          </a:p>
+        </p:txBody>
+      </p:sp>
+      <p:sp>
+        <p:nvSpPr>
+          <p:cNvPr id="7" name="TextBox 6"/>
+          <p:cNvSpPr txBox="1"/>
+          <p:nvPr/>
+        </p:nvSpPr>
+        <p:spPr>
+          <a:xfrm>
+            <a:off x="640080" y="6400800"/>
+            <a:ext cx="8686800" cy="320040"/>
+          </a:xfrm>
+          <a:prstGeom prst="rect">
+            <a:avLst/>
+          </a:prstGeom>
+          <a:noFill/>
+        </p:spPr>
+        <p:txBody>
+          <a:bodyPr wrap="square">
+            <a:spAutoFit/>
+          </a:bodyPr>
+          <a:lstStyle/>
+          <a:p>
+            <a:pPr algn="r" rtl="1"/>
+            <a:r>
+              <a:rPr sz="1000" b="0">
+                <a:solidFill>
+                  <a:srgbClr val="666666"/>
+                </a:solidFill>
+                <a:latin typeface="Arial"/>
+              </a:rPr>
+              <a:t>Module 02 — Data &amp; AI Engineering Track  |  الوحدة الثانية</a:t>
+            </a:r>
+          </a:p>
+        </p:txBody>
+      </p:sp>
+      <p:sp>
+        <p:nvSpPr>
+          <p:cNvPr id="8" name="TextBox 7"/>
+          <p:cNvSpPr txBox="1"/>
+          <p:nvPr/>
+        </p:nvSpPr>
+        <p:spPr>
+          <a:xfrm>
+            <a:off x="9601200" y="6400800"/>
+            <a:ext cx="1920240" cy="320040"/>
+          </a:xfrm>
+          <a:prstGeom prst="rect">
+            <a:avLst/>
+          </a:prstGeom>
+          <a:noFill/>
+        </p:spPr>
+        <p:txBody>
+          <a:bodyPr wrap="square">
+            <a:spAutoFit/>
+          </a:bodyPr>
+          <a:lstStyle/>
+          <a:p>
+            <a:pPr algn="l" rtl="0"/>
+            <a:r>
+              <a:rPr sz="1000" b="0">
+                <a:solidFill>
+                  <a:srgbClr val="666666"/>
+                </a:solidFill>
+                <a:latin typeface="Calibri"/>
+              </a:rPr>
+              <a:t>06_  •  12/12</a:t>
+            </a:r>
+          </a:p>
+        </p:txBody>
+      </p:sp>
+      <p:sp>
+        <p:nvSpPr>
+          <p:cNvPr id="9" name="TextBox 8"/>
+          <p:cNvSpPr txBox="1"/>
+          <p:nvPr/>
+        </p:nvSpPr>
+        <p:spPr>
+          <a:xfrm>
+            <a:off x="640080" y="6400800"/>
+            <a:ext cx="8686800" cy="320040"/>
+          </a:xfrm>
+          <a:prstGeom prst="rect">
+            <a:avLst/>
+          </a:prstGeom>
+          <a:noFill/>
+        </p:spPr>
+        <p:txBody>
+          <a:bodyPr wrap="square">
+            <a:spAutoFit/>
+          </a:bodyPr>
+          <a:lstStyle/>
+          <a:p>
+            <a:pPr algn="r" rtl="1"/>
+            <a:r>
+              <a:rPr sz="1000" b="0">
+                <a:solidFill>
+                  <a:srgbClr val="666666"/>
+                </a:solidFill>
+                <a:latin typeface="Arial"/>
+              </a:rPr>
+              <a:t>Module 02 — Data &amp; AI Engineering Track  |  الوحدة الثانية</a:t>
+            </a:r>
+          </a:p>
+        </p:txBody>
+      </p:sp>
+      <p:sp>
+        <p:nvSpPr>
+          <p:cNvPr id="10" name="TextBox 9"/>
+          <p:cNvSpPr txBox="1"/>
+          <p:nvPr/>
+        </p:nvSpPr>
+        <p:spPr>
+          <a:xfrm>
+            <a:off x="9601200" y="6400800"/>
+            <a:ext cx="1920240" cy="320040"/>
+          </a:xfrm>
+          <a:prstGeom prst="rect">
+            <a:avLst/>
+          </a:prstGeom>
+          <a:noFill/>
+        </p:spPr>
+        <p:txBody>
+          <a:bodyPr wrap="square">
+            <a:spAutoFit/>
+          </a:bodyPr>
+          <a:lstStyle/>
+          <a:p>
+            <a:pPr algn="l" rtl="0"/>
+            <a:r>
+              <a:rPr sz="1000" b="0">
+                <a:solidFill>
+                  <a:srgbClr val="666666"/>
+                </a:solidFill>
+                <a:latin typeface="Calibri"/>
+              </a:rPr>
+              <a:t>06_  •  12/12</a:t>
             </a:r>
           </a:p>
         </p:txBody>
@@ -3958,8 +4938,8 @@
 </p:sld>
 </file>
 
-<file path=ppt/slides/slide3.xml><?xml version="1.0" encoding="utf-8"?>
-<p:sld xmlns:a="http://schemas.openxmlformats.org/drawingml/2006/main" xmlns:r="http://schemas.openxmlformats.org/officeDocument/2006/relationships" xmlns:p="http://schemas.openxmlformats.org/presentationml/2006/main">
+<file path=ppt/slides/slide2.xml><?xml version="1.0" encoding="utf-8"?>
+<p:sld xmlns:a="http://schemas.openxmlformats.org/drawingml/2006/main" xmlns:p="http://schemas.openxmlformats.org/presentationml/2006/main" xmlns:r="http://schemas.openxmlformats.org/officeDocument/2006/relationships">
   <p:cSld>
     <p:bg>
       <p:bgPr>
@@ -3975,67 +4955,25 @@
         <p:cNvGrpSpPr/>
         <p:nvPr/>
       </p:nvGrpSpPr>
-      <p:grpSpPr>
-        <a:xfrm>
-          <a:off x="0" y="0"/>
-          <a:ext cx="0" cy="0"/>
-          <a:chOff x="0" y="0"/>
-          <a:chExt cx="0" cy="0"/>
-        </a:xfrm>
-      </p:grpSpPr>
-      <p:sp>
-        <p:nvSpPr>
-          <p:cNvPr id="2" name="TextBox 1"/>
-          <p:cNvSpPr txBox="1"/>
-          <p:nvPr/>
-        </p:nvSpPr>
-        <p:spPr>
-          <a:xfrm>
-            <a:off x="640080" y="137160"/>
-            <a:ext cx="10972800" cy="640080"/>
-          </a:xfrm>
-          <a:prstGeom prst="rect">
-            <a:avLst/>
-          </a:prstGeom>
-          <a:noFill/>
-        </p:spPr>
-        <p:txBody>
-          <a:bodyPr wrap="none">
-            <a:spAutoFit/>
-          </a:bodyPr>
-          <a:lstStyle/>
-          <a:p>
-            <a:pPr algn="r" rtl="1"/>
-            <a:r>
-              <a:rPr sz="3000" b="1">
-                <a:solidFill>
-                  <a:srgbClr val="1F3B5C"/>
-                </a:solidFill>
-                <a:latin typeface="Calibri"/>
-              </a:rPr>
-              <a:t>خريطة المسار / Track Roadmap</a:t>
-            </a:r>
-          </a:p>
-        </p:txBody>
-      </p:sp>
-      <p:sp>
-        <p:nvSpPr>
-          <p:cNvPr id="3" name="Rounded Rectangle 2"/>
+      <p:grpSpPr/>
+      <p:sp>
+        <p:nvSpPr>
+          <p:cNvPr id="2" name="Rectangle 1"/>
           <p:cNvSpPr/>
           <p:nvPr/>
         </p:nvSpPr>
         <p:spPr>
           <a:xfrm>
-            <a:off x="502920" y="2377440"/>
-            <a:ext cx="1234440" cy="1371600"/>
-          </a:xfrm>
-          <a:prstGeom prst="roundRect">
+            <a:off x="0" y="0"/>
+            <a:ext cx="12191695" cy="1005840"/>
+          </a:xfrm>
+          <a:prstGeom prst="rect">
             <a:avLst/>
           </a:prstGeom>
           <a:solidFill>
-            <a:srgbClr val="DCE6F1"/>
+            <a:srgbClr val="FFFFFF"/>
           </a:solidFill>
-          <a:ln w="12700">
+          <a:ln w="25400">
             <a:solidFill>
               <a:srgbClr val="1F4E79"/>
             </a:solidFill>
@@ -4057,828 +4995,23 @@
           </a:fontRef>
         </p:style>
         <p:txBody>
-          <a:bodyPr wrap="square" rtlCol="0" anchor="ctr"/>
-          <a:lstStyle/>
-          <a:p>
-            <a:pPr algn="ctr" rtl="1"/>
-            <a:r>
-              <a:rPr sz="1400" b="1">
-                <a:solidFill>
-                  <a:srgbClr val="333333"/>
-                </a:solidFill>
-                <a:latin typeface="Calibri"/>
-              </a:rPr>
-              <a:t>البيانات</a:t>
-            </a:r>
-          </a:p>
-          <a:p>
-            <a:pPr algn="ctr" rtl="0"/>
-            <a:r>
-              <a:rPr sz="1000">
-                <a:solidFill>
-                  <a:srgbClr val="666666"/>
-                </a:solidFill>
-                <a:latin typeface="Calibri"/>
-              </a:rPr>
-              <a:t>Data</a:t>
-            </a:r>
-          </a:p>
-        </p:txBody>
-      </p:sp>
-      <p:sp>
-        <p:nvSpPr>
-          <p:cNvPr id="4" name="Right Arrow 3"/>
-          <p:cNvSpPr/>
-          <p:nvPr/>
-        </p:nvSpPr>
-        <p:spPr>
-          <a:xfrm>
-            <a:off x="1746504" y="2926080"/>
-            <a:ext cx="128016" cy="274320"/>
-          </a:xfrm>
-          <a:prstGeom prst="rightArrow">
-            <a:avLst/>
-          </a:prstGeom>
-          <a:solidFill>
-            <a:srgbClr val="1F4E79"/>
-          </a:solidFill>
-          <a:ln>
-            <a:noFill/>
-          </a:ln>
-          <a:effectLst/>
-        </p:spPr>
-        <p:style>
-          <a:lnRef idx="1">
-            <a:schemeClr val="accent1"/>
-          </a:lnRef>
-          <a:fillRef idx="3">
-            <a:schemeClr val="accent1"/>
-          </a:fillRef>
-          <a:effectRef idx="2">
-            <a:schemeClr val="accent1"/>
-          </a:effectRef>
-          <a:fontRef idx="minor">
-            <a:schemeClr val="lt1"/>
-          </a:fontRef>
-        </p:style>
-        <p:txBody>
           <a:bodyPr rtlCol="0" anchor="ctr"/>
           <a:lstStyle/>
           <a:p>
             <a:pPr algn="ctr"/>
-            <a:endParaRPr/>
-          </a:p>
-        </p:txBody>
-      </p:sp>
-      <p:sp>
-        <p:nvSpPr>
-          <p:cNvPr id="5" name="Rounded Rectangle 4"/>
-          <p:cNvSpPr/>
-          <p:nvPr/>
-        </p:nvSpPr>
-        <p:spPr>
-          <a:xfrm>
-            <a:off x="1883664" y="2377440"/>
-            <a:ext cx="1234440" cy="1371600"/>
-          </a:xfrm>
-          <a:prstGeom prst="roundRect">
-            <a:avLst/>
-          </a:prstGeom>
-          <a:solidFill>
-            <a:srgbClr val="E2EFDA"/>
-          </a:solidFill>
-          <a:ln w="12700">
-            <a:solidFill>
-              <a:srgbClr val="1F4E79"/>
-            </a:solidFill>
-          </a:ln>
-          <a:effectLst/>
-        </p:spPr>
-        <p:style>
-          <a:lnRef idx="1">
-            <a:schemeClr val="accent1"/>
-          </a:lnRef>
-          <a:fillRef idx="3">
-            <a:schemeClr val="accent1"/>
-          </a:fillRef>
-          <a:effectRef idx="2">
-            <a:schemeClr val="accent1"/>
-          </a:effectRef>
-          <a:fontRef idx="minor">
-            <a:schemeClr val="lt1"/>
-          </a:fontRef>
-        </p:style>
-        <p:txBody>
-          <a:bodyPr wrap="square" rtlCol="0" anchor="ctr"/>
-          <a:lstStyle/>
-          <a:p>
-            <a:pPr algn="ctr" rtl="1"/>
-            <a:r>
-              <a:rPr sz="1400" b="1">
-                <a:solidFill>
-                  <a:srgbClr val="333333"/>
-                </a:solidFill>
-                <a:latin typeface="Calibri"/>
-              </a:rPr>
-              <a:t>التخزين</a:t>
-            </a:r>
-          </a:p>
-          <a:p>
-            <a:pPr algn="ctr" rtl="0"/>
-            <a:r>
-              <a:rPr sz="1000">
-                <a:solidFill>
-                  <a:srgbClr val="666666"/>
-                </a:solidFill>
-                <a:latin typeface="Calibri"/>
-              </a:rPr>
-              <a:t>Storage</a:t>
-            </a:r>
-          </a:p>
-        </p:txBody>
-      </p:sp>
-      <p:sp>
-        <p:nvSpPr>
-          <p:cNvPr id="6" name="Right Arrow 5"/>
-          <p:cNvSpPr/>
-          <p:nvPr/>
-        </p:nvSpPr>
-        <p:spPr>
-          <a:xfrm>
-            <a:off x="3127248" y="2926080"/>
-            <a:ext cx="128016" cy="274320"/>
-          </a:xfrm>
-          <a:prstGeom prst="rightArrow">
-            <a:avLst/>
-          </a:prstGeom>
-          <a:solidFill>
-            <a:srgbClr val="1F4E79"/>
-          </a:solidFill>
-          <a:ln>
-            <a:noFill/>
-          </a:ln>
-          <a:effectLst/>
-        </p:spPr>
-        <p:style>
-          <a:lnRef idx="1">
-            <a:schemeClr val="accent1"/>
-          </a:lnRef>
-          <a:fillRef idx="3">
-            <a:schemeClr val="accent1"/>
-          </a:fillRef>
-          <a:effectRef idx="2">
-            <a:schemeClr val="accent1"/>
-          </a:effectRef>
-          <a:fontRef idx="minor">
-            <a:schemeClr val="lt1"/>
-          </a:fontRef>
-        </p:style>
-        <p:txBody>
-          <a:bodyPr rtlCol="0" anchor="ctr"/>
-          <a:lstStyle/>
-          <a:p>
-            <a:pPr algn="ctr"/>
-            <a:endParaRPr/>
-          </a:p>
-        </p:txBody>
-      </p:sp>
-      <p:sp>
-        <p:nvSpPr>
-          <p:cNvPr id="7" name="Rounded Rectangle 6"/>
-          <p:cNvSpPr/>
-          <p:nvPr/>
-        </p:nvSpPr>
-        <p:spPr>
-          <a:xfrm>
-            <a:off x="3264408" y="2377440"/>
-            <a:ext cx="1234440" cy="1371600"/>
-          </a:xfrm>
-          <a:prstGeom prst="roundRect">
-            <a:avLst/>
-          </a:prstGeom>
-          <a:solidFill>
-            <a:srgbClr val="FDE9D9"/>
-          </a:solidFill>
-          <a:ln w="12700">
-            <a:solidFill>
-              <a:srgbClr val="1F4E79"/>
-            </a:solidFill>
-          </a:ln>
-          <a:effectLst/>
-        </p:spPr>
-        <p:style>
-          <a:lnRef idx="1">
-            <a:schemeClr val="accent1"/>
-          </a:lnRef>
-          <a:fillRef idx="3">
-            <a:schemeClr val="accent1"/>
-          </a:fillRef>
-          <a:effectRef idx="2">
-            <a:schemeClr val="accent1"/>
-          </a:effectRef>
-          <a:fontRef idx="minor">
-            <a:schemeClr val="lt1"/>
-          </a:fontRef>
-        </p:style>
-        <p:txBody>
-          <a:bodyPr wrap="square" rtlCol="0" anchor="ctr"/>
-          <a:lstStyle/>
-          <a:p>
-            <a:pPr algn="ctr" rtl="1"/>
-            <a:r>
-              <a:rPr sz="1400" b="1">
-                <a:solidFill>
-                  <a:srgbClr val="333333"/>
-                </a:solidFill>
-                <a:latin typeface="Calibri"/>
-              </a:rPr>
-              <a:t>الخصائص</a:t>
-            </a:r>
-          </a:p>
-          <a:p>
-            <a:pPr algn="ctr" rtl="0"/>
-            <a:r>
-              <a:rPr sz="1000">
-                <a:solidFill>
-                  <a:srgbClr val="666666"/>
-                </a:solidFill>
-                <a:latin typeface="Calibri"/>
-              </a:rPr>
-              <a:t>Features</a:t>
-            </a:r>
-          </a:p>
-        </p:txBody>
-      </p:sp>
-      <p:sp>
-        <p:nvSpPr>
-          <p:cNvPr id="8" name="Right Arrow 7"/>
-          <p:cNvSpPr/>
-          <p:nvPr/>
-        </p:nvSpPr>
-        <p:spPr>
-          <a:xfrm>
-            <a:off x="4507992" y="2926080"/>
-            <a:ext cx="128016" cy="274320"/>
-          </a:xfrm>
-          <a:prstGeom prst="rightArrow">
-            <a:avLst/>
-          </a:prstGeom>
-          <a:solidFill>
-            <a:srgbClr val="1F4E79"/>
-          </a:solidFill>
-          <a:ln>
-            <a:noFill/>
-          </a:ln>
-          <a:effectLst/>
-        </p:spPr>
-        <p:style>
-          <a:lnRef idx="1">
-            <a:schemeClr val="accent1"/>
-          </a:lnRef>
-          <a:fillRef idx="3">
-            <a:schemeClr val="accent1"/>
-          </a:fillRef>
-          <a:effectRef idx="2">
-            <a:schemeClr val="accent1"/>
-          </a:effectRef>
-          <a:fontRef idx="minor">
-            <a:schemeClr val="lt1"/>
-          </a:fontRef>
-        </p:style>
-        <p:txBody>
-          <a:bodyPr rtlCol="0" anchor="ctr"/>
-          <a:lstStyle/>
-          <a:p>
-            <a:pPr algn="ctr"/>
-            <a:endParaRPr/>
-          </a:p>
-        </p:txBody>
-      </p:sp>
-      <p:sp>
-        <p:nvSpPr>
-          <p:cNvPr id="9" name="Rounded Rectangle 8"/>
-          <p:cNvSpPr/>
-          <p:nvPr/>
-        </p:nvSpPr>
-        <p:spPr>
-          <a:xfrm>
-            <a:off x="4645152" y="2377440"/>
-            <a:ext cx="1234440" cy="1371600"/>
-          </a:xfrm>
-          <a:prstGeom prst="roundRect">
-            <a:avLst/>
-          </a:prstGeom>
-          <a:solidFill>
-            <a:srgbClr val="EDEDED"/>
-          </a:solidFill>
-          <a:ln w="12700">
-            <a:solidFill>
-              <a:srgbClr val="1F4E79"/>
-            </a:solidFill>
-          </a:ln>
-          <a:effectLst/>
-        </p:spPr>
-        <p:style>
-          <a:lnRef idx="1">
-            <a:schemeClr val="accent1"/>
-          </a:lnRef>
-          <a:fillRef idx="3">
-            <a:schemeClr val="accent1"/>
-          </a:fillRef>
-          <a:effectRef idx="2">
-            <a:schemeClr val="accent1"/>
-          </a:effectRef>
-          <a:fontRef idx="minor">
-            <a:schemeClr val="lt1"/>
-          </a:fontRef>
-        </p:style>
-        <p:txBody>
-          <a:bodyPr wrap="square" rtlCol="0" anchor="ctr"/>
-          <a:lstStyle/>
-          <a:p>
-            <a:pPr algn="ctr" rtl="1"/>
-            <a:r>
-              <a:rPr sz="1400" b="1">
-                <a:solidFill>
-                  <a:srgbClr val="333333"/>
-                </a:solidFill>
-                <a:latin typeface="Calibri"/>
-              </a:rPr>
-              <a:t>الفهارس المتجهية</a:t>
-            </a:r>
-          </a:p>
-          <a:p>
-            <a:pPr algn="ctr" rtl="0"/>
-            <a:r>
-              <a:rPr sz="1000">
-                <a:solidFill>
-                  <a:srgbClr val="666666"/>
-                </a:solidFill>
-                <a:latin typeface="Calibri"/>
-              </a:rPr>
-              <a:t>Vector Indexes</a:t>
-            </a:r>
-          </a:p>
-        </p:txBody>
-      </p:sp>
-      <p:sp>
-        <p:nvSpPr>
-          <p:cNvPr id="10" name="Right Arrow 9"/>
-          <p:cNvSpPr/>
-          <p:nvPr/>
-        </p:nvSpPr>
-        <p:spPr>
-          <a:xfrm>
-            <a:off x="5888736" y="2926080"/>
-            <a:ext cx="128016" cy="274320"/>
-          </a:xfrm>
-          <a:prstGeom prst="rightArrow">
-            <a:avLst/>
-          </a:prstGeom>
-          <a:solidFill>
-            <a:srgbClr val="1F4E79"/>
-          </a:solidFill>
-          <a:ln>
-            <a:noFill/>
-          </a:ln>
-          <a:effectLst/>
-        </p:spPr>
-        <p:style>
-          <a:lnRef idx="1">
-            <a:schemeClr val="accent1"/>
-          </a:lnRef>
-          <a:fillRef idx="3">
-            <a:schemeClr val="accent1"/>
-          </a:fillRef>
-          <a:effectRef idx="2">
-            <a:schemeClr val="accent1"/>
-          </a:effectRef>
-          <a:fontRef idx="minor">
-            <a:schemeClr val="lt1"/>
-          </a:fontRef>
-        </p:style>
-        <p:txBody>
-          <a:bodyPr rtlCol="0" anchor="ctr"/>
-          <a:lstStyle/>
-          <a:p>
-            <a:pPr algn="ctr"/>
-            <a:endParaRPr/>
-          </a:p>
-        </p:txBody>
-      </p:sp>
-      <p:sp>
-        <p:nvSpPr>
-          <p:cNvPr id="11" name="Rounded Rectangle 10"/>
-          <p:cNvSpPr/>
-          <p:nvPr/>
-        </p:nvSpPr>
-        <p:spPr>
-          <a:xfrm>
-            <a:off x="6025896" y="2377440"/>
-            <a:ext cx="1234440" cy="1371600"/>
-          </a:xfrm>
-          <a:prstGeom prst="roundRect">
-            <a:avLst/>
-          </a:prstGeom>
-          <a:solidFill>
-            <a:srgbClr val="DCE6F1"/>
-          </a:solidFill>
-          <a:ln w="12700">
-            <a:solidFill>
-              <a:srgbClr val="1F4E79"/>
-            </a:solidFill>
-          </a:ln>
-          <a:effectLst/>
-        </p:spPr>
-        <p:style>
-          <a:lnRef idx="1">
-            <a:schemeClr val="accent1"/>
-          </a:lnRef>
-          <a:fillRef idx="3">
-            <a:schemeClr val="accent1"/>
-          </a:fillRef>
-          <a:effectRef idx="2">
-            <a:schemeClr val="accent1"/>
-          </a:effectRef>
-          <a:fontRef idx="minor">
-            <a:schemeClr val="lt1"/>
-          </a:fontRef>
-        </p:style>
-        <p:txBody>
-          <a:bodyPr wrap="square" rtlCol="0" anchor="ctr"/>
-          <a:lstStyle/>
-          <a:p>
-            <a:pPr algn="ctr" rtl="1"/>
-            <a:r>
-              <a:rPr sz="1400" b="1">
-                <a:solidFill>
-                  <a:srgbClr val="333333"/>
-                </a:solidFill>
-                <a:latin typeface="Calibri"/>
-              </a:rPr>
-              <a:t>التصنيف</a:t>
-            </a:r>
-          </a:p>
-          <a:p>
-            <a:pPr algn="ctr" rtl="0"/>
-            <a:r>
-              <a:rPr sz="1000">
-                <a:solidFill>
-                  <a:srgbClr val="666666"/>
-                </a:solidFill>
-                <a:latin typeface="Calibri"/>
-              </a:rPr>
-              <a:t>Labeling</a:t>
-            </a:r>
-          </a:p>
-        </p:txBody>
-      </p:sp>
-      <p:sp>
-        <p:nvSpPr>
-          <p:cNvPr id="12" name="Right Arrow 11"/>
-          <p:cNvSpPr/>
-          <p:nvPr/>
-        </p:nvSpPr>
-        <p:spPr>
-          <a:xfrm>
-            <a:off x="7269480" y="2926080"/>
-            <a:ext cx="128016" cy="274320"/>
-          </a:xfrm>
-          <a:prstGeom prst="rightArrow">
-            <a:avLst/>
-          </a:prstGeom>
-          <a:solidFill>
-            <a:srgbClr val="1F4E79"/>
-          </a:solidFill>
-          <a:ln>
-            <a:noFill/>
-          </a:ln>
-          <a:effectLst/>
-        </p:spPr>
-        <p:style>
-          <a:lnRef idx="1">
-            <a:schemeClr val="accent1"/>
-          </a:lnRef>
-          <a:fillRef idx="3">
-            <a:schemeClr val="accent1"/>
-          </a:fillRef>
-          <a:effectRef idx="2">
-            <a:schemeClr val="accent1"/>
-          </a:effectRef>
-          <a:fontRef idx="minor">
-            <a:schemeClr val="lt1"/>
-          </a:fontRef>
-        </p:style>
-        <p:txBody>
-          <a:bodyPr rtlCol="0" anchor="ctr"/>
-          <a:lstStyle/>
-          <a:p>
-            <a:pPr algn="ctr"/>
-            <a:endParaRPr/>
-          </a:p>
-        </p:txBody>
-      </p:sp>
-      <p:sp>
-        <p:nvSpPr>
-          <p:cNvPr id="13" name="Rounded Rectangle 12"/>
-          <p:cNvSpPr/>
-          <p:nvPr/>
-        </p:nvSpPr>
-        <p:spPr>
-          <a:xfrm>
-            <a:off x="7406640" y="2377440"/>
-            <a:ext cx="1234440" cy="1371600"/>
-          </a:xfrm>
-          <a:prstGeom prst="roundRect">
-            <a:avLst/>
-          </a:prstGeom>
-          <a:solidFill>
-            <a:srgbClr val="E2EFDA"/>
-          </a:solidFill>
-          <a:ln w="12700">
-            <a:solidFill>
-              <a:srgbClr val="1F4E79"/>
-            </a:solidFill>
-          </a:ln>
-          <a:effectLst/>
-        </p:spPr>
-        <p:style>
-          <a:lnRef idx="1">
-            <a:schemeClr val="accent1"/>
-          </a:lnRef>
-          <a:fillRef idx="3">
-            <a:schemeClr val="accent1"/>
-          </a:fillRef>
-          <a:effectRef idx="2">
-            <a:schemeClr val="accent1"/>
-          </a:effectRef>
-          <a:fontRef idx="minor">
-            <a:schemeClr val="lt1"/>
-          </a:fontRef>
-        </p:style>
-        <p:txBody>
-          <a:bodyPr wrap="square" rtlCol="0" anchor="ctr"/>
-          <a:lstStyle/>
-          <a:p>
-            <a:pPr algn="ctr" rtl="1"/>
-            <a:r>
-              <a:rPr sz="1400" b="1">
-                <a:solidFill>
-                  <a:srgbClr val="333333"/>
-                </a:solidFill>
-                <a:latin typeface="Calibri"/>
-              </a:rPr>
-              <a:t>الحوكمة</a:t>
-            </a:r>
-          </a:p>
-          <a:p>
-            <a:pPr algn="ctr" rtl="0"/>
-            <a:r>
-              <a:rPr sz="1000">
-                <a:solidFill>
-                  <a:srgbClr val="666666"/>
-                </a:solidFill>
-                <a:latin typeface="Calibri"/>
-              </a:rPr>
-              <a:t>Governance</a:t>
-            </a:r>
-          </a:p>
-        </p:txBody>
-      </p:sp>
-      <p:sp>
-        <p:nvSpPr>
-          <p:cNvPr id="14" name="Right Arrow 13"/>
-          <p:cNvSpPr/>
-          <p:nvPr/>
-        </p:nvSpPr>
-        <p:spPr>
-          <a:xfrm>
-            <a:off x="8650224" y="2926080"/>
-            <a:ext cx="128016" cy="274320"/>
-          </a:xfrm>
-          <a:prstGeom prst="rightArrow">
-            <a:avLst/>
-          </a:prstGeom>
-          <a:solidFill>
-            <a:srgbClr val="1F4E79"/>
-          </a:solidFill>
-          <a:ln>
-            <a:noFill/>
-          </a:ln>
-          <a:effectLst/>
-        </p:spPr>
-        <p:style>
-          <a:lnRef idx="1">
-            <a:schemeClr val="accent1"/>
-          </a:lnRef>
-          <a:fillRef idx="3">
-            <a:schemeClr val="accent1"/>
-          </a:fillRef>
-          <a:effectRef idx="2">
-            <a:schemeClr val="accent1"/>
-          </a:effectRef>
-          <a:fontRef idx="minor">
-            <a:schemeClr val="lt1"/>
-          </a:fontRef>
-        </p:style>
-        <p:txBody>
-          <a:bodyPr rtlCol="0" anchor="ctr"/>
-          <a:lstStyle/>
-          <a:p>
-            <a:pPr algn="ctr"/>
-            <a:endParaRPr/>
-          </a:p>
-        </p:txBody>
-      </p:sp>
-      <p:sp>
-        <p:nvSpPr>
-          <p:cNvPr id="15" name="Rounded Rectangle 14"/>
-          <p:cNvSpPr/>
-          <p:nvPr/>
-        </p:nvSpPr>
-        <p:spPr>
-          <a:xfrm>
-            <a:off x="8787384" y="2377440"/>
-            <a:ext cx="1234440" cy="1371600"/>
-          </a:xfrm>
-          <a:prstGeom prst="roundRect">
-            <a:avLst/>
-          </a:prstGeom>
-          <a:solidFill>
-            <a:srgbClr val="FDE9D9"/>
-          </a:solidFill>
-          <a:ln w="12700">
-            <a:solidFill>
-              <a:srgbClr val="1F4E79"/>
-            </a:solidFill>
-          </a:ln>
-          <a:effectLst/>
-        </p:spPr>
-        <p:style>
-          <a:lnRef idx="1">
-            <a:schemeClr val="accent1"/>
-          </a:lnRef>
-          <a:fillRef idx="3">
-            <a:schemeClr val="accent1"/>
-          </a:fillRef>
-          <a:effectRef idx="2">
-            <a:schemeClr val="accent1"/>
-          </a:effectRef>
-          <a:fontRef idx="minor">
-            <a:schemeClr val="lt1"/>
-          </a:fontRef>
-        </p:style>
-        <p:txBody>
-          <a:bodyPr wrap="square" rtlCol="0" anchor="ctr"/>
-          <a:lstStyle/>
-          <a:p>
-            <a:pPr algn="ctr" rtl="1"/>
-            <a:r>
-              <a:rPr sz="1400" b="1">
-                <a:solidFill>
-                  <a:srgbClr val="333333"/>
-                </a:solidFill>
-                <a:latin typeface="Calibri"/>
-              </a:rPr>
-              <a:t>MLOps</a:t>
-            </a:r>
-          </a:p>
-          <a:p>
-            <a:pPr algn="ctr" rtl="0"/>
-            <a:r>
-              <a:rPr sz="1000">
-                <a:solidFill>
-                  <a:srgbClr val="666666"/>
-                </a:solidFill>
-                <a:latin typeface="Calibri"/>
-              </a:rPr>
-              <a:t>MLOps</a:t>
-            </a:r>
-          </a:p>
-        </p:txBody>
-      </p:sp>
-      <p:sp>
-        <p:nvSpPr>
-          <p:cNvPr id="16" name="Right Arrow 15"/>
-          <p:cNvSpPr/>
-          <p:nvPr/>
-        </p:nvSpPr>
-        <p:spPr>
-          <a:xfrm>
-            <a:off x="10030968" y="2926080"/>
-            <a:ext cx="128016" cy="274320"/>
-          </a:xfrm>
-          <a:prstGeom prst="rightArrow">
-            <a:avLst/>
-          </a:prstGeom>
-          <a:solidFill>
-            <a:srgbClr val="1F4E79"/>
-          </a:solidFill>
-          <a:ln>
-            <a:noFill/>
-          </a:ln>
-          <a:effectLst/>
-        </p:spPr>
-        <p:style>
-          <a:lnRef idx="1">
-            <a:schemeClr val="accent1"/>
-          </a:lnRef>
-          <a:fillRef idx="3">
-            <a:schemeClr val="accent1"/>
-          </a:fillRef>
-          <a:effectRef idx="2">
-            <a:schemeClr val="accent1"/>
-          </a:effectRef>
-          <a:fontRef idx="minor">
-            <a:schemeClr val="lt1"/>
-          </a:fontRef>
-        </p:style>
-        <p:txBody>
-          <a:bodyPr rtlCol="0" anchor="ctr"/>
-          <a:lstStyle/>
-          <a:p>
-            <a:pPr algn="ctr"/>
-            <a:endParaRPr/>
-          </a:p>
-        </p:txBody>
-      </p:sp>
-      <p:sp>
-        <p:nvSpPr>
-          <p:cNvPr id="17" name="Rounded Rectangle 16"/>
-          <p:cNvSpPr/>
-          <p:nvPr/>
-        </p:nvSpPr>
-        <p:spPr>
-          <a:xfrm>
-            <a:off x="10168128" y="2377440"/>
-            <a:ext cx="1234440" cy="1371600"/>
-          </a:xfrm>
-          <a:prstGeom prst="roundRect">
-            <a:avLst/>
-          </a:prstGeom>
-          <a:solidFill>
-            <a:srgbClr val="EDEDED"/>
-          </a:solidFill>
-          <a:ln w="12700">
-            <a:solidFill>
-              <a:srgbClr val="1F4E79"/>
-            </a:solidFill>
-          </a:ln>
-          <a:effectLst/>
-        </p:spPr>
-        <p:style>
-          <a:lnRef idx="1">
-            <a:schemeClr val="accent1"/>
-          </a:lnRef>
-          <a:fillRef idx="3">
-            <a:schemeClr val="accent1"/>
-          </a:fillRef>
-          <a:effectRef idx="2">
-            <a:schemeClr val="accent1"/>
-          </a:effectRef>
-          <a:fontRef idx="minor">
-            <a:schemeClr val="lt1"/>
-          </a:fontRef>
-        </p:style>
-        <p:txBody>
-          <a:bodyPr wrap="square" rtlCol="0" anchor="ctr"/>
-          <a:lstStyle/>
-          <a:p>
-            <a:pPr algn="ctr" rtl="1"/>
-            <a:r>
-              <a:rPr sz="1400" b="1">
-                <a:solidFill>
-                  <a:srgbClr val="333333"/>
-                </a:solidFill>
-                <a:latin typeface="Calibri"/>
-              </a:rPr>
-              <a:t>المختبر</a:t>
-            </a:r>
-          </a:p>
-          <a:p>
-            <a:pPr algn="ctr" rtl="0"/>
-            <a:r>
-              <a:rPr sz="1000">
-                <a:solidFill>
-                  <a:srgbClr val="666666"/>
-                </a:solidFill>
-                <a:latin typeface="Calibri"/>
-              </a:rPr>
-              <a:t>Lab</a:t>
-            </a:r>
-          </a:p>
-        </p:txBody>
-      </p:sp>
-      <p:sp>
-        <p:nvSpPr>
-          <p:cNvPr id="18" name="TextBox 17"/>
+          </a:p>
+        </p:txBody>
+      </p:sp>
+      <p:sp>
+        <p:nvSpPr>
+          <p:cNvPr id="3" name="TextBox 2"/>
           <p:cNvSpPr txBox="1"/>
           <p:nvPr/>
         </p:nvSpPr>
         <p:spPr>
           <a:xfrm>
-            <a:off x="640080" y="6126480"/>
-            <a:ext cx="10972800" cy="548640"/>
+            <a:off x="640080" y="182880"/>
+            <a:ext cx="10972800" cy="640080"/>
           </a:xfrm>
           <a:prstGeom prst="rect">
             <a:avLst/>
@@ -4893,19 +5026,398 @@
           <a:p>
             <a:pPr algn="r" rtl="1"/>
             <a:r>
-              <a:rPr sz="1400">
+              <a:rPr sz="3200" b="1">
+                <a:solidFill>
+                  <a:srgbClr val="1F3B5C"/>
+                </a:solidFill>
+                <a:latin typeface="Arial"/>
+              </a:rPr>
+              <a:t>أجندة العرض / Agenda</a:t>
+            </a:r>
+          </a:p>
+        </p:txBody>
+      </p:sp>
+      <p:sp>
+        <p:nvSpPr>
+          <p:cNvPr id="4" name="TextBox 3"/>
+          <p:cNvSpPr txBox="1"/>
+          <p:nvPr/>
+        </p:nvSpPr>
+        <p:spPr>
+          <a:xfrm>
+            <a:off x="640080" y="1280160"/>
+            <a:ext cx="10972800" cy="5212080"/>
+          </a:xfrm>
+          <a:prstGeom prst="rect">
+            <a:avLst/>
+          </a:prstGeom>
+          <a:noFill/>
+        </p:spPr>
+        <p:txBody>
+          <a:bodyPr wrap="square">
+            <a:spAutoFit/>
+          </a:bodyPr>
+          <a:lstStyle/>
+          <a:p>
+            <a:pPr algn="r" rtl="1">
+              <a:spcBef>
+                <a:spcPts val="200"/>
+              </a:spcBef>
+              <a:spcAft>
+                <a:spcPts val="1000"/>
+              </a:spcAft>
+            </a:pPr>
+            <a:r>
+              <a:rPr sz="1600">
+                <a:solidFill>
+                  <a:srgbClr val="333333"/>
+                </a:solidFill>
+                <a:latin typeface="Arial"/>
+              </a:rPr>
+              <a:t>• V06 — أساسيات البيانات</a:t>
+            </a:r>
+          </a:p>
+          <a:p>
+            <a:pPr algn="l" rtl="0">
+              <a:spcBef>
+                <a:spcPts val="200"/>
+              </a:spcBef>
+              <a:spcAft>
+                <a:spcPts val="1000"/>
+              </a:spcAft>
+            </a:pPr>
+            <a:r>
+              <a:rPr sz="1300">
                 <a:solidFill>
                   <a:srgbClr val="666666"/>
                 </a:solidFill>
                 <a:latin typeface="Calibri"/>
               </a:rPr>
-              <a:t>رحلة الوحدة الثانية من البيانات الخام إلى نقطة نهاية RAG.</a:t>
-            </a:r>
-          </a:p>
-          <a:p>
-            <a:pPr algn="r" rtl="0"/>
-            <a:r>
-              <a:t>Module 02 journey: from raw data to a RAG endpoint.</a:t>
+              <a:t>• V06 — Data Fundamentals</a:t>
+            </a:r>
+          </a:p>
+          <a:p>
+            <a:pPr algn="r" rtl="1">
+              <a:spcBef>
+                <a:spcPts val="200"/>
+              </a:spcBef>
+              <a:spcAft>
+                <a:spcPts val="1000"/>
+              </a:spcAft>
+            </a:pPr>
+            <a:r>
+              <a:rPr sz="1600">
+                <a:solidFill>
+                  <a:srgbClr val="333333"/>
+                </a:solidFill>
+                <a:latin typeface="Arial"/>
+              </a:rPr>
+              <a:t>• خريطة المسار / Roadmap</a:t>
+            </a:r>
+          </a:p>
+          <a:p>
+            <a:pPr algn="r" rtl="1">
+              <a:spcBef>
+                <a:spcPts val="200"/>
+              </a:spcBef>
+              <a:spcAft>
+                <a:spcPts val="1000"/>
+              </a:spcAft>
+            </a:pPr>
+            <a:r>
+              <a:rPr sz="1600">
+                <a:solidFill>
+                  <a:srgbClr val="333333"/>
+                </a:solidFill>
+                <a:latin typeface="Arial"/>
+              </a:rPr>
+              <a:t>• أنواع البيانات / Data Types</a:t>
+            </a:r>
+          </a:p>
+          <a:p>
+            <a:pPr algn="r" rtl="1">
+              <a:spcBef>
+                <a:spcPts val="200"/>
+              </a:spcBef>
+              <a:spcAft>
+                <a:spcPts val="1000"/>
+              </a:spcAft>
+            </a:pPr>
+            <a:r>
+              <a:rPr sz="1600">
+                <a:solidFill>
+                  <a:srgbClr val="333333"/>
+                </a:solidFill>
+                <a:latin typeface="Arial"/>
+              </a:rPr>
+              <a:t>• التنسيقات / Formats</a:t>
+            </a:r>
+          </a:p>
+          <a:p>
+            <a:pPr algn="r" rtl="1">
+              <a:spcBef>
+                <a:spcPts val="200"/>
+              </a:spcBef>
+              <a:spcAft>
+                <a:spcPts val="1000"/>
+              </a:spcAft>
+            </a:pPr>
+            <a:r>
+              <a:rPr sz="1600">
+                <a:solidFill>
+                  <a:srgbClr val="333333"/>
+                </a:solidFill>
+                <a:latin typeface="Arial"/>
+              </a:rPr>
+              <a:t>• أنابيب ETL / ELT</a:t>
+            </a:r>
+          </a:p>
+          <a:p>
+            <a:pPr algn="r" rtl="1">
+              <a:spcBef>
+                <a:spcPts val="200"/>
+              </a:spcBef>
+              <a:spcAft>
+                <a:spcPts val="1000"/>
+              </a:spcAft>
+            </a:pPr>
+            <a:r>
+              <a:rPr sz="1600">
+                <a:solidFill>
+                  <a:srgbClr val="333333"/>
+                </a:solidFill>
+                <a:latin typeface="Arial"/>
+              </a:rPr>
+              <a:t>• مقارنة أنماط المعالجة / Processing Patterns</a:t>
+            </a:r>
+          </a:p>
+          <a:p>
+            <a:pPr algn="r" rtl="1">
+              <a:spcBef>
+                <a:spcPts val="200"/>
+              </a:spcBef>
+              <a:spcAft>
+                <a:spcPts val="1000"/>
+              </a:spcAft>
+            </a:pPr>
+            <a:r>
+              <a:rPr sz="1600">
+                <a:solidFill>
+                  <a:srgbClr val="333333"/>
+                </a:solidFill>
+                <a:latin typeface="Arial"/>
+              </a:rPr>
+              <a:t>• جدول المقارنة السريع / Quick Comparison</a:t>
+            </a:r>
+          </a:p>
+        </p:txBody>
+      </p:sp>
+      <p:sp>
+        <p:nvSpPr>
+          <p:cNvPr id="5" name="TextBox 4"/>
+          <p:cNvSpPr txBox="1"/>
+          <p:nvPr/>
+        </p:nvSpPr>
+        <p:spPr>
+          <a:xfrm>
+            <a:off x="640080" y="6400800"/>
+            <a:ext cx="8686800" cy="320040"/>
+          </a:xfrm>
+          <a:prstGeom prst="rect">
+            <a:avLst/>
+          </a:prstGeom>
+          <a:noFill/>
+        </p:spPr>
+        <p:txBody>
+          <a:bodyPr wrap="square">
+            <a:spAutoFit/>
+          </a:bodyPr>
+          <a:lstStyle/>
+          <a:p>
+            <a:pPr algn="r" rtl="1"/>
+            <a:r>
+              <a:rPr sz="1000" b="0">
+                <a:solidFill>
+                  <a:srgbClr val="666666"/>
+                </a:solidFill>
+                <a:latin typeface="Arial"/>
+              </a:rPr>
+              <a:t>Module 02 — Data &amp; AI Engineering Track  |  الوحدة الثانية</a:t>
+            </a:r>
+          </a:p>
+        </p:txBody>
+      </p:sp>
+      <p:sp>
+        <p:nvSpPr>
+          <p:cNvPr id="6" name="TextBox 5"/>
+          <p:cNvSpPr txBox="1"/>
+          <p:nvPr/>
+        </p:nvSpPr>
+        <p:spPr>
+          <a:xfrm>
+            <a:off x="9601200" y="6400800"/>
+            <a:ext cx="1920240" cy="320040"/>
+          </a:xfrm>
+          <a:prstGeom prst="rect">
+            <a:avLst/>
+          </a:prstGeom>
+          <a:noFill/>
+        </p:spPr>
+        <p:txBody>
+          <a:bodyPr wrap="square">
+            <a:spAutoFit/>
+          </a:bodyPr>
+          <a:lstStyle/>
+          <a:p>
+            <a:pPr algn="l" rtl="0"/>
+            <a:r>
+              <a:rPr sz="1000" b="0">
+                <a:solidFill>
+                  <a:srgbClr val="666666"/>
+                </a:solidFill>
+                <a:latin typeface="Calibri"/>
+              </a:rPr>
+              <a:t>V06  •  2/13</a:t>
+            </a:r>
+          </a:p>
+        </p:txBody>
+      </p:sp>
+      <p:sp>
+        <p:nvSpPr>
+          <p:cNvPr id="7" name="TextBox 6"/>
+          <p:cNvSpPr txBox="1"/>
+          <p:nvPr/>
+        </p:nvSpPr>
+        <p:spPr>
+          <a:xfrm>
+            <a:off x="640080" y="6400800"/>
+            <a:ext cx="8686800" cy="320040"/>
+          </a:xfrm>
+          <a:prstGeom prst="rect">
+            <a:avLst/>
+          </a:prstGeom>
+          <a:noFill/>
+        </p:spPr>
+        <p:txBody>
+          <a:bodyPr wrap="square">
+            <a:spAutoFit/>
+          </a:bodyPr>
+          <a:lstStyle/>
+          <a:p>
+            <a:pPr algn="r" rtl="1"/>
+            <a:r>
+              <a:rPr sz="1000" b="0">
+                <a:solidFill>
+                  <a:srgbClr val="666666"/>
+                </a:solidFill>
+                <a:latin typeface="Arial"/>
+              </a:rPr>
+              <a:t>Module 02 — Data &amp; AI Engineering Track  |  الوحدة الثانية</a:t>
+            </a:r>
+          </a:p>
+        </p:txBody>
+      </p:sp>
+      <p:sp>
+        <p:nvSpPr>
+          <p:cNvPr id="8" name="TextBox 7"/>
+          <p:cNvSpPr txBox="1"/>
+          <p:nvPr/>
+        </p:nvSpPr>
+        <p:spPr>
+          <a:xfrm>
+            <a:off x="9601200" y="6400800"/>
+            <a:ext cx="1920240" cy="320040"/>
+          </a:xfrm>
+          <a:prstGeom prst="rect">
+            <a:avLst/>
+          </a:prstGeom>
+          <a:noFill/>
+        </p:spPr>
+        <p:txBody>
+          <a:bodyPr wrap="square">
+            <a:spAutoFit/>
+          </a:bodyPr>
+          <a:lstStyle/>
+          <a:p>
+            <a:pPr algn="l" rtl="0"/>
+            <a:r>
+              <a:rPr sz="1000" b="0">
+                <a:solidFill>
+                  <a:srgbClr val="666666"/>
+                </a:solidFill>
+                <a:latin typeface="Calibri"/>
+              </a:rPr>
+              <a:t>06_  •  2/12</a:t>
+            </a:r>
+          </a:p>
+        </p:txBody>
+      </p:sp>
+      <p:sp>
+        <p:nvSpPr>
+          <p:cNvPr id="9" name="TextBox 8"/>
+          <p:cNvSpPr txBox="1"/>
+          <p:nvPr/>
+        </p:nvSpPr>
+        <p:spPr>
+          <a:xfrm>
+            <a:off x="640080" y="6400800"/>
+            <a:ext cx="8686800" cy="320040"/>
+          </a:xfrm>
+          <a:prstGeom prst="rect">
+            <a:avLst/>
+          </a:prstGeom>
+          <a:noFill/>
+        </p:spPr>
+        <p:txBody>
+          <a:bodyPr wrap="square">
+            <a:spAutoFit/>
+          </a:bodyPr>
+          <a:lstStyle/>
+          <a:p>
+            <a:pPr algn="r" rtl="1"/>
+            <a:r>
+              <a:rPr sz="1000" b="0">
+                <a:solidFill>
+                  <a:srgbClr val="666666"/>
+                </a:solidFill>
+                <a:latin typeface="Arial"/>
+              </a:rPr>
+              <a:t>Module 02 — Data &amp; AI Engineering Track  |  الوحدة الثانية</a:t>
+            </a:r>
+          </a:p>
+        </p:txBody>
+      </p:sp>
+      <p:sp>
+        <p:nvSpPr>
+          <p:cNvPr id="10" name="TextBox 9"/>
+          <p:cNvSpPr txBox="1"/>
+          <p:nvPr/>
+        </p:nvSpPr>
+        <p:spPr>
+          <a:xfrm>
+            <a:off x="9601200" y="6400800"/>
+            <a:ext cx="1920240" cy="320040"/>
+          </a:xfrm>
+          <a:prstGeom prst="rect">
+            <a:avLst/>
+          </a:prstGeom>
+          <a:noFill/>
+        </p:spPr>
+        <p:txBody>
+          <a:bodyPr wrap="square">
+            <a:spAutoFit/>
+          </a:bodyPr>
+          <a:lstStyle/>
+          <a:p>
+            <a:pPr algn="l" rtl="0"/>
+            <a:r>
+              <a:rPr sz="1000" b="0">
+                <a:solidFill>
+                  <a:srgbClr val="666666"/>
+                </a:solidFill>
+                <a:latin typeface="Calibri"/>
+              </a:rPr>
+              <a:t>06_  •  2/12</a:t>
             </a:r>
           </a:p>
         </p:txBody>
@@ -4918,8 +5430,8 @@
 </p:sld>
 </file>
 
-<file path=ppt/slides/slide4.xml><?xml version="1.0" encoding="utf-8"?>
-<p:sld xmlns:a="http://schemas.openxmlformats.org/drawingml/2006/main" xmlns:r="http://schemas.openxmlformats.org/officeDocument/2006/relationships" xmlns:p="http://schemas.openxmlformats.org/presentationml/2006/main">
+<file path=ppt/slides/slide3.xml><?xml version="1.0" encoding="utf-8"?>
+<p:sld xmlns:a="http://schemas.openxmlformats.org/drawingml/2006/main" xmlns:p="http://schemas.openxmlformats.org/presentationml/2006/main" xmlns:r="http://schemas.openxmlformats.org/officeDocument/2006/relationships">
   <p:cSld>
     <p:bg>
       <p:bgPr>
@@ -4935,32 +5447,60 @@
         <p:cNvGrpSpPr/>
         <p:nvPr/>
       </p:nvGrpSpPr>
-      <p:grpSpPr>
-        <a:xfrm>
-          <a:off x="0" y="0"/>
-          <a:ext cx="0" cy="0"/>
-          <a:chOff x="0" y="0"/>
-          <a:chExt cx="0" cy="0"/>
-        </a:xfrm>
-      </p:grpSpPr>
-      <p:sp>
-        <p:nvSpPr>
-          <p:cNvPr id="2" name="Rectangle 1"/>
+      <p:grpSpPr/>
+      <p:sp>
+        <p:nvSpPr>
+          <p:cNvPr id="2" name="TextBox 1"/>
+          <p:cNvSpPr txBox="1"/>
+          <p:nvPr/>
+        </p:nvSpPr>
+        <p:spPr>
+          <a:xfrm>
+            <a:off x="640080" y="137160"/>
+            <a:ext cx="10972800" cy="640080"/>
+          </a:xfrm>
+          <a:prstGeom prst="rect">
+            <a:avLst/>
+          </a:prstGeom>
+          <a:noFill/>
+        </p:spPr>
+        <p:txBody>
+          <a:bodyPr wrap="none">
+            <a:spAutoFit/>
+          </a:bodyPr>
+          <a:lstStyle/>
+          <a:p>
+            <a:pPr algn="r" rtl="1"/>
+            <a:r>
+              <a:rPr sz="3000" b="1">
+                <a:solidFill>
+                  <a:srgbClr val="1F3B5C"/>
+                </a:solidFill>
+                <a:latin typeface="Arial"/>
+              </a:rPr>
+              <a:t>خريطة المسار / Track Roadmap</a:t>
+            </a:r>
+          </a:p>
+        </p:txBody>
+      </p:sp>
+      <p:sp>
+        <p:nvSpPr>
+          <p:cNvPr id="3" name="Rounded Rectangle 2"/>
           <p:cNvSpPr/>
           <p:nvPr/>
         </p:nvSpPr>
         <p:spPr>
           <a:xfrm>
-            <a:off x="0" y="0"/>
-            <a:ext cx="12191695" cy="1005840"/>
-          </a:xfrm>
-          <a:prstGeom prst="rect">
+            <a:off x="502920" y="2377440"/>
+            <a:ext cx="1234440" cy="1371600"/>
+          </a:xfrm>
+          <a:prstGeom prst="roundRect">
             <a:avLst/>
           </a:prstGeom>
           <a:solidFill>
-            <a:srgbClr val="FFFFFF"/>
+            <a:srgbClr val="DCE6F1"/>
           </a:solidFill>
-          <a:ln w="25400">
+          <a:ln w="12700">
             <a:solidFill>
               <a:srgbClr val="1F4E79"/>
             </a:solidFill>
@@ -4982,24 +5522,821 @@
           </a:fontRef>
         </p:style>
         <p:txBody>
+          <a:bodyPr rtlCol="0" anchor="ctr" wrap="square"/>
+          <a:lstStyle/>
+          <a:p>
+            <a:pPr algn="ctr" rtl="1"/>
+            <a:r>
+              <a:rPr sz="1400" b="1">
+                <a:solidFill>
+                  <a:srgbClr val="333333"/>
+                </a:solidFill>
+                <a:latin typeface="Arial"/>
+              </a:rPr>
+              <a:t>البيانات</a:t>
+            </a:r>
+          </a:p>
+          <a:p>
+            <a:pPr algn="ctr" rtl="0"/>
+            <a:r>
+              <a:rPr sz="1000">
+                <a:solidFill>
+                  <a:srgbClr val="666666"/>
+                </a:solidFill>
+                <a:latin typeface="Calibri"/>
+              </a:rPr>
+              <a:t>Data</a:t>
+            </a:r>
+          </a:p>
+        </p:txBody>
+      </p:sp>
+      <p:sp>
+        <p:nvSpPr>
+          <p:cNvPr id="4" name="Left Arrow 3"/>
+          <p:cNvSpPr/>
+          <p:nvPr/>
+        </p:nvSpPr>
+        <p:spPr>
+          <a:xfrm>
+            <a:off x="1746504" y="2926080"/>
+            <a:ext cx="128016" cy="274320"/>
+          </a:xfrm>
+          <a:prstGeom prst="leftArrow">
+            <a:avLst/>
+          </a:prstGeom>
+          <a:solidFill>
+            <a:srgbClr val="1F4E79"/>
+          </a:solidFill>
+          <a:ln>
+            <a:noFill/>
+          </a:ln>
+          <a:effectLst/>
+        </p:spPr>
+        <p:style>
+          <a:lnRef idx="1">
+            <a:schemeClr val="accent1"/>
+          </a:lnRef>
+          <a:fillRef idx="3">
+            <a:schemeClr val="accent1"/>
+          </a:fillRef>
+          <a:effectRef idx="2">
+            <a:schemeClr val="accent1"/>
+          </a:effectRef>
+          <a:fontRef idx="minor">
+            <a:schemeClr val="lt1"/>
+          </a:fontRef>
+        </p:style>
+        <p:txBody>
           <a:bodyPr rtlCol="0" anchor="ctr"/>
           <a:lstStyle/>
           <a:p>
             <a:pPr algn="ctr"/>
-            <a:endParaRPr/>
-          </a:p>
-        </p:txBody>
-      </p:sp>
-      <p:sp>
-        <p:nvSpPr>
-          <p:cNvPr id="3" name="TextBox 2"/>
+          </a:p>
+        </p:txBody>
+      </p:sp>
+      <p:sp>
+        <p:nvSpPr>
+          <p:cNvPr id="5" name="Rounded Rectangle 4"/>
+          <p:cNvSpPr/>
+          <p:nvPr/>
+        </p:nvSpPr>
+        <p:spPr>
+          <a:xfrm>
+            <a:off x="1883664" y="2377440"/>
+            <a:ext cx="1234440" cy="1371600"/>
+          </a:xfrm>
+          <a:prstGeom prst="roundRect">
+            <a:avLst/>
+          </a:prstGeom>
+          <a:solidFill>
+            <a:srgbClr val="E2EFDA"/>
+          </a:solidFill>
+          <a:ln w="12700">
+            <a:solidFill>
+              <a:srgbClr val="1F4E79"/>
+            </a:solidFill>
+          </a:ln>
+          <a:effectLst/>
+        </p:spPr>
+        <p:style>
+          <a:lnRef idx="1">
+            <a:schemeClr val="accent1"/>
+          </a:lnRef>
+          <a:fillRef idx="3">
+            <a:schemeClr val="accent1"/>
+          </a:fillRef>
+          <a:effectRef idx="2">
+            <a:schemeClr val="accent1"/>
+          </a:effectRef>
+          <a:fontRef idx="minor">
+            <a:schemeClr val="lt1"/>
+          </a:fontRef>
+        </p:style>
+        <p:txBody>
+          <a:bodyPr rtlCol="0" anchor="ctr" wrap="square"/>
+          <a:lstStyle/>
+          <a:p>
+            <a:pPr algn="ctr" rtl="1"/>
+            <a:r>
+              <a:rPr sz="1400" b="1">
+                <a:solidFill>
+                  <a:srgbClr val="333333"/>
+                </a:solidFill>
+                <a:latin typeface="Arial"/>
+              </a:rPr>
+              <a:t>التخزين</a:t>
+            </a:r>
+          </a:p>
+          <a:p>
+            <a:pPr algn="ctr" rtl="0"/>
+            <a:r>
+              <a:rPr sz="1000">
+                <a:solidFill>
+                  <a:srgbClr val="666666"/>
+                </a:solidFill>
+                <a:latin typeface="Calibri"/>
+              </a:rPr>
+              <a:t>Storage</a:t>
+            </a:r>
+          </a:p>
+        </p:txBody>
+      </p:sp>
+      <p:sp>
+        <p:nvSpPr>
+          <p:cNvPr id="6" name="Left Arrow 5"/>
+          <p:cNvSpPr/>
+          <p:nvPr/>
+        </p:nvSpPr>
+        <p:spPr>
+          <a:xfrm>
+            <a:off x="3127248" y="2926080"/>
+            <a:ext cx="128016" cy="274320"/>
+          </a:xfrm>
+          <a:prstGeom prst="leftArrow">
+            <a:avLst/>
+          </a:prstGeom>
+          <a:solidFill>
+            <a:srgbClr val="1F4E79"/>
+          </a:solidFill>
+          <a:ln>
+            <a:noFill/>
+          </a:ln>
+          <a:effectLst/>
+        </p:spPr>
+        <p:style>
+          <a:lnRef idx="1">
+            <a:schemeClr val="accent1"/>
+          </a:lnRef>
+          <a:fillRef idx="3">
+            <a:schemeClr val="accent1"/>
+          </a:fillRef>
+          <a:effectRef idx="2">
+            <a:schemeClr val="accent1"/>
+          </a:effectRef>
+          <a:fontRef idx="minor">
+            <a:schemeClr val="lt1"/>
+          </a:fontRef>
+        </p:style>
+        <p:txBody>
+          <a:bodyPr rtlCol="0" anchor="ctr"/>
+          <a:lstStyle/>
+          <a:p>
+            <a:pPr algn="ctr"/>
+          </a:p>
+        </p:txBody>
+      </p:sp>
+      <p:sp>
+        <p:nvSpPr>
+          <p:cNvPr id="7" name="Rounded Rectangle 6"/>
+          <p:cNvSpPr/>
+          <p:nvPr/>
+        </p:nvSpPr>
+        <p:spPr>
+          <a:xfrm>
+            <a:off x="3264408" y="2377440"/>
+            <a:ext cx="1234440" cy="1371600"/>
+          </a:xfrm>
+          <a:prstGeom prst="roundRect">
+            <a:avLst/>
+          </a:prstGeom>
+          <a:solidFill>
+            <a:srgbClr val="FDE9D9"/>
+          </a:solidFill>
+          <a:ln w="12700">
+            <a:solidFill>
+              <a:srgbClr val="1F4E79"/>
+            </a:solidFill>
+          </a:ln>
+          <a:effectLst/>
+        </p:spPr>
+        <p:style>
+          <a:lnRef idx="1">
+            <a:schemeClr val="accent1"/>
+          </a:lnRef>
+          <a:fillRef idx="3">
+            <a:schemeClr val="accent1"/>
+          </a:fillRef>
+          <a:effectRef idx="2">
+            <a:schemeClr val="accent1"/>
+          </a:effectRef>
+          <a:fontRef idx="minor">
+            <a:schemeClr val="lt1"/>
+          </a:fontRef>
+        </p:style>
+        <p:txBody>
+          <a:bodyPr rtlCol="0" anchor="ctr" wrap="square"/>
+          <a:lstStyle/>
+          <a:p>
+            <a:pPr algn="ctr" rtl="1"/>
+            <a:r>
+              <a:rPr sz="1400" b="1">
+                <a:solidFill>
+                  <a:srgbClr val="333333"/>
+                </a:solidFill>
+                <a:latin typeface="Arial"/>
+              </a:rPr>
+              <a:t>الخصائص</a:t>
+            </a:r>
+          </a:p>
+          <a:p>
+            <a:pPr algn="ctr" rtl="0"/>
+            <a:r>
+              <a:rPr sz="1000">
+                <a:solidFill>
+                  <a:srgbClr val="666666"/>
+                </a:solidFill>
+                <a:latin typeface="Calibri"/>
+              </a:rPr>
+              <a:t>Features</a:t>
+            </a:r>
+          </a:p>
+        </p:txBody>
+      </p:sp>
+      <p:sp>
+        <p:nvSpPr>
+          <p:cNvPr id="8" name="Left Arrow 7"/>
+          <p:cNvSpPr/>
+          <p:nvPr/>
+        </p:nvSpPr>
+        <p:spPr>
+          <a:xfrm>
+            <a:off x="4507992" y="2926080"/>
+            <a:ext cx="128016" cy="274320"/>
+          </a:xfrm>
+          <a:prstGeom prst="leftArrow">
+            <a:avLst/>
+          </a:prstGeom>
+          <a:solidFill>
+            <a:srgbClr val="1F4E79"/>
+          </a:solidFill>
+          <a:ln>
+            <a:noFill/>
+          </a:ln>
+          <a:effectLst/>
+        </p:spPr>
+        <p:style>
+          <a:lnRef idx="1">
+            <a:schemeClr val="accent1"/>
+          </a:lnRef>
+          <a:fillRef idx="3">
+            <a:schemeClr val="accent1"/>
+          </a:fillRef>
+          <a:effectRef idx="2">
+            <a:schemeClr val="accent1"/>
+          </a:effectRef>
+          <a:fontRef idx="minor">
+            <a:schemeClr val="lt1"/>
+          </a:fontRef>
+        </p:style>
+        <p:txBody>
+          <a:bodyPr rtlCol="0" anchor="ctr"/>
+          <a:lstStyle/>
+          <a:p>
+            <a:pPr algn="ctr"/>
+          </a:p>
+        </p:txBody>
+      </p:sp>
+      <p:sp>
+        <p:nvSpPr>
+          <p:cNvPr id="9" name="Rounded Rectangle 8"/>
+          <p:cNvSpPr/>
+          <p:nvPr/>
+        </p:nvSpPr>
+        <p:spPr>
+          <a:xfrm>
+            <a:off x="4645152" y="2377440"/>
+            <a:ext cx="1234440" cy="1371600"/>
+          </a:xfrm>
+          <a:prstGeom prst="roundRect">
+            <a:avLst/>
+          </a:prstGeom>
+          <a:solidFill>
+            <a:srgbClr val="EDEDED"/>
+          </a:solidFill>
+          <a:ln w="12700">
+            <a:solidFill>
+              <a:srgbClr val="1F4E79"/>
+            </a:solidFill>
+          </a:ln>
+          <a:effectLst/>
+        </p:spPr>
+        <p:style>
+          <a:lnRef idx="1">
+            <a:schemeClr val="accent1"/>
+          </a:lnRef>
+          <a:fillRef idx="3">
+            <a:schemeClr val="accent1"/>
+          </a:fillRef>
+          <a:effectRef idx="2">
+            <a:schemeClr val="accent1"/>
+          </a:effectRef>
+          <a:fontRef idx="minor">
+            <a:schemeClr val="lt1"/>
+          </a:fontRef>
+        </p:style>
+        <p:txBody>
+          <a:bodyPr rtlCol="0" anchor="ctr" wrap="square"/>
+          <a:lstStyle/>
+          <a:p>
+            <a:pPr algn="ctr" rtl="1"/>
+            <a:r>
+              <a:rPr sz="1400" b="1">
+                <a:solidFill>
+                  <a:srgbClr val="333333"/>
+                </a:solidFill>
+                <a:latin typeface="Arial"/>
+              </a:rPr>
+              <a:t>الفهارس المتجهية</a:t>
+            </a:r>
+          </a:p>
+          <a:p>
+            <a:pPr algn="ctr" rtl="0"/>
+            <a:r>
+              <a:rPr sz="1000">
+                <a:solidFill>
+                  <a:srgbClr val="666666"/>
+                </a:solidFill>
+                <a:latin typeface="Calibri"/>
+              </a:rPr>
+              <a:t>Vector Indexes</a:t>
+            </a:r>
+          </a:p>
+        </p:txBody>
+      </p:sp>
+      <p:sp>
+        <p:nvSpPr>
+          <p:cNvPr id="10" name="Left Arrow 9"/>
+          <p:cNvSpPr/>
+          <p:nvPr/>
+        </p:nvSpPr>
+        <p:spPr>
+          <a:xfrm>
+            <a:off x="5888736" y="2926080"/>
+            <a:ext cx="128016" cy="274320"/>
+          </a:xfrm>
+          <a:prstGeom prst="leftArrow">
+            <a:avLst/>
+          </a:prstGeom>
+          <a:solidFill>
+            <a:srgbClr val="1F4E79"/>
+          </a:solidFill>
+          <a:ln>
+            <a:noFill/>
+          </a:ln>
+          <a:effectLst/>
+        </p:spPr>
+        <p:style>
+          <a:lnRef idx="1">
+            <a:schemeClr val="accent1"/>
+          </a:lnRef>
+          <a:fillRef idx="3">
+            <a:schemeClr val="accent1"/>
+          </a:fillRef>
+          <a:effectRef idx="2">
+            <a:schemeClr val="accent1"/>
+          </a:effectRef>
+          <a:fontRef idx="minor">
+            <a:schemeClr val="lt1"/>
+          </a:fontRef>
+        </p:style>
+        <p:txBody>
+          <a:bodyPr rtlCol="0" anchor="ctr"/>
+          <a:lstStyle/>
+          <a:p>
+            <a:pPr algn="ctr"/>
+          </a:p>
+        </p:txBody>
+      </p:sp>
+      <p:sp>
+        <p:nvSpPr>
+          <p:cNvPr id="11" name="Rounded Rectangle 10"/>
+          <p:cNvSpPr/>
+          <p:nvPr/>
+        </p:nvSpPr>
+        <p:spPr>
+          <a:xfrm>
+            <a:off x="6025896" y="2377440"/>
+            <a:ext cx="1234440" cy="1371600"/>
+          </a:xfrm>
+          <a:prstGeom prst="roundRect">
+            <a:avLst/>
+          </a:prstGeom>
+          <a:solidFill>
+            <a:srgbClr val="DCE6F1"/>
+          </a:solidFill>
+          <a:ln w="12700">
+            <a:solidFill>
+              <a:srgbClr val="1F4E79"/>
+            </a:solidFill>
+          </a:ln>
+          <a:effectLst/>
+        </p:spPr>
+        <p:style>
+          <a:lnRef idx="1">
+            <a:schemeClr val="accent1"/>
+          </a:lnRef>
+          <a:fillRef idx="3">
+            <a:schemeClr val="accent1"/>
+          </a:fillRef>
+          <a:effectRef idx="2">
+            <a:schemeClr val="accent1"/>
+          </a:effectRef>
+          <a:fontRef idx="minor">
+            <a:schemeClr val="lt1"/>
+          </a:fontRef>
+        </p:style>
+        <p:txBody>
+          <a:bodyPr rtlCol="0" anchor="ctr" wrap="square"/>
+          <a:lstStyle/>
+          <a:p>
+            <a:pPr algn="ctr" rtl="1"/>
+            <a:r>
+              <a:rPr sz="1400" b="1">
+                <a:solidFill>
+                  <a:srgbClr val="333333"/>
+                </a:solidFill>
+                <a:latin typeface="Arial"/>
+              </a:rPr>
+              <a:t>التصنيف</a:t>
+            </a:r>
+          </a:p>
+          <a:p>
+            <a:pPr algn="ctr" rtl="0"/>
+            <a:r>
+              <a:rPr sz="1000">
+                <a:solidFill>
+                  <a:srgbClr val="666666"/>
+                </a:solidFill>
+                <a:latin typeface="Calibri"/>
+              </a:rPr>
+              <a:t>Labeling</a:t>
+            </a:r>
+          </a:p>
+        </p:txBody>
+      </p:sp>
+      <p:sp>
+        <p:nvSpPr>
+          <p:cNvPr id="12" name="Left Arrow 11"/>
+          <p:cNvSpPr/>
+          <p:nvPr/>
+        </p:nvSpPr>
+        <p:spPr>
+          <a:xfrm>
+            <a:off x="7269480" y="2926080"/>
+            <a:ext cx="128016" cy="274320"/>
+          </a:xfrm>
+          <a:prstGeom prst="leftArrow">
+            <a:avLst/>
+          </a:prstGeom>
+          <a:solidFill>
+            <a:srgbClr val="1F4E79"/>
+          </a:solidFill>
+          <a:ln>
+            <a:noFill/>
+          </a:ln>
+          <a:effectLst/>
+        </p:spPr>
+        <p:style>
+          <a:lnRef idx="1">
+            <a:schemeClr val="accent1"/>
+          </a:lnRef>
+          <a:fillRef idx="3">
+            <a:schemeClr val="accent1"/>
+          </a:fillRef>
+          <a:effectRef idx="2">
+            <a:schemeClr val="accent1"/>
+          </a:effectRef>
+          <a:fontRef idx="minor">
+            <a:schemeClr val="lt1"/>
+          </a:fontRef>
+        </p:style>
+        <p:txBody>
+          <a:bodyPr rtlCol="0" anchor="ctr"/>
+          <a:lstStyle/>
+          <a:p>
+            <a:pPr algn="ctr"/>
+          </a:p>
+        </p:txBody>
+      </p:sp>
+      <p:sp>
+        <p:nvSpPr>
+          <p:cNvPr id="13" name="Rounded Rectangle 12"/>
+          <p:cNvSpPr/>
+          <p:nvPr/>
+        </p:nvSpPr>
+        <p:spPr>
+          <a:xfrm>
+            <a:off x="7406640" y="2377440"/>
+            <a:ext cx="1234440" cy="1371600"/>
+          </a:xfrm>
+          <a:prstGeom prst="roundRect">
+            <a:avLst/>
+          </a:prstGeom>
+          <a:solidFill>
+            <a:srgbClr val="E2EFDA"/>
+          </a:solidFill>
+          <a:ln w="12700">
+            <a:solidFill>
+              <a:srgbClr val="1F4E79"/>
+            </a:solidFill>
+          </a:ln>
+          <a:effectLst/>
+        </p:spPr>
+        <p:style>
+          <a:lnRef idx="1">
+            <a:schemeClr val="accent1"/>
+          </a:lnRef>
+          <a:fillRef idx="3">
+            <a:schemeClr val="accent1"/>
+          </a:fillRef>
+          <a:effectRef idx="2">
+            <a:schemeClr val="accent1"/>
+          </a:effectRef>
+          <a:fontRef idx="minor">
+            <a:schemeClr val="lt1"/>
+          </a:fontRef>
+        </p:style>
+        <p:txBody>
+          <a:bodyPr rtlCol="0" anchor="ctr" wrap="square"/>
+          <a:lstStyle/>
+          <a:p>
+            <a:pPr algn="ctr" rtl="1"/>
+            <a:r>
+              <a:rPr sz="1400" b="1">
+                <a:solidFill>
+                  <a:srgbClr val="333333"/>
+                </a:solidFill>
+                <a:latin typeface="Arial"/>
+              </a:rPr>
+              <a:t>الحوكمة</a:t>
+            </a:r>
+          </a:p>
+          <a:p>
+            <a:pPr algn="ctr" rtl="0"/>
+            <a:r>
+              <a:rPr sz="1000">
+                <a:solidFill>
+                  <a:srgbClr val="666666"/>
+                </a:solidFill>
+                <a:latin typeface="Calibri"/>
+              </a:rPr>
+              <a:t>Governance</a:t>
+            </a:r>
+          </a:p>
+        </p:txBody>
+      </p:sp>
+      <p:sp>
+        <p:nvSpPr>
+          <p:cNvPr id="14" name="Left Arrow 13"/>
+          <p:cNvSpPr/>
+          <p:nvPr/>
+        </p:nvSpPr>
+        <p:spPr>
+          <a:xfrm>
+            <a:off x="8650224" y="2926080"/>
+            <a:ext cx="128016" cy="274320"/>
+          </a:xfrm>
+          <a:prstGeom prst="leftArrow">
+            <a:avLst/>
+          </a:prstGeom>
+          <a:solidFill>
+            <a:srgbClr val="1F4E79"/>
+          </a:solidFill>
+          <a:ln>
+            <a:noFill/>
+          </a:ln>
+          <a:effectLst/>
+        </p:spPr>
+        <p:style>
+          <a:lnRef idx="1">
+            <a:schemeClr val="accent1"/>
+          </a:lnRef>
+          <a:fillRef idx="3">
+            <a:schemeClr val="accent1"/>
+          </a:fillRef>
+          <a:effectRef idx="2">
+            <a:schemeClr val="accent1"/>
+          </a:effectRef>
+          <a:fontRef idx="minor">
+            <a:schemeClr val="lt1"/>
+          </a:fontRef>
+        </p:style>
+        <p:txBody>
+          <a:bodyPr rtlCol="0" anchor="ctr"/>
+          <a:lstStyle/>
+          <a:p>
+            <a:pPr algn="ctr"/>
+          </a:p>
+        </p:txBody>
+      </p:sp>
+      <p:sp>
+        <p:nvSpPr>
+          <p:cNvPr id="15" name="Rounded Rectangle 14"/>
+          <p:cNvSpPr/>
+          <p:nvPr/>
+        </p:nvSpPr>
+        <p:spPr>
+          <a:xfrm>
+            <a:off x="8787384" y="2377440"/>
+            <a:ext cx="1234440" cy="1371600"/>
+          </a:xfrm>
+          <a:prstGeom prst="roundRect">
+            <a:avLst/>
+          </a:prstGeom>
+          <a:solidFill>
+            <a:srgbClr val="FDE9D9"/>
+          </a:solidFill>
+          <a:ln w="12700">
+            <a:solidFill>
+              <a:srgbClr val="1F4E79"/>
+            </a:solidFill>
+          </a:ln>
+          <a:effectLst/>
+        </p:spPr>
+        <p:style>
+          <a:lnRef idx="1">
+            <a:schemeClr val="accent1"/>
+          </a:lnRef>
+          <a:fillRef idx="3">
+            <a:schemeClr val="accent1"/>
+          </a:fillRef>
+          <a:effectRef idx="2">
+            <a:schemeClr val="accent1"/>
+          </a:effectRef>
+          <a:fontRef idx="minor">
+            <a:schemeClr val="lt1"/>
+          </a:fontRef>
+        </p:style>
+        <p:txBody>
+          <a:bodyPr rtlCol="0" anchor="ctr" wrap="square"/>
+          <a:lstStyle/>
+          <a:p>
+            <a:pPr algn="ctr" rtl="1"/>
+            <a:r>
+              <a:rPr sz="1400" b="1">
+                <a:solidFill>
+                  <a:srgbClr val="333333"/>
+                </a:solidFill>
+                <a:latin typeface="Arial"/>
+              </a:rPr>
+              <a:t>MLOps</a:t>
+            </a:r>
+          </a:p>
+          <a:p>
+            <a:pPr algn="ctr" rtl="0"/>
+            <a:r>
+              <a:rPr sz="1000">
+                <a:solidFill>
+                  <a:srgbClr val="666666"/>
+                </a:solidFill>
+                <a:latin typeface="Calibri"/>
+              </a:rPr>
+              <a:t>MLOps</a:t>
+            </a:r>
+          </a:p>
+        </p:txBody>
+      </p:sp>
+      <p:sp>
+        <p:nvSpPr>
+          <p:cNvPr id="16" name="Left Arrow 15"/>
+          <p:cNvSpPr/>
+          <p:nvPr/>
+        </p:nvSpPr>
+        <p:spPr>
+          <a:xfrm>
+            <a:off x="10030968" y="2926080"/>
+            <a:ext cx="128016" cy="274320"/>
+          </a:xfrm>
+          <a:prstGeom prst="leftArrow">
+            <a:avLst/>
+          </a:prstGeom>
+          <a:solidFill>
+            <a:srgbClr val="1F4E79"/>
+          </a:solidFill>
+          <a:ln>
+            <a:noFill/>
+          </a:ln>
+          <a:effectLst/>
+        </p:spPr>
+        <p:style>
+          <a:lnRef idx="1">
+            <a:schemeClr val="accent1"/>
+          </a:lnRef>
+          <a:fillRef idx="3">
+            <a:schemeClr val="accent1"/>
+          </a:fillRef>
+          <a:effectRef idx="2">
+            <a:schemeClr val="accent1"/>
+          </a:effectRef>
+          <a:fontRef idx="minor">
+            <a:schemeClr val="lt1"/>
+          </a:fontRef>
+        </p:style>
+        <p:txBody>
+          <a:bodyPr rtlCol="0" anchor="ctr"/>
+          <a:lstStyle/>
+          <a:p>
+            <a:pPr algn="ctr"/>
+          </a:p>
+        </p:txBody>
+      </p:sp>
+      <p:sp>
+        <p:nvSpPr>
+          <p:cNvPr id="17" name="Rounded Rectangle 16"/>
+          <p:cNvSpPr/>
+          <p:nvPr/>
+        </p:nvSpPr>
+        <p:spPr>
+          <a:xfrm>
+            <a:off x="10168128" y="2377440"/>
+            <a:ext cx="1234440" cy="1371600"/>
+          </a:xfrm>
+          <a:prstGeom prst="roundRect">
+            <a:avLst/>
+          </a:prstGeom>
+          <a:solidFill>
+            <a:srgbClr val="EDEDED"/>
+          </a:solidFill>
+          <a:ln w="12700">
+            <a:solidFill>
+              <a:srgbClr val="1F4E79"/>
+            </a:solidFill>
+          </a:ln>
+          <a:effectLst/>
+        </p:spPr>
+        <p:style>
+          <a:lnRef idx="1">
+            <a:schemeClr val="accent1"/>
+          </a:lnRef>
+          <a:fillRef idx="3">
+            <a:schemeClr val="accent1"/>
+          </a:fillRef>
+          <a:effectRef idx="2">
+            <a:schemeClr val="accent1"/>
+          </a:effectRef>
+          <a:fontRef idx="minor">
+            <a:schemeClr val="lt1"/>
+          </a:fontRef>
+        </p:style>
+        <p:txBody>
+          <a:bodyPr rtlCol="0" anchor="ctr" wrap="square"/>
+          <a:lstStyle/>
+          <a:p>
+            <a:pPr algn="ctr" rtl="1"/>
+            <a:r>
+              <a:rPr sz="1400" b="1">
+                <a:solidFill>
+                  <a:srgbClr val="333333"/>
+                </a:solidFill>
+                <a:latin typeface="Arial"/>
+              </a:rPr>
+              <a:t>المختبر</a:t>
+            </a:r>
+          </a:p>
+          <a:p>
+            <a:pPr algn="ctr" rtl="0"/>
+            <a:r>
+              <a:rPr sz="1000">
+                <a:solidFill>
+                  <a:srgbClr val="666666"/>
+                </a:solidFill>
+                <a:latin typeface="Calibri"/>
+              </a:rPr>
+              <a:t>Lab</a:t>
+            </a:r>
+          </a:p>
+        </p:txBody>
+      </p:sp>
+      <p:sp>
+        <p:nvSpPr>
+          <p:cNvPr id="18" name="TextBox 17"/>
           <p:cNvSpPr txBox="1"/>
           <p:nvPr/>
         </p:nvSpPr>
         <p:spPr>
           <a:xfrm>
-            <a:off x="640080" y="182880"/>
-            <a:ext cx="10972800" cy="640080"/>
+            <a:off x="640080" y="6126480"/>
+            <a:ext cx="10972800" cy="548640"/>
           </a:xfrm>
           <a:prstGeom prst="rect">
             <a:avLst/>
@@ -5014,27 +6351,33 @@
           <a:p>
             <a:pPr algn="r" rtl="1"/>
             <a:r>
-              <a:rPr sz="3200" b="1">
-                <a:solidFill>
-                  <a:srgbClr val="1F3B5C"/>
-                </a:solidFill>
-                <a:latin typeface="Calibri"/>
-              </a:rPr>
-              <a:t>وحدات المقرر / Course Modules</a:t>
-            </a:r>
-          </a:p>
-        </p:txBody>
-      </p:sp>
-      <p:sp>
-        <p:nvSpPr>
-          <p:cNvPr id="4" name="TextBox 3"/>
+              <a:rPr sz="1400">
+                <a:solidFill>
+                  <a:srgbClr val="666666"/>
+                </a:solidFill>
+                <a:latin typeface="Arial"/>
+              </a:rPr>
+              <a:t>رحلة الوحدة الثانية من البيانات الخام إلى نقطة نهاية RAG.</a:t>
+            </a:r>
+          </a:p>
+          <a:p>
+            <a:pPr algn="r" rtl="0"/>
+            <a:r>
+              <a:t>Module 02 journey: from raw data to a RAG endpoint.</a:t>
+            </a:r>
+          </a:p>
+        </p:txBody>
+      </p:sp>
+      <p:sp>
+        <p:nvSpPr>
+          <p:cNvPr id="19" name="TextBox 18"/>
           <p:cNvSpPr txBox="1"/>
           <p:nvPr/>
         </p:nvSpPr>
         <p:spPr>
           <a:xfrm>
-            <a:off x="800096" y="1051552"/>
-            <a:ext cx="10427018" cy="5852884"/>
+            <a:off x="640080" y="6400800"/>
+            <a:ext cx="8686800" cy="320040"/>
           </a:xfrm>
           <a:prstGeom prst="rect">
             <a:avLst/>
@@ -5047,972 +6390,121 @@
           </a:bodyPr>
           <a:lstStyle/>
           <a:p>
-            <a:pPr algn="r" rtl="1">
-              <a:spcAft>
-                <a:spcPts val="1000"/>
-              </a:spcAft>
-            </a:pPr>
-            <a:r>
-              <a:rPr sz="1900" dirty="0">
-                <a:solidFill>
-                  <a:srgbClr val="333333"/>
+            <a:pPr algn="r" rtl="1"/>
+            <a:r>
+              <a:rPr sz="1000" b="0">
+                <a:solidFill>
+                  <a:srgbClr val="666666"/>
+                </a:solidFill>
+                <a:latin typeface="Arial"/>
+              </a:rPr>
+              <a:t>Module 02 — Data &amp; AI Engineering Track  |  الوحدة الثانية</a:t>
+            </a:r>
+          </a:p>
+        </p:txBody>
+      </p:sp>
+      <p:sp>
+        <p:nvSpPr>
+          <p:cNvPr id="20" name="TextBox 19"/>
+          <p:cNvSpPr txBox="1"/>
+          <p:nvPr/>
+        </p:nvSpPr>
+        <p:spPr>
+          <a:xfrm>
+            <a:off x="9601200" y="6400800"/>
+            <a:ext cx="1920240" cy="320040"/>
+          </a:xfrm>
+          <a:prstGeom prst="rect">
+            <a:avLst/>
+          </a:prstGeom>
+          <a:noFill/>
+        </p:spPr>
+        <p:txBody>
+          <a:bodyPr wrap="square">
+            <a:spAutoFit/>
+          </a:bodyPr>
+          <a:lstStyle/>
+          <a:p>
+            <a:pPr algn="l" rtl="0"/>
+            <a:r>
+              <a:rPr sz="1000" b="0">
+                <a:solidFill>
+                  <a:srgbClr val="666666"/>
                 </a:solidFill>
                 <a:latin typeface="Calibri"/>
               </a:rPr>
-              <a:t>• </a:t>
-            </a:r>
-            <a:r>
-              <a:rPr sz="1900" dirty="0" err="1">
-                <a:solidFill>
-                  <a:srgbClr val="333333"/>
+              <a:t>06_  •  3/12</a:t>
+            </a:r>
+          </a:p>
+        </p:txBody>
+      </p:sp>
+      <p:sp>
+        <p:nvSpPr>
+          <p:cNvPr id="21" name="TextBox 20"/>
+          <p:cNvSpPr txBox="1"/>
+          <p:nvPr/>
+        </p:nvSpPr>
+        <p:spPr>
+          <a:xfrm>
+            <a:off x="640080" y="6400800"/>
+            <a:ext cx="8686800" cy="320040"/>
+          </a:xfrm>
+          <a:prstGeom prst="rect">
+            <a:avLst/>
+          </a:prstGeom>
+          <a:noFill/>
+        </p:spPr>
+        <p:txBody>
+          <a:bodyPr wrap="square">
+            <a:spAutoFit/>
+          </a:bodyPr>
+          <a:lstStyle/>
+          <a:p>
+            <a:pPr algn="r" rtl="1"/>
+            <a:r>
+              <a:rPr sz="1000" b="0">
+                <a:solidFill>
+                  <a:srgbClr val="666666"/>
+                </a:solidFill>
+                <a:latin typeface="Arial"/>
+              </a:rPr>
+              <a:t>Module 02 — Data &amp; AI Engineering Track  |  الوحدة الثانية</a:t>
+            </a:r>
+          </a:p>
+        </p:txBody>
+      </p:sp>
+      <p:sp>
+        <p:nvSpPr>
+          <p:cNvPr id="22" name="TextBox 21"/>
+          <p:cNvSpPr txBox="1"/>
+          <p:nvPr/>
+        </p:nvSpPr>
+        <p:spPr>
+          <a:xfrm>
+            <a:off x="9601200" y="6400800"/>
+            <a:ext cx="1920240" cy="320040"/>
+          </a:xfrm>
+          <a:prstGeom prst="rect">
+            <a:avLst/>
+          </a:prstGeom>
+          <a:noFill/>
+        </p:spPr>
+        <p:txBody>
+          <a:bodyPr wrap="square">
+            <a:spAutoFit/>
+          </a:bodyPr>
+          <a:lstStyle/>
+          <a:p>
+            <a:pPr algn="l" rtl="0"/>
+            <a:r>
+              <a:rPr sz="1000" b="0">
+                <a:solidFill>
+                  <a:srgbClr val="666666"/>
                 </a:solidFill>
                 <a:latin typeface="Calibri"/>
               </a:rPr>
-              <a:t>V06</a:t>
-            </a:r>
-            <a:r>
-              <a:rPr sz="1900" dirty="0">
-                <a:solidFill>
-                  <a:srgbClr val="333333"/>
-                </a:solidFill>
-                <a:latin typeface="Calibri"/>
-              </a:rPr>
-              <a:t> — </a:t>
-            </a:r>
-            <a:r>
-              <a:rPr sz="1900" dirty="0" err="1">
-                <a:solidFill>
-                  <a:srgbClr val="333333"/>
-                </a:solidFill>
-                <a:latin typeface="Calibri"/>
-              </a:rPr>
-              <a:t>أساسيات</a:t>
-            </a:r>
-            <a:r>
-              <a:rPr sz="1900" dirty="0">
-                <a:solidFill>
-                  <a:srgbClr val="333333"/>
-                </a:solidFill>
-                <a:latin typeface="Calibri"/>
-              </a:rPr>
-              <a:t> </a:t>
-            </a:r>
-            <a:r>
-              <a:rPr sz="1900" dirty="0" err="1">
-                <a:solidFill>
-                  <a:srgbClr val="333333"/>
-                </a:solidFill>
-                <a:latin typeface="Calibri"/>
-              </a:rPr>
-              <a:t>البيانات</a:t>
-            </a:r>
-            <a:endParaRPr sz="1900" dirty="0">
-              <a:solidFill>
-                <a:srgbClr val="333333"/>
-              </a:solidFill>
-              <a:latin typeface="Calibri"/>
-            </a:endParaRPr>
-          </a:p>
-          <a:p>
-            <a:pPr algn="l" rtl="1">
-              <a:spcAft>
-                <a:spcPts val="1000"/>
-              </a:spcAft>
-            </a:pPr>
-            <a:r>
-              <a:rPr sz="1900" dirty="0">
-                <a:solidFill>
-                  <a:srgbClr val="666666"/>
-                </a:solidFill>
-                <a:latin typeface="Calibri"/>
-              </a:rPr>
-              <a:t>   </a:t>
-            </a:r>
-            <a:r>
-              <a:rPr sz="1900" dirty="0" err="1">
-                <a:solidFill>
-                  <a:srgbClr val="666666"/>
-                </a:solidFill>
-                <a:latin typeface="Calibri"/>
-              </a:rPr>
-              <a:t>V06</a:t>
-            </a:r>
-            <a:r>
-              <a:rPr sz="1900" dirty="0">
-                <a:solidFill>
-                  <a:srgbClr val="666666"/>
-                </a:solidFill>
-                <a:latin typeface="Calibri"/>
-              </a:rPr>
-              <a:t> — Data Fundamentals</a:t>
-            </a:r>
-          </a:p>
-          <a:p>
-            <a:pPr algn="r" rtl="1">
-              <a:spcAft>
-                <a:spcPts val="1000"/>
-              </a:spcAft>
-            </a:pPr>
-            <a:r>
-              <a:rPr sz="1900" dirty="0">
-                <a:solidFill>
-                  <a:srgbClr val="333333"/>
-                </a:solidFill>
-                <a:latin typeface="Calibri"/>
-              </a:rPr>
-              <a:t>• </a:t>
-            </a:r>
-            <a:r>
-              <a:rPr sz="1900" dirty="0" err="1">
-                <a:solidFill>
-                  <a:srgbClr val="333333"/>
-                </a:solidFill>
-                <a:latin typeface="Calibri"/>
-              </a:rPr>
-              <a:t>V07</a:t>
-            </a:r>
-            <a:r>
-              <a:rPr sz="1900" dirty="0">
-                <a:solidFill>
-                  <a:srgbClr val="333333"/>
-                </a:solidFill>
-                <a:latin typeface="Calibri"/>
-              </a:rPr>
-              <a:t> — </a:t>
-            </a:r>
-            <a:r>
-              <a:rPr sz="1900" dirty="0" err="1">
-                <a:solidFill>
-                  <a:srgbClr val="333333"/>
-                </a:solidFill>
-                <a:latin typeface="Calibri"/>
-              </a:rPr>
-              <a:t>المستودعات</a:t>
-            </a:r>
-            <a:r>
-              <a:rPr sz="1900" dirty="0">
-                <a:solidFill>
-                  <a:srgbClr val="333333"/>
-                </a:solidFill>
-                <a:latin typeface="Calibri"/>
-              </a:rPr>
-              <a:t> </a:t>
-            </a:r>
-            <a:r>
-              <a:rPr sz="1900" dirty="0" err="1">
-                <a:solidFill>
-                  <a:srgbClr val="333333"/>
-                </a:solidFill>
-                <a:latin typeface="Calibri"/>
-              </a:rPr>
-              <a:t>والبحيرات</a:t>
-            </a:r>
-            <a:r>
-              <a:rPr sz="1900" dirty="0">
-                <a:solidFill>
-                  <a:srgbClr val="333333"/>
-                </a:solidFill>
-                <a:latin typeface="Calibri"/>
-              </a:rPr>
-              <a:t> </a:t>
-            </a:r>
-            <a:r>
-              <a:rPr sz="1900" dirty="0" err="1">
-                <a:solidFill>
-                  <a:srgbClr val="333333"/>
-                </a:solidFill>
-                <a:latin typeface="Calibri"/>
-              </a:rPr>
-              <a:t>ومعمارية</a:t>
-            </a:r>
-            <a:r>
-              <a:rPr sz="1900" dirty="0">
-                <a:solidFill>
-                  <a:srgbClr val="333333"/>
-                </a:solidFill>
-                <a:latin typeface="Calibri"/>
-              </a:rPr>
-              <a:t> Lakehouse</a:t>
-            </a:r>
-          </a:p>
-          <a:p>
-            <a:pPr algn="l" rtl="1">
-              <a:spcAft>
-                <a:spcPts val="1000"/>
-              </a:spcAft>
-            </a:pPr>
-            <a:r>
-              <a:rPr sz="1900" dirty="0">
-                <a:solidFill>
-                  <a:srgbClr val="666666"/>
-                </a:solidFill>
-                <a:latin typeface="Calibri"/>
-              </a:rPr>
-              <a:t>   </a:t>
-            </a:r>
-            <a:r>
-              <a:rPr sz="1900" dirty="0" err="1">
-                <a:solidFill>
-                  <a:srgbClr val="666666"/>
-                </a:solidFill>
-                <a:latin typeface="Calibri"/>
-              </a:rPr>
-              <a:t>V07</a:t>
-            </a:r>
-            <a:r>
-              <a:rPr sz="1900" dirty="0">
-                <a:solidFill>
-                  <a:srgbClr val="666666"/>
-                </a:solidFill>
-                <a:latin typeface="Calibri"/>
-              </a:rPr>
-              <a:t> — Warehouses, Data Lakes &amp; Lakehouse</a:t>
-            </a:r>
-          </a:p>
-          <a:p>
-            <a:pPr algn="r" rtl="1">
-              <a:spcAft>
-                <a:spcPts val="1000"/>
-              </a:spcAft>
-            </a:pPr>
-            <a:r>
-              <a:rPr sz="1900" dirty="0">
-                <a:solidFill>
-                  <a:srgbClr val="333333"/>
-                </a:solidFill>
-                <a:latin typeface="Calibri"/>
-              </a:rPr>
-              <a:t>• </a:t>
-            </a:r>
-            <a:r>
-              <a:rPr sz="1900" dirty="0" err="1">
-                <a:solidFill>
-                  <a:srgbClr val="333333"/>
-                </a:solidFill>
-                <a:latin typeface="Calibri"/>
-              </a:rPr>
-              <a:t>V08</a:t>
-            </a:r>
-            <a:r>
-              <a:rPr sz="1900" dirty="0">
-                <a:solidFill>
-                  <a:srgbClr val="333333"/>
-                </a:solidFill>
-                <a:latin typeface="Calibri"/>
-              </a:rPr>
-              <a:t> — </a:t>
-            </a:r>
-            <a:r>
-              <a:rPr sz="1900" dirty="0" err="1">
-                <a:solidFill>
-                  <a:srgbClr val="333333"/>
-                </a:solidFill>
-                <a:latin typeface="Calibri"/>
-              </a:rPr>
-              <a:t>هندسة</a:t>
-            </a:r>
-            <a:r>
-              <a:rPr sz="1900" dirty="0">
-                <a:solidFill>
-                  <a:srgbClr val="333333"/>
-                </a:solidFill>
-                <a:latin typeface="Calibri"/>
-              </a:rPr>
-              <a:t> </a:t>
-            </a:r>
-            <a:r>
-              <a:rPr sz="1900" dirty="0" err="1">
-                <a:solidFill>
-                  <a:srgbClr val="333333"/>
-                </a:solidFill>
-                <a:latin typeface="Calibri"/>
-              </a:rPr>
-              <a:t>الخصائص</a:t>
-            </a:r>
-            <a:r>
-              <a:rPr sz="1900" dirty="0">
-                <a:solidFill>
-                  <a:srgbClr val="333333"/>
-                </a:solidFill>
-                <a:latin typeface="Calibri"/>
-              </a:rPr>
-              <a:t> </a:t>
-            </a:r>
-            <a:r>
-              <a:rPr sz="1900" dirty="0" err="1">
-                <a:solidFill>
-                  <a:srgbClr val="333333"/>
-                </a:solidFill>
-                <a:latin typeface="Calibri"/>
-              </a:rPr>
-              <a:t>ومخازنها</a:t>
-            </a:r>
-            <a:endParaRPr sz="1900" dirty="0">
-              <a:solidFill>
-                <a:srgbClr val="333333"/>
-              </a:solidFill>
-              <a:latin typeface="Calibri"/>
-            </a:endParaRPr>
-          </a:p>
-          <a:p>
-            <a:pPr algn="l" rtl="1">
-              <a:spcAft>
-                <a:spcPts val="1000"/>
-              </a:spcAft>
-            </a:pPr>
-            <a:r>
-              <a:rPr sz="1900" dirty="0">
-                <a:solidFill>
-                  <a:srgbClr val="666666"/>
-                </a:solidFill>
-                <a:latin typeface="Calibri"/>
-              </a:rPr>
-              <a:t>   </a:t>
-            </a:r>
-            <a:r>
-              <a:rPr sz="1900" dirty="0" err="1">
-                <a:solidFill>
-                  <a:srgbClr val="666666"/>
-                </a:solidFill>
-                <a:latin typeface="Calibri"/>
-              </a:rPr>
-              <a:t>V08</a:t>
-            </a:r>
-            <a:r>
-              <a:rPr sz="1900" dirty="0">
-                <a:solidFill>
-                  <a:srgbClr val="666666"/>
-                </a:solidFill>
-                <a:latin typeface="Calibri"/>
-              </a:rPr>
-              <a:t> — Feature Engineering &amp; Feature Stores</a:t>
-            </a:r>
-          </a:p>
-          <a:p>
-            <a:pPr algn="r" rtl="1">
-              <a:spcAft>
-                <a:spcPts val="1000"/>
-              </a:spcAft>
-            </a:pPr>
-            <a:r>
-              <a:rPr sz="1900" dirty="0">
-                <a:solidFill>
-                  <a:srgbClr val="333333"/>
-                </a:solidFill>
-                <a:latin typeface="Calibri"/>
-              </a:rPr>
-              <a:t>• </a:t>
-            </a:r>
-            <a:r>
-              <a:rPr sz="1900" dirty="0" err="1">
-                <a:solidFill>
-                  <a:srgbClr val="333333"/>
-                </a:solidFill>
-                <a:latin typeface="Calibri"/>
-              </a:rPr>
-              <a:t>V09</a:t>
-            </a:r>
-            <a:r>
-              <a:rPr sz="1900" dirty="0">
-                <a:solidFill>
-                  <a:srgbClr val="333333"/>
-                </a:solidFill>
-                <a:latin typeface="Calibri"/>
-              </a:rPr>
-              <a:t> — </a:t>
-            </a:r>
-            <a:r>
-              <a:rPr sz="1900" dirty="0" err="1">
-                <a:solidFill>
-                  <a:srgbClr val="333333"/>
-                </a:solidFill>
-                <a:latin typeface="Calibri"/>
-              </a:rPr>
-              <a:t>قواعد</a:t>
-            </a:r>
-            <a:r>
-              <a:rPr sz="1900" dirty="0">
-                <a:solidFill>
-                  <a:srgbClr val="333333"/>
-                </a:solidFill>
-                <a:latin typeface="Calibri"/>
-              </a:rPr>
-              <a:t> </a:t>
-            </a:r>
-            <a:r>
-              <a:rPr sz="1900" dirty="0" err="1">
-                <a:solidFill>
-                  <a:srgbClr val="333333"/>
-                </a:solidFill>
-                <a:latin typeface="Calibri"/>
-              </a:rPr>
-              <a:t>البيانات</a:t>
-            </a:r>
-            <a:r>
-              <a:rPr sz="1900" dirty="0">
-                <a:solidFill>
-                  <a:srgbClr val="333333"/>
-                </a:solidFill>
-                <a:latin typeface="Calibri"/>
-              </a:rPr>
-              <a:t> </a:t>
-            </a:r>
-            <a:r>
-              <a:rPr sz="1900" dirty="0" err="1">
-                <a:solidFill>
-                  <a:srgbClr val="333333"/>
-                </a:solidFill>
-                <a:latin typeface="Calibri"/>
-              </a:rPr>
-              <a:t>المتجهية</a:t>
-            </a:r>
-            <a:r>
-              <a:rPr sz="1900" dirty="0">
-                <a:solidFill>
-                  <a:srgbClr val="333333"/>
-                </a:solidFill>
-                <a:latin typeface="Calibri"/>
-              </a:rPr>
-              <a:t> + RAG </a:t>
-            </a:r>
-            <a:r>
-              <a:rPr sz="1900" dirty="0" err="1">
-                <a:solidFill>
-                  <a:srgbClr val="333333"/>
-                </a:solidFill>
-                <a:latin typeface="Calibri"/>
-              </a:rPr>
-              <a:t>التطبيقي</a:t>
-            </a:r>
-            <a:endParaRPr sz="1900" dirty="0">
-              <a:solidFill>
-                <a:srgbClr val="333333"/>
-              </a:solidFill>
-              <a:latin typeface="Calibri"/>
-            </a:endParaRPr>
-          </a:p>
-          <a:p>
-            <a:pPr algn="l" rtl="1">
-              <a:spcAft>
-                <a:spcPts val="1000"/>
-              </a:spcAft>
-            </a:pPr>
-            <a:r>
-              <a:rPr sz="1900" dirty="0">
-                <a:solidFill>
-                  <a:srgbClr val="666666"/>
-                </a:solidFill>
-                <a:latin typeface="Calibri"/>
-              </a:rPr>
-              <a:t>   </a:t>
-            </a:r>
-            <a:r>
-              <a:rPr sz="1900" dirty="0" err="1">
-                <a:solidFill>
-                  <a:srgbClr val="666666"/>
-                </a:solidFill>
-                <a:latin typeface="Calibri"/>
-              </a:rPr>
-              <a:t>V09</a:t>
-            </a:r>
-            <a:r>
-              <a:rPr sz="1900" dirty="0">
-                <a:solidFill>
-                  <a:srgbClr val="666666"/>
-                </a:solidFill>
-                <a:latin typeface="Calibri"/>
-              </a:rPr>
-              <a:t> — Vector Databases + Applied RAG</a:t>
-            </a:r>
-          </a:p>
-          <a:p>
-            <a:pPr algn="r" rtl="1">
-              <a:spcAft>
-                <a:spcPts val="1000"/>
-              </a:spcAft>
-            </a:pPr>
-            <a:r>
-              <a:rPr sz="1900" dirty="0">
-                <a:solidFill>
-                  <a:srgbClr val="333333"/>
-                </a:solidFill>
-                <a:latin typeface="Calibri"/>
-              </a:rPr>
-              <a:t>• </a:t>
-            </a:r>
-            <a:r>
-              <a:rPr sz="1900" dirty="0" err="1">
-                <a:solidFill>
-                  <a:srgbClr val="333333"/>
-                </a:solidFill>
-                <a:latin typeface="Calibri"/>
-              </a:rPr>
-              <a:t>V10</a:t>
-            </a:r>
-            <a:r>
-              <a:rPr sz="1900" dirty="0">
-                <a:solidFill>
-                  <a:srgbClr val="333333"/>
-                </a:solidFill>
-                <a:latin typeface="Calibri"/>
-              </a:rPr>
-              <a:t> — </a:t>
-            </a:r>
-            <a:r>
-              <a:rPr sz="1900" dirty="0" err="1">
-                <a:solidFill>
-                  <a:srgbClr val="333333"/>
-                </a:solidFill>
-                <a:latin typeface="Calibri"/>
-              </a:rPr>
-              <a:t>تصنيف</a:t>
-            </a:r>
-            <a:r>
-              <a:rPr sz="1900" dirty="0">
-                <a:solidFill>
-                  <a:srgbClr val="333333"/>
-                </a:solidFill>
-                <a:latin typeface="Calibri"/>
-              </a:rPr>
-              <a:t> </a:t>
-            </a:r>
-            <a:r>
-              <a:rPr sz="1900" dirty="0" err="1">
-                <a:solidFill>
-                  <a:srgbClr val="333333"/>
-                </a:solidFill>
-                <a:latin typeface="Calibri"/>
-              </a:rPr>
-              <a:t>البيانات</a:t>
-            </a:r>
-            <a:r>
-              <a:rPr sz="1900" dirty="0">
-                <a:solidFill>
-                  <a:srgbClr val="333333"/>
-                </a:solidFill>
-                <a:latin typeface="Calibri"/>
-              </a:rPr>
-              <a:t> </a:t>
-            </a:r>
-            <a:r>
-              <a:rPr sz="1900" dirty="0" err="1">
-                <a:solidFill>
-                  <a:srgbClr val="333333"/>
-                </a:solidFill>
-                <a:latin typeface="Calibri"/>
-              </a:rPr>
-              <a:t>على</a:t>
-            </a:r>
-            <a:r>
-              <a:rPr sz="1900" dirty="0">
-                <a:solidFill>
-                  <a:srgbClr val="333333"/>
-                </a:solidFill>
-                <a:latin typeface="Calibri"/>
-              </a:rPr>
-              <a:t> </a:t>
-            </a:r>
-            <a:r>
-              <a:rPr sz="1900" dirty="0" err="1">
-                <a:solidFill>
-                  <a:srgbClr val="333333"/>
-                </a:solidFill>
-                <a:latin typeface="Calibri"/>
-              </a:rPr>
-              <a:t>نطاق</a:t>
-            </a:r>
-            <a:r>
-              <a:rPr sz="1900" dirty="0">
-                <a:solidFill>
-                  <a:srgbClr val="333333"/>
-                </a:solidFill>
-                <a:latin typeface="Calibri"/>
-              </a:rPr>
-              <a:t> </a:t>
-            </a:r>
-            <a:r>
-              <a:rPr sz="1900" dirty="0" err="1">
-                <a:solidFill>
-                  <a:srgbClr val="333333"/>
-                </a:solidFill>
-                <a:latin typeface="Calibri"/>
-              </a:rPr>
-              <a:t>واسع</a:t>
-            </a:r>
-            <a:endParaRPr sz="1900" dirty="0">
-              <a:solidFill>
-                <a:srgbClr val="333333"/>
-              </a:solidFill>
-              <a:latin typeface="Calibri"/>
-            </a:endParaRPr>
-          </a:p>
-          <a:p>
-            <a:pPr algn="l" rtl="1">
-              <a:spcAft>
-                <a:spcPts val="1000"/>
-              </a:spcAft>
-            </a:pPr>
-            <a:r>
-              <a:rPr sz="1900" dirty="0">
-                <a:solidFill>
-                  <a:srgbClr val="666666"/>
-                </a:solidFill>
-                <a:latin typeface="Calibri"/>
-              </a:rPr>
-              <a:t>   </a:t>
-            </a:r>
-            <a:r>
-              <a:rPr sz="1900" dirty="0" err="1">
-                <a:solidFill>
-                  <a:srgbClr val="666666"/>
-                </a:solidFill>
-                <a:latin typeface="Calibri"/>
-              </a:rPr>
-              <a:t>V10</a:t>
-            </a:r>
-            <a:r>
-              <a:rPr sz="1900" dirty="0">
-                <a:solidFill>
-                  <a:srgbClr val="666666"/>
-                </a:solidFill>
-                <a:latin typeface="Calibri"/>
-              </a:rPr>
-              <a:t> — Labeling at Scale</a:t>
-            </a:r>
-          </a:p>
-          <a:p>
-            <a:pPr algn="r" rtl="1">
-              <a:spcAft>
-                <a:spcPts val="1000"/>
-              </a:spcAft>
-            </a:pPr>
-            <a:r>
-              <a:rPr sz="1900" dirty="0">
-                <a:solidFill>
-                  <a:srgbClr val="333333"/>
-                </a:solidFill>
-                <a:latin typeface="Calibri"/>
-              </a:rPr>
-              <a:t>• </a:t>
-            </a:r>
-            <a:r>
-              <a:rPr sz="1900" dirty="0" err="1">
-                <a:solidFill>
-                  <a:srgbClr val="333333"/>
-                </a:solidFill>
-                <a:latin typeface="Calibri"/>
-              </a:rPr>
-              <a:t>V11</a:t>
-            </a:r>
-            <a:r>
-              <a:rPr sz="1900" dirty="0">
-                <a:solidFill>
-                  <a:srgbClr val="333333"/>
-                </a:solidFill>
-                <a:latin typeface="Calibri"/>
-              </a:rPr>
-              <a:t> — </a:t>
-            </a:r>
-            <a:r>
-              <a:rPr sz="1900" dirty="0" err="1">
-                <a:solidFill>
-                  <a:srgbClr val="333333"/>
-                </a:solidFill>
-                <a:latin typeface="Calibri"/>
-              </a:rPr>
-              <a:t>حوكمة</a:t>
-            </a:r>
-            <a:r>
-              <a:rPr sz="1900" dirty="0">
-                <a:solidFill>
-                  <a:srgbClr val="333333"/>
-                </a:solidFill>
-                <a:latin typeface="Calibri"/>
-              </a:rPr>
-              <a:t> </a:t>
-            </a:r>
-            <a:r>
-              <a:rPr sz="1900" dirty="0" err="1">
-                <a:solidFill>
-                  <a:srgbClr val="333333"/>
-                </a:solidFill>
-                <a:latin typeface="Calibri"/>
-              </a:rPr>
-              <a:t>البيانات</a:t>
-            </a:r>
-            <a:r>
-              <a:rPr sz="1900" dirty="0">
-                <a:solidFill>
-                  <a:srgbClr val="333333"/>
-                </a:solidFill>
-                <a:latin typeface="Calibri"/>
-              </a:rPr>
-              <a:t> </a:t>
-            </a:r>
-            <a:r>
-              <a:rPr sz="1900" dirty="0" err="1">
-                <a:solidFill>
-                  <a:srgbClr val="333333"/>
-                </a:solidFill>
-                <a:latin typeface="Calibri"/>
-              </a:rPr>
-              <a:t>وسلسلة</a:t>
-            </a:r>
-            <a:r>
-              <a:rPr sz="1900" dirty="0">
-                <a:solidFill>
-                  <a:srgbClr val="333333"/>
-                </a:solidFill>
-                <a:latin typeface="Calibri"/>
-              </a:rPr>
-              <a:t> </a:t>
-            </a:r>
-            <a:r>
-              <a:rPr sz="1900" dirty="0" err="1">
-                <a:solidFill>
-                  <a:srgbClr val="333333"/>
-                </a:solidFill>
-                <a:latin typeface="Calibri"/>
-              </a:rPr>
-              <a:t>العهدة</a:t>
-            </a:r>
-            <a:r>
-              <a:rPr sz="1900" dirty="0">
-                <a:solidFill>
-                  <a:srgbClr val="333333"/>
-                </a:solidFill>
-                <a:latin typeface="Calibri"/>
-              </a:rPr>
-              <a:t> </a:t>
-            </a:r>
-            <a:r>
-              <a:rPr sz="1900" dirty="0" err="1">
-                <a:solidFill>
-                  <a:srgbClr val="333333"/>
-                </a:solidFill>
-                <a:latin typeface="Calibri"/>
-              </a:rPr>
-              <a:t>والفهرسة</a:t>
-            </a:r>
-            <a:endParaRPr sz="1900" dirty="0">
-              <a:solidFill>
-                <a:srgbClr val="333333"/>
-              </a:solidFill>
-              <a:latin typeface="Calibri"/>
-            </a:endParaRPr>
-          </a:p>
-          <a:p>
-            <a:pPr algn="l" rtl="1">
-              <a:spcAft>
-                <a:spcPts val="1000"/>
-              </a:spcAft>
-            </a:pPr>
-            <a:r>
-              <a:rPr sz="1900" dirty="0">
-                <a:solidFill>
-                  <a:srgbClr val="666666"/>
-                </a:solidFill>
-                <a:latin typeface="Calibri"/>
-              </a:rPr>
-              <a:t>   </a:t>
-            </a:r>
-            <a:r>
-              <a:rPr sz="1900" dirty="0" err="1">
-                <a:solidFill>
-                  <a:srgbClr val="666666"/>
-                </a:solidFill>
-                <a:latin typeface="Calibri"/>
-              </a:rPr>
-              <a:t>V11</a:t>
-            </a:r>
-            <a:r>
-              <a:rPr sz="1900" dirty="0">
-                <a:solidFill>
-                  <a:srgbClr val="666666"/>
-                </a:solidFill>
-                <a:latin typeface="Calibri"/>
-              </a:rPr>
-              <a:t> — Data Governance, Lineage &amp; Cataloging</a:t>
-            </a:r>
-          </a:p>
-          <a:p>
-            <a:pPr algn="r" rtl="1">
-              <a:spcAft>
-                <a:spcPts val="1000"/>
-              </a:spcAft>
-            </a:pPr>
-            <a:r>
-              <a:rPr sz="1900" dirty="0">
-                <a:solidFill>
-                  <a:srgbClr val="333333"/>
-                </a:solidFill>
-                <a:latin typeface="Calibri"/>
-              </a:rPr>
-              <a:t>• </a:t>
-            </a:r>
-            <a:r>
-              <a:rPr sz="1900" dirty="0" err="1">
-                <a:solidFill>
-                  <a:srgbClr val="333333"/>
-                </a:solidFill>
-                <a:latin typeface="Calibri"/>
-              </a:rPr>
-              <a:t>V12</a:t>
-            </a:r>
-            <a:r>
-              <a:rPr sz="1900" dirty="0">
-                <a:solidFill>
-                  <a:srgbClr val="333333"/>
-                </a:solidFill>
-                <a:latin typeface="Calibri"/>
-              </a:rPr>
-              <a:t> — </a:t>
-            </a:r>
-            <a:r>
-              <a:rPr sz="1900" dirty="0" err="1">
-                <a:solidFill>
-                  <a:srgbClr val="333333"/>
-                </a:solidFill>
-                <a:latin typeface="Calibri"/>
-              </a:rPr>
-              <a:t>أساسيات</a:t>
-            </a:r>
-            <a:r>
-              <a:rPr sz="1900" dirty="0">
-                <a:solidFill>
-                  <a:srgbClr val="333333"/>
-                </a:solidFill>
-                <a:latin typeface="Calibri"/>
-              </a:rPr>
-              <a:t> </a:t>
-            </a:r>
-            <a:r>
-              <a:rPr sz="1900" dirty="0" err="1">
-                <a:solidFill>
-                  <a:srgbClr val="333333"/>
-                </a:solidFill>
-                <a:latin typeface="Calibri"/>
-              </a:rPr>
-              <a:t>MLOps</a:t>
-            </a:r>
-            <a:r>
-              <a:rPr sz="1900" dirty="0">
-                <a:solidFill>
-                  <a:srgbClr val="333333"/>
-                </a:solidFill>
-                <a:latin typeface="Calibri"/>
-              </a:rPr>
-              <a:t> + </a:t>
-            </a:r>
-            <a:r>
-              <a:rPr sz="1900" dirty="0" err="1">
-                <a:solidFill>
-                  <a:srgbClr val="333333"/>
-                </a:solidFill>
-                <a:latin typeface="Calibri"/>
-              </a:rPr>
-              <a:t>تمهيد</a:t>
-            </a:r>
-            <a:r>
-              <a:rPr sz="1900" dirty="0">
-                <a:solidFill>
-                  <a:srgbClr val="333333"/>
-                </a:solidFill>
-                <a:latin typeface="Calibri"/>
-              </a:rPr>
-              <a:t> </a:t>
-            </a:r>
-            <a:r>
-              <a:rPr sz="1900" dirty="0" err="1">
-                <a:solidFill>
-                  <a:srgbClr val="333333"/>
-                </a:solidFill>
-                <a:latin typeface="Calibri"/>
-              </a:rPr>
-              <a:t>للمختبر</a:t>
-            </a:r>
-            <a:endParaRPr sz="1900" dirty="0">
-              <a:solidFill>
-                <a:srgbClr val="333333"/>
-              </a:solidFill>
-              <a:latin typeface="Calibri"/>
-            </a:endParaRPr>
-          </a:p>
-          <a:p>
-            <a:pPr algn="l" rtl="1">
-              <a:spcAft>
-                <a:spcPts val="1000"/>
-              </a:spcAft>
-            </a:pPr>
-            <a:r>
-              <a:rPr sz="1900" dirty="0">
-                <a:solidFill>
-                  <a:srgbClr val="666666"/>
-                </a:solidFill>
-                <a:latin typeface="Calibri"/>
-              </a:rPr>
-              <a:t>   </a:t>
-            </a:r>
-            <a:r>
-              <a:rPr sz="1900" dirty="0" err="1">
-                <a:solidFill>
-                  <a:srgbClr val="666666"/>
-                </a:solidFill>
-                <a:latin typeface="Calibri"/>
-              </a:rPr>
-              <a:t>V12</a:t>
-            </a:r>
-            <a:r>
-              <a:rPr sz="1900" dirty="0">
-                <a:solidFill>
-                  <a:srgbClr val="666666"/>
-                </a:solidFill>
-                <a:latin typeface="Calibri"/>
-              </a:rPr>
-              <a:t> — </a:t>
-            </a:r>
-            <a:r>
-              <a:rPr sz="1900" dirty="0" err="1">
-                <a:solidFill>
-                  <a:srgbClr val="666666"/>
-                </a:solidFill>
-                <a:latin typeface="Calibri"/>
-              </a:rPr>
-              <a:t>MLOps</a:t>
-            </a:r>
-            <a:r>
-              <a:rPr sz="1900" dirty="0">
-                <a:solidFill>
-                  <a:srgbClr val="666666"/>
-                </a:solidFill>
-                <a:latin typeface="Calibri"/>
-              </a:rPr>
-              <a:t> Fundamentals + </a:t>
-            </a:r>
-            <a:r>
-              <a:rPr sz="1900">
-                <a:solidFill>
-                  <a:srgbClr val="666666"/>
-                </a:solidFill>
-                <a:latin typeface="Calibri"/>
-              </a:rPr>
-              <a:t>Lab </a:t>
-            </a:r>
-            <a:r>
-              <a:rPr lang="en-US" sz="1900">
-                <a:solidFill>
-                  <a:srgbClr val="666666"/>
-                </a:solidFill>
-                <a:latin typeface="Calibri"/>
-              </a:rPr>
-              <a:t>Introduction</a:t>
-            </a:r>
-            <a:endParaRPr sz="1900" dirty="0">
-              <a:solidFill>
-                <a:srgbClr val="666666"/>
-              </a:solidFill>
-              <a:latin typeface="Calibri"/>
-            </a:endParaRPr>
+              <a:t>06_  •  3/12</a:t>
+            </a:r>
           </a:p>
         </p:txBody>
       </p:sp>
@@ -6024,8 +6516,8 @@
 </p:sld>
 </file>
 
-<file path=ppt/slides/slide5.xml><?xml version="1.0" encoding="utf-8"?>
-<p:sld xmlns:a="http://schemas.openxmlformats.org/drawingml/2006/main" xmlns:r="http://schemas.openxmlformats.org/officeDocument/2006/relationships" xmlns:p="http://schemas.openxmlformats.org/presentationml/2006/main">
+<file path=ppt/slides/slide4.xml><?xml version="1.0" encoding="utf-8"?>
+<p:sld xmlns:a="http://schemas.openxmlformats.org/drawingml/2006/main" xmlns:p="http://schemas.openxmlformats.org/presentationml/2006/main" xmlns:r="http://schemas.openxmlformats.org/officeDocument/2006/relationships">
   <p:cSld>
     <p:bg>
       <p:bgPr>
@@ -6041,14 +6533,7 @@
         <p:cNvGrpSpPr/>
         <p:nvPr/>
       </p:nvGrpSpPr>
-      <p:grpSpPr>
-        <a:xfrm>
-          <a:off x="0" y="0"/>
-          <a:ext cx="0" cy="0"/>
-          <a:chOff x="0" y="0"/>
-          <a:chExt cx="0" cy="0"/>
-        </a:xfrm>
-      </p:grpSpPr>
+      <p:grpSpPr/>
       <p:sp>
         <p:nvSpPr>
           <p:cNvPr id="2" name="Rectangle 1"/>
@@ -6092,7 +6577,6 @@
           <a:lstStyle/>
           <a:p>
             <a:pPr algn="ctr"/>
-            <a:endParaRPr/>
           </a:p>
         </p:txBody>
       </p:sp>
@@ -6124,9 +6608,9 @@
                 <a:solidFill>
                   <a:srgbClr val="1F3B5C"/>
                 </a:solidFill>
-                <a:latin typeface="Calibri"/>
-              </a:rPr>
-              <a:t>أنواع البيانات / Data Types</a:t>
+                <a:latin typeface="Arial"/>
+              </a:rPr>
+              <a:t>وحدات المقرر / Course Modules</a:t>
             </a:r>
           </a:p>
         </p:txBody>
@@ -6154,66 +6638,275 @@
           <a:lstStyle/>
           <a:p>
             <a:pPr algn="r" rtl="1">
+              <a:spcBef>
+                <a:spcPts val="200"/>
+              </a:spcBef>
               <a:spcAft>
                 <a:spcPts val="1000"/>
               </a:spcAft>
             </a:pPr>
             <a:r>
-              <a:rPr sz="1900">
+              <a:rPr sz="1600">
                 <a:solidFill>
                   <a:srgbClr val="333333"/>
                 </a:solidFill>
-                <a:latin typeface="Calibri"/>
-              </a:rPr>
-              <a:t>• بيانات مهيكلة (جداول)، شبه مهيكلة (JSON/XML)، غير مهيكلة (نصوص، صور، صوت).</a:t>
-            </a:r>
-          </a:p>
-          <a:p>
-            <a:pPr algn="r" rtl="0">
+                <a:latin typeface="Arial"/>
+              </a:rPr>
+              <a:t>• V06 — أساسيات البيانات / Data Fundamentals</a:t>
+            </a:r>
+          </a:p>
+          <a:p>
+            <a:pPr algn="r" rtl="1">
+              <a:spcBef>
+                <a:spcPts val="200"/>
+              </a:spcBef>
               <a:spcAft>
                 <a:spcPts val="1000"/>
               </a:spcAft>
             </a:pPr>
             <a:r>
-              <a:rPr sz="1900">
-                <a:solidFill>
-                  <a:srgbClr val="666666"/>
-                </a:solidFill>
-                <a:latin typeface="Calibri"/>
-              </a:rPr>
-              <a:t>   Structured (tables), semi-structured (JSON/XML), unstructured (text, images, audio).</a:t>
+              <a:rPr sz="1600">
+                <a:solidFill>
+                  <a:srgbClr val="333333"/>
+                </a:solidFill>
+                <a:latin typeface="Arial"/>
+              </a:rPr>
+              <a:t>• V07 — المستودعات والبحيرات ومعمارية Lakehouse / Warehouses, Data Lakes &amp; Lakehouse</a:t>
             </a:r>
           </a:p>
           <a:p>
             <a:pPr algn="r" rtl="1">
+              <a:spcBef>
+                <a:spcPts val="200"/>
+              </a:spcBef>
               <a:spcAft>
                 <a:spcPts val="1000"/>
               </a:spcAft>
             </a:pPr>
             <a:r>
-              <a:rPr sz="1900">
+              <a:rPr sz="1600">
                 <a:solidFill>
                   <a:srgbClr val="333333"/>
                 </a:solidFill>
-                <a:latin typeface="Calibri"/>
-              </a:rPr>
-              <a:t>• اختيار النوع يحدد أدوات التخزين والمعالجة المناسبة.</a:t>
-            </a:r>
-          </a:p>
-          <a:p>
-            <a:pPr algn="r" rtl="0">
+                <a:latin typeface="Arial"/>
+              </a:rPr>
+              <a:t>• V08 — هندسة الخصائص ومخازنها / Feature Engineering &amp; Feature Stores</a:t>
+            </a:r>
+          </a:p>
+          <a:p>
+            <a:pPr algn="r" rtl="1">
+              <a:spcBef>
+                <a:spcPts val="200"/>
+              </a:spcBef>
               <a:spcAft>
                 <a:spcPts val="1000"/>
               </a:spcAft>
             </a:pPr>
             <a:r>
-              <a:rPr sz="1900">
+              <a:rPr sz="1600">
+                <a:solidFill>
+                  <a:srgbClr val="333333"/>
+                </a:solidFill>
+                <a:latin typeface="Arial"/>
+              </a:rPr>
+              <a:t>• V09 — قواعد البيانات المتجهية + RAG التطبيقي / Vector Databases + Applied RAG</a:t>
+            </a:r>
+          </a:p>
+          <a:p>
+            <a:pPr algn="r" rtl="1">
+              <a:spcBef>
+                <a:spcPts val="200"/>
+              </a:spcBef>
+              <a:spcAft>
+                <a:spcPts val="1000"/>
+              </a:spcAft>
+            </a:pPr>
+            <a:r>
+              <a:rPr sz="1600">
+                <a:solidFill>
+                  <a:srgbClr val="333333"/>
+                </a:solidFill>
+                <a:latin typeface="Arial"/>
+              </a:rPr>
+              <a:t>• V10 — تصنيف البيانات على نطاق واسع / Labeling at Scale</a:t>
+            </a:r>
+          </a:p>
+          <a:p>
+            <a:pPr algn="r" rtl="1">
+              <a:spcBef>
+                <a:spcPts val="200"/>
+              </a:spcBef>
+              <a:spcAft>
+                <a:spcPts val="1000"/>
+              </a:spcAft>
+            </a:pPr>
+            <a:r>
+              <a:rPr sz="1600">
+                <a:solidFill>
+                  <a:srgbClr val="333333"/>
+                </a:solidFill>
+                <a:latin typeface="Arial"/>
+              </a:rPr>
+              <a:t>• V11 — حوكمة البيانات وسلسلة العهدة والفهرسة / Data Governance, Lineage &amp; Cataloging</a:t>
+            </a:r>
+          </a:p>
+          <a:p>
+            <a:pPr algn="r" rtl="1">
+              <a:spcBef>
+                <a:spcPts val="200"/>
+              </a:spcBef>
+              <a:spcAft>
+                <a:spcPts val="1000"/>
+              </a:spcAft>
+            </a:pPr>
+            <a:r>
+              <a:rPr sz="1600">
+                <a:solidFill>
+                  <a:srgbClr val="333333"/>
+                </a:solidFill>
+                <a:latin typeface="Arial"/>
+              </a:rPr>
+              <a:t>• V12 — أساسيات MLOps + تمهيد للمختبر / MLOps Fundamentals + Lab Prelude</a:t>
+            </a:r>
+          </a:p>
+        </p:txBody>
+      </p:sp>
+      <p:sp>
+        <p:nvSpPr>
+          <p:cNvPr id="5" name="TextBox 4"/>
+          <p:cNvSpPr txBox="1"/>
+          <p:nvPr/>
+        </p:nvSpPr>
+        <p:spPr>
+          <a:xfrm>
+            <a:off x="640080" y="6400800"/>
+            <a:ext cx="8686800" cy="320040"/>
+          </a:xfrm>
+          <a:prstGeom prst="rect">
+            <a:avLst/>
+          </a:prstGeom>
+          <a:noFill/>
+        </p:spPr>
+        <p:txBody>
+          <a:bodyPr wrap="square">
+            <a:spAutoFit/>
+          </a:bodyPr>
+          <a:lstStyle/>
+          <a:p>
+            <a:pPr algn="r" rtl="1"/>
+            <a:r>
+              <a:rPr sz="1000" b="0">
+                <a:solidFill>
+                  <a:srgbClr val="666666"/>
+                </a:solidFill>
+                <a:latin typeface="Arial"/>
+              </a:rPr>
+              <a:t>Module 02 — Data &amp; AI Engineering Track  |  الوحدة الثانية</a:t>
+            </a:r>
+          </a:p>
+        </p:txBody>
+      </p:sp>
+      <p:sp>
+        <p:nvSpPr>
+          <p:cNvPr id="6" name="TextBox 5"/>
+          <p:cNvSpPr txBox="1"/>
+          <p:nvPr/>
+        </p:nvSpPr>
+        <p:spPr>
+          <a:xfrm>
+            <a:off x="9601200" y="6400800"/>
+            <a:ext cx="1920240" cy="320040"/>
+          </a:xfrm>
+          <a:prstGeom prst="rect">
+            <a:avLst/>
+          </a:prstGeom>
+          <a:noFill/>
+        </p:spPr>
+        <p:txBody>
+          <a:bodyPr wrap="square">
+            <a:spAutoFit/>
+          </a:bodyPr>
+          <a:lstStyle/>
+          <a:p>
+            <a:pPr algn="l" rtl="0"/>
+            <a:r>
+              <a:rPr sz="1000" b="0">
                 <a:solidFill>
                   <a:srgbClr val="666666"/>
                 </a:solidFill>
                 <a:latin typeface="Calibri"/>
               </a:rPr>
-              <a:t>   The data type determines the right storage and processing tools.</a:t>
+              <a:t>06_  •  4/12</a:t>
+            </a:r>
+          </a:p>
+        </p:txBody>
+      </p:sp>
+      <p:sp>
+        <p:nvSpPr>
+          <p:cNvPr id="7" name="TextBox 6"/>
+          <p:cNvSpPr txBox="1"/>
+          <p:nvPr/>
+        </p:nvSpPr>
+        <p:spPr>
+          <a:xfrm>
+            <a:off x="640080" y="6400800"/>
+            <a:ext cx="8686800" cy="320040"/>
+          </a:xfrm>
+          <a:prstGeom prst="rect">
+            <a:avLst/>
+          </a:prstGeom>
+          <a:noFill/>
+        </p:spPr>
+        <p:txBody>
+          <a:bodyPr wrap="square">
+            <a:spAutoFit/>
+          </a:bodyPr>
+          <a:lstStyle/>
+          <a:p>
+            <a:pPr algn="r" rtl="1"/>
+            <a:r>
+              <a:rPr sz="1000" b="0">
+                <a:solidFill>
+                  <a:srgbClr val="666666"/>
+                </a:solidFill>
+                <a:latin typeface="Arial"/>
+              </a:rPr>
+              <a:t>Module 02 — Data &amp; AI Engineering Track  |  الوحدة الثانية</a:t>
+            </a:r>
+          </a:p>
+        </p:txBody>
+      </p:sp>
+      <p:sp>
+        <p:nvSpPr>
+          <p:cNvPr id="8" name="TextBox 7"/>
+          <p:cNvSpPr txBox="1"/>
+          <p:nvPr/>
+        </p:nvSpPr>
+        <p:spPr>
+          <a:xfrm>
+            <a:off x="9601200" y="6400800"/>
+            <a:ext cx="1920240" cy="320040"/>
+          </a:xfrm>
+          <a:prstGeom prst="rect">
+            <a:avLst/>
+          </a:prstGeom>
+          <a:noFill/>
+        </p:spPr>
+        <p:txBody>
+          <a:bodyPr wrap="square">
+            <a:spAutoFit/>
+          </a:bodyPr>
+          <a:lstStyle/>
+          <a:p>
+            <a:pPr algn="l" rtl="0"/>
+            <a:r>
+              <a:rPr sz="1000" b="0">
+                <a:solidFill>
+                  <a:srgbClr val="666666"/>
+                </a:solidFill>
+                <a:latin typeface="Calibri"/>
+              </a:rPr>
+              <a:t>06_  •  4/12</a:t>
             </a:r>
           </a:p>
         </p:txBody>
@@ -6226,8 +6919,8 @@
 </p:sld>
 </file>
 
-<file path=ppt/slides/slide6.xml><?xml version="1.0" encoding="utf-8"?>
-<p:sld xmlns:a="http://schemas.openxmlformats.org/drawingml/2006/main" xmlns:r="http://schemas.openxmlformats.org/officeDocument/2006/relationships" xmlns:p="http://schemas.openxmlformats.org/presentationml/2006/main">
+<file path=ppt/slides/slide5.xml><?xml version="1.0" encoding="utf-8"?>
+<p:sld xmlns:a="http://schemas.openxmlformats.org/drawingml/2006/main" xmlns:p="http://schemas.openxmlformats.org/presentationml/2006/main" xmlns:r="http://schemas.openxmlformats.org/officeDocument/2006/relationships">
   <p:cSld>
     <p:bg>
       <p:bgPr>
@@ -6243,14 +6936,7 @@
         <p:cNvGrpSpPr/>
         <p:nvPr/>
       </p:nvGrpSpPr>
-      <p:grpSpPr>
-        <a:xfrm>
-          <a:off x="0" y="0"/>
-          <a:ext cx="0" cy="0"/>
-          <a:chOff x="0" y="0"/>
-          <a:chExt cx="0" cy="0"/>
-        </a:xfrm>
-      </p:grpSpPr>
+      <p:grpSpPr/>
       <p:sp>
         <p:nvSpPr>
           <p:cNvPr id="2" name="Rectangle 1"/>
@@ -6294,7 +6980,6 @@
           <a:lstStyle/>
           <a:p>
             <a:pPr algn="ctr"/>
-            <a:endParaRPr/>
           </a:p>
         </p:txBody>
       </p:sp>
@@ -6326,9 +7011,9 @@
                 <a:solidFill>
                   <a:srgbClr val="1F3B5C"/>
                 </a:solidFill>
-                <a:latin typeface="Calibri"/>
-              </a:rPr>
-              <a:t>التنسيقات / Formats</a:t>
+                <a:latin typeface="Arial"/>
+              </a:rPr>
+              <a:t>أنواع البيانات / Data Types</a:t>
             </a:r>
           </a:p>
         </p:txBody>
@@ -6356,6 +7041,9 @@
           <a:lstStyle/>
           <a:p>
             <a:pPr algn="r" rtl="1">
+              <a:spcBef>
+                <a:spcPts val="200"/>
+              </a:spcBef>
               <a:spcAft>
                 <a:spcPts val="1000"/>
               </a:spcAft>
@@ -6365,29 +7053,35 @@
                 <a:solidFill>
                   <a:srgbClr val="333333"/>
                 </a:solidFill>
-                <a:latin typeface="Calibri"/>
-              </a:rPr>
-              <a:t>• CSV للتبادل البسيط، JSON للواجهات البرمجية، Parquet وAvro للتحليلات والأنابيب.</a:t>
-            </a:r>
-          </a:p>
-          <a:p>
-            <a:pPr algn="r" rtl="0">
+                <a:latin typeface="Arial"/>
+              </a:rPr>
+              <a:t>• بيانات مهيكلة (جداول)، شبه مهيكلة (JSON/XML)، غير مهيكلة (نصوص، صور، صوت).</a:t>
+            </a:r>
+          </a:p>
+          <a:p>
+            <a:pPr algn="l" rtl="0">
+              <a:spcBef>
+                <a:spcPts val="200"/>
+              </a:spcBef>
               <a:spcAft>
                 <a:spcPts val="1000"/>
               </a:spcAft>
             </a:pPr>
             <a:r>
-              <a:rPr sz="1900">
+              <a:rPr sz="1600">
                 <a:solidFill>
                   <a:srgbClr val="666666"/>
                 </a:solidFill>
                 <a:latin typeface="Calibri"/>
               </a:rPr>
-              <a:t>   CSV for simple exchange, JSON for APIs, Parquet and Avro for analytics and pipelines.</a:t>
+              <a:t>• Structured (tables), semi-structured (JSON/XML), unstructured (text, images, audio).</a:t>
             </a:r>
           </a:p>
           <a:p>
             <a:pPr algn="r" rtl="1">
+              <a:spcBef>
+                <a:spcPts val="200"/>
+              </a:spcBef>
               <a:spcAft>
                 <a:spcPts val="1000"/>
               </a:spcAft>
@@ -6397,25 +7091,238 @@
                 <a:solidFill>
                   <a:srgbClr val="333333"/>
                 </a:solidFill>
-                <a:latin typeface="Calibri"/>
-              </a:rPr>
-              <a:t>• التنسيقات العمودية (Parquet) تقلل الحجم وتسرّع القراءة التحليلية.</a:t>
-            </a:r>
-          </a:p>
-          <a:p>
-            <a:pPr algn="r" rtl="0">
+                <a:latin typeface="Arial"/>
+              </a:rPr>
+              <a:t>• اختيار النوع يحدد أدوات التخزين والمعالجة المناسبة.</a:t>
+            </a:r>
+          </a:p>
+          <a:p>
+            <a:pPr algn="l" rtl="0">
+              <a:spcBef>
+                <a:spcPts val="200"/>
+              </a:spcBef>
               <a:spcAft>
                 <a:spcPts val="1000"/>
               </a:spcAft>
             </a:pPr>
             <a:r>
-              <a:rPr sz="1900">
+              <a:rPr sz="1600">
                 <a:solidFill>
                   <a:srgbClr val="666666"/>
                 </a:solidFill>
                 <a:latin typeface="Calibri"/>
               </a:rPr>
-              <a:t>   Columnar formats (Parquet) reduce size and speed up analytical reads.</a:t>
+              <a:t>• The data type determines the right storage and processing tools.</a:t>
+            </a:r>
+          </a:p>
+        </p:txBody>
+      </p:sp>
+      <p:sp>
+        <p:nvSpPr>
+          <p:cNvPr id="5" name="TextBox 4"/>
+          <p:cNvSpPr txBox="1"/>
+          <p:nvPr/>
+        </p:nvSpPr>
+        <p:spPr>
+          <a:xfrm>
+            <a:off x="640080" y="6400800"/>
+            <a:ext cx="8686800" cy="320040"/>
+          </a:xfrm>
+          <a:prstGeom prst="rect">
+            <a:avLst/>
+          </a:prstGeom>
+          <a:noFill/>
+        </p:spPr>
+        <p:txBody>
+          <a:bodyPr wrap="square">
+            <a:spAutoFit/>
+          </a:bodyPr>
+          <a:lstStyle/>
+          <a:p>
+            <a:pPr algn="r" rtl="1"/>
+            <a:r>
+              <a:rPr sz="1000" b="0">
+                <a:solidFill>
+                  <a:srgbClr val="666666"/>
+                </a:solidFill>
+                <a:latin typeface="Arial"/>
+              </a:rPr>
+              <a:t>Module 02 — Data &amp; AI Engineering Track  |  الوحدة الثانية</a:t>
+            </a:r>
+          </a:p>
+        </p:txBody>
+      </p:sp>
+      <p:sp>
+        <p:nvSpPr>
+          <p:cNvPr id="6" name="TextBox 5"/>
+          <p:cNvSpPr txBox="1"/>
+          <p:nvPr/>
+        </p:nvSpPr>
+        <p:spPr>
+          <a:xfrm>
+            <a:off x="9601200" y="6400800"/>
+            <a:ext cx="1920240" cy="320040"/>
+          </a:xfrm>
+          <a:prstGeom prst="rect">
+            <a:avLst/>
+          </a:prstGeom>
+          <a:noFill/>
+        </p:spPr>
+        <p:txBody>
+          <a:bodyPr wrap="square">
+            <a:spAutoFit/>
+          </a:bodyPr>
+          <a:lstStyle/>
+          <a:p>
+            <a:pPr algn="l" rtl="0"/>
+            <a:r>
+              <a:rPr sz="1000" b="0">
+                <a:solidFill>
+                  <a:srgbClr val="666666"/>
+                </a:solidFill>
+                <a:latin typeface="Calibri"/>
+              </a:rPr>
+              <a:t>V06  •  3/13</a:t>
+            </a:r>
+          </a:p>
+        </p:txBody>
+      </p:sp>
+      <p:sp>
+        <p:nvSpPr>
+          <p:cNvPr id="7" name="TextBox 6"/>
+          <p:cNvSpPr txBox="1"/>
+          <p:nvPr/>
+        </p:nvSpPr>
+        <p:spPr>
+          <a:xfrm>
+            <a:off x="640080" y="6400800"/>
+            <a:ext cx="8686800" cy="320040"/>
+          </a:xfrm>
+          <a:prstGeom prst="rect">
+            <a:avLst/>
+          </a:prstGeom>
+          <a:noFill/>
+        </p:spPr>
+        <p:txBody>
+          <a:bodyPr wrap="square">
+            <a:spAutoFit/>
+          </a:bodyPr>
+          <a:lstStyle/>
+          <a:p>
+            <a:pPr algn="r" rtl="1"/>
+            <a:r>
+              <a:rPr sz="1000" b="0">
+                <a:solidFill>
+                  <a:srgbClr val="666666"/>
+                </a:solidFill>
+                <a:latin typeface="Arial"/>
+              </a:rPr>
+              <a:t>Module 02 — Data &amp; AI Engineering Track  |  الوحدة الثانية</a:t>
+            </a:r>
+          </a:p>
+        </p:txBody>
+      </p:sp>
+      <p:sp>
+        <p:nvSpPr>
+          <p:cNvPr id="8" name="TextBox 7"/>
+          <p:cNvSpPr txBox="1"/>
+          <p:nvPr/>
+        </p:nvSpPr>
+        <p:spPr>
+          <a:xfrm>
+            <a:off x="9601200" y="6400800"/>
+            <a:ext cx="1920240" cy="320040"/>
+          </a:xfrm>
+          <a:prstGeom prst="rect">
+            <a:avLst/>
+          </a:prstGeom>
+          <a:noFill/>
+        </p:spPr>
+        <p:txBody>
+          <a:bodyPr wrap="square">
+            <a:spAutoFit/>
+          </a:bodyPr>
+          <a:lstStyle/>
+          <a:p>
+            <a:pPr algn="l" rtl="0"/>
+            <a:r>
+              <a:rPr sz="1000" b="0">
+                <a:solidFill>
+                  <a:srgbClr val="666666"/>
+                </a:solidFill>
+                <a:latin typeface="Calibri"/>
+              </a:rPr>
+              <a:t>06_  •  5/12</a:t>
+            </a:r>
+          </a:p>
+        </p:txBody>
+      </p:sp>
+      <p:sp>
+        <p:nvSpPr>
+          <p:cNvPr id="9" name="TextBox 8"/>
+          <p:cNvSpPr txBox="1"/>
+          <p:nvPr/>
+        </p:nvSpPr>
+        <p:spPr>
+          <a:xfrm>
+            <a:off x="640080" y="6400800"/>
+            <a:ext cx="8686800" cy="320040"/>
+          </a:xfrm>
+          <a:prstGeom prst="rect">
+            <a:avLst/>
+          </a:prstGeom>
+          <a:noFill/>
+        </p:spPr>
+        <p:txBody>
+          <a:bodyPr wrap="square">
+            <a:spAutoFit/>
+          </a:bodyPr>
+          <a:lstStyle/>
+          <a:p>
+            <a:pPr algn="r" rtl="1"/>
+            <a:r>
+              <a:rPr sz="1000" b="0">
+                <a:solidFill>
+                  <a:srgbClr val="666666"/>
+                </a:solidFill>
+                <a:latin typeface="Arial"/>
+              </a:rPr>
+              <a:t>Module 02 — Data &amp; AI Engineering Track  |  الوحدة الثانية</a:t>
+            </a:r>
+          </a:p>
+        </p:txBody>
+      </p:sp>
+      <p:sp>
+        <p:nvSpPr>
+          <p:cNvPr id="10" name="TextBox 9"/>
+          <p:cNvSpPr txBox="1"/>
+          <p:nvPr/>
+        </p:nvSpPr>
+        <p:spPr>
+          <a:xfrm>
+            <a:off x="9601200" y="6400800"/>
+            <a:ext cx="1920240" cy="320040"/>
+          </a:xfrm>
+          <a:prstGeom prst="rect">
+            <a:avLst/>
+          </a:prstGeom>
+          <a:noFill/>
+        </p:spPr>
+        <p:txBody>
+          <a:bodyPr wrap="square">
+            <a:spAutoFit/>
+          </a:bodyPr>
+          <a:lstStyle/>
+          <a:p>
+            <a:pPr algn="l" rtl="0"/>
+            <a:r>
+              <a:rPr sz="1000" b="0">
+                <a:solidFill>
+                  <a:srgbClr val="666666"/>
+                </a:solidFill>
+                <a:latin typeface="Calibri"/>
+              </a:rPr>
+              <a:t>06_  •  5/12</a:t>
             </a:r>
           </a:p>
         </p:txBody>
@@ -6428,8 +7335,8 @@
 </p:sld>
 </file>
 
-<file path=ppt/slides/slide7.xml><?xml version="1.0" encoding="utf-8"?>
-<p:sld xmlns:a="http://schemas.openxmlformats.org/drawingml/2006/main" xmlns:r="http://schemas.openxmlformats.org/officeDocument/2006/relationships" xmlns:p="http://schemas.openxmlformats.org/presentationml/2006/main">
+<file path=ppt/slides/slide6.xml><?xml version="1.0" encoding="utf-8"?>
+<p:sld xmlns:a="http://schemas.openxmlformats.org/drawingml/2006/main" xmlns:p="http://schemas.openxmlformats.org/presentationml/2006/main" xmlns:r="http://schemas.openxmlformats.org/officeDocument/2006/relationships">
   <p:cSld>
     <p:bg>
       <p:bgPr>
@@ -6445,14 +7352,7 @@
         <p:cNvGrpSpPr/>
         <p:nvPr/>
       </p:nvGrpSpPr>
-      <p:grpSpPr>
-        <a:xfrm>
-          <a:off x="0" y="0"/>
-          <a:ext cx="0" cy="0"/>
-          <a:chOff x="0" y="0"/>
-          <a:chExt cx="0" cy="0"/>
-        </a:xfrm>
-      </p:grpSpPr>
+      <p:grpSpPr/>
       <p:sp>
         <p:nvSpPr>
           <p:cNvPr id="2" name="Rectangle 1"/>
@@ -6496,7 +7396,6 @@
           <a:lstStyle/>
           <a:p>
             <a:pPr algn="ctr"/>
-            <a:endParaRPr/>
           </a:p>
         </p:txBody>
       </p:sp>
@@ -6528,9 +7427,9 @@
                 <a:solidFill>
                   <a:srgbClr val="1F3B5C"/>
                 </a:solidFill>
-                <a:latin typeface="Calibri"/>
-              </a:rPr>
-              <a:t>أنابيب ETL / ELT</a:t>
+                <a:latin typeface="Arial"/>
+              </a:rPr>
+              <a:t>التنسيقات / Formats</a:t>
             </a:r>
           </a:p>
         </p:txBody>
@@ -6558,6 +7457,9 @@
           <a:lstStyle/>
           <a:p>
             <a:pPr algn="r" rtl="1">
+              <a:spcBef>
+                <a:spcPts val="200"/>
+              </a:spcBef>
               <a:spcAft>
                 <a:spcPts val="1000"/>
               </a:spcAft>
@@ -6567,29 +7469,35 @@
                 <a:solidFill>
                   <a:srgbClr val="333333"/>
                 </a:solidFill>
-                <a:latin typeface="Calibri"/>
-              </a:rPr>
-              <a:t>• ETL: التحويل قبل التحميل؛ ELT: التحميل أولاً ثم التحويل داخل المنصة المستهدفة.</a:t>
-            </a:r>
-          </a:p>
-          <a:p>
-            <a:pPr algn="r" rtl="0">
+                <a:latin typeface="Arial"/>
+              </a:rPr>
+              <a:t>• CSV للتبادل البسيط، JSON للواجهات البرمجية، Parquet وAvro للتحليلات والأنابيب.</a:t>
+            </a:r>
+          </a:p>
+          <a:p>
+            <a:pPr algn="l" rtl="0">
+              <a:spcBef>
+                <a:spcPts val="200"/>
+              </a:spcBef>
               <a:spcAft>
                 <a:spcPts val="1000"/>
               </a:spcAft>
             </a:pPr>
             <a:r>
-              <a:rPr sz="1900">
+              <a:rPr sz="1600">
                 <a:solidFill>
                   <a:srgbClr val="666666"/>
                 </a:solidFill>
                 <a:latin typeface="Calibri"/>
               </a:rPr>
-              <a:t>   ETL: transform before loading; ELT: load first, transform inside the target platform.</a:t>
+              <a:t>• CSV for simple exchange, JSON for APIs, Parquet and Avro for analytics and pipelines.</a:t>
             </a:r>
           </a:p>
           <a:p>
             <a:pPr algn="r" rtl="1">
+              <a:spcBef>
+                <a:spcPts val="200"/>
+              </a:spcBef>
               <a:spcAft>
                 <a:spcPts val="1000"/>
               </a:spcAft>
@@ -6599,25 +7507,238 @@
                 <a:solidFill>
                   <a:srgbClr val="333333"/>
                 </a:solidFill>
-                <a:latin typeface="Calibri"/>
-              </a:rPr>
-              <a:t>• ELT هو النمط السائد في بيئات Lakehouse الحديثة.</a:t>
-            </a:r>
-          </a:p>
-          <a:p>
-            <a:pPr algn="r" rtl="0">
+                <a:latin typeface="Arial"/>
+              </a:rPr>
+              <a:t>• التنسيقات العمودية (Parquet) تقلل الحجم وتسرّع القراءة التحليلية.</a:t>
+            </a:r>
+          </a:p>
+          <a:p>
+            <a:pPr algn="l" rtl="0">
+              <a:spcBef>
+                <a:spcPts val="200"/>
+              </a:spcBef>
               <a:spcAft>
                 <a:spcPts val="1000"/>
               </a:spcAft>
             </a:pPr>
             <a:r>
-              <a:rPr sz="1900">
+              <a:rPr sz="1600">
                 <a:solidFill>
                   <a:srgbClr val="666666"/>
                 </a:solidFill>
                 <a:latin typeface="Calibri"/>
               </a:rPr>
-              <a:t>   ELT is the dominant pattern in modern lakehouse environments.</a:t>
+              <a:t>• Columnar formats (Parquet) reduce size and speed up analytical reads.</a:t>
+            </a:r>
+          </a:p>
+        </p:txBody>
+      </p:sp>
+      <p:sp>
+        <p:nvSpPr>
+          <p:cNvPr id="5" name="TextBox 4"/>
+          <p:cNvSpPr txBox="1"/>
+          <p:nvPr/>
+        </p:nvSpPr>
+        <p:spPr>
+          <a:xfrm>
+            <a:off x="640080" y="6400800"/>
+            <a:ext cx="8686800" cy="320040"/>
+          </a:xfrm>
+          <a:prstGeom prst="rect">
+            <a:avLst/>
+          </a:prstGeom>
+          <a:noFill/>
+        </p:spPr>
+        <p:txBody>
+          <a:bodyPr wrap="square">
+            <a:spAutoFit/>
+          </a:bodyPr>
+          <a:lstStyle/>
+          <a:p>
+            <a:pPr algn="r" rtl="1"/>
+            <a:r>
+              <a:rPr sz="1000" b="0">
+                <a:solidFill>
+                  <a:srgbClr val="666666"/>
+                </a:solidFill>
+                <a:latin typeface="Arial"/>
+              </a:rPr>
+              <a:t>Module 02 — Data &amp; AI Engineering Track  |  الوحدة الثانية</a:t>
+            </a:r>
+          </a:p>
+        </p:txBody>
+      </p:sp>
+      <p:sp>
+        <p:nvSpPr>
+          <p:cNvPr id="6" name="TextBox 5"/>
+          <p:cNvSpPr txBox="1"/>
+          <p:nvPr/>
+        </p:nvSpPr>
+        <p:spPr>
+          <a:xfrm>
+            <a:off x="9601200" y="6400800"/>
+            <a:ext cx="1920240" cy="320040"/>
+          </a:xfrm>
+          <a:prstGeom prst="rect">
+            <a:avLst/>
+          </a:prstGeom>
+          <a:noFill/>
+        </p:spPr>
+        <p:txBody>
+          <a:bodyPr wrap="square">
+            <a:spAutoFit/>
+          </a:bodyPr>
+          <a:lstStyle/>
+          <a:p>
+            <a:pPr algn="l" rtl="0"/>
+            <a:r>
+              <a:rPr sz="1000" b="0">
+                <a:solidFill>
+                  <a:srgbClr val="666666"/>
+                </a:solidFill>
+                <a:latin typeface="Calibri"/>
+              </a:rPr>
+              <a:t>V06  •  4/13</a:t>
+            </a:r>
+          </a:p>
+        </p:txBody>
+      </p:sp>
+      <p:sp>
+        <p:nvSpPr>
+          <p:cNvPr id="7" name="TextBox 6"/>
+          <p:cNvSpPr txBox="1"/>
+          <p:nvPr/>
+        </p:nvSpPr>
+        <p:spPr>
+          <a:xfrm>
+            <a:off x="640080" y="6400800"/>
+            <a:ext cx="8686800" cy="320040"/>
+          </a:xfrm>
+          <a:prstGeom prst="rect">
+            <a:avLst/>
+          </a:prstGeom>
+          <a:noFill/>
+        </p:spPr>
+        <p:txBody>
+          <a:bodyPr wrap="square">
+            <a:spAutoFit/>
+          </a:bodyPr>
+          <a:lstStyle/>
+          <a:p>
+            <a:pPr algn="r" rtl="1"/>
+            <a:r>
+              <a:rPr sz="1000" b="0">
+                <a:solidFill>
+                  <a:srgbClr val="666666"/>
+                </a:solidFill>
+                <a:latin typeface="Arial"/>
+              </a:rPr>
+              <a:t>Module 02 — Data &amp; AI Engineering Track  |  الوحدة الثانية</a:t>
+            </a:r>
+          </a:p>
+        </p:txBody>
+      </p:sp>
+      <p:sp>
+        <p:nvSpPr>
+          <p:cNvPr id="8" name="TextBox 7"/>
+          <p:cNvSpPr txBox="1"/>
+          <p:nvPr/>
+        </p:nvSpPr>
+        <p:spPr>
+          <a:xfrm>
+            <a:off x="9601200" y="6400800"/>
+            <a:ext cx="1920240" cy="320040"/>
+          </a:xfrm>
+          <a:prstGeom prst="rect">
+            <a:avLst/>
+          </a:prstGeom>
+          <a:noFill/>
+        </p:spPr>
+        <p:txBody>
+          <a:bodyPr wrap="square">
+            <a:spAutoFit/>
+          </a:bodyPr>
+          <a:lstStyle/>
+          <a:p>
+            <a:pPr algn="l" rtl="0"/>
+            <a:r>
+              <a:rPr sz="1000" b="0">
+                <a:solidFill>
+                  <a:srgbClr val="666666"/>
+                </a:solidFill>
+                <a:latin typeface="Calibri"/>
+              </a:rPr>
+              <a:t>06_  •  6/12</a:t>
+            </a:r>
+          </a:p>
+        </p:txBody>
+      </p:sp>
+      <p:sp>
+        <p:nvSpPr>
+          <p:cNvPr id="9" name="TextBox 8"/>
+          <p:cNvSpPr txBox="1"/>
+          <p:nvPr/>
+        </p:nvSpPr>
+        <p:spPr>
+          <a:xfrm>
+            <a:off x="640080" y="6400800"/>
+            <a:ext cx="8686800" cy="320040"/>
+          </a:xfrm>
+          <a:prstGeom prst="rect">
+            <a:avLst/>
+          </a:prstGeom>
+          <a:noFill/>
+        </p:spPr>
+        <p:txBody>
+          <a:bodyPr wrap="square">
+            <a:spAutoFit/>
+          </a:bodyPr>
+          <a:lstStyle/>
+          <a:p>
+            <a:pPr algn="r" rtl="1"/>
+            <a:r>
+              <a:rPr sz="1000" b="0">
+                <a:solidFill>
+                  <a:srgbClr val="666666"/>
+                </a:solidFill>
+                <a:latin typeface="Arial"/>
+              </a:rPr>
+              <a:t>Module 02 — Data &amp; AI Engineering Track  |  الوحدة الثانية</a:t>
+            </a:r>
+          </a:p>
+        </p:txBody>
+      </p:sp>
+      <p:sp>
+        <p:nvSpPr>
+          <p:cNvPr id="10" name="TextBox 9"/>
+          <p:cNvSpPr txBox="1"/>
+          <p:nvPr/>
+        </p:nvSpPr>
+        <p:spPr>
+          <a:xfrm>
+            <a:off x="9601200" y="6400800"/>
+            <a:ext cx="1920240" cy="320040"/>
+          </a:xfrm>
+          <a:prstGeom prst="rect">
+            <a:avLst/>
+          </a:prstGeom>
+          <a:noFill/>
+        </p:spPr>
+        <p:txBody>
+          <a:bodyPr wrap="square">
+            <a:spAutoFit/>
+          </a:bodyPr>
+          <a:lstStyle/>
+          <a:p>
+            <a:pPr algn="l" rtl="0"/>
+            <a:r>
+              <a:rPr sz="1000" b="0">
+                <a:solidFill>
+                  <a:srgbClr val="666666"/>
+                </a:solidFill>
+                <a:latin typeface="Calibri"/>
+              </a:rPr>
+              <a:t>06_  •  6/12</a:t>
             </a:r>
           </a:p>
         </p:txBody>
@@ -6630,8 +7751,8 @@
 </p:sld>
 </file>
 
-<file path=ppt/slides/slide8.xml><?xml version="1.0" encoding="utf-8"?>
-<p:sld xmlns:a="http://schemas.openxmlformats.org/drawingml/2006/main" xmlns:r="http://schemas.openxmlformats.org/officeDocument/2006/relationships" xmlns:p="http://schemas.openxmlformats.org/presentationml/2006/main">
+<file path=ppt/slides/slide7.xml><?xml version="1.0" encoding="utf-8"?>
+<p:sld xmlns:a="http://schemas.openxmlformats.org/drawingml/2006/main" xmlns:p="http://schemas.openxmlformats.org/presentationml/2006/main" xmlns:r="http://schemas.openxmlformats.org/officeDocument/2006/relationships">
   <p:cSld>
     <p:bg>
       <p:bgPr>
@@ -6647,14 +7768,7 @@
         <p:cNvGrpSpPr/>
         <p:nvPr/>
       </p:nvGrpSpPr>
-      <p:grpSpPr>
-        <a:xfrm>
-          <a:off x="0" y="0"/>
-          <a:ext cx="0" cy="0"/>
-          <a:chOff x="0" y="0"/>
-          <a:chExt cx="0" cy="0"/>
-        </a:xfrm>
-      </p:grpSpPr>
+      <p:grpSpPr/>
       <p:sp>
         <p:nvSpPr>
           <p:cNvPr id="2" name="Rectangle 1"/>
@@ -6698,7 +7812,6 @@
           <a:lstStyle/>
           <a:p>
             <a:pPr algn="ctr"/>
-            <a:endParaRPr/>
           </a:p>
         </p:txBody>
       </p:sp>
@@ -6730,9 +7843,9 @@
                 <a:solidFill>
                   <a:srgbClr val="1F3B5C"/>
                 </a:solidFill>
-                <a:latin typeface="Calibri"/>
-              </a:rPr>
-              <a:t>مقارنة أنماط المعالجة / Processing Patterns</a:t>
+                <a:latin typeface="Arial"/>
+              </a:rPr>
+              <a:t>أنابيب ETL / ELT</a:t>
             </a:r>
           </a:p>
         </p:txBody>
@@ -6760,98 +7873,288 @@
           <a:lstStyle/>
           <a:p>
             <a:pPr algn="r" rtl="1">
+              <a:spcBef>
+                <a:spcPts val="200"/>
+              </a:spcBef>
               <a:spcAft>
                 <a:spcPts val="1000"/>
               </a:spcAft>
             </a:pPr>
             <a:r>
-              <a:rPr sz="1800">
+              <a:rPr sz="1900">
                 <a:solidFill>
                   <a:srgbClr val="333333"/>
                 </a:solidFill>
-                <a:latin typeface="Calibri"/>
-              </a:rPr>
-              <a:t>• المعمارية المتدرِّجة Medallion (Lakehouse): Bronze خام → Silver منقَّى → Gold جاهز للتحليل؛ إدارة مركزية؛ الأنسب للتحليلات وخطوط AI/ML/RAG.</a:t>
-            </a:r>
-          </a:p>
-          <a:p>
-            <a:pPr algn="r" rtl="0">
+                <a:latin typeface="Arial"/>
+              </a:rPr>
+              <a:t>• ETL: التحويل قبل التحميل؛ ELT: التحميل أولاً ثم التحويل داخل المنصة المستهدفة.</a:t>
+            </a:r>
+          </a:p>
+          <a:p>
+            <a:pPr algn="l" rtl="0">
+              <a:spcBef>
+                <a:spcPts val="200"/>
+              </a:spcBef>
               <a:spcAft>
                 <a:spcPts val="1000"/>
               </a:spcAft>
             </a:pPr>
             <a:r>
-              <a:rPr sz="1800">
+              <a:rPr sz="1600">
                 <a:solidFill>
                   <a:srgbClr val="666666"/>
                 </a:solidFill>
                 <a:latin typeface="Calibri"/>
               </a:rPr>
-              <a:t>   Medallion (Lakehouse): raw Bronze → cleansed Silver → analytics-ready Gold; central ownership; best for analytics and AI/ML/RAG pipelines.</a:t>
+              <a:t>• ETL: transform before loading; ELT: load first, transform inside the target platform.</a:t>
             </a:r>
           </a:p>
           <a:p>
             <a:pPr algn="r" rtl="1">
+              <a:spcBef>
+                <a:spcPts val="200"/>
+              </a:spcBef>
               <a:spcAft>
                 <a:spcPts val="1000"/>
               </a:spcAft>
             </a:pPr>
             <a:r>
-              <a:rPr sz="1800">
+              <a:rPr sz="1900">
                 <a:solidFill>
                   <a:srgbClr val="333333"/>
                 </a:solidFill>
-                <a:latin typeface="Calibri"/>
-              </a:rPr>
-              <a:t>• مستودع البيانات: ETL/ELT → Staging → المستودع → أسواق البيانات؛ حوكمة مركزية؛ الأنسب للتقارير وذكاء الأعمال.</a:t>
-            </a:r>
-          </a:p>
-          <a:p>
-            <a:pPr algn="r" rtl="0">
+                <a:latin typeface="Arial"/>
+              </a:rPr>
+              <a:t>• ELT هو النمط السائد في بيئات Lakehouse الحديثة.</a:t>
+            </a:r>
+          </a:p>
+          <a:p>
+            <a:pPr algn="l" rtl="0">
+              <a:spcBef>
+                <a:spcPts val="200"/>
+              </a:spcBef>
               <a:spcAft>
                 <a:spcPts val="1000"/>
               </a:spcAft>
             </a:pPr>
             <a:r>
-              <a:rPr sz="1800">
+              <a:rPr sz="1600">
                 <a:solidFill>
                   <a:srgbClr val="666666"/>
                 </a:solidFill>
                 <a:latin typeface="Calibri"/>
               </a:rPr>
-              <a:t>   Data warehouse: ETL/ELT → staging → warehouse → data marts; central governance; best for reporting and BI.</a:t>
-            </a:r>
-          </a:p>
-          <a:p>
-            <a:pPr algn="r" rtl="1">
-              <a:spcAft>
-                <a:spcPts val="1000"/>
-              </a:spcAft>
-            </a:pPr>
-            <a:r>
-              <a:rPr sz="1800">
-                <a:solidFill>
-                  <a:srgbClr val="333333"/>
+              <a:t>• ELT is the dominant pattern in modern lakehouse environments.</a:t>
+            </a:r>
+          </a:p>
+        </p:txBody>
+      </p:sp>
+      <p:sp>
+        <p:nvSpPr>
+          <p:cNvPr id="5" name="TextBox 4"/>
+          <p:cNvSpPr txBox="1"/>
+          <p:nvPr/>
+        </p:nvSpPr>
+        <p:spPr>
+          <a:xfrm>
+            <a:off x="640080" y="6400800"/>
+            <a:ext cx="8686800" cy="320040"/>
+          </a:xfrm>
+          <a:prstGeom prst="rect">
+            <a:avLst/>
+          </a:prstGeom>
+          <a:noFill/>
+        </p:spPr>
+        <p:txBody>
+          <a:bodyPr wrap="square">
+            <a:spAutoFit/>
+          </a:bodyPr>
+          <a:lstStyle/>
+          <a:p>
+            <a:pPr algn="r" rtl="1"/>
+            <a:r>
+              <a:rPr sz="1000" b="0">
+                <a:solidFill>
+                  <a:srgbClr val="666666"/>
+                </a:solidFill>
+                <a:latin typeface="Arial"/>
+              </a:rPr>
+              <a:t>Module 02 — Data &amp; AI Engineering Track  |  الوحدة الثانية</a:t>
+            </a:r>
+          </a:p>
+        </p:txBody>
+      </p:sp>
+      <p:sp>
+        <p:nvSpPr>
+          <p:cNvPr id="6" name="TextBox 5"/>
+          <p:cNvSpPr txBox="1"/>
+          <p:nvPr/>
+        </p:nvSpPr>
+        <p:spPr>
+          <a:xfrm>
+            <a:off x="9601200" y="6400800"/>
+            <a:ext cx="1920240" cy="320040"/>
+          </a:xfrm>
+          <a:prstGeom prst="rect">
+            <a:avLst/>
+          </a:prstGeom>
+          <a:noFill/>
+        </p:spPr>
+        <p:txBody>
+          <a:bodyPr wrap="square">
+            <a:spAutoFit/>
+          </a:bodyPr>
+          <a:lstStyle/>
+          <a:p>
+            <a:pPr algn="l" rtl="0"/>
+            <a:r>
+              <a:rPr sz="1000" b="0">
+                <a:solidFill>
+                  <a:srgbClr val="666666"/>
                 </a:solidFill>
                 <a:latin typeface="Calibri"/>
               </a:rPr>
-              <a:t>• شبكة البيانات Data Mesh: ملكية لامركزية بالمجالات؛ منتجات بيانات بعقود (مخطط، أمان، SLA) وكتالوج موحد؛ الأنسب للمؤسسات الكبيرة.</a:t>
-            </a:r>
-          </a:p>
-          <a:p>
-            <a:pPr algn="r" rtl="0">
-              <a:spcAft>
-                <a:spcPts val="1000"/>
-              </a:spcAft>
-            </a:pPr>
-            <a:r>
-              <a:rPr sz="1800">
+              <a:t>V06  •  5/13</a:t>
+            </a:r>
+          </a:p>
+        </p:txBody>
+      </p:sp>
+      <p:sp>
+        <p:nvSpPr>
+          <p:cNvPr id="7" name="TextBox 6"/>
+          <p:cNvSpPr txBox="1"/>
+          <p:nvPr/>
+        </p:nvSpPr>
+        <p:spPr>
+          <a:xfrm>
+            <a:off x="640080" y="6400800"/>
+            <a:ext cx="8686800" cy="320040"/>
+          </a:xfrm>
+          <a:prstGeom prst="rect">
+            <a:avLst/>
+          </a:prstGeom>
+          <a:noFill/>
+        </p:spPr>
+        <p:txBody>
+          <a:bodyPr wrap="square">
+            <a:spAutoFit/>
+          </a:bodyPr>
+          <a:lstStyle/>
+          <a:p>
+            <a:pPr algn="r" rtl="1"/>
+            <a:r>
+              <a:rPr sz="1000" b="0">
+                <a:solidFill>
+                  <a:srgbClr val="666666"/>
+                </a:solidFill>
+                <a:latin typeface="Arial"/>
+              </a:rPr>
+              <a:t>Module 02 — Data &amp; AI Engineering Track  |  الوحدة الثانية</a:t>
+            </a:r>
+          </a:p>
+        </p:txBody>
+      </p:sp>
+      <p:sp>
+        <p:nvSpPr>
+          <p:cNvPr id="8" name="TextBox 7"/>
+          <p:cNvSpPr txBox="1"/>
+          <p:nvPr/>
+        </p:nvSpPr>
+        <p:spPr>
+          <a:xfrm>
+            <a:off x="9601200" y="6400800"/>
+            <a:ext cx="1920240" cy="320040"/>
+          </a:xfrm>
+          <a:prstGeom prst="rect">
+            <a:avLst/>
+          </a:prstGeom>
+          <a:noFill/>
+        </p:spPr>
+        <p:txBody>
+          <a:bodyPr wrap="square">
+            <a:spAutoFit/>
+          </a:bodyPr>
+          <a:lstStyle/>
+          <a:p>
+            <a:pPr algn="l" rtl="0"/>
+            <a:r>
+              <a:rPr sz="1000" b="0">
                 <a:solidFill>
                   <a:srgbClr val="666666"/>
                 </a:solidFill>
                 <a:latin typeface="Calibri"/>
               </a:rPr>
-              <a:t>   Data mesh: decentralized domain ownership; data products with contracts (schema, security, SLA) and a unified catalog; best for large organizations.</a:t>
+              <a:t>06_  •  7/12</a:t>
+            </a:r>
+          </a:p>
+        </p:txBody>
+      </p:sp>
+      <p:sp>
+        <p:nvSpPr>
+          <p:cNvPr id="9" name="TextBox 8"/>
+          <p:cNvSpPr txBox="1"/>
+          <p:nvPr/>
+        </p:nvSpPr>
+        <p:spPr>
+          <a:xfrm>
+            <a:off x="640080" y="6400800"/>
+            <a:ext cx="8686800" cy="320040"/>
+          </a:xfrm>
+          <a:prstGeom prst="rect">
+            <a:avLst/>
+          </a:prstGeom>
+          <a:noFill/>
+        </p:spPr>
+        <p:txBody>
+          <a:bodyPr wrap="square">
+            <a:spAutoFit/>
+          </a:bodyPr>
+          <a:lstStyle/>
+          <a:p>
+            <a:pPr algn="r" rtl="1"/>
+            <a:r>
+              <a:rPr sz="1000" b="0">
+                <a:solidFill>
+                  <a:srgbClr val="666666"/>
+                </a:solidFill>
+                <a:latin typeface="Arial"/>
+              </a:rPr>
+              <a:t>Module 02 — Data &amp; AI Engineering Track  |  الوحدة الثانية</a:t>
+            </a:r>
+          </a:p>
+        </p:txBody>
+      </p:sp>
+      <p:sp>
+        <p:nvSpPr>
+          <p:cNvPr id="10" name="TextBox 9"/>
+          <p:cNvSpPr txBox="1"/>
+          <p:nvPr/>
+        </p:nvSpPr>
+        <p:spPr>
+          <a:xfrm>
+            <a:off x="9601200" y="6400800"/>
+            <a:ext cx="1920240" cy="320040"/>
+          </a:xfrm>
+          <a:prstGeom prst="rect">
+            <a:avLst/>
+          </a:prstGeom>
+          <a:noFill/>
+        </p:spPr>
+        <p:txBody>
+          <a:bodyPr wrap="square">
+            <a:spAutoFit/>
+          </a:bodyPr>
+          <a:lstStyle/>
+          <a:p>
+            <a:pPr algn="l" rtl="0"/>
+            <a:r>
+              <a:rPr sz="1000" b="0">
+                <a:solidFill>
+                  <a:srgbClr val="666666"/>
+                </a:solidFill>
+                <a:latin typeface="Calibri"/>
+              </a:rPr>
+              <a:t>06_  •  7/12</a:t>
             </a:r>
           </a:p>
         </p:txBody>
@@ -6864,8 +8167,8 @@
 </p:sld>
 </file>
 
-<file path=ppt/slides/slide9.xml><?xml version="1.0" encoding="utf-8"?>
-<p:sld xmlns:a="http://schemas.openxmlformats.org/drawingml/2006/main" xmlns:r="http://schemas.openxmlformats.org/officeDocument/2006/relationships" xmlns:p="http://schemas.openxmlformats.org/presentationml/2006/main">
+<file path=ppt/slides/slide8.xml><?xml version="1.0" encoding="utf-8"?>
+<p:sld xmlns:a="http://schemas.openxmlformats.org/drawingml/2006/main" xmlns:p="http://schemas.openxmlformats.org/presentationml/2006/main" xmlns:r="http://schemas.openxmlformats.org/officeDocument/2006/relationships">
   <p:cSld>
     <p:bg>
       <p:bgPr>
@@ -6881,14 +8184,7 @@
         <p:cNvGrpSpPr/>
         <p:nvPr/>
       </p:nvGrpSpPr>
-      <p:grpSpPr>
-        <a:xfrm>
-          <a:off x="0" y="0"/>
-          <a:ext cx="0" cy="0"/>
-          <a:chOff x="0" y="0"/>
-          <a:chExt cx="0" cy="0"/>
-        </a:xfrm>
-      </p:grpSpPr>
+      <p:grpSpPr/>
       <p:sp>
         <p:nvSpPr>
           <p:cNvPr id="2" name="Rectangle 1"/>
@@ -6932,7 +8228,6 @@
           <a:lstStyle/>
           <a:p>
             <a:pPr algn="ctr"/>
-            <a:endParaRPr/>
           </a:p>
         </p:txBody>
       </p:sp>
@@ -6964,9 +8259,9 @@
                 <a:solidFill>
                   <a:srgbClr val="1F3B5C"/>
                 </a:solidFill>
-                <a:latin typeface="Calibri"/>
-              </a:rPr>
-              <a:t>جدول المقارنة السريع / Quick Comparison</a:t>
+                <a:latin typeface="Arial"/>
+              </a:rPr>
+              <a:t>مقارنة أنماط المعالجة / Processing Patterns</a:t>
             </a:r>
           </a:p>
         </p:txBody>
@@ -6994,66 +8289,1141 @@
           <a:lstStyle/>
           <a:p>
             <a:pPr algn="r" rtl="1">
+              <a:spcBef>
+                <a:spcPts val="200"/>
+              </a:spcBef>
               <a:spcAft>
                 <a:spcPts val="1000"/>
               </a:spcAft>
             </a:pPr>
             <a:r>
-              <a:rPr sz="1900">
+              <a:rPr sz="1800">
                 <a:solidFill>
                   <a:srgbClr val="333333"/>
                 </a:solidFill>
-                <a:latin typeface="Calibri"/>
-              </a:rPr>
-              <a:t>• المعايير: الفكرة الجوهرية / تدفق البيانات / مالك البيانات / حالة الاستخدام المثلى / نمط الحوكمة.</a:t>
-            </a:r>
-          </a:p>
-          <a:p>
-            <a:pPr algn="r" rtl="0">
+                <a:latin typeface="Arial"/>
+              </a:rPr>
+              <a:t>• المعمارية المتدرِّجة Medallion (Lakehouse): Bronze خام → Silver منقَّى → Gold جاهز للتحليل؛ إدارة مركزية؛ الأنسب للتحليلات وخطوط AI/ML/RAG.</a:t>
+            </a:r>
+          </a:p>
+          <a:p>
+            <a:pPr algn="l" rtl="0">
+              <a:spcBef>
+                <a:spcPts val="200"/>
+              </a:spcBef>
               <a:spcAft>
                 <a:spcPts val="1000"/>
               </a:spcAft>
             </a:pPr>
             <a:r>
-              <a:rPr sz="1900">
+              <a:rPr sz="1500">
                 <a:solidFill>
                   <a:srgbClr val="666666"/>
                 </a:solidFill>
                 <a:latin typeface="Calibri"/>
               </a:rPr>
-              <a:t>   Criteria: core idea / data flow / data ownership / best use case / governance style.</a:t>
+              <a:t>• Medallion (Lakehouse): raw Bronze → cleansed Silver → analytics-ready Gold; central ownership; best for analytics and AI/ML/RAG pipelines.</a:t>
             </a:r>
           </a:p>
           <a:p>
             <a:pPr algn="r" rtl="1">
+              <a:spcBef>
+                <a:spcPts val="200"/>
+              </a:spcBef>
               <a:spcAft>
                 <a:spcPts val="1000"/>
               </a:spcAft>
             </a:pPr>
             <a:r>
-              <a:rPr sz="1900">
+              <a:rPr sz="1800">
                 <a:solidFill>
                   <a:srgbClr val="333333"/>
                 </a:solidFill>
-                <a:latin typeface="Calibri"/>
-              </a:rPr>
-              <a:t>• Medallion: فريق هندسة مركزي — المستودع: فرق BI — Data Mesh: فرق المجالات.</a:t>
-            </a:r>
-          </a:p>
-          <a:p>
-            <a:pPr algn="r" rtl="0">
+                <a:latin typeface="Arial"/>
+              </a:rPr>
+              <a:t>• مستودع البيانات: ETL/ELT → Staging → المستودع → أسواق البيانات؛ حوكمة مركزية؛ الأنسب للتقارير وذكاء الأعمال.</a:t>
+            </a:r>
+          </a:p>
+          <a:p>
+            <a:pPr algn="l" rtl="0">
+              <a:spcBef>
+                <a:spcPts val="200"/>
+              </a:spcBef>
               <a:spcAft>
                 <a:spcPts val="1000"/>
               </a:spcAft>
             </a:pPr>
             <a:r>
-              <a:rPr sz="1900">
+              <a:rPr sz="1500">
                 <a:solidFill>
                   <a:srgbClr val="666666"/>
                 </a:solidFill>
                 <a:latin typeface="Calibri"/>
               </a:rPr>
-              <a:t>   Medallion: central data engineering — warehouse: BI teams — data mesh: domain teams.</a:t>
+              <a:t>• Data warehouse: ETL/ELT → staging → warehouse → data marts; central governance; best for reporting and BI.</a:t>
+            </a:r>
+          </a:p>
+          <a:p>
+            <a:pPr algn="r" rtl="1">
+              <a:spcBef>
+                <a:spcPts val="200"/>
+              </a:spcBef>
+              <a:spcAft>
+                <a:spcPts val="1000"/>
+              </a:spcAft>
+            </a:pPr>
+            <a:r>
+              <a:rPr sz="1800">
+                <a:solidFill>
+                  <a:srgbClr val="333333"/>
+                </a:solidFill>
+                <a:latin typeface="Arial"/>
+              </a:rPr>
+              <a:t>• شبكة البيانات Data Mesh: ملكية لامركزية بالمجالات؛ منتجات بيانات بعقود (مخطط، أمان، SLA) وكتالوج موحد؛ الأنسب للمؤسسات الكبيرة.</a:t>
+            </a:r>
+          </a:p>
+          <a:p>
+            <a:pPr algn="l" rtl="0">
+              <a:spcBef>
+                <a:spcPts val="200"/>
+              </a:spcBef>
+              <a:spcAft>
+                <a:spcPts val="1000"/>
+              </a:spcAft>
+            </a:pPr>
+            <a:r>
+              <a:rPr sz="1500">
+                <a:solidFill>
+                  <a:srgbClr val="666666"/>
+                </a:solidFill>
+                <a:latin typeface="Calibri"/>
+              </a:rPr>
+              <a:t>• Data mesh: decentralized domain ownership; data products with contracts (schema, security, SLA) and a unified catalog; best for large organizations.</a:t>
+            </a:r>
+          </a:p>
+        </p:txBody>
+      </p:sp>
+      <p:sp>
+        <p:nvSpPr>
+          <p:cNvPr id="5" name="TextBox 4"/>
+          <p:cNvSpPr txBox="1"/>
+          <p:nvPr/>
+        </p:nvSpPr>
+        <p:spPr>
+          <a:xfrm>
+            <a:off x="640080" y="6400800"/>
+            <a:ext cx="8686800" cy="320040"/>
+          </a:xfrm>
+          <a:prstGeom prst="rect">
+            <a:avLst/>
+          </a:prstGeom>
+          <a:noFill/>
+        </p:spPr>
+        <p:txBody>
+          <a:bodyPr wrap="square">
+            <a:spAutoFit/>
+          </a:bodyPr>
+          <a:lstStyle/>
+          <a:p>
+            <a:pPr algn="r" rtl="1"/>
+            <a:r>
+              <a:rPr sz="1000" b="0">
+                <a:solidFill>
+                  <a:srgbClr val="666666"/>
+                </a:solidFill>
+                <a:latin typeface="Arial"/>
+              </a:rPr>
+              <a:t>Module 02 — Data &amp; AI Engineering Track  |  الوحدة الثانية</a:t>
+            </a:r>
+          </a:p>
+        </p:txBody>
+      </p:sp>
+      <p:sp>
+        <p:nvSpPr>
+          <p:cNvPr id="6" name="TextBox 5"/>
+          <p:cNvSpPr txBox="1"/>
+          <p:nvPr/>
+        </p:nvSpPr>
+        <p:spPr>
+          <a:xfrm>
+            <a:off x="9601200" y="6400800"/>
+            <a:ext cx="1920240" cy="320040"/>
+          </a:xfrm>
+          <a:prstGeom prst="rect">
+            <a:avLst/>
+          </a:prstGeom>
+          <a:noFill/>
+        </p:spPr>
+        <p:txBody>
+          <a:bodyPr wrap="square">
+            <a:spAutoFit/>
+          </a:bodyPr>
+          <a:lstStyle/>
+          <a:p>
+            <a:pPr algn="l" rtl="0"/>
+            <a:r>
+              <a:rPr sz="1000" b="0">
+                <a:solidFill>
+                  <a:srgbClr val="666666"/>
+                </a:solidFill>
+                <a:latin typeface="Calibri"/>
+              </a:rPr>
+              <a:t>V06  •  6/13</a:t>
+            </a:r>
+          </a:p>
+        </p:txBody>
+      </p:sp>
+      <p:sp>
+        <p:nvSpPr>
+          <p:cNvPr id="7" name="TextBox 6"/>
+          <p:cNvSpPr txBox="1"/>
+          <p:nvPr/>
+        </p:nvSpPr>
+        <p:spPr>
+          <a:xfrm>
+            <a:off x="640080" y="6400800"/>
+            <a:ext cx="8686800" cy="320040"/>
+          </a:xfrm>
+          <a:prstGeom prst="rect">
+            <a:avLst/>
+          </a:prstGeom>
+          <a:noFill/>
+        </p:spPr>
+        <p:txBody>
+          <a:bodyPr wrap="square">
+            <a:spAutoFit/>
+          </a:bodyPr>
+          <a:lstStyle/>
+          <a:p>
+            <a:pPr algn="r" rtl="1"/>
+            <a:r>
+              <a:rPr sz="1000" b="0">
+                <a:solidFill>
+                  <a:srgbClr val="666666"/>
+                </a:solidFill>
+                <a:latin typeface="Arial"/>
+              </a:rPr>
+              <a:t>Module 02 — Data &amp; AI Engineering Track  |  الوحدة الثانية</a:t>
+            </a:r>
+          </a:p>
+        </p:txBody>
+      </p:sp>
+      <p:sp>
+        <p:nvSpPr>
+          <p:cNvPr id="8" name="TextBox 7"/>
+          <p:cNvSpPr txBox="1"/>
+          <p:nvPr/>
+        </p:nvSpPr>
+        <p:spPr>
+          <a:xfrm>
+            <a:off x="9601200" y="6400800"/>
+            <a:ext cx="1920240" cy="320040"/>
+          </a:xfrm>
+          <a:prstGeom prst="rect">
+            <a:avLst/>
+          </a:prstGeom>
+          <a:noFill/>
+        </p:spPr>
+        <p:txBody>
+          <a:bodyPr wrap="square">
+            <a:spAutoFit/>
+          </a:bodyPr>
+          <a:lstStyle/>
+          <a:p>
+            <a:pPr algn="l" rtl="0"/>
+            <a:r>
+              <a:rPr sz="1000" b="0">
+                <a:solidFill>
+                  <a:srgbClr val="666666"/>
+                </a:solidFill>
+                <a:latin typeface="Calibri"/>
+              </a:rPr>
+              <a:t>06_  •  8/12</a:t>
+            </a:r>
+          </a:p>
+        </p:txBody>
+      </p:sp>
+      <p:sp>
+        <p:nvSpPr>
+          <p:cNvPr id="9" name="TextBox 8"/>
+          <p:cNvSpPr txBox="1"/>
+          <p:nvPr/>
+        </p:nvSpPr>
+        <p:spPr>
+          <a:xfrm>
+            <a:off x="640080" y="6400800"/>
+            <a:ext cx="8686800" cy="320040"/>
+          </a:xfrm>
+          <a:prstGeom prst="rect">
+            <a:avLst/>
+          </a:prstGeom>
+          <a:noFill/>
+        </p:spPr>
+        <p:txBody>
+          <a:bodyPr wrap="square">
+            <a:spAutoFit/>
+          </a:bodyPr>
+          <a:lstStyle/>
+          <a:p>
+            <a:pPr algn="r" rtl="1"/>
+            <a:r>
+              <a:rPr sz="1000" b="0">
+                <a:solidFill>
+                  <a:srgbClr val="666666"/>
+                </a:solidFill>
+                <a:latin typeface="Arial"/>
+              </a:rPr>
+              <a:t>Module 02 — Data &amp; AI Engineering Track  |  الوحدة الثانية</a:t>
+            </a:r>
+          </a:p>
+        </p:txBody>
+      </p:sp>
+      <p:sp>
+        <p:nvSpPr>
+          <p:cNvPr id="10" name="TextBox 9"/>
+          <p:cNvSpPr txBox="1"/>
+          <p:nvPr/>
+        </p:nvSpPr>
+        <p:spPr>
+          <a:xfrm>
+            <a:off x="9601200" y="6400800"/>
+            <a:ext cx="1920240" cy="320040"/>
+          </a:xfrm>
+          <a:prstGeom prst="rect">
+            <a:avLst/>
+          </a:prstGeom>
+          <a:noFill/>
+        </p:spPr>
+        <p:txBody>
+          <a:bodyPr wrap="square">
+            <a:spAutoFit/>
+          </a:bodyPr>
+          <a:lstStyle/>
+          <a:p>
+            <a:pPr algn="l" rtl="0"/>
+            <a:r>
+              <a:rPr sz="1000" b="0">
+                <a:solidFill>
+                  <a:srgbClr val="666666"/>
+                </a:solidFill>
+                <a:latin typeface="Calibri"/>
+              </a:rPr>
+              <a:t>06_  •  8/12</a:t>
+            </a:r>
+          </a:p>
+        </p:txBody>
+      </p:sp>
+    </p:spTree>
+  </p:cSld>
+  <p:clrMapOvr>
+    <a:masterClrMapping/>
+  </p:clrMapOvr>
+</p:sld>
+</file>
+
+<file path=ppt/slides/slide9.xml><?xml version="1.0" encoding="utf-8"?>
+<p:sld xmlns:a="http://schemas.openxmlformats.org/drawingml/2006/main" xmlns:p="http://schemas.openxmlformats.org/presentationml/2006/main" xmlns:r="http://schemas.openxmlformats.org/officeDocument/2006/relationships">
+  <p:cSld>
+    <p:bg>
+      <p:bgPr>
+        <a:solidFill>
+          <a:srgbClr val="FFFFFF"/>
+        </a:solidFill>
+        <a:effectLst/>
+      </p:bgPr>
+    </p:bg>
+    <p:spTree>
+      <p:nvGrpSpPr>
+        <p:cNvPr id="1" name=""/>
+        <p:cNvGrpSpPr/>
+        <p:nvPr/>
+      </p:nvGrpSpPr>
+      <p:grpSpPr/>
+      <p:sp>
+        <p:nvSpPr>
+          <p:cNvPr id="2" name="Rectangle 1"/>
+          <p:cNvSpPr/>
+          <p:nvPr/>
+        </p:nvSpPr>
+        <p:spPr>
+          <a:xfrm>
+            <a:off x="0" y="0"/>
+            <a:ext cx="12191695" cy="1005840"/>
+          </a:xfrm>
+          <a:prstGeom prst="rect">
+            <a:avLst/>
+          </a:prstGeom>
+          <a:solidFill>
+            <a:srgbClr val="FFFFFF"/>
+          </a:solidFill>
+          <a:ln w="25400">
+            <a:solidFill>
+              <a:srgbClr val="1F4E79"/>
+            </a:solidFill>
+          </a:ln>
+          <a:effectLst/>
+        </p:spPr>
+        <p:style>
+          <a:lnRef idx="1">
+            <a:schemeClr val="accent1"/>
+          </a:lnRef>
+          <a:fillRef idx="3">
+            <a:schemeClr val="accent1"/>
+          </a:fillRef>
+          <a:effectRef idx="2">
+            <a:schemeClr val="accent1"/>
+          </a:effectRef>
+          <a:fontRef idx="minor">
+            <a:schemeClr val="lt1"/>
+          </a:fontRef>
+        </p:style>
+        <p:txBody>
+          <a:bodyPr rtlCol="0" anchor="ctr"/>
+          <a:lstStyle/>
+          <a:p>
+            <a:pPr algn="ctr"/>
+          </a:p>
+        </p:txBody>
+      </p:sp>
+      <p:sp>
+        <p:nvSpPr>
+          <p:cNvPr id="3" name="TextBox 2"/>
+          <p:cNvSpPr txBox="1"/>
+          <p:nvPr/>
+        </p:nvSpPr>
+        <p:spPr>
+          <a:xfrm>
+            <a:off x="640080" y="182880"/>
+            <a:ext cx="10972800" cy="640080"/>
+          </a:xfrm>
+          <a:prstGeom prst="rect">
+            <a:avLst/>
+          </a:prstGeom>
+          <a:noFill/>
+        </p:spPr>
+        <p:txBody>
+          <a:bodyPr wrap="square">
+            <a:spAutoFit/>
+          </a:bodyPr>
+          <a:lstStyle/>
+          <a:p>
+            <a:pPr algn="r" rtl="1"/>
+            <a:r>
+              <a:rPr sz="3200" b="1">
+                <a:solidFill>
+                  <a:srgbClr val="1F3B5C"/>
+                </a:solidFill>
+                <a:latin typeface="Arial"/>
+              </a:rPr>
+              <a:t>جدول المقارنة: Medallion / المستودع / Data Mesh</a:t>
+            </a:r>
+          </a:p>
+        </p:txBody>
+      </p:sp>
+      <p:graphicFrame>
+        <p:nvGraphicFramePr>
+          <p:cNvPr id="4" name="Table 3"/>
+          <p:cNvGraphicFramePr>
+            <a:graphicFrameLocks noGrp="1"/>
+          </p:cNvGraphicFramePr>
+          <p:nvPr/>
+        </p:nvGraphicFramePr>
+        <p:xfrm>
+          <a:off x="640080" y="1371600"/>
+          <a:ext cx="10972800" cy="2743200"/>
+        </p:xfrm>
+        <a:graphic>
+          <a:graphicData uri="http://schemas.openxmlformats.org/drawingml/2006/table">
+            <a:tbl>
+              <a:tblPr firstRow="1" bandRow="1">
+                <a:tableStyleId>{5C22544A-7EE6-4342-B048-85BDC9FD1C3A}</a:tableStyleId>
+              </a:tblPr>
+              <a:tblGrid>
+                <a:gridCol w="2743200"/>
+                <a:gridCol w="2743200"/>
+                <a:gridCol w="2743200"/>
+                <a:gridCol w="2743200"/>
+              </a:tblGrid>
+              <a:tr h="548640">
+                <a:tc>
+                  <a:txBody>
+                    <a:bodyPr/>
+                    <a:lstStyle/>
+                    <a:p>
+                      <a:pPr algn="ctr" rtl="1"/>
+                      <a:r>
+                        <a:rPr sz="1400" b="1">
+                          <a:solidFill>
+                            <a:srgbClr val="FFFFFF"/>
+                          </a:solidFill>
+                          <a:latin typeface="Arial"/>
+                        </a:rPr>
+                        <a:t>المعيار</a:t>
+                      </a:r>
+                    </a:p>
+                  </a:txBody>
+                  <a:tcPr>
+                    <a:solidFill>
+                      <a:srgbClr val="1F4E79"/>
+                    </a:solidFill>
+                  </a:tcPr>
+                </a:tc>
+                <a:tc>
+                  <a:txBody>
+                    <a:bodyPr/>
+                    <a:lstStyle/>
+                    <a:p>
+                      <a:pPr algn="ctr" rtl="1"/>
+                      <a:r>
+                        <a:rPr sz="1400" b="1">
+                          <a:solidFill>
+                            <a:srgbClr val="FFFFFF"/>
+                          </a:solidFill>
+                          <a:latin typeface="Arial"/>
+                        </a:rPr>
+                        <a:t>Medallion</a:t>
+                      </a:r>
+                    </a:p>
+                  </a:txBody>
+                  <a:tcPr>
+                    <a:solidFill>
+                      <a:srgbClr val="1F4E79"/>
+                    </a:solidFill>
+                  </a:tcPr>
+                </a:tc>
+                <a:tc>
+                  <a:txBody>
+                    <a:bodyPr/>
+                    <a:lstStyle/>
+                    <a:p>
+                      <a:pPr algn="ctr" rtl="1"/>
+                      <a:r>
+                        <a:rPr sz="1400" b="1">
+                          <a:solidFill>
+                            <a:srgbClr val="FFFFFF"/>
+                          </a:solidFill>
+                          <a:latin typeface="Arial"/>
+                        </a:rPr>
+                        <a:t>المستودع</a:t>
+                      </a:r>
+                    </a:p>
+                  </a:txBody>
+                  <a:tcPr>
+                    <a:solidFill>
+                      <a:srgbClr val="1F4E79"/>
+                    </a:solidFill>
+                  </a:tcPr>
+                </a:tc>
+                <a:tc>
+                  <a:txBody>
+                    <a:bodyPr/>
+                    <a:lstStyle/>
+                    <a:p>
+                      <a:pPr algn="ctr" rtl="1"/>
+                      <a:r>
+                        <a:rPr sz="1400" b="1">
+                          <a:solidFill>
+                            <a:srgbClr val="FFFFFF"/>
+                          </a:solidFill>
+                          <a:latin typeface="Arial"/>
+                        </a:rPr>
+                        <a:t>Data Mesh</a:t>
+                      </a:r>
+                    </a:p>
+                  </a:txBody>
+                  <a:tcPr>
+                    <a:solidFill>
+                      <a:srgbClr val="1F4E79"/>
+                    </a:solidFill>
+                  </a:tcPr>
+                </a:tc>
+              </a:tr>
+              <a:tr h="548640">
+                <a:tc>
+                  <a:txBody>
+                    <a:bodyPr/>
+                    <a:lstStyle/>
+                    <a:p>
+                      <a:pPr algn="ctr" rtl="1"/>
+                      <a:r>
+                        <a:rPr sz="1200">
+                          <a:solidFill>
+                            <a:srgbClr val="333333"/>
+                          </a:solidFill>
+                          <a:latin typeface="Arial"/>
+                        </a:rPr>
+                        <a:t>الفكرة</a:t>
+                      </a:r>
+                    </a:p>
+                  </a:txBody>
+                  <a:tcPr>
+                    <a:solidFill>
+                      <a:srgbClr val="FFFFFF"/>
+                    </a:solidFill>
+                  </a:tcPr>
+                </a:tc>
+                <a:tc>
+                  <a:txBody>
+                    <a:bodyPr/>
+                    <a:lstStyle/>
+                    <a:p>
+                      <a:pPr algn="ctr" rtl="1"/>
+                      <a:r>
+                        <a:rPr sz="1200">
+                          <a:solidFill>
+                            <a:srgbClr val="333333"/>
+                          </a:solidFill>
+                          <a:latin typeface="Arial"/>
+                        </a:rPr>
+                        <a:t>طبقات Bronze→Silver→Gold</a:t>
+                      </a:r>
+                    </a:p>
+                  </a:txBody>
+                  <a:tcPr>
+                    <a:solidFill>
+                      <a:srgbClr val="FFFFFF"/>
+                    </a:solidFill>
+                  </a:tcPr>
+                </a:tc>
+                <a:tc>
+                  <a:txBody>
+                    <a:bodyPr/>
+                    <a:lstStyle/>
+                    <a:p>
+                      <a:pPr algn="ctr" rtl="1"/>
+                      <a:r>
+                        <a:rPr sz="1200">
+                          <a:solidFill>
+                            <a:srgbClr val="333333"/>
+                          </a:solidFill>
+                          <a:latin typeface="Arial"/>
+                        </a:rPr>
+                        <a:t>Staging→Warehouse→Marts</a:t>
+                      </a:r>
+                    </a:p>
+                  </a:txBody>
+                  <a:tcPr>
+                    <a:solidFill>
+                      <a:srgbClr val="FFFFFF"/>
+                    </a:solidFill>
+                  </a:tcPr>
+                </a:tc>
+                <a:tc>
+                  <a:txBody>
+                    <a:bodyPr/>
+                    <a:lstStyle/>
+                    <a:p>
+                      <a:pPr algn="ctr" rtl="1"/>
+                      <a:r>
+                        <a:rPr sz="1200">
+                          <a:solidFill>
+                            <a:srgbClr val="333333"/>
+                          </a:solidFill>
+                          <a:latin typeface="Arial"/>
+                        </a:rPr>
+                        <a:t>منتجات بالمجالات</a:t>
+                      </a:r>
+                    </a:p>
+                  </a:txBody>
+                  <a:tcPr>
+                    <a:solidFill>
+                      <a:srgbClr val="FFFFFF"/>
+                    </a:solidFill>
+                  </a:tcPr>
+                </a:tc>
+              </a:tr>
+              <a:tr h="548640">
+                <a:tc>
+                  <a:txBody>
+                    <a:bodyPr/>
+                    <a:lstStyle/>
+                    <a:p>
+                      <a:pPr algn="ctr" rtl="1"/>
+                      <a:r>
+                        <a:rPr sz="1200">
+                          <a:solidFill>
+                            <a:srgbClr val="333333"/>
+                          </a:solidFill>
+                          <a:latin typeface="Arial"/>
+                        </a:rPr>
+                        <a:t>المالك</a:t>
+                      </a:r>
+                    </a:p>
+                  </a:txBody>
+                  <a:tcPr>
+                    <a:solidFill>
+                      <a:srgbClr val="F2F2F2"/>
+                    </a:solidFill>
+                  </a:tcPr>
+                </a:tc>
+                <a:tc>
+                  <a:txBody>
+                    <a:bodyPr/>
+                    <a:lstStyle/>
+                    <a:p>
+                      <a:pPr algn="ctr" rtl="1"/>
+                      <a:r>
+                        <a:rPr sz="1200">
+                          <a:solidFill>
+                            <a:srgbClr val="333333"/>
+                          </a:solidFill>
+                          <a:latin typeface="Arial"/>
+                        </a:rPr>
+                        <a:t>هندسة مركزية</a:t>
+                      </a:r>
+                    </a:p>
+                  </a:txBody>
+                  <a:tcPr>
+                    <a:solidFill>
+                      <a:srgbClr val="F2F2F2"/>
+                    </a:solidFill>
+                  </a:tcPr>
+                </a:tc>
+                <a:tc>
+                  <a:txBody>
+                    <a:bodyPr/>
+                    <a:lstStyle/>
+                    <a:p>
+                      <a:pPr algn="ctr" rtl="1"/>
+                      <a:r>
+                        <a:rPr sz="1200">
+                          <a:solidFill>
+                            <a:srgbClr val="333333"/>
+                          </a:solidFill>
+                          <a:latin typeface="Arial"/>
+                        </a:rPr>
+                        <a:t>فرق BI</a:t>
+                      </a:r>
+                    </a:p>
+                  </a:txBody>
+                  <a:tcPr>
+                    <a:solidFill>
+                      <a:srgbClr val="F2F2F2"/>
+                    </a:solidFill>
+                  </a:tcPr>
+                </a:tc>
+                <a:tc>
+                  <a:txBody>
+                    <a:bodyPr/>
+                    <a:lstStyle/>
+                    <a:p>
+                      <a:pPr algn="ctr" rtl="1"/>
+                      <a:r>
+                        <a:rPr sz="1200">
+                          <a:solidFill>
+                            <a:srgbClr val="333333"/>
+                          </a:solidFill>
+                          <a:latin typeface="Arial"/>
+                        </a:rPr>
+                        <a:t>فرق المجالات</a:t>
+                      </a:r>
+                    </a:p>
+                  </a:txBody>
+                  <a:tcPr>
+                    <a:solidFill>
+                      <a:srgbClr val="F2F2F2"/>
+                    </a:solidFill>
+                  </a:tcPr>
+                </a:tc>
+              </a:tr>
+              <a:tr h="548640">
+                <a:tc>
+                  <a:txBody>
+                    <a:bodyPr/>
+                    <a:lstStyle/>
+                    <a:p>
+                      <a:pPr algn="ctr" rtl="1"/>
+                      <a:r>
+                        <a:rPr sz="1200">
+                          <a:solidFill>
+                            <a:srgbClr val="333333"/>
+                          </a:solidFill>
+                          <a:latin typeface="Arial"/>
+                        </a:rPr>
+                        <a:t>الأنسب</a:t>
+                      </a:r>
+                    </a:p>
+                  </a:txBody>
+                  <a:tcPr>
+                    <a:solidFill>
+                      <a:srgbClr val="FFFFFF"/>
+                    </a:solidFill>
+                  </a:tcPr>
+                </a:tc>
+                <a:tc>
+                  <a:txBody>
+                    <a:bodyPr/>
+                    <a:lstStyle/>
+                    <a:p>
+                      <a:pPr algn="ctr" rtl="1"/>
+                      <a:r>
+                        <a:rPr sz="1200">
+                          <a:solidFill>
+                            <a:srgbClr val="333333"/>
+                          </a:solidFill>
+                          <a:latin typeface="Arial"/>
+                        </a:rPr>
+                        <a:t>تحليلات و AI/RAG</a:t>
+                      </a:r>
+                    </a:p>
+                  </a:txBody>
+                  <a:tcPr>
+                    <a:solidFill>
+                      <a:srgbClr val="FFFFFF"/>
+                    </a:solidFill>
+                  </a:tcPr>
+                </a:tc>
+                <a:tc>
+                  <a:txBody>
+                    <a:bodyPr/>
+                    <a:lstStyle/>
+                    <a:p>
+                      <a:pPr algn="ctr" rtl="1"/>
+                      <a:r>
+                        <a:rPr sz="1200">
+                          <a:solidFill>
+                            <a:srgbClr val="333333"/>
+                          </a:solidFill>
+                          <a:latin typeface="Arial"/>
+                        </a:rPr>
+                        <a:t>تقارير BI</a:t>
+                      </a:r>
+                    </a:p>
+                  </a:txBody>
+                  <a:tcPr>
+                    <a:solidFill>
+                      <a:srgbClr val="FFFFFF"/>
+                    </a:solidFill>
+                  </a:tcPr>
+                </a:tc>
+                <a:tc>
+                  <a:txBody>
+                    <a:bodyPr/>
+                    <a:lstStyle/>
+                    <a:p>
+                      <a:pPr algn="ctr" rtl="1"/>
+                      <a:r>
+                        <a:rPr sz="1200">
+                          <a:solidFill>
+                            <a:srgbClr val="333333"/>
+                          </a:solidFill>
+                          <a:latin typeface="Arial"/>
+                        </a:rPr>
+                        <a:t>مؤسسات كبيرة</a:t>
+                      </a:r>
+                    </a:p>
+                  </a:txBody>
+                  <a:tcPr>
+                    <a:solidFill>
+                      <a:srgbClr val="FFFFFF"/>
+                    </a:solidFill>
+                  </a:tcPr>
+                </a:tc>
+              </a:tr>
+              <a:tr h="548640">
+                <a:tc>
+                  <a:txBody>
+                    <a:bodyPr/>
+                    <a:lstStyle/>
+                    <a:p>
+                      <a:pPr algn="ctr" rtl="1"/>
+                      <a:r>
+                        <a:rPr sz="1200">
+                          <a:solidFill>
+                            <a:srgbClr val="333333"/>
+                          </a:solidFill>
+                          <a:latin typeface="Arial"/>
+                        </a:rPr>
+                        <a:t>الحوكمة</a:t>
+                      </a:r>
+                    </a:p>
+                  </a:txBody>
+                  <a:tcPr>
+                    <a:solidFill>
+                      <a:srgbClr val="F2F2F2"/>
+                    </a:solidFill>
+                  </a:tcPr>
+                </a:tc>
+                <a:tc>
+                  <a:txBody>
+                    <a:bodyPr/>
+                    <a:lstStyle/>
+                    <a:p>
+                      <a:pPr algn="ctr" rtl="1"/>
+                      <a:r>
+                        <a:rPr sz="1200">
+                          <a:solidFill>
+                            <a:srgbClr val="333333"/>
+                          </a:solidFill>
+                          <a:latin typeface="Arial"/>
+                        </a:rPr>
+                        <a:t>جودة بين الطبقات</a:t>
+                      </a:r>
+                    </a:p>
+                  </a:txBody>
+                  <a:tcPr>
+                    <a:solidFill>
+                      <a:srgbClr val="F2F2F2"/>
+                    </a:solidFill>
+                  </a:tcPr>
+                </a:tc>
+                <a:tc>
+                  <a:txBody>
+                    <a:bodyPr/>
+                    <a:lstStyle/>
+                    <a:p>
+                      <a:pPr algn="ctr" rtl="1"/>
+                      <a:r>
+                        <a:rPr sz="1200">
+                          <a:solidFill>
+                            <a:srgbClr val="333333"/>
+                          </a:solidFill>
+                          <a:latin typeface="Arial"/>
+                        </a:rPr>
+                        <a:t>مركزية</a:t>
+                      </a:r>
+                    </a:p>
+                  </a:txBody>
+                  <a:tcPr>
+                    <a:solidFill>
+                      <a:srgbClr val="F2F2F2"/>
+                    </a:solidFill>
+                  </a:tcPr>
+                </a:tc>
+                <a:tc>
+                  <a:txBody>
+                    <a:bodyPr/>
+                    <a:lstStyle/>
+                    <a:p>
+                      <a:pPr algn="ctr" rtl="1"/>
+                      <a:r>
+                        <a:rPr sz="1200">
+                          <a:solidFill>
+                            <a:srgbClr val="333333"/>
+                          </a:solidFill>
+                          <a:latin typeface="Arial"/>
+                        </a:rPr>
+                        <a:t>موحدة + عقود</a:t>
+                      </a:r>
+                    </a:p>
+                  </a:txBody>
+                  <a:tcPr>
+                    <a:solidFill>
+                      <a:srgbClr val="F2F2F2"/>
+                    </a:solidFill>
+                  </a:tcPr>
+                </a:tc>
+              </a:tr>
+            </a:tbl>
+          </a:graphicData>
+        </a:graphic>
+      </p:graphicFrame>
+      <p:sp>
+        <p:nvSpPr>
+          <p:cNvPr id="5" name="TextBox 4"/>
+          <p:cNvSpPr txBox="1"/>
+          <p:nvPr/>
+        </p:nvSpPr>
+        <p:spPr>
+          <a:xfrm>
+            <a:off x="640080" y="6400800"/>
+            <a:ext cx="8686800" cy="320040"/>
+          </a:xfrm>
+          <a:prstGeom prst="rect">
+            <a:avLst/>
+          </a:prstGeom>
+          <a:noFill/>
+        </p:spPr>
+        <p:txBody>
+          <a:bodyPr wrap="square">
+            <a:spAutoFit/>
+          </a:bodyPr>
+          <a:lstStyle/>
+          <a:p>
+            <a:pPr algn="r" rtl="1"/>
+            <a:r>
+              <a:rPr sz="1000" b="0">
+                <a:solidFill>
+                  <a:srgbClr val="666666"/>
+                </a:solidFill>
+                <a:latin typeface="Arial"/>
+              </a:rPr>
+              <a:t>Module 02 — Data &amp; AI Engineering Track  |  الوحدة الثانية</a:t>
+            </a:r>
+          </a:p>
+        </p:txBody>
+      </p:sp>
+      <p:sp>
+        <p:nvSpPr>
+          <p:cNvPr id="6" name="TextBox 5"/>
+          <p:cNvSpPr txBox="1"/>
+          <p:nvPr/>
+        </p:nvSpPr>
+        <p:spPr>
+          <a:xfrm>
+            <a:off x="9601200" y="6400800"/>
+            <a:ext cx="1920240" cy="320040"/>
+          </a:xfrm>
+          <a:prstGeom prst="rect">
+            <a:avLst/>
+          </a:prstGeom>
+          <a:noFill/>
+        </p:spPr>
+        <p:txBody>
+          <a:bodyPr wrap="square">
+            <a:spAutoFit/>
+          </a:bodyPr>
+          <a:lstStyle/>
+          <a:p>
+            <a:pPr algn="l" rtl="0"/>
+            <a:r>
+              <a:rPr sz="1000" b="0">
+                <a:solidFill>
+                  <a:srgbClr val="666666"/>
+                </a:solidFill>
+                <a:latin typeface="Calibri"/>
+              </a:rPr>
+              <a:t>V06  •  7/13</a:t>
+            </a:r>
+          </a:p>
+        </p:txBody>
+      </p:sp>
+      <p:sp>
+        <p:nvSpPr>
+          <p:cNvPr id="7" name="TextBox 6"/>
+          <p:cNvSpPr txBox="1"/>
+          <p:nvPr/>
+        </p:nvSpPr>
+        <p:spPr>
+          <a:xfrm>
+            <a:off x="640080" y="6400800"/>
+            <a:ext cx="8686800" cy="320040"/>
+          </a:xfrm>
+          <a:prstGeom prst="rect">
+            <a:avLst/>
+          </a:prstGeom>
+          <a:noFill/>
+        </p:spPr>
+        <p:txBody>
+          <a:bodyPr wrap="square">
+            <a:spAutoFit/>
+          </a:bodyPr>
+          <a:lstStyle/>
+          <a:p>
+            <a:pPr algn="r" rtl="1"/>
+            <a:r>
+              <a:rPr sz="1000" b="0">
+                <a:solidFill>
+                  <a:srgbClr val="666666"/>
+                </a:solidFill>
+                <a:latin typeface="Arial"/>
+              </a:rPr>
+              <a:t>Module 02 — Data &amp; AI Engineering Track  |  الوحدة الثانية</a:t>
+            </a:r>
+          </a:p>
+        </p:txBody>
+      </p:sp>
+      <p:sp>
+        <p:nvSpPr>
+          <p:cNvPr id="8" name="TextBox 7"/>
+          <p:cNvSpPr txBox="1"/>
+          <p:nvPr/>
+        </p:nvSpPr>
+        <p:spPr>
+          <a:xfrm>
+            <a:off x="9601200" y="6400800"/>
+            <a:ext cx="1920240" cy="320040"/>
+          </a:xfrm>
+          <a:prstGeom prst="rect">
+            <a:avLst/>
+          </a:prstGeom>
+          <a:noFill/>
+        </p:spPr>
+        <p:txBody>
+          <a:bodyPr wrap="square">
+            <a:spAutoFit/>
+          </a:bodyPr>
+          <a:lstStyle/>
+          <a:p>
+            <a:pPr algn="l" rtl="0"/>
+            <a:r>
+              <a:rPr sz="1000" b="0">
+                <a:solidFill>
+                  <a:srgbClr val="666666"/>
+                </a:solidFill>
+                <a:latin typeface="Calibri"/>
+              </a:rPr>
+              <a:t>06_  •  9/12</a:t>
+            </a:r>
+          </a:p>
+        </p:txBody>
+      </p:sp>
+      <p:sp>
+        <p:nvSpPr>
+          <p:cNvPr id="9" name="TextBox 8"/>
+          <p:cNvSpPr txBox="1"/>
+          <p:nvPr/>
+        </p:nvSpPr>
+        <p:spPr>
+          <a:xfrm>
+            <a:off x="640080" y="6400800"/>
+            <a:ext cx="8686800" cy="320040"/>
+          </a:xfrm>
+          <a:prstGeom prst="rect">
+            <a:avLst/>
+          </a:prstGeom>
+          <a:noFill/>
+        </p:spPr>
+        <p:txBody>
+          <a:bodyPr wrap="square">
+            <a:spAutoFit/>
+          </a:bodyPr>
+          <a:lstStyle/>
+          <a:p>
+            <a:pPr algn="r" rtl="1"/>
+            <a:r>
+              <a:rPr sz="1000" b="0">
+                <a:solidFill>
+                  <a:srgbClr val="666666"/>
+                </a:solidFill>
+                <a:latin typeface="Arial"/>
+              </a:rPr>
+              <a:t>Module 02 — Data &amp; AI Engineering Track  |  الوحدة الثانية</a:t>
+            </a:r>
+          </a:p>
+        </p:txBody>
+      </p:sp>
+      <p:sp>
+        <p:nvSpPr>
+          <p:cNvPr id="10" name="TextBox 9"/>
+          <p:cNvSpPr txBox="1"/>
+          <p:nvPr/>
+        </p:nvSpPr>
+        <p:spPr>
+          <a:xfrm>
+            <a:off x="9601200" y="6400800"/>
+            <a:ext cx="1920240" cy="320040"/>
+          </a:xfrm>
+          <a:prstGeom prst="rect">
+            <a:avLst/>
+          </a:prstGeom>
+          <a:noFill/>
+        </p:spPr>
+        <p:txBody>
+          <a:bodyPr wrap="square">
+            <a:spAutoFit/>
+          </a:bodyPr>
+          <a:lstStyle/>
+          <a:p>
+            <a:pPr algn="l" rtl="0"/>
+            <a:r>
+              <a:rPr sz="1000" b="0">
+                <a:solidFill>
+                  <a:srgbClr val="666666"/>
+                </a:solidFill>
+                <a:latin typeface="Calibri"/>
+              </a:rPr>
+              <a:t>06_  •  9/12</a:t>
             </a:r>
           </a:p>
         </p:txBody>

--- a/output/Module02_V06_Updated.pptx
+++ b/output/Module02_V06_Updated.pptx
@@ -3129,13 +3129,15 @@
           </a:bodyPr>
           <a:lstStyle/>
           <a:p>
-            <a:pPr algn="l" rtl="0"/>
+            <a:pPr algn="r" rtl="0"/>
             <a:r>
               <a:rPr sz="2800" b="1">
                 <a:solidFill>
                   <a:srgbClr val="1F4E79"/>
                 </a:solidFill>
                 <a:latin typeface="Calibri"/>
+                <a:cs typeface="Arial"/>
+                <a:ea typeface="Calibri"/>
               </a:rPr>
               <a:t>Module 02  |  V06</a:t>
             </a:r>
@@ -3171,6 +3173,8 @@
                   <a:srgbClr val="1F3B5C"/>
                 </a:solidFill>
                 <a:latin typeface="Arial"/>
+                <a:cs typeface="Arial"/>
+                <a:ea typeface="Calibri"/>
               </a:rPr>
               <a:t>أساسيات البيانات</a:t>
             </a:r>
@@ -3199,13 +3203,15 @@
           </a:bodyPr>
           <a:lstStyle/>
           <a:p>
-            <a:pPr algn="l" rtl="0"/>
+            <a:pPr algn="r" rtl="0"/>
             <a:r>
               <a:rPr sz="3000" b="0">
                 <a:solidFill>
                   <a:srgbClr val="333333"/>
                 </a:solidFill>
                 <a:latin typeface="Calibri"/>
+                <a:cs typeface="Arial"/>
+                <a:ea typeface="Calibri"/>
               </a:rPr>
               <a:t>Data Fundamentals</a:t>
             </a:r>
@@ -3241,6 +3247,8 @@
                   <a:srgbClr val="666666"/>
                 </a:solidFill>
                 <a:latin typeface="Arial"/>
+                <a:cs typeface="Arial"/>
+                <a:ea typeface="Calibri"/>
               </a:rPr>
               <a:t>Module 02 — Data &amp; AI Engineering Track  |  الوحدة الثانية</a:t>
             </a:r>
@@ -3269,13 +3277,15 @@
           </a:bodyPr>
           <a:lstStyle/>
           <a:p>
-            <a:pPr algn="l" rtl="0"/>
+            <a:pPr algn="r" rtl="0"/>
             <a:r>
               <a:rPr sz="1400" b="0">
                 <a:solidFill>
                   <a:srgbClr val="666666"/>
                 </a:solidFill>
                 <a:latin typeface="Calibri"/>
+                <a:cs typeface="Arial"/>
+                <a:ea typeface="Calibri"/>
               </a:rPr>
               <a:t>Light theme  |  Bilingual AR/EN  |  Ready to present</a:t>
             </a:r>
@@ -3311,6 +3321,8 @@
                   <a:srgbClr val="666666"/>
                 </a:solidFill>
                 <a:latin typeface="Arial"/>
+                <a:cs typeface="Arial"/>
+                <a:ea typeface="Calibri"/>
               </a:rPr>
               <a:t>Module 02 — Data &amp; AI Engineering Track  |  الوحدة الثانية</a:t>
             </a:r>
@@ -3346,6 +3358,8 @@
                   <a:srgbClr val="666666"/>
                 </a:solidFill>
                 <a:latin typeface="Calibri"/>
+                <a:cs typeface="Arial"/>
+                <a:ea typeface="Calibri"/>
               </a:rPr>
               <a:t>V06  •  1/13</a:t>
             </a:r>
@@ -3381,6 +3395,8 @@
                   <a:srgbClr val="666666"/>
                 </a:solidFill>
                 <a:latin typeface="Arial"/>
+                <a:cs typeface="Arial"/>
+                <a:ea typeface="Calibri"/>
               </a:rPr>
               <a:t>Module 02 — Data &amp; AI Engineering Track  |  الوحدة الثانية</a:t>
             </a:r>
@@ -3416,6 +3432,8 @@
                   <a:srgbClr val="666666"/>
                 </a:solidFill>
                 <a:latin typeface="Calibri"/>
+                <a:cs typeface="Arial"/>
+                <a:ea typeface="Calibri"/>
               </a:rPr>
               <a:t>06_  •  1/12</a:t>
             </a:r>
@@ -3451,6 +3469,8 @@
                   <a:srgbClr val="666666"/>
                 </a:solidFill>
                 <a:latin typeface="Arial"/>
+                <a:cs typeface="Arial"/>
+                <a:ea typeface="Calibri"/>
               </a:rPr>
               <a:t>Module 02 — Data &amp; AI Engineering Track  |  الوحدة الثانية</a:t>
             </a:r>
@@ -3486,6 +3506,8 @@
                   <a:srgbClr val="666666"/>
                 </a:solidFill>
                 <a:latin typeface="Calibri"/>
+                <a:cs typeface="Arial"/>
+                <a:ea typeface="Calibri"/>
               </a:rPr>
               <a:t>06_  •  1/12</a:t>
             </a:r>
@@ -3593,6 +3615,8 @@
                   <a:srgbClr val="1F3B5C"/>
                 </a:solidFill>
                 <a:latin typeface="Arial"/>
+                <a:cs typeface="Arial"/>
+                <a:ea typeface="Calibri"/>
               </a:rPr>
               <a:t>اختبار قصير / Quick Quiz</a:t>
             </a:r>
@@ -3635,12 +3659,14 @@
                   <a:srgbClr val="333333"/>
                 </a:solidFill>
                 <a:latin typeface="Arial"/>
+                <a:cs typeface="Arial"/>
+                <a:ea typeface="Calibri"/>
               </a:rPr>
               <a:t>• 1. ما الفرق الجوهري بين ETL وELT؟</a:t>
             </a:r>
           </a:p>
           <a:p>
-            <a:pPr algn="l" rtl="0">
+            <a:pPr algn="r" rtl="0">
               <a:spcBef>
                 <a:spcPts val="200"/>
               </a:spcBef>
@@ -3654,6 +3680,8 @@
                   <a:srgbClr val="666666"/>
                 </a:solidFill>
                 <a:latin typeface="Calibri"/>
+                <a:cs typeface="Arial"/>
+                <a:ea typeface="Calibri"/>
               </a:rPr>
               <a:t>• What is the key difference between ETL and ELT?</a:t>
             </a:r>
@@ -3673,12 +3701,14 @@
                   <a:srgbClr val="333333"/>
                 </a:solidFill>
                 <a:latin typeface="Arial"/>
+                <a:cs typeface="Arial"/>
+                <a:ea typeface="Calibri"/>
               </a:rPr>
               <a:t>• 2. أين تُستخدم طبقة Gold في المعمارية المتدرِّجة؟</a:t>
             </a:r>
           </a:p>
           <a:p>
-            <a:pPr algn="l" rtl="0">
+            <a:pPr algn="r" rtl="0">
               <a:spcBef>
                 <a:spcPts val="200"/>
               </a:spcBef>
@@ -3692,6 +3722,8 @@
                   <a:srgbClr val="666666"/>
                 </a:solidFill>
                 <a:latin typeface="Calibri"/>
+                <a:cs typeface="Arial"/>
+                <a:ea typeface="Calibri"/>
               </a:rPr>
               <a:t>• Where is the Gold layer used in the Medallion architecture?</a:t>
             </a:r>
@@ -3711,12 +3743,14 @@
                   <a:srgbClr val="333333"/>
                 </a:solidFill>
                 <a:latin typeface="Arial"/>
+                <a:cs typeface="Arial"/>
+                <a:ea typeface="Calibri"/>
               </a:rPr>
               <a:t>• 3. أي نمط يناسب مؤسسة كبيرة بفرق مستقلة وملكية لامركزية؟</a:t>
             </a:r>
           </a:p>
           <a:p>
-            <a:pPr algn="l" rtl="0">
+            <a:pPr algn="r" rtl="0">
               <a:spcBef>
                 <a:spcPts val="200"/>
               </a:spcBef>
@@ -3730,6 +3764,8 @@
                   <a:srgbClr val="666666"/>
                 </a:solidFill>
                 <a:latin typeface="Calibri"/>
+                <a:cs typeface="Arial"/>
+                <a:ea typeface="Calibri"/>
               </a:rPr>
               <a:t>• Which pattern suits a large organization with independent, decentralized teams?</a:t>
             </a:r>
@@ -3749,12 +3785,14 @@
                   <a:srgbClr val="333333"/>
                 </a:solidFill>
                 <a:latin typeface="Arial"/>
+                <a:cs typeface="Arial"/>
+                <a:ea typeface="Calibri"/>
               </a:rPr>
               <a:t>• 4. ما التنسيق الأنسب للتحليلات عالية الأداء ولماذا؟</a:t>
             </a:r>
           </a:p>
           <a:p>
-            <a:pPr algn="l" rtl="0">
+            <a:pPr algn="r" rtl="0">
               <a:spcBef>
                 <a:spcPts val="200"/>
               </a:spcBef>
@@ -3768,6 +3806,8 @@
                   <a:srgbClr val="666666"/>
                 </a:solidFill>
                 <a:latin typeface="Calibri"/>
+                <a:cs typeface="Arial"/>
+                <a:ea typeface="Calibri"/>
               </a:rPr>
               <a:t>• Which format suits high-performance analytics and why?</a:t>
             </a:r>
@@ -3803,6 +3843,8 @@
                   <a:srgbClr val="666666"/>
                 </a:solidFill>
                 <a:latin typeface="Arial"/>
+                <a:cs typeface="Arial"/>
+                <a:ea typeface="Calibri"/>
               </a:rPr>
               <a:t>Module 02 — Data &amp; AI Engineering Track  |  الوحدة الثانية</a:t>
             </a:r>
@@ -3838,6 +3880,8 @@
                   <a:srgbClr val="666666"/>
                 </a:solidFill>
                 <a:latin typeface="Calibri"/>
+                <a:cs typeface="Arial"/>
+                <a:ea typeface="Calibri"/>
               </a:rPr>
               <a:t>V06  •  8/13</a:t>
             </a:r>
@@ -3873,6 +3917,8 @@
                   <a:srgbClr val="666666"/>
                 </a:solidFill>
                 <a:latin typeface="Arial"/>
+                <a:cs typeface="Arial"/>
+                <a:ea typeface="Calibri"/>
               </a:rPr>
               <a:t>Module 02 — Data &amp; AI Engineering Track  |  الوحدة الثانية</a:t>
             </a:r>
@@ -3908,6 +3954,8 @@
                   <a:srgbClr val="666666"/>
                 </a:solidFill>
                 <a:latin typeface="Calibri"/>
+                <a:cs typeface="Arial"/>
+                <a:ea typeface="Calibri"/>
               </a:rPr>
               <a:t>06_  •  10/12</a:t>
             </a:r>
@@ -3943,6 +3991,8 @@
                   <a:srgbClr val="666666"/>
                 </a:solidFill>
                 <a:latin typeface="Arial"/>
+                <a:cs typeface="Arial"/>
+                <a:ea typeface="Calibri"/>
               </a:rPr>
               <a:t>Module 02 — Data &amp; AI Engineering Track  |  الوحدة الثانية</a:t>
             </a:r>
@@ -3978,6 +4028,8 @@
                   <a:srgbClr val="666666"/>
                 </a:solidFill>
                 <a:latin typeface="Calibri"/>
+                <a:cs typeface="Arial"/>
+                <a:ea typeface="Calibri"/>
               </a:rPr>
               <a:t>06_  •  10/12</a:t>
             </a:r>
@@ -4085,6 +4137,8 @@
                   <a:srgbClr val="1F3B5C"/>
                 </a:solidFill>
                 <a:latin typeface="Arial"/>
+                <a:cs typeface="Arial"/>
+                <a:ea typeface="Calibri"/>
               </a:rPr>
               <a:t>إجابات الاختبار / Quiz Answers</a:t>
             </a:r>
@@ -4127,12 +4181,14 @@
                   <a:srgbClr val="333333"/>
                 </a:solidFill>
                 <a:latin typeface="Arial"/>
+                <a:cs typeface="Arial"/>
+                <a:ea typeface="Calibri"/>
               </a:rPr>
               <a:t>• 1. ETL يحوّل قبل التحميل؛ ELT يحمّل أولاً ثم يحوّل داخل المنصة الهدف.</a:t>
             </a:r>
           </a:p>
           <a:p>
-            <a:pPr algn="l" rtl="0">
+            <a:pPr algn="r" rtl="0">
               <a:spcBef>
                 <a:spcPts val="200"/>
               </a:spcBef>
@@ -4146,6 +4202,8 @@
                   <a:srgbClr val="666666"/>
                 </a:solidFill>
                 <a:latin typeface="Calibri"/>
+                <a:cs typeface="Arial"/>
+                <a:ea typeface="Calibri"/>
               </a:rPr>
               <a:t>• ETL transforms before loading; ELT loads first and transforms inside the target platform.</a:t>
             </a:r>
@@ -4165,12 +4223,14 @@
                   <a:srgbClr val="333333"/>
                 </a:solidFill>
                 <a:latin typeface="Arial"/>
+                <a:cs typeface="Arial"/>
+                <a:ea typeface="Calibri"/>
               </a:rPr>
               <a:t>• 2. تجميعات على مستوى الأعمال جاهزة للتحليل.</a:t>
             </a:r>
           </a:p>
           <a:p>
-            <a:pPr algn="l" rtl="0">
+            <a:pPr algn="r" rtl="0">
               <a:spcBef>
                 <a:spcPts val="200"/>
               </a:spcBef>
@@ -4184,6 +4244,8 @@
                   <a:srgbClr val="666666"/>
                 </a:solidFill>
                 <a:latin typeface="Calibri"/>
+                <a:cs typeface="Arial"/>
+                <a:ea typeface="Calibri"/>
               </a:rPr>
               <a:t>• Business-level aggregates that are analytics-ready.</a:t>
             </a:r>
@@ -4203,12 +4265,14 @@
                   <a:srgbClr val="333333"/>
                 </a:solidFill>
                 <a:latin typeface="Arial"/>
+                <a:cs typeface="Arial"/>
+                <a:ea typeface="Calibri"/>
               </a:rPr>
               <a:t>• 3. شبكة البيانات Data Mesh.</a:t>
             </a:r>
           </a:p>
           <a:p>
-            <a:pPr algn="l" rtl="0">
+            <a:pPr algn="r" rtl="0">
               <a:spcBef>
                 <a:spcPts val="200"/>
               </a:spcBef>
@@ -4222,6 +4286,8 @@
                   <a:srgbClr val="666666"/>
                 </a:solidFill>
                 <a:latin typeface="Calibri"/>
+                <a:cs typeface="Arial"/>
+                <a:ea typeface="Calibri"/>
               </a:rPr>
               <a:t>• Data mesh.</a:t>
             </a:r>
@@ -4241,12 +4307,14 @@
                   <a:srgbClr val="333333"/>
                 </a:solidFill>
                 <a:latin typeface="Arial"/>
+                <a:cs typeface="Arial"/>
+                <a:ea typeface="Calibri"/>
               </a:rPr>
               <a:t>• 4. Parquet — تنسيق عمودي يقلل الحجم ويسرّع القراءة.</a:t>
             </a:r>
           </a:p>
           <a:p>
-            <a:pPr algn="l" rtl="0">
+            <a:pPr algn="r" rtl="0">
               <a:spcBef>
                 <a:spcPts val="200"/>
               </a:spcBef>
@@ -4260,6 +4328,8 @@
                   <a:srgbClr val="666666"/>
                 </a:solidFill>
                 <a:latin typeface="Calibri"/>
+                <a:cs typeface="Arial"/>
+                <a:ea typeface="Calibri"/>
               </a:rPr>
               <a:t>• Parquet — columnar, smaller and faster for analytical reads.</a:t>
             </a:r>
@@ -4295,6 +4365,8 @@
                   <a:srgbClr val="666666"/>
                 </a:solidFill>
                 <a:latin typeface="Arial"/>
+                <a:cs typeface="Arial"/>
+                <a:ea typeface="Calibri"/>
               </a:rPr>
               <a:t>Module 02 — Data &amp; AI Engineering Track  |  الوحدة الثانية</a:t>
             </a:r>
@@ -4330,6 +4402,8 @@
                   <a:srgbClr val="666666"/>
                 </a:solidFill>
                 <a:latin typeface="Calibri"/>
+                <a:cs typeface="Arial"/>
+                <a:ea typeface="Calibri"/>
               </a:rPr>
               <a:t>V06  •  9/13</a:t>
             </a:r>
@@ -4365,6 +4439,8 @@
                   <a:srgbClr val="666666"/>
                 </a:solidFill>
                 <a:latin typeface="Arial"/>
+                <a:cs typeface="Arial"/>
+                <a:ea typeface="Calibri"/>
               </a:rPr>
               <a:t>Module 02 — Data &amp; AI Engineering Track  |  الوحدة الثانية</a:t>
             </a:r>
@@ -4400,6 +4476,8 @@
                   <a:srgbClr val="666666"/>
                 </a:solidFill>
                 <a:latin typeface="Calibri"/>
+                <a:cs typeface="Arial"/>
+                <a:ea typeface="Calibri"/>
               </a:rPr>
               <a:t>06_  •  11/12</a:t>
             </a:r>
@@ -4435,6 +4513,8 @@
                   <a:srgbClr val="666666"/>
                 </a:solidFill>
                 <a:latin typeface="Arial"/>
+                <a:cs typeface="Arial"/>
+                <a:ea typeface="Calibri"/>
               </a:rPr>
               <a:t>Module 02 — Data &amp; AI Engineering Track  |  الوحدة الثانية</a:t>
             </a:r>
@@ -4470,6 +4550,8 @@
                   <a:srgbClr val="666666"/>
                 </a:solidFill>
                 <a:latin typeface="Calibri"/>
+                <a:cs typeface="Arial"/>
+                <a:ea typeface="Calibri"/>
               </a:rPr>
               <a:t>06_  •  11/12</a:t>
             </a:r>
@@ -4577,6 +4659,8 @@
                   <a:srgbClr val="1F3B5C"/>
                 </a:solidFill>
                 <a:latin typeface="Arial"/>
+                <a:cs typeface="Arial"/>
+                <a:ea typeface="Calibri"/>
               </a:rPr>
               <a:t>للاستزادة / Further Reading</a:t>
             </a:r>
@@ -4619,12 +4703,14 @@
                   <a:srgbClr val="333333"/>
                 </a:solidFill>
                 <a:latin typeface="Arial"/>
+                <a:cs typeface="Arial"/>
+                <a:ea typeface="Calibri"/>
               </a:rPr>
               <a:t>• توثيق Databricks — المعمارية المتدرِّجة Medallion.</a:t>
             </a:r>
           </a:p>
           <a:p>
-            <a:pPr algn="l" rtl="0">
+            <a:pPr algn="r" rtl="0">
               <a:spcBef>
                 <a:spcPts val="200"/>
               </a:spcBef>
@@ -4638,6 +4724,8 @@
                   <a:srgbClr val="666666"/>
                 </a:solidFill>
                 <a:latin typeface="Calibri"/>
+                <a:cs typeface="Arial"/>
+                <a:ea typeface="Calibri"/>
               </a:rPr>
               <a:t>• Databricks docs — Medallion architecture.</a:t>
             </a:r>
@@ -4657,12 +4745,14 @@
                   <a:srgbClr val="333333"/>
                 </a:solidFill>
                 <a:latin typeface="Arial"/>
+                <a:cs typeface="Arial"/>
+                <a:ea typeface="Calibri"/>
               </a:rPr>
               <a:t>• مقالات Data Mesh — Zhamak Dehghani.</a:t>
             </a:r>
           </a:p>
           <a:p>
-            <a:pPr algn="l" rtl="0">
+            <a:pPr algn="r" rtl="0">
               <a:spcBef>
                 <a:spcPts val="200"/>
               </a:spcBef>
@@ -4676,6 +4766,8 @@
                   <a:srgbClr val="666666"/>
                 </a:solidFill>
                 <a:latin typeface="Calibri"/>
+                <a:cs typeface="Arial"/>
+                <a:ea typeface="Calibri"/>
               </a:rPr>
               <a:t>• Data Mesh articles — Zhamak Dehghani.</a:t>
             </a:r>
@@ -4695,12 +4787,14 @@
                   <a:srgbClr val="333333"/>
                 </a:solidFill>
                 <a:latin typeface="Arial"/>
+                <a:cs typeface="Arial"/>
+                <a:ea typeface="Calibri"/>
               </a:rPr>
               <a:t>• توثيق Apache Parquet.</a:t>
             </a:r>
           </a:p>
           <a:p>
-            <a:pPr algn="l" rtl="0">
+            <a:pPr algn="r" rtl="0">
               <a:spcBef>
                 <a:spcPts val="200"/>
               </a:spcBef>
@@ -4714,6 +4808,8 @@
                   <a:srgbClr val="666666"/>
                 </a:solidFill>
                 <a:latin typeface="Calibri"/>
+                <a:cs typeface="Arial"/>
+                <a:ea typeface="Calibri"/>
               </a:rPr>
               <a:t>• Apache Parquet documentation.</a:t>
             </a:r>
@@ -4749,6 +4845,8 @@
                   <a:srgbClr val="666666"/>
                 </a:solidFill>
                 <a:latin typeface="Arial"/>
+                <a:cs typeface="Arial"/>
+                <a:ea typeface="Calibri"/>
               </a:rPr>
               <a:t>Module 02 — Data &amp; AI Engineering Track  |  الوحدة الثانية</a:t>
             </a:r>
@@ -4784,6 +4882,8 @@
                   <a:srgbClr val="666666"/>
                 </a:solidFill>
                 <a:latin typeface="Calibri"/>
+                <a:cs typeface="Arial"/>
+                <a:ea typeface="Calibri"/>
               </a:rPr>
               <a:t>V06  •  10/13</a:t>
             </a:r>
@@ -4819,6 +4919,8 @@
                   <a:srgbClr val="666666"/>
                 </a:solidFill>
                 <a:latin typeface="Arial"/>
+                <a:cs typeface="Arial"/>
+                <a:ea typeface="Calibri"/>
               </a:rPr>
               <a:t>Module 02 — Data &amp; AI Engineering Track  |  الوحدة الثانية</a:t>
             </a:r>
@@ -4854,6 +4956,8 @@
                   <a:srgbClr val="666666"/>
                 </a:solidFill>
                 <a:latin typeface="Calibri"/>
+                <a:cs typeface="Arial"/>
+                <a:ea typeface="Calibri"/>
               </a:rPr>
               <a:t>06_  •  12/12</a:t>
             </a:r>
@@ -4889,6 +4993,8 @@
                   <a:srgbClr val="666666"/>
                 </a:solidFill>
                 <a:latin typeface="Arial"/>
+                <a:cs typeface="Arial"/>
+                <a:ea typeface="Calibri"/>
               </a:rPr>
               <a:t>Module 02 — Data &amp; AI Engineering Track  |  الوحدة الثانية</a:t>
             </a:r>
@@ -4924,6 +5030,8 @@
                   <a:srgbClr val="666666"/>
                 </a:solidFill>
                 <a:latin typeface="Calibri"/>
+                <a:cs typeface="Arial"/>
+                <a:ea typeface="Calibri"/>
               </a:rPr>
               <a:t>06_  •  12/12</a:t>
             </a:r>
@@ -5031,6 +5139,8 @@
                   <a:srgbClr val="1F3B5C"/>
                 </a:solidFill>
                 <a:latin typeface="Arial"/>
+                <a:cs typeface="Arial"/>
+                <a:ea typeface="Calibri"/>
               </a:rPr>
               <a:t>أجندة العرض / Agenda</a:t>
             </a:r>
@@ -5073,12 +5183,14 @@
                   <a:srgbClr val="333333"/>
                 </a:solidFill>
                 <a:latin typeface="Arial"/>
+                <a:cs typeface="Arial"/>
+                <a:ea typeface="Calibri"/>
               </a:rPr>
               <a:t>• V06 — أساسيات البيانات</a:t>
             </a:r>
           </a:p>
           <a:p>
-            <a:pPr algn="l" rtl="0">
+            <a:pPr algn="r" rtl="0">
               <a:spcBef>
                 <a:spcPts val="200"/>
               </a:spcBef>
@@ -5092,6 +5204,8 @@
                   <a:srgbClr val="666666"/>
                 </a:solidFill>
                 <a:latin typeface="Calibri"/>
+                <a:cs typeface="Arial"/>
+                <a:ea typeface="Calibri"/>
               </a:rPr>
               <a:t>• V06 — Data Fundamentals</a:t>
             </a:r>
@@ -5111,6 +5225,8 @@
                   <a:srgbClr val="333333"/>
                 </a:solidFill>
                 <a:latin typeface="Arial"/>
+                <a:cs typeface="Arial"/>
+                <a:ea typeface="Calibri"/>
               </a:rPr>
               <a:t>• خريطة المسار / Roadmap</a:t>
             </a:r>
@@ -5130,6 +5246,8 @@
                   <a:srgbClr val="333333"/>
                 </a:solidFill>
                 <a:latin typeface="Arial"/>
+                <a:cs typeface="Arial"/>
+                <a:ea typeface="Calibri"/>
               </a:rPr>
               <a:t>• أنواع البيانات / Data Types</a:t>
             </a:r>
@@ -5149,6 +5267,8 @@
                   <a:srgbClr val="333333"/>
                 </a:solidFill>
                 <a:latin typeface="Arial"/>
+                <a:cs typeface="Arial"/>
+                <a:ea typeface="Calibri"/>
               </a:rPr>
               <a:t>• التنسيقات / Formats</a:t>
             </a:r>
@@ -5168,6 +5288,8 @@
                   <a:srgbClr val="333333"/>
                 </a:solidFill>
                 <a:latin typeface="Arial"/>
+                <a:cs typeface="Arial"/>
+                <a:ea typeface="Calibri"/>
               </a:rPr>
               <a:t>• أنابيب ETL / ELT</a:t>
             </a:r>
@@ -5187,6 +5309,8 @@
                   <a:srgbClr val="333333"/>
                 </a:solidFill>
                 <a:latin typeface="Arial"/>
+                <a:cs typeface="Arial"/>
+                <a:ea typeface="Calibri"/>
               </a:rPr>
               <a:t>• مقارنة أنماط المعالجة / Processing Patterns</a:t>
             </a:r>
@@ -5206,6 +5330,8 @@
                   <a:srgbClr val="333333"/>
                 </a:solidFill>
                 <a:latin typeface="Arial"/>
+                <a:cs typeface="Arial"/>
+                <a:ea typeface="Calibri"/>
               </a:rPr>
               <a:t>• جدول المقارنة السريع / Quick Comparison</a:t>
             </a:r>
@@ -5241,6 +5367,8 @@
                   <a:srgbClr val="666666"/>
                 </a:solidFill>
                 <a:latin typeface="Arial"/>
+                <a:cs typeface="Arial"/>
+                <a:ea typeface="Calibri"/>
               </a:rPr>
               <a:t>Module 02 — Data &amp; AI Engineering Track  |  الوحدة الثانية</a:t>
             </a:r>
@@ -5276,6 +5404,8 @@
                   <a:srgbClr val="666666"/>
                 </a:solidFill>
                 <a:latin typeface="Calibri"/>
+                <a:cs typeface="Arial"/>
+                <a:ea typeface="Calibri"/>
               </a:rPr>
               <a:t>V06  •  2/13</a:t>
             </a:r>
@@ -5311,6 +5441,8 @@
                   <a:srgbClr val="666666"/>
                 </a:solidFill>
                 <a:latin typeface="Arial"/>
+                <a:cs typeface="Arial"/>
+                <a:ea typeface="Calibri"/>
               </a:rPr>
               <a:t>Module 02 — Data &amp; AI Engineering Track  |  الوحدة الثانية</a:t>
             </a:r>
@@ -5346,6 +5478,8 @@
                   <a:srgbClr val="666666"/>
                 </a:solidFill>
                 <a:latin typeface="Calibri"/>
+                <a:cs typeface="Arial"/>
+                <a:ea typeface="Calibri"/>
               </a:rPr>
               <a:t>06_  •  2/12</a:t>
             </a:r>
@@ -5381,6 +5515,8 @@
                   <a:srgbClr val="666666"/>
                 </a:solidFill>
                 <a:latin typeface="Arial"/>
+                <a:cs typeface="Arial"/>
+                <a:ea typeface="Calibri"/>
               </a:rPr>
               <a:t>Module 02 — Data &amp; AI Engineering Track  |  الوحدة الثانية</a:t>
             </a:r>
@@ -5416,6 +5552,8 @@
                   <a:srgbClr val="666666"/>
                 </a:solidFill>
                 <a:latin typeface="Calibri"/>
+                <a:cs typeface="Arial"/>
+                <a:ea typeface="Calibri"/>
               </a:rPr>
               <a:t>06_  •  2/12</a:t>
             </a:r>
@@ -5477,6 +5615,8 @@
                   <a:srgbClr val="1F3B5C"/>
                 </a:solidFill>
                 <a:latin typeface="Arial"/>
+                <a:cs typeface="Arial"/>
+                <a:ea typeface="Calibri"/>
               </a:rPr>
               <a:t>خريطة المسار / Track Roadmap</a:t>
             </a:r>
@@ -5532,6 +5672,8 @@
                   <a:srgbClr val="333333"/>
                 </a:solidFill>
                 <a:latin typeface="Arial"/>
+                <a:cs typeface="Arial"/>
+                <a:ea typeface="Calibri"/>
               </a:rPr>
               <a:t>البيانات</a:t>
             </a:r>
@@ -5544,6 +5686,8 @@
                   <a:srgbClr val="666666"/>
                 </a:solidFill>
                 <a:latin typeface="Calibri"/>
+                <a:cs typeface="Arial"/>
+                <a:ea typeface="Calibri"/>
               </a:rPr>
               <a:t>Data</a:t>
             </a:r>
@@ -5643,6 +5787,8 @@
                   <a:srgbClr val="333333"/>
                 </a:solidFill>
                 <a:latin typeface="Arial"/>
+                <a:cs typeface="Arial"/>
+                <a:ea typeface="Calibri"/>
               </a:rPr>
               <a:t>التخزين</a:t>
             </a:r>
@@ -5655,6 +5801,8 @@
                   <a:srgbClr val="666666"/>
                 </a:solidFill>
                 <a:latin typeface="Calibri"/>
+                <a:cs typeface="Arial"/>
+                <a:ea typeface="Calibri"/>
               </a:rPr>
               <a:t>Storage</a:t>
             </a:r>
@@ -5754,6 +5902,8 @@
                   <a:srgbClr val="333333"/>
                 </a:solidFill>
                 <a:latin typeface="Arial"/>
+                <a:cs typeface="Arial"/>
+                <a:ea typeface="Calibri"/>
               </a:rPr>
               <a:t>الخصائص</a:t>
             </a:r>
@@ -5766,6 +5916,8 @@
                   <a:srgbClr val="666666"/>
                 </a:solidFill>
                 <a:latin typeface="Calibri"/>
+                <a:cs typeface="Arial"/>
+                <a:ea typeface="Calibri"/>
               </a:rPr>
               <a:t>Features</a:t>
             </a:r>
@@ -5865,6 +6017,8 @@
                   <a:srgbClr val="333333"/>
                 </a:solidFill>
                 <a:latin typeface="Arial"/>
+                <a:cs typeface="Arial"/>
+                <a:ea typeface="Calibri"/>
               </a:rPr>
               <a:t>الفهارس المتجهية</a:t>
             </a:r>
@@ -5877,6 +6031,8 @@
                   <a:srgbClr val="666666"/>
                 </a:solidFill>
                 <a:latin typeface="Calibri"/>
+                <a:cs typeface="Arial"/>
+                <a:ea typeface="Calibri"/>
               </a:rPr>
               <a:t>Vector Indexes</a:t>
             </a:r>
@@ -5976,6 +6132,8 @@
                   <a:srgbClr val="333333"/>
                 </a:solidFill>
                 <a:latin typeface="Arial"/>
+                <a:cs typeface="Arial"/>
+                <a:ea typeface="Calibri"/>
               </a:rPr>
               <a:t>التصنيف</a:t>
             </a:r>
@@ -5988,6 +6146,8 @@
                   <a:srgbClr val="666666"/>
                 </a:solidFill>
                 <a:latin typeface="Calibri"/>
+                <a:cs typeface="Arial"/>
+                <a:ea typeface="Calibri"/>
               </a:rPr>
               <a:t>Labeling</a:t>
             </a:r>
@@ -6087,6 +6247,8 @@
                   <a:srgbClr val="333333"/>
                 </a:solidFill>
                 <a:latin typeface="Arial"/>
+                <a:cs typeface="Arial"/>
+                <a:ea typeface="Calibri"/>
               </a:rPr>
               <a:t>الحوكمة</a:t>
             </a:r>
@@ -6099,6 +6261,8 @@
                   <a:srgbClr val="666666"/>
                 </a:solidFill>
                 <a:latin typeface="Calibri"/>
+                <a:cs typeface="Arial"/>
+                <a:ea typeface="Calibri"/>
               </a:rPr>
               <a:t>Governance</a:t>
             </a:r>
@@ -6191,13 +6355,15 @@
           <a:bodyPr rtlCol="0" anchor="ctr" wrap="square"/>
           <a:lstStyle/>
           <a:p>
-            <a:pPr algn="ctr" rtl="1"/>
+            <a:pPr algn="ctr" rtl="0"/>
             <a:r>
               <a:rPr sz="1400" b="1">
                 <a:solidFill>
                   <a:srgbClr val="333333"/>
                 </a:solidFill>
-                <a:latin typeface="Arial"/>
+                <a:latin typeface="Calibri"/>
+                <a:cs typeface="Arial"/>
+                <a:ea typeface="Calibri"/>
               </a:rPr>
               <a:t>MLOps</a:t>
             </a:r>
@@ -6210,6 +6376,8 @@
                   <a:srgbClr val="666666"/>
                 </a:solidFill>
                 <a:latin typeface="Calibri"/>
+                <a:cs typeface="Arial"/>
+                <a:ea typeface="Calibri"/>
               </a:rPr>
               <a:t>MLOps</a:t>
             </a:r>
@@ -6309,6 +6477,8 @@
                   <a:srgbClr val="333333"/>
                 </a:solidFill>
                 <a:latin typeface="Arial"/>
+                <a:cs typeface="Arial"/>
+                <a:ea typeface="Calibri"/>
               </a:rPr>
               <a:t>المختبر</a:t>
             </a:r>
@@ -6321,6 +6491,8 @@
                   <a:srgbClr val="666666"/>
                 </a:solidFill>
                 <a:latin typeface="Calibri"/>
+                <a:cs typeface="Arial"/>
+                <a:ea typeface="Calibri"/>
               </a:rPr>
               <a:t>Lab</a:t>
             </a:r>
@@ -6356,6 +6528,8 @@
                   <a:srgbClr val="666666"/>
                 </a:solidFill>
                 <a:latin typeface="Arial"/>
+                <a:cs typeface="Arial"/>
+                <a:ea typeface="Calibri"/>
               </a:rPr>
               <a:t>رحلة الوحدة الثانية من البيانات الخام إلى نقطة نهاية RAG.</a:t>
             </a:r>
@@ -6363,6 +6537,11 @@
           <a:p>
             <a:pPr algn="r" rtl="0"/>
             <a:r>
+              <a:rPr>
+                <a:latin typeface="Calibri"/>
+                <a:cs typeface="Arial"/>
+                <a:ea typeface="Calibri"/>
+              </a:rPr>
               <a:t>Module 02 journey: from raw data to a RAG endpoint.</a:t>
             </a:r>
           </a:p>
@@ -6397,6 +6576,8 @@
                   <a:srgbClr val="666666"/>
                 </a:solidFill>
                 <a:latin typeface="Arial"/>
+                <a:cs typeface="Arial"/>
+                <a:ea typeface="Calibri"/>
               </a:rPr>
               <a:t>Module 02 — Data &amp; AI Engineering Track  |  الوحدة الثانية</a:t>
             </a:r>
@@ -6432,6 +6613,8 @@
                   <a:srgbClr val="666666"/>
                 </a:solidFill>
                 <a:latin typeface="Calibri"/>
+                <a:cs typeface="Arial"/>
+                <a:ea typeface="Calibri"/>
               </a:rPr>
               <a:t>06_  •  3/12</a:t>
             </a:r>
@@ -6467,6 +6650,8 @@
                   <a:srgbClr val="666666"/>
                 </a:solidFill>
                 <a:latin typeface="Arial"/>
+                <a:cs typeface="Arial"/>
+                <a:ea typeface="Calibri"/>
               </a:rPr>
               <a:t>Module 02 — Data &amp; AI Engineering Track  |  الوحدة الثانية</a:t>
             </a:r>
@@ -6502,6 +6687,8 @@
                   <a:srgbClr val="666666"/>
                 </a:solidFill>
                 <a:latin typeface="Calibri"/>
+                <a:cs typeface="Arial"/>
+                <a:ea typeface="Calibri"/>
               </a:rPr>
               <a:t>06_  •  3/12</a:t>
             </a:r>
@@ -6609,6 +6796,8 @@
                   <a:srgbClr val="1F3B5C"/>
                 </a:solidFill>
                 <a:latin typeface="Arial"/>
+                <a:cs typeface="Arial"/>
+                <a:ea typeface="Calibri"/>
               </a:rPr>
               <a:t>وحدات المقرر / Course Modules</a:t>
             </a:r>
@@ -6651,6 +6840,8 @@
                   <a:srgbClr val="333333"/>
                 </a:solidFill>
                 <a:latin typeface="Arial"/>
+                <a:cs typeface="Arial"/>
+                <a:ea typeface="Calibri"/>
               </a:rPr>
               <a:t>• V06 — أساسيات البيانات / Data Fundamentals</a:t>
             </a:r>
@@ -6670,6 +6861,8 @@
                   <a:srgbClr val="333333"/>
                 </a:solidFill>
                 <a:latin typeface="Arial"/>
+                <a:cs typeface="Arial"/>
+                <a:ea typeface="Calibri"/>
               </a:rPr>
               <a:t>• V07 — المستودعات والبحيرات ومعمارية Lakehouse / Warehouses, Data Lakes &amp; Lakehouse</a:t>
             </a:r>
@@ -6689,6 +6882,8 @@
                   <a:srgbClr val="333333"/>
                 </a:solidFill>
                 <a:latin typeface="Arial"/>
+                <a:cs typeface="Arial"/>
+                <a:ea typeface="Calibri"/>
               </a:rPr>
               <a:t>• V08 — هندسة الخصائص ومخازنها / Feature Engineering &amp; Feature Stores</a:t>
             </a:r>
@@ -6708,6 +6903,8 @@
                   <a:srgbClr val="333333"/>
                 </a:solidFill>
                 <a:latin typeface="Arial"/>
+                <a:cs typeface="Arial"/>
+                <a:ea typeface="Calibri"/>
               </a:rPr>
               <a:t>• V09 — قواعد البيانات المتجهية + RAG التطبيقي / Vector Databases + Applied RAG</a:t>
             </a:r>
@@ -6727,6 +6924,8 @@
                   <a:srgbClr val="333333"/>
                 </a:solidFill>
                 <a:latin typeface="Arial"/>
+                <a:cs typeface="Arial"/>
+                <a:ea typeface="Calibri"/>
               </a:rPr>
               <a:t>• V10 — تصنيف البيانات على نطاق واسع / Labeling at Scale</a:t>
             </a:r>
@@ -6746,6 +6945,8 @@
                   <a:srgbClr val="333333"/>
                 </a:solidFill>
                 <a:latin typeface="Arial"/>
+                <a:cs typeface="Arial"/>
+                <a:ea typeface="Calibri"/>
               </a:rPr>
               <a:t>• V11 — حوكمة البيانات وسلسلة العهدة والفهرسة / Data Governance, Lineage &amp; Cataloging</a:t>
             </a:r>
@@ -6765,8 +6966,10 @@
                   <a:srgbClr val="333333"/>
                 </a:solidFill>
                 <a:latin typeface="Arial"/>
-              </a:rPr>
-              <a:t>• V12 — أساسيات MLOps + تمهيد للمختبر / MLOps Fundamentals + Lab Prelude</a:t>
+                <a:cs typeface="Arial"/>
+                <a:ea typeface="Calibri"/>
+              </a:rPr>
+              <a:t>• V12 — أساسيات MLOps + تمهيد للمختبر / MLOps Fundamentals + Lab Introduction</a:t>
             </a:r>
           </a:p>
         </p:txBody>
@@ -6800,6 +7003,8 @@
                   <a:srgbClr val="666666"/>
                 </a:solidFill>
                 <a:latin typeface="Arial"/>
+                <a:cs typeface="Arial"/>
+                <a:ea typeface="Calibri"/>
               </a:rPr>
               <a:t>Module 02 — Data &amp; AI Engineering Track  |  الوحدة الثانية</a:t>
             </a:r>
@@ -6835,6 +7040,8 @@
                   <a:srgbClr val="666666"/>
                 </a:solidFill>
                 <a:latin typeface="Calibri"/>
+                <a:cs typeface="Arial"/>
+                <a:ea typeface="Calibri"/>
               </a:rPr>
               <a:t>06_  •  4/12</a:t>
             </a:r>
@@ -6870,6 +7077,8 @@
                   <a:srgbClr val="666666"/>
                 </a:solidFill>
                 <a:latin typeface="Arial"/>
+                <a:cs typeface="Arial"/>
+                <a:ea typeface="Calibri"/>
               </a:rPr>
               <a:t>Module 02 — Data &amp; AI Engineering Track  |  الوحدة الثانية</a:t>
             </a:r>
@@ -6905,6 +7114,8 @@
                   <a:srgbClr val="666666"/>
                 </a:solidFill>
                 <a:latin typeface="Calibri"/>
+                <a:cs typeface="Arial"/>
+                <a:ea typeface="Calibri"/>
               </a:rPr>
               <a:t>06_  •  4/12</a:t>
             </a:r>
@@ -7012,6 +7223,8 @@
                   <a:srgbClr val="1F3B5C"/>
                 </a:solidFill>
                 <a:latin typeface="Arial"/>
+                <a:cs typeface="Arial"/>
+                <a:ea typeface="Calibri"/>
               </a:rPr>
               <a:t>أنواع البيانات / Data Types</a:t>
             </a:r>
@@ -7054,12 +7267,14 @@
                   <a:srgbClr val="333333"/>
                 </a:solidFill>
                 <a:latin typeface="Arial"/>
+                <a:cs typeface="Arial"/>
+                <a:ea typeface="Calibri"/>
               </a:rPr>
               <a:t>• بيانات مهيكلة (جداول)، شبه مهيكلة (JSON/XML)، غير مهيكلة (نصوص، صور، صوت).</a:t>
             </a:r>
           </a:p>
           <a:p>
-            <a:pPr algn="l" rtl="0">
+            <a:pPr algn="r" rtl="0">
               <a:spcBef>
                 <a:spcPts val="200"/>
               </a:spcBef>
@@ -7073,6 +7288,8 @@
                   <a:srgbClr val="666666"/>
                 </a:solidFill>
                 <a:latin typeface="Calibri"/>
+                <a:cs typeface="Arial"/>
+                <a:ea typeface="Calibri"/>
               </a:rPr>
               <a:t>• Structured (tables), semi-structured (JSON/XML), unstructured (text, images, audio).</a:t>
             </a:r>
@@ -7092,12 +7309,14 @@
                   <a:srgbClr val="333333"/>
                 </a:solidFill>
                 <a:latin typeface="Arial"/>
+                <a:cs typeface="Arial"/>
+                <a:ea typeface="Calibri"/>
               </a:rPr>
               <a:t>• اختيار النوع يحدد أدوات التخزين والمعالجة المناسبة.</a:t>
             </a:r>
           </a:p>
           <a:p>
-            <a:pPr algn="l" rtl="0">
+            <a:pPr algn="r" rtl="0">
               <a:spcBef>
                 <a:spcPts val="200"/>
               </a:spcBef>
@@ -7111,6 +7330,8 @@
                   <a:srgbClr val="666666"/>
                 </a:solidFill>
                 <a:latin typeface="Calibri"/>
+                <a:cs typeface="Arial"/>
+                <a:ea typeface="Calibri"/>
               </a:rPr>
               <a:t>• The data type determines the right storage and processing tools.</a:t>
             </a:r>
@@ -7146,6 +7367,8 @@
                   <a:srgbClr val="666666"/>
                 </a:solidFill>
                 <a:latin typeface="Arial"/>
+                <a:cs typeface="Arial"/>
+                <a:ea typeface="Calibri"/>
               </a:rPr>
               <a:t>Module 02 — Data &amp; AI Engineering Track  |  الوحدة الثانية</a:t>
             </a:r>
@@ -7181,6 +7404,8 @@
                   <a:srgbClr val="666666"/>
                 </a:solidFill>
                 <a:latin typeface="Calibri"/>
+                <a:cs typeface="Arial"/>
+                <a:ea typeface="Calibri"/>
               </a:rPr>
               <a:t>V06  •  3/13</a:t>
             </a:r>
@@ -7216,6 +7441,8 @@
                   <a:srgbClr val="666666"/>
                 </a:solidFill>
                 <a:latin typeface="Arial"/>
+                <a:cs typeface="Arial"/>
+                <a:ea typeface="Calibri"/>
               </a:rPr>
               <a:t>Module 02 — Data &amp; AI Engineering Track  |  الوحدة الثانية</a:t>
             </a:r>
@@ -7251,6 +7478,8 @@
                   <a:srgbClr val="666666"/>
                 </a:solidFill>
                 <a:latin typeface="Calibri"/>
+                <a:cs typeface="Arial"/>
+                <a:ea typeface="Calibri"/>
               </a:rPr>
               <a:t>06_  •  5/12</a:t>
             </a:r>
@@ -7286,6 +7515,8 @@
                   <a:srgbClr val="666666"/>
                 </a:solidFill>
                 <a:latin typeface="Arial"/>
+                <a:cs typeface="Arial"/>
+                <a:ea typeface="Calibri"/>
               </a:rPr>
               <a:t>Module 02 — Data &amp; AI Engineering Track  |  الوحدة الثانية</a:t>
             </a:r>
@@ -7321,6 +7552,8 @@
                   <a:srgbClr val="666666"/>
                 </a:solidFill>
                 <a:latin typeface="Calibri"/>
+                <a:cs typeface="Arial"/>
+                <a:ea typeface="Calibri"/>
               </a:rPr>
               <a:t>06_  •  5/12</a:t>
             </a:r>
@@ -7428,6 +7661,8 @@
                   <a:srgbClr val="1F3B5C"/>
                 </a:solidFill>
                 <a:latin typeface="Arial"/>
+                <a:cs typeface="Arial"/>
+                <a:ea typeface="Calibri"/>
               </a:rPr>
               <a:t>التنسيقات / Formats</a:t>
             </a:r>
@@ -7470,12 +7705,14 @@
                   <a:srgbClr val="333333"/>
                 </a:solidFill>
                 <a:latin typeface="Arial"/>
+                <a:cs typeface="Arial"/>
+                <a:ea typeface="Calibri"/>
               </a:rPr>
               <a:t>• CSV للتبادل البسيط، JSON للواجهات البرمجية، Parquet وAvro للتحليلات والأنابيب.</a:t>
             </a:r>
           </a:p>
           <a:p>
-            <a:pPr algn="l" rtl="0">
+            <a:pPr algn="r" rtl="0">
               <a:spcBef>
                 <a:spcPts val="200"/>
               </a:spcBef>
@@ -7489,6 +7726,8 @@
                   <a:srgbClr val="666666"/>
                 </a:solidFill>
                 <a:latin typeface="Calibri"/>
+                <a:cs typeface="Arial"/>
+                <a:ea typeface="Calibri"/>
               </a:rPr>
               <a:t>• CSV for simple exchange, JSON for APIs, Parquet and Avro for analytics and pipelines.</a:t>
             </a:r>
@@ -7508,12 +7747,14 @@
                   <a:srgbClr val="333333"/>
                 </a:solidFill>
                 <a:latin typeface="Arial"/>
+                <a:cs typeface="Arial"/>
+                <a:ea typeface="Calibri"/>
               </a:rPr>
               <a:t>• التنسيقات العمودية (Parquet) تقلل الحجم وتسرّع القراءة التحليلية.</a:t>
             </a:r>
           </a:p>
           <a:p>
-            <a:pPr algn="l" rtl="0">
+            <a:pPr algn="r" rtl="0">
               <a:spcBef>
                 <a:spcPts val="200"/>
               </a:spcBef>
@@ -7527,6 +7768,8 @@
                   <a:srgbClr val="666666"/>
                 </a:solidFill>
                 <a:latin typeface="Calibri"/>
+                <a:cs typeface="Arial"/>
+                <a:ea typeface="Calibri"/>
               </a:rPr>
               <a:t>• Columnar formats (Parquet) reduce size and speed up analytical reads.</a:t>
             </a:r>
@@ -7562,6 +7805,8 @@
                   <a:srgbClr val="666666"/>
                 </a:solidFill>
                 <a:latin typeface="Arial"/>
+                <a:cs typeface="Arial"/>
+                <a:ea typeface="Calibri"/>
               </a:rPr>
               <a:t>Module 02 — Data &amp; AI Engineering Track  |  الوحدة الثانية</a:t>
             </a:r>
@@ -7597,6 +7842,8 @@
                   <a:srgbClr val="666666"/>
                 </a:solidFill>
                 <a:latin typeface="Calibri"/>
+                <a:cs typeface="Arial"/>
+                <a:ea typeface="Calibri"/>
               </a:rPr>
               <a:t>V06  •  4/13</a:t>
             </a:r>
@@ -7632,6 +7879,8 @@
                   <a:srgbClr val="666666"/>
                 </a:solidFill>
                 <a:latin typeface="Arial"/>
+                <a:cs typeface="Arial"/>
+                <a:ea typeface="Calibri"/>
               </a:rPr>
               <a:t>Module 02 — Data &amp; AI Engineering Track  |  الوحدة الثانية</a:t>
             </a:r>
@@ -7667,6 +7916,8 @@
                   <a:srgbClr val="666666"/>
                 </a:solidFill>
                 <a:latin typeface="Calibri"/>
+                <a:cs typeface="Arial"/>
+                <a:ea typeface="Calibri"/>
               </a:rPr>
               <a:t>06_  •  6/12</a:t>
             </a:r>
@@ -7702,6 +7953,8 @@
                   <a:srgbClr val="666666"/>
                 </a:solidFill>
                 <a:latin typeface="Arial"/>
+                <a:cs typeface="Arial"/>
+                <a:ea typeface="Calibri"/>
               </a:rPr>
               <a:t>Module 02 — Data &amp; AI Engineering Track  |  الوحدة الثانية</a:t>
             </a:r>
@@ -7737,6 +7990,8 @@
                   <a:srgbClr val="666666"/>
                 </a:solidFill>
                 <a:latin typeface="Calibri"/>
+                <a:cs typeface="Arial"/>
+                <a:ea typeface="Calibri"/>
               </a:rPr>
               <a:t>06_  •  6/12</a:t>
             </a:r>
@@ -7844,6 +8099,8 @@
                   <a:srgbClr val="1F3B5C"/>
                 </a:solidFill>
                 <a:latin typeface="Arial"/>
+                <a:cs typeface="Arial"/>
+                <a:ea typeface="Calibri"/>
               </a:rPr>
               <a:t>أنابيب ETL / ELT</a:t>
             </a:r>
@@ -7886,12 +8143,14 @@
                   <a:srgbClr val="333333"/>
                 </a:solidFill>
                 <a:latin typeface="Arial"/>
+                <a:cs typeface="Arial"/>
+                <a:ea typeface="Calibri"/>
               </a:rPr>
               <a:t>• ETL: التحويل قبل التحميل؛ ELT: التحميل أولاً ثم التحويل داخل المنصة المستهدفة.</a:t>
             </a:r>
           </a:p>
           <a:p>
-            <a:pPr algn="l" rtl="0">
+            <a:pPr algn="r" rtl="0">
               <a:spcBef>
                 <a:spcPts val="200"/>
               </a:spcBef>
@@ -7905,6 +8164,8 @@
                   <a:srgbClr val="666666"/>
                 </a:solidFill>
                 <a:latin typeface="Calibri"/>
+                <a:cs typeface="Arial"/>
+                <a:ea typeface="Calibri"/>
               </a:rPr>
               <a:t>• ETL: transform before loading; ELT: load first, transform inside the target platform.</a:t>
             </a:r>
@@ -7924,12 +8185,14 @@
                   <a:srgbClr val="333333"/>
                 </a:solidFill>
                 <a:latin typeface="Arial"/>
+                <a:cs typeface="Arial"/>
+                <a:ea typeface="Calibri"/>
               </a:rPr>
               <a:t>• ELT هو النمط السائد في بيئات Lakehouse الحديثة.</a:t>
             </a:r>
           </a:p>
           <a:p>
-            <a:pPr algn="l" rtl="0">
+            <a:pPr algn="r" rtl="0">
               <a:spcBef>
                 <a:spcPts val="200"/>
               </a:spcBef>
@@ -7943,6 +8206,8 @@
                   <a:srgbClr val="666666"/>
                 </a:solidFill>
                 <a:latin typeface="Calibri"/>
+                <a:cs typeface="Arial"/>
+                <a:ea typeface="Calibri"/>
               </a:rPr>
               <a:t>• ELT is the dominant pattern in modern lakehouse environments.</a:t>
             </a:r>
@@ -7978,6 +8243,8 @@
                   <a:srgbClr val="666666"/>
                 </a:solidFill>
                 <a:latin typeface="Arial"/>
+                <a:cs typeface="Arial"/>
+                <a:ea typeface="Calibri"/>
               </a:rPr>
               <a:t>Module 02 — Data &amp; AI Engineering Track  |  الوحدة الثانية</a:t>
             </a:r>
@@ -8013,6 +8280,8 @@
                   <a:srgbClr val="666666"/>
                 </a:solidFill>
                 <a:latin typeface="Calibri"/>
+                <a:cs typeface="Arial"/>
+                <a:ea typeface="Calibri"/>
               </a:rPr>
               <a:t>V06  •  5/13</a:t>
             </a:r>
@@ -8048,6 +8317,8 @@
                   <a:srgbClr val="666666"/>
                 </a:solidFill>
                 <a:latin typeface="Arial"/>
+                <a:cs typeface="Arial"/>
+                <a:ea typeface="Calibri"/>
               </a:rPr>
               <a:t>Module 02 — Data &amp; AI Engineering Track  |  الوحدة الثانية</a:t>
             </a:r>
@@ -8083,6 +8354,8 @@
                   <a:srgbClr val="666666"/>
                 </a:solidFill>
                 <a:latin typeface="Calibri"/>
+                <a:cs typeface="Arial"/>
+                <a:ea typeface="Calibri"/>
               </a:rPr>
               <a:t>06_  •  7/12</a:t>
             </a:r>
@@ -8118,6 +8391,8 @@
                   <a:srgbClr val="666666"/>
                 </a:solidFill>
                 <a:latin typeface="Arial"/>
+                <a:cs typeface="Arial"/>
+                <a:ea typeface="Calibri"/>
               </a:rPr>
               <a:t>Module 02 — Data &amp; AI Engineering Track  |  الوحدة الثانية</a:t>
             </a:r>
@@ -8153,6 +8428,8 @@
                   <a:srgbClr val="666666"/>
                 </a:solidFill>
                 <a:latin typeface="Calibri"/>
+                <a:cs typeface="Arial"/>
+                <a:ea typeface="Calibri"/>
               </a:rPr>
               <a:t>06_  •  7/12</a:t>
             </a:r>
@@ -8260,6 +8537,8 @@
                   <a:srgbClr val="1F3B5C"/>
                 </a:solidFill>
                 <a:latin typeface="Arial"/>
+                <a:cs typeface="Arial"/>
+                <a:ea typeface="Calibri"/>
               </a:rPr>
               <a:t>مقارنة أنماط المعالجة / Processing Patterns</a:t>
             </a:r>
@@ -8302,12 +8581,14 @@
                   <a:srgbClr val="333333"/>
                 </a:solidFill>
                 <a:latin typeface="Arial"/>
+                <a:cs typeface="Arial"/>
+                <a:ea typeface="Calibri"/>
               </a:rPr>
               <a:t>• المعمارية المتدرِّجة Medallion (Lakehouse): Bronze خام → Silver منقَّى → Gold جاهز للتحليل؛ إدارة مركزية؛ الأنسب للتحليلات وخطوط AI/ML/RAG.</a:t>
             </a:r>
           </a:p>
           <a:p>
-            <a:pPr algn="l" rtl="0">
+            <a:pPr algn="r" rtl="0">
               <a:spcBef>
                 <a:spcPts val="200"/>
               </a:spcBef>
@@ -8321,6 +8602,8 @@
                   <a:srgbClr val="666666"/>
                 </a:solidFill>
                 <a:latin typeface="Calibri"/>
+                <a:cs typeface="Arial"/>
+                <a:ea typeface="Calibri"/>
               </a:rPr>
               <a:t>• Medallion (Lakehouse): raw Bronze → cleansed Silver → analytics-ready Gold; central ownership; best for analytics and AI/ML/RAG pipelines.</a:t>
             </a:r>
@@ -8340,12 +8623,14 @@
                   <a:srgbClr val="333333"/>
                 </a:solidFill>
                 <a:latin typeface="Arial"/>
+                <a:cs typeface="Arial"/>
+                <a:ea typeface="Calibri"/>
               </a:rPr>
               <a:t>• مستودع البيانات: ETL/ELT → Staging → المستودع → أسواق البيانات؛ حوكمة مركزية؛ الأنسب للتقارير وذكاء الأعمال.</a:t>
             </a:r>
           </a:p>
           <a:p>
-            <a:pPr algn="l" rtl="0">
+            <a:pPr algn="r" rtl="0">
               <a:spcBef>
                 <a:spcPts val="200"/>
               </a:spcBef>
@@ -8359,6 +8644,8 @@
                   <a:srgbClr val="666666"/>
                 </a:solidFill>
                 <a:latin typeface="Calibri"/>
+                <a:cs typeface="Arial"/>
+                <a:ea typeface="Calibri"/>
               </a:rPr>
               <a:t>• Data warehouse: ETL/ELT → staging → warehouse → data marts; central governance; best for reporting and BI.</a:t>
             </a:r>
@@ -8378,12 +8665,14 @@
                   <a:srgbClr val="333333"/>
                 </a:solidFill>
                 <a:latin typeface="Arial"/>
+                <a:cs typeface="Arial"/>
+                <a:ea typeface="Calibri"/>
               </a:rPr>
               <a:t>• شبكة البيانات Data Mesh: ملكية لامركزية بالمجالات؛ منتجات بيانات بعقود (مخطط، أمان، SLA) وكتالوج موحد؛ الأنسب للمؤسسات الكبيرة.</a:t>
             </a:r>
           </a:p>
           <a:p>
-            <a:pPr algn="l" rtl="0">
+            <a:pPr algn="r" rtl="0">
               <a:spcBef>
                 <a:spcPts val="200"/>
               </a:spcBef>
@@ -8397,6 +8686,8 @@
                   <a:srgbClr val="666666"/>
                 </a:solidFill>
                 <a:latin typeface="Calibri"/>
+                <a:cs typeface="Arial"/>
+                <a:ea typeface="Calibri"/>
               </a:rPr>
               <a:t>• Data mesh: decentralized domain ownership; data products with contracts (schema, security, SLA) and a unified catalog; best for large organizations.</a:t>
             </a:r>
@@ -8432,6 +8723,8 @@
                   <a:srgbClr val="666666"/>
                 </a:solidFill>
                 <a:latin typeface="Arial"/>
+                <a:cs typeface="Arial"/>
+                <a:ea typeface="Calibri"/>
               </a:rPr>
               <a:t>Module 02 — Data &amp; AI Engineering Track  |  الوحدة الثانية</a:t>
             </a:r>
@@ -8467,6 +8760,8 @@
                   <a:srgbClr val="666666"/>
                 </a:solidFill>
                 <a:latin typeface="Calibri"/>
+                <a:cs typeface="Arial"/>
+                <a:ea typeface="Calibri"/>
               </a:rPr>
               <a:t>V06  •  6/13</a:t>
             </a:r>
@@ -8502,6 +8797,8 @@
                   <a:srgbClr val="666666"/>
                 </a:solidFill>
                 <a:latin typeface="Arial"/>
+                <a:cs typeface="Arial"/>
+                <a:ea typeface="Calibri"/>
               </a:rPr>
               <a:t>Module 02 — Data &amp; AI Engineering Track  |  الوحدة الثانية</a:t>
             </a:r>
@@ -8537,6 +8834,8 @@
                   <a:srgbClr val="666666"/>
                 </a:solidFill>
                 <a:latin typeface="Calibri"/>
+                <a:cs typeface="Arial"/>
+                <a:ea typeface="Calibri"/>
               </a:rPr>
               <a:t>06_  •  8/12</a:t>
             </a:r>
@@ -8572,6 +8871,8 @@
                   <a:srgbClr val="666666"/>
                 </a:solidFill>
                 <a:latin typeface="Arial"/>
+                <a:cs typeface="Arial"/>
+                <a:ea typeface="Calibri"/>
               </a:rPr>
               <a:t>Module 02 — Data &amp; AI Engineering Track  |  الوحدة الثانية</a:t>
             </a:r>
@@ -8607,6 +8908,8 @@
                   <a:srgbClr val="666666"/>
                 </a:solidFill>
                 <a:latin typeface="Calibri"/>
+                <a:cs typeface="Arial"/>
+                <a:ea typeface="Calibri"/>
               </a:rPr>
               <a:t>06_  •  8/12</a:t>
             </a:r>
@@ -8714,6 +9017,8 @@
                   <a:srgbClr val="1F3B5C"/>
                 </a:solidFill>
                 <a:latin typeface="Arial"/>
+                <a:cs typeface="Arial"/>
+                <a:ea typeface="Calibri"/>
               </a:rPr>
               <a:t>جدول المقارنة: Medallion / المستودع / Data Mesh</a:t>
             </a:r>
@@ -8753,10 +9058,9 @@
                       <a:pPr algn="ctr" rtl="1"/>
                       <a:r>
                         <a:rPr sz="1400" b="1">
-                          <a:solidFill>
-                            <a:srgbClr val="FFFFFF"/>
-                          </a:solidFill>
                           <a:latin typeface="Arial"/>
+                          <a:cs typeface="Arial"/>
+                          <a:ea typeface="Calibri"/>
                         </a:rPr>
                         <a:t>المعيار</a:t>
                       </a:r>
@@ -8773,13 +9077,12 @@
                     <a:bodyPr/>
                     <a:lstStyle/>
                     <a:p>
-                      <a:pPr algn="ctr" rtl="1"/>
+                      <a:pPr algn="ctr" rtl="0"/>
                       <a:r>
                         <a:rPr sz="1400" b="1">
-                          <a:solidFill>
-                            <a:srgbClr val="FFFFFF"/>
-                          </a:solidFill>
-                          <a:latin typeface="Arial"/>
+                          <a:latin typeface="Calibri"/>
+                          <a:cs typeface="Arial"/>
+                          <a:ea typeface="Calibri"/>
                         </a:rPr>
                         <a:t>Medallion</a:t>
                       </a:r>
@@ -8799,10 +9102,9 @@
                       <a:pPr algn="ctr" rtl="1"/>
                       <a:r>
                         <a:rPr sz="1400" b="1">
-                          <a:solidFill>
-                            <a:srgbClr val="FFFFFF"/>
-                          </a:solidFill>
                           <a:latin typeface="Arial"/>
+                          <a:cs typeface="Arial"/>
+                          <a:ea typeface="Calibri"/>
                         </a:rPr>
                         <a:t>المستودع</a:t>
                       </a:r>
@@ -8819,13 +9121,12 @@
                     <a:bodyPr/>
                     <a:lstStyle/>
                     <a:p>
-                      <a:pPr algn="ctr" rtl="1"/>
+                      <a:pPr algn="ctr" rtl="0"/>
                       <a:r>
                         <a:rPr sz="1400" b="1">
-                          <a:solidFill>
-                            <a:srgbClr val="FFFFFF"/>
-                          </a:solidFill>
-                          <a:latin typeface="Arial"/>
+                          <a:latin typeface="Calibri"/>
+                          <a:cs typeface="Arial"/>
+                          <a:ea typeface="Calibri"/>
                         </a:rPr>
                         <a:t>Data Mesh</a:t>
                       </a:r>
@@ -8846,11 +9147,10 @@
                     <a:p>
                       <a:pPr algn="ctr" rtl="1"/>
                       <a:r>
-                        <a:rPr sz="1200">
-                          <a:solidFill>
-                            <a:srgbClr val="333333"/>
-                          </a:solidFill>
+                        <a:rPr sz="1200" b="0">
                           <a:latin typeface="Arial"/>
+                          <a:cs typeface="Arial"/>
+                          <a:ea typeface="Calibri"/>
                         </a:rPr>
                         <a:t>الفكرة</a:t>
                       </a:r>
@@ -8869,11 +9169,10 @@
                     <a:p>
                       <a:pPr algn="ctr" rtl="1"/>
                       <a:r>
-                        <a:rPr sz="1200">
-                          <a:solidFill>
-                            <a:srgbClr val="333333"/>
-                          </a:solidFill>
+                        <a:rPr sz="1200" b="0">
                           <a:latin typeface="Arial"/>
+                          <a:cs typeface="Arial"/>
+                          <a:ea typeface="Calibri"/>
                         </a:rPr>
                         <a:t>طبقات Bronze→Silver→Gold</a:t>
                       </a:r>
@@ -8890,13 +9189,12 @@
                     <a:bodyPr/>
                     <a:lstStyle/>
                     <a:p>
-                      <a:pPr algn="ctr" rtl="1"/>
+                      <a:pPr algn="ctr" rtl="0"/>
                       <a:r>
-                        <a:rPr sz="1200">
-                          <a:solidFill>
-                            <a:srgbClr val="333333"/>
-                          </a:solidFill>
-                          <a:latin typeface="Arial"/>
+                        <a:rPr sz="1200" b="0">
+                          <a:latin typeface="Calibri"/>
+                          <a:cs typeface="Arial"/>
+                          <a:ea typeface="Calibri"/>
                         </a:rPr>
                         <a:t>Staging→Warehouse→Marts</a:t>
                       </a:r>
@@ -8915,11 +9213,10 @@
                     <a:p>
                       <a:pPr algn="ctr" rtl="1"/>
                       <a:r>
-                        <a:rPr sz="1200">
-                          <a:solidFill>
-                            <a:srgbClr val="333333"/>
-                          </a:solidFill>
+                        <a:rPr sz="1200" b="0">
                           <a:latin typeface="Arial"/>
+                          <a:cs typeface="Arial"/>
+                          <a:ea typeface="Calibri"/>
                         </a:rPr>
                         <a:t>منتجات بالمجالات</a:t>
                       </a:r>
@@ -8940,11 +9237,10 @@
                     <a:p>
                       <a:pPr algn="ctr" rtl="1"/>
                       <a:r>
-                        <a:rPr sz="1200">
-                          <a:solidFill>
-                            <a:srgbClr val="333333"/>
-                          </a:solidFill>
+                        <a:rPr sz="1200" b="0">
                           <a:latin typeface="Arial"/>
+                          <a:cs typeface="Arial"/>
+                          <a:ea typeface="Calibri"/>
                         </a:rPr>
                         <a:t>المالك</a:t>
                       </a:r>
@@ -8963,11 +9259,10 @@
                     <a:p>
                       <a:pPr algn="ctr" rtl="1"/>
                       <a:r>
-                        <a:rPr sz="1200">
-                          <a:solidFill>
-                            <a:srgbClr val="333333"/>
-                          </a:solidFill>
+                        <a:rPr sz="1200" b="0">
                           <a:latin typeface="Arial"/>
+                          <a:cs typeface="Arial"/>
+                          <a:ea typeface="Calibri"/>
                         </a:rPr>
                         <a:t>هندسة مركزية</a:t>
                       </a:r>
@@ -8986,11 +9281,10 @@
                     <a:p>
                       <a:pPr algn="ctr" rtl="1"/>
                       <a:r>
-                        <a:rPr sz="1200">
-                          <a:solidFill>
-                            <a:srgbClr val="333333"/>
-                          </a:solidFill>
+                        <a:rPr sz="1200" b="0">
                           <a:latin typeface="Arial"/>
+                          <a:cs typeface="Arial"/>
+                          <a:ea typeface="Calibri"/>
                         </a:rPr>
                         <a:t>فرق BI</a:t>
                       </a:r>
@@ -9009,11 +9303,10 @@
                     <a:p>
                       <a:pPr algn="ctr" rtl="1"/>
                       <a:r>
-                        <a:rPr sz="1200">
-                          <a:solidFill>
-                            <a:srgbClr val="333333"/>
-                          </a:solidFill>
+                        <a:rPr sz="1200" b="0">
                           <a:latin typeface="Arial"/>
+                          <a:cs typeface="Arial"/>
+                          <a:ea typeface="Calibri"/>
                         </a:rPr>
                         <a:t>فرق المجالات</a:t>
                       </a:r>
@@ -9034,11 +9327,10 @@
                     <a:p>
                       <a:pPr algn="ctr" rtl="1"/>
                       <a:r>
-                        <a:rPr sz="1200">
-                          <a:solidFill>
-                            <a:srgbClr val="333333"/>
-                          </a:solidFill>
+                        <a:rPr sz="1200" b="0">
                           <a:latin typeface="Arial"/>
+                          <a:cs typeface="Arial"/>
+                          <a:ea typeface="Calibri"/>
                         </a:rPr>
                         <a:t>الأنسب</a:t>
                       </a:r>
@@ -9057,11 +9349,10 @@
                     <a:p>
                       <a:pPr algn="ctr" rtl="1"/>
                       <a:r>
-                        <a:rPr sz="1200">
-                          <a:solidFill>
-                            <a:srgbClr val="333333"/>
-                          </a:solidFill>
+                        <a:rPr sz="1200" b="0">
                           <a:latin typeface="Arial"/>
+                          <a:cs typeface="Arial"/>
+                          <a:ea typeface="Calibri"/>
                         </a:rPr>
                         <a:t>تحليلات و AI/RAG</a:t>
                       </a:r>
@@ -9080,11 +9371,10 @@
                     <a:p>
                       <a:pPr algn="ctr" rtl="1"/>
                       <a:r>
-                        <a:rPr sz="1200">
-                          <a:solidFill>
-                            <a:srgbClr val="333333"/>
-                          </a:solidFill>
+                        <a:rPr sz="1200" b="0">
                           <a:latin typeface="Arial"/>
+                          <a:cs typeface="Arial"/>
+                          <a:ea typeface="Calibri"/>
                         </a:rPr>
                         <a:t>تقارير BI</a:t>
                       </a:r>
@@ -9103,11 +9393,10 @@
                     <a:p>
                       <a:pPr algn="ctr" rtl="1"/>
                       <a:r>
-                        <a:rPr sz="1200">
-                          <a:solidFill>
-                            <a:srgbClr val="333333"/>
-                          </a:solidFill>
+                        <a:rPr sz="1200" b="0">
                           <a:latin typeface="Arial"/>
+                          <a:cs typeface="Arial"/>
+                          <a:ea typeface="Calibri"/>
                         </a:rPr>
                         <a:t>مؤسسات كبيرة</a:t>
                       </a:r>
@@ -9128,11 +9417,10 @@
                     <a:p>
                       <a:pPr algn="ctr" rtl="1"/>
                       <a:r>
-                        <a:rPr sz="1200">
-                          <a:solidFill>
-                            <a:srgbClr val="333333"/>
-                          </a:solidFill>
+                        <a:rPr sz="1200" b="0">
                           <a:latin typeface="Arial"/>
+                          <a:cs typeface="Arial"/>
+                          <a:ea typeface="Calibri"/>
                         </a:rPr>
                         <a:t>الحوكمة</a:t>
                       </a:r>
@@ -9151,11 +9439,10 @@
                     <a:p>
                       <a:pPr algn="ctr" rtl="1"/>
                       <a:r>
-                        <a:rPr sz="1200">
-                          <a:solidFill>
-                            <a:srgbClr val="333333"/>
-                          </a:solidFill>
+                        <a:rPr sz="1200" b="0">
                           <a:latin typeface="Arial"/>
+                          <a:cs typeface="Arial"/>
+                          <a:ea typeface="Calibri"/>
                         </a:rPr>
                         <a:t>جودة بين الطبقات</a:t>
                       </a:r>
@@ -9174,11 +9461,10 @@
                     <a:p>
                       <a:pPr algn="ctr" rtl="1"/>
                       <a:r>
-                        <a:rPr sz="1200">
-                          <a:solidFill>
-                            <a:srgbClr val="333333"/>
-                          </a:solidFill>
+                        <a:rPr sz="1200" b="0">
                           <a:latin typeface="Arial"/>
+                          <a:cs typeface="Arial"/>
+                          <a:ea typeface="Calibri"/>
                         </a:rPr>
                         <a:t>مركزية</a:t>
                       </a:r>
@@ -9197,11 +9483,10 @@
                     <a:p>
                       <a:pPr algn="ctr" rtl="1"/>
                       <a:r>
-                        <a:rPr sz="1200">
-                          <a:solidFill>
-                            <a:srgbClr val="333333"/>
-                          </a:solidFill>
+                        <a:rPr sz="1200" b="0">
                           <a:latin typeface="Arial"/>
+                          <a:cs typeface="Arial"/>
+                          <a:ea typeface="Calibri"/>
                         </a:rPr>
                         <a:t>موحدة + عقود</a:t>
                       </a:r>
@@ -9247,6 +9532,8 @@
                   <a:srgbClr val="666666"/>
                 </a:solidFill>
                 <a:latin typeface="Arial"/>
+                <a:cs typeface="Arial"/>
+                <a:ea typeface="Calibri"/>
               </a:rPr>
               <a:t>Module 02 — Data &amp; AI Engineering Track  |  الوحدة الثانية</a:t>
             </a:r>
@@ -9282,6 +9569,8 @@
                   <a:srgbClr val="666666"/>
                 </a:solidFill>
                 <a:latin typeface="Calibri"/>
+                <a:cs typeface="Arial"/>
+                <a:ea typeface="Calibri"/>
               </a:rPr>
               <a:t>V06  •  7/13</a:t>
             </a:r>
@@ -9317,6 +9606,8 @@
                   <a:srgbClr val="666666"/>
                 </a:solidFill>
                 <a:latin typeface="Arial"/>
+                <a:cs typeface="Arial"/>
+                <a:ea typeface="Calibri"/>
               </a:rPr>
               <a:t>Module 02 — Data &amp; AI Engineering Track  |  الوحدة الثانية</a:t>
             </a:r>
@@ -9352,6 +9643,8 @@
                   <a:srgbClr val="666666"/>
                 </a:solidFill>
                 <a:latin typeface="Calibri"/>
+                <a:cs typeface="Arial"/>
+                <a:ea typeface="Calibri"/>
               </a:rPr>
               <a:t>06_  •  9/12</a:t>
             </a:r>
@@ -9387,6 +9680,8 @@
                   <a:srgbClr val="666666"/>
                 </a:solidFill>
                 <a:latin typeface="Arial"/>
+                <a:cs typeface="Arial"/>
+                <a:ea typeface="Calibri"/>
               </a:rPr>
               <a:t>Module 02 — Data &amp; AI Engineering Track  |  الوحدة الثانية</a:t>
             </a:r>
@@ -9422,6 +9717,8 @@
                   <a:srgbClr val="666666"/>
                 </a:solidFill>
                 <a:latin typeface="Calibri"/>
+                <a:cs typeface="Arial"/>
+                <a:ea typeface="Calibri"/>
               </a:rPr>
               <a:t>06_  •  9/12</a:t>
             </a:r>

--- a/output/Module02_V06_Updated.pptx
+++ b/output/Module02_V06_Updated.pptx
@@ -3129,15 +3129,13 @@
           </a:bodyPr>
           <a:lstStyle/>
           <a:p>
-            <a:pPr algn="r" rtl="0"/>
+            <a:pPr algn="l" rtl="0"/>
             <a:r>
               <a:rPr sz="2800" b="1">
                 <a:solidFill>
                   <a:srgbClr val="1F4E79"/>
                 </a:solidFill>
                 <a:latin typeface="Calibri"/>
-                <a:cs typeface="Arial"/>
-                <a:ea typeface="Calibri"/>
               </a:rPr>
               <a:t>Module 02  |  V06</a:t>
             </a:r>
@@ -3173,8 +3171,6 @@
                   <a:srgbClr val="1F3B5C"/>
                 </a:solidFill>
                 <a:latin typeface="Arial"/>
-                <a:cs typeface="Arial"/>
-                <a:ea typeface="Calibri"/>
               </a:rPr>
               <a:t>أساسيات البيانات</a:t>
             </a:r>
@@ -3203,15 +3199,13 @@
           </a:bodyPr>
           <a:lstStyle/>
           <a:p>
-            <a:pPr algn="r" rtl="0"/>
+            <a:pPr algn="l" rtl="0"/>
             <a:r>
               <a:rPr sz="3000" b="0">
                 <a:solidFill>
                   <a:srgbClr val="333333"/>
                 </a:solidFill>
                 <a:latin typeface="Calibri"/>
-                <a:cs typeface="Arial"/>
-                <a:ea typeface="Calibri"/>
               </a:rPr>
               <a:t>Data Fundamentals</a:t>
             </a:r>
@@ -3220,14 +3214,14 @@
       </p:sp>
       <p:sp>
         <p:nvSpPr>
-          <p:cNvPr id="5" name="TextBox 4"/>
+          <p:cNvPr id="6" name="TextBox 5"/>
           <p:cNvSpPr txBox="1"/>
           <p:nvPr/>
         </p:nvSpPr>
         <p:spPr>
           <a:xfrm>
-            <a:off x="822960" y="4937760"/>
-            <a:ext cx="10515600" cy="548640"/>
+            <a:off x="822960" y="5486400"/>
+            <a:ext cx="10515600" cy="457200"/>
           </a:xfrm>
           <a:prstGeom prst="rect">
             <a:avLst/>
@@ -3240,31 +3234,29 @@
           </a:bodyPr>
           <a:lstStyle/>
           <a:p>
-            <a:pPr algn="r" rtl="1"/>
-            <a:r>
-              <a:rPr sz="1800" b="0">
+            <a:pPr algn="l" rtl="0"/>
+            <a:r>
+              <a:rPr sz="1400" b="0">
                 <a:solidFill>
                   <a:srgbClr val="666666"/>
                 </a:solidFill>
-                <a:latin typeface="Arial"/>
-                <a:cs typeface="Arial"/>
-                <a:ea typeface="Calibri"/>
-              </a:rPr>
-              <a:t>Module 02 — Data &amp; AI Engineering Track  |  الوحدة الثانية</a:t>
-            </a:r>
-          </a:p>
-        </p:txBody>
-      </p:sp>
-      <p:sp>
-        <p:nvSpPr>
-          <p:cNvPr id="6" name="TextBox 5"/>
+                <a:latin typeface="Calibri"/>
+              </a:rPr>
+              <a:t>Light theme  |  Bilingual AR/EN  |  Ready to present</a:t>
+            </a:r>
+          </a:p>
+        </p:txBody>
+      </p:sp>
+      <p:sp>
+        <p:nvSpPr>
+          <p:cNvPr id="7" name="TextBox 6"/>
           <p:cNvSpPr txBox="1"/>
           <p:nvPr/>
         </p:nvSpPr>
         <p:spPr>
           <a:xfrm>
-            <a:off x="822960" y="5486400"/>
-            <a:ext cx="10515600" cy="457200"/>
+            <a:off x="640080" y="6400800"/>
+            <a:ext cx="8686800" cy="320040"/>
           </a:xfrm>
           <a:prstGeom prst="rect">
             <a:avLst/>
@@ -3277,31 +3269,29 @@
           </a:bodyPr>
           <a:lstStyle/>
           <a:p>
-            <a:pPr algn="r" rtl="0"/>
-            <a:r>
-              <a:rPr sz="1400" b="0">
+            <a:pPr algn="r" rtl="1"/>
+            <a:r>
+              <a:rPr sz="1000" b="0">
                 <a:solidFill>
                   <a:srgbClr val="666666"/>
                 </a:solidFill>
-                <a:latin typeface="Calibri"/>
-                <a:cs typeface="Arial"/>
-                <a:ea typeface="Calibri"/>
-              </a:rPr>
-              <a:t>Light theme  |  Bilingual AR/EN  |  Ready to present</a:t>
-            </a:r>
-          </a:p>
-        </p:txBody>
-      </p:sp>
-      <p:sp>
-        <p:nvSpPr>
-          <p:cNvPr id="7" name="TextBox 6"/>
+                <a:latin typeface="Arial"/>
+              </a:rPr>
+              <a:t>Module 02 — Data &amp; AI Engineering Track  |  الوحدة الثانية</a:t>
+            </a:r>
+          </a:p>
+        </p:txBody>
+      </p:sp>
+      <p:sp>
+        <p:nvSpPr>
+          <p:cNvPr id="8" name="TextBox 7"/>
           <p:cNvSpPr txBox="1"/>
           <p:nvPr/>
         </p:nvSpPr>
         <p:spPr>
           <a:xfrm>
-            <a:off x="640080" y="6400800"/>
-            <a:ext cx="8686800" cy="320040"/>
+            <a:off x="9601200" y="6400800"/>
+            <a:ext cx="1920240" cy="320040"/>
           </a:xfrm>
           <a:prstGeom prst="rect">
             <a:avLst/>
@@ -3314,202 +3304,15 @@
           </a:bodyPr>
           <a:lstStyle/>
           <a:p>
-            <a:pPr algn="r" rtl="1"/>
+            <a:pPr algn="l" rtl="0"/>
             <a:r>
               <a:rPr sz="1000" b="0">
                 <a:solidFill>
                   <a:srgbClr val="666666"/>
                 </a:solidFill>
-                <a:latin typeface="Arial"/>
-                <a:cs typeface="Arial"/>
-                <a:ea typeface="Calibri"/>
-              </a:rPr>
-              <a:t>Module 02 — Data &amp; AI Engineering Track  |  الوحدة الثانية</a:t>
-            </a:r>
-          </a:p>
-        </p:txBody>
-      </p:sp>
-      <p:sp>
-        <p:nvSpPr>
-          <p:cNvPr id="8" name="TextBox 7"/>
-          <p:cNvSpPr txBox="1"/>
-          <p:nvPr/>
-        </p:nvSpPr>
-        <p:spPr>
-          <a:xfrm>
-            <a:off x="9601200" y="6400800"/>
-            <a:ext cx="1920240" cy="320040"/>
-          </a:xfrm>
-          <a:prstGeom prst="rect">
-            <a:avLst/>
-          </a:prstGeom>
-          <a:noFill/>
-        </p:spPr>
-        <p:txBody>
-          <a:bodyPr wrap="square">
-            <a:spAutoFit/>
-          </a:bodyPr>
-          <a:lstStyle/>
-          <a:p>
-            <a:pPr algn="l" rtl="0"/>
-            <a:r>
-              <a:rPr sz="1000" b="0">
-                <a:solidFill>
-                  <a:srgbClr val="666666"/>
-                </a:solidFill>
                 <a:latin typeface="Calibri"/>
-                <a:cs typeface="Arial"/>
-                <a:ea typeface="Calibri"/>
-              </a:rPr>
-              <a:t>V06  •  1/13</a:t>
-            </a:r>
-          </a:p>
-        </p:txBody>
-      </p:sp>
-      <p:sp>
-        <p:nvSpPr>
-          <p:cNvPr id="9" name="TextBox 8"/>
-          <p:cNvSpPr txBox="1"/>
-          <p:nvPr/>
-        </p:nvSpPr>
-        <p:spPr>
-          <a:xfrm>
-            <a:off x="640080" y="6400800"/>
-            <a:ext cx="8686800" cy="320040"/>
-          </a:xfrm>
-          <a:prstGeom prst="rect">
-            <a:avLst/>
-          </a:prstGeom>
-          <a:noFill/>
-        </p:spPr>
-        <p:txBody>
-          <a:bodyPr wrap="square">
-            <a:spAutoFit/>
-          </a:bodyPr>
-          <a:lstStyle/>
-          <a:p>
-            <a:pPr algn="r" rtl="1"/>
-            <a:r>
-              <a:rPr sz="1000" b="0">
-                <a:solidFill>
-                  <a:srgbClr val="666666"/>
-                </a:solidFill>
-                <a:latin typeface="Arial"/>
-                <a:cs typeface="Arial"/>
-                <a:ea typeface="Calibri"/>
-              </a:rPr>
-              <a:t>Module 02 — Data &amp; AI Engineering Track  |  الوحدة الثانية</a:t>
-            </a:r>
-          </a:p>
-        </p:txBody>
-      </p:sp>
-      <p:sp>
-        <p:nvSpPr>
-          <p:cNvPr id="10" name="TextBox 9"/>
-          <p:cNvSpPr txBox="1"/>
-          <p:nvPr/>
-        </p:nvSpPr>
-        <p:spPr>
-          <a:xfrm>
-            <a:off x="9601200" y="6400800"/>
-            <a:ext cx="1920240" cy="320040"/>
-          </a:xfrm>
-          <a:prstGeom prst="rect">
-            <a:avLst/>
-          </a:prstGeom>
-          <a:noFill/>
-        </p:spPr>
-        <p:txBody>
-          <a:bodyPr wrap="square">
-            <a:spAutoFit/>
-          </a:bodyPr>
-          <a:lstStyle/>
-          <a:p>
-            <a:pPr algn="l" rtl="0"/>
-            <a:r>
-              <a:rPr sz="1000" b="0">
-                <a:solidFill>
-                  <a:srgbClr val="666666"/>
-                </a:solidFill>
-                <a:latin typeface="Calibri"/>
-                <a:cs typeface="Arial"/>
-                <a:ea typeface="Calibri"/>
-              </a:rPr>
-              <a:t>06_  •  1/12</a:t>
-            </a:r>
-          </a:p>
-        </p:txBody>
-      </p:sp>
-      <p:sp>
-        <p:nvSpPr>
-          <p:cNvPr id="11" name="TextBox 10"/>
-          <p:cNvSpPr txBox="1"/>
-          <p:nvPr/>
-        </p:nvSpPr>
-        <p:spPr>
-          <a:xfrm>
-            <a:off x="640080" y="6400800"/>
-            <a:ext cx="8686800" cy="320040"/>
-          </a:xfrm>
-          <a:prstGeom prst="rect">
-            <a:avLst/>
-          </a:prstGeom>
-          <a:noFill/>
-        </p:spPr>
-        <p:txBody>
-          <a:bodyPr wrap="square">
-            <a:spAutoFit/>
-          </a:bodyPr>
-          <a:lstStyle/>
-          <a:p>
-            <a:pPr algn="r" rtl="1"/>
-            <a:r>
-              <a:rPr sz="1000" b="0">
-                <a:solidFill>
-                  <a:srgbClr val="666666"/>
-                </a:solidFill>
-                <a:latin typeface="Arial"/>
-                <a:cs typeface="Arial"/>
-                <a:ea typeface="Calibri"/>
-              </a:rPr>
-              <a:t>Module 02 — Data &amp; AI Engineering Track  |  الوحدة الثانية</a:t>
-            </a:r>
-          </a:p>
-        </p:txBody>
-      </p:sp>
-      <p:sp>
-        <p:nvSpPr>
-          <p:cNvPr id="12" name="TextBox 11"/>
-          <p:cNvSpPr txBox="1"/>
-          <p:nvPr/>
-        </p:nvSpPr>
-        <p:spPr>
-          <a:xfrm>
-            <a:off x="9601200" y="6400800"/>
-            <a:ext cx="1920240" cy="320040"/>
-          </a:xfrm>
-          <a:prstGeom prst="rect">
-            <a:avLst/>
-          </a:prstGeom>
-          <a:noFill/>
-        </p:spPr>
-        <p:txBody>
-          <a:bodyPr wrap="square">
-            <a:spAutoFit/>
-          </a:bodyPr>
-          <a:lstStyle/>
-          <a:p>
-            <a:pPr algn="l" rtl="0"/>
-            <a:r>
-              <a:rPr sz="1000" b="0">
-                <a:solidFill>
-                  <a:srgbClr val="666666"/>
-                </a:solidFill>
-                <a:latin typeface="Calibri"/>
-                <a:cs typeface="Arial"/>
-                <a:ea typeface="Calibri"/>
-              </a:rPr>
-              <a:t>06_  •  1/12</a:t>
+              </a:rPr>
+              <a:t>V06  •  1/12</a:t>
             </a:r>
           </a:p>
         </p:txBody>
@@ -3615,10 +3418,8 @@
                   <a:srgbClr val="1F3B5C"/>
                 </a:solidFill>
                 <a:latin typeface="Arial"/>
-                <a:cs typeface="Arial"/>
-                <a:ea typeface="Calibri"/>
-              </a:rPr>
-              <a:t>اختبار قصير / Quick Quiz</a:t>
+              </a:rPr>
+              <a:t>للاستزادة / Further Reading</a:t>
             </a:r>
           </a:p>
         </p:txBody>
@@ -3659,14 +3460,12 @@
                   <a:srgbClr val="333333"/>
                 </a:solidFill>
                 <a:latin typeface="Arial"/>
-                <a:cs typeface="Arial"/>
-                <a:ea typeface="Calibri"/>
-              </a:rPr>
-              <a:t>• 1. ما الفرق الجوهري بين ETL وELT؟</a:t>
-            </a:r>
-          </a:p>
-          <a:p>
-            <a:pPr algn="r" rtl="0">
+              </a:rPr>
+              <a:t>• توثيق Databricks — المعمارية المتدرِّجة Medallion.</a:t>
+            </a:r>
+          </a:p>
+          <a:p>
+            <a:pPr algn="l" rtl="0">
               <a:spcBef>
                 <a:spcPts val="200"/>
               </a:spcBef>
@@ -3680,10 +3479,8 @@
                   <a:srgbClr val="666666"/>
                 </a:solidFill>
                 <a:latin typeface="Calibri"/>
-                <a:cs typeface="Arial"/>
-                <a:ea typeface="Calibri"/>
-              </a:rPr>
-              <a:t>• What is the key difference between ETL and ELT?</a:t>
+              </a:rPr>
+              <a:t>• Databricks docs — Medallion architecture.</a:t>
             </a:r>
           </a:p>
           <a:p>
@@ -3701,14 +3498,12 @@
                   <a:srgbClr val="333333"/>
                 </a:solidFill>
                 <a:latin typeface="Arial"/>
-                <a:cs typeface="Arial"/>
-                <a:ea typeface="Calibri"/>
-              </a:rPr>
-              <a:t>• 2. أين تُستخدم طبقة Gold في المعمارية المتدرِّجة؟</a:t>
-            </a:r>
-          </a:p>
-          <a:p>
-            <a:pPr algn="r" rtl="0">
+              </a:rPr>
+              <a:t>• مقالات Data Mesh — Zhamak Dehghani.</a:t>
+            </a:r>
+          </a:p>
+          <a:p>
+            <a:pPr algn="l" rtl="0">
               <a:spcBef>
                 <a:spcPts val="200"/>
               </a:spcBef>
@@ -3722,10 +3517,8 @@
                   <a:srgbClr val="666666"/>
                 </a:solidFill>
                 <a:latin typeface="Calibri"/>
-                <a:cs typeface="Arial"/>
-                <a:ea typeface="Calibri"/>
-              </a:rPr>
-              <a:t>• Where is the Gold layer used in the Medallion architecture?</a:t>
+              </a:rPr>
+              <a:t>• Data Mesh articles — Zhamak Dehghani.</a:t>
             </a:r>
           </a:p>
           <a:p>
@@ -3743,14 +3536,12 @@
                   <a:srgbClr val="333333"/>
                 </a:solidFill>
                 <a:latin typeface="Arial"/>
-                <a:cs typeface="Arial"/>
-                <a:ea typeface="Calibri"/>
-              </a:rPr>
-              <a:t>• 3. أي نمط يناسب مؤسسة كبيرة بفرق مستقلة وملكية لامركزية؟</a:t>
-            </a:r>
-          </a:p>
-          <a:p>
-            <a:pPr algn="r" rtl="0">
+              </a:rPr>
+              <a:t>• توثيق Apache Parquet.</a:t>
+            </a:r>
+          </a:p>
+          <a:p>
+            <a:pPr algn="l" rtl="0">
               <a:spcBef>
                 <a:spcPts val="200"/>
               </a:spcBef>
@@ -3764,52 +3555,8 @@
                   <a:srgbClr val="666666"/>
                 </a:solidFill>
                 <a:latin typeface="Calibri"/>
-                <a:cs typeface="Arial"/>
-                <a:ea typeface="Calibri"/>
-              </a:rPr>
-              <a:t>• Which pattern suits a large organization with independent, decentralized teams?</a:t>
-            </a:r>
-          </a:p>
-          <a:p>
-            <a:pPr algn="r" rtl="1">
-              <a:spcBef>
-                <a:spcPts val="200"/>
-              </a:spcBef>
-              <a:spcAft>
-                <a:spcPts val="1000"/>
-              </a:spcAft>
-            </a:pPr>
-            <a:r>
-              <a:rPr sz="2000">
-                <a:solidFill>
-                  <a:srgbClr val="333333"/>
-                </a:solidFill>
-                <a:latin typeface="Arial"/>
-                <a:cs typeface="Arial"/>
-                <a:ea typeface="Calibri"/>
-              </a:rPr>
-              <a:t>• 4. ما التنسيق الأنسب للتحليلات عالية الأداء ولماذا؟</a:t>
-            </a:r>
-          </a:p>
-          <a:p>
-            <a:pPr algn="r" rtl="0">
-              <a:spcBef>
-                <a:spcPts val="200"/>
-              </a:spcBef>
-              <a:spcAft>
-                <a:spcPts val="1000"/>
-              </a:spcAft>
-            </a:pPr>
-            <a:r>
-              <a:rPr sz="1700">
-                <a:solidFill>
-                  <a:srgbClr val="666666"/>
-                </a:solidFill>
-                <a:latin typeface="Calibri"/>
-                <a:cs typeface="Arial"/>
-                <a:ea typeface="Calibri"/>
-              </a:rPr>
-              <a:t>• Which format suits high-performance analytics and why?</a:t>
+              </a:rPr>
+              <a:t>• Apache Parquet documentation.</a:t>
             </a:r>
           </a:p>
         </p:txBody>
@@ -3843,8 +3590,6 @@
                   <a:srgbClr val="666666"/>
                 </a:solidFill>
                 <a:latin typeface="Arial"/>
-                <a:cs typeface="Arial"/>
-                <a:ea typeface="Calibri"/>
               </a:rPr>
               <a:t>Module 02 — Data &amp; AI Engineering Track  |  الوحدة الثانية</a:t>
             </a:r>
@@ -3880,158 +3625,8 @@
                   <a:srgbClr val="666666"/>
                 </a:solidFill>
                 <a:latin typeface="Calibri"/>
-                <a:cs typeface="Arial"/>
-                <a:ea typeface="Calibri"/>
-              </a:rPr>
-              <a:t>V06  •  8/13</a:t>
-            </a:r>
-          </a:p>
-        </p:txBody>
-      </p:sp>
-      <p:sp>
-        <p:nvSpPr>
-          <p:cNvPr id="7" name="TextBox 6"/>
-          <p:cNvSpPr txBox="1"/>
-          <p:nvPr/>
-        </p:nvSpPr>
-        <p:spPr>
-          <a:xfrm>
-            <a:off x="640080" y="6400800"/>
-            <a:ext cx="8686800" cy="320040"/>
-          </a:xfrm>
-          <a:prstGeom prst="rect">
-            <a:avLst/>
-          </a:prstGeom>
-          <a:noFill/>
-        </p:spPr>
-        <p:txBody>
-          <a:bodyPr wrap="square">
-            <a:spAutoFit/>
-          </a:bodyPr>
-          <a:lstStyle/>
-          <a:p>
-            <a:pPr algn="r" rtl="1"/>
-            <a:r>
-              <a:rPr sz="1000" b="0">
-                <a:solidFill>
-                  <a:srgbClr val="666666"/>
-                </a:solidFill>
-                <a:latin typeface="Arial"/>
-                <a:cs typeface="Arial"/>
-                <a:ea typeface="Calibri"/>
-              </a:rPr>
-              <a:t>Module 02 — Data &amp; AI Engineering Track  |  الوحدة الثانية</a:t>
-            </a:r>
-          </a:p>
-        </p:txBody>
-      </p:sp>
-      <p:sp>
-        <p:nvSpPr>
-          <p:cNvPr id="8" name="TextBox 7"/>
-          <p:cNvSpPr txBox="1"/>
-          <p:nvPr/>
-        </p:nvSpPr>
-        <p:spPr>
-          <a:xfrm>
-            <a:off x="9601200" y="6400800"/>
-            <a:ext cx="1920240" cy="320040"/>
-          </a:xfrm>
-          <a:prstGeom prst="rect">
-            <a:avLst/>
-          </a:prstGeom>
-          <a:noFill/>
-        </p:spPr>
-        <p:txBody>
-          <a:bodyPr wrap="square">
-            <a:spAutoFit/>
-          </a:bodyPr>
-          <a:lstStyle/>
-          <a:p>
-            <a:pPr algn="l" rtl="0"/>
-            <a:r>
-              <a:rPr sz="1000" b="0">
-                <a:solidFill>
-                  <a:srgbClr val="666666"/>
-                </a:solidFill>
-                <a:latin typeface="Calibri"/>
-                <a:cs typeface="Arial"/>
-                <a:ea typeface="Calibri"/>
-              </a:rPr>
-              <a:t>06_  •  10/12</a:t>
-            </a:r>
-          </a:p>
-        </p:txBody>
-      </p:sp>
-      <p:sp>
-        <p:nvSpPr>
-          <p:cNvPr id="9" name="TextBox 8"/>
-          <p:cNvSpPr txBox="1"/>
-          <p:nvPr/>
-        </p:nvSpPr>
-        <p:spPr>
-          <a:xfrm>
-            <a:off x="640080" y="6400800"/>
-            <a:ext cx="8686800" cy="320040"/>
-          </a:xfrm>
-          <a:prstGeom prst="rect">
-            <a:avLst/>
-          </a:prstGeom>
-          <a:noFill/>
-        </p:spPr>
-        <p:txBody>
-          <a:bodyPr wrap="square">
-            <a:spAutoFit/>
-          </a:bodyPr>
-          <a:lstStyle/>
-          <a:p>
-            <a:pPr algn="r" rtl="1"/>
-            <a:r>
-              <a:rPr sz="1000" b="0">
-                <a:solidFill>
-                  <a:srgbClr val="666666"/>
-                </a:solidFill>
-                <a:latin typeface="Arial"/>
-                <a:cs typeface="Arial"/>
-                <a:ea typeface="Calibri"/>
-              </a:rPr>
-              <a:t>Module 02 — Data &amp; AI Engineering Track  |  الوحدة الثانية</a:t>
-            </a:r>
-          </a:p>
-        </p:txBody>
-      </p:sp>
-      <p:sp>
-        <p:nvSpPr>
-          <p:cNvPr id="10" name="TextBox 9"/>
-          <p:cNvSpPr txBox="1"/>
-          <p:nvPr/>
-        </p:nvSpPr>
-        <p:spPr>
-          <a:xfrm>
-            <a:off x="9601200" y="6400800"/>
-            <a:ext cx="1920240" cy="320040"/>
-          </a:xfrm>
-          <a:prstGeom prst="rect">
-            <a:avLst/>
-          </a:prstGeom>
-          <a:noFill/>
-        </p:spPr>
-        <p:txBody>
-          <a:bodyPr wrap="square">
-            <a:spAutoFit/>
-          </a:bodyPr>
-          <a:lstStyle/>
-          <a:p>
-            <a:pPr algn="l" rtl="0"/>
-            <a:r>
-              <a:rPr sz="1000" b="0">
-                <a:solidFill>
-                  <a:srgbClr val="666666"/>
-                </a:solidFill>
-                <a:latin typeface="Calibri"/>
-                <a:cs typeface="Arial"/>
-                <a:ea typeface="Calibri"/>
-              </a:rPr>
-              <a:t>06_  •  10/12</a:t>
+              </a:rPr>
+              <a:t>V06  •  12/12</a:t>
             </a:r>
           </a:p>
         </p:txBody>
@@ -4064,22 +3659,57 @@
       <p:grpSpPr/>
       <p:sp>
         <p:nvSpPr>
-          <p:cNvPr id="2" name="Rectangle 1"/>
-          <p:cNvSpPr/>
+          <p:cNvPr id="2" name="TextBox 1"/>
+          <p:cNvSpPr txBox="1"/>
           <p:nvPr/>
         </p:nvSpPr>
         <p:spPr>
           <a:xfrm>
-            <a:off x="0" y="0"/>
-            <a:ext cx="12191695" cy="1005840"/>
+            <a:off x="640080" y="137160"/>
+            <a:ext cx="10972800" cy="640080"/>
           </a:xfrm>
           <a:prstGeom prst="rect">
             <a:avLst/>
           </a:prstGeom>
+          <a:noFill/>
+        </p:spPr>
+        <p:txBody>
+          <a:bodyPr wrap="none">
+            <a:spAutoFit/>
+          </a:bodyPr>
+          <a:lstStyle/>
+          <a:p>
+            <a:pPr algn="r" rtl="1"/>
+            <a:r>
+              <a:rPr sz="3000" b="1">
+                <a:solidFill>
+                  <a:srgbClr val="1F3B5C"/>
+                </a:solidFill>
+                <a:latin typeface="Arial"/>
+              </a:rPr>
+              <a:t>خريطة المسار / Track Roadmap</a:t>
+            </a:r>
+          </a:p>
+        </p:txBody>
+      </p:sp>
+      <p:sp>
+        <p:nvSpPr>
+          <p:cNvPr id="3" name="Rounded Rectangle 2"/>
+          <p:cNvSpPr/>
+          <p:nvPr/>
+        </p:nvSpPr>
+        <p:spPr>
+          <a:xfrm>
+            <a:off x="502920" y="2377440"/>
+            <a:ext cx="1234440" cy="1371600"/>
+          </a:xfrm>
+          <a:prstGeom prst="roundRect">
+            <a:avLst/>
+          </a:prstGeom>
           <a:solidFill>
-            <a:srgbClr val="FFFFFF"/>
+            <a:srgbClr val="DCE6F1"/>
           </a:solidFill>
-          <a:ln w="25400">
+          <a:ln w="12700">
             <a:solidFill>
               <a:srgbClr val="1F4E79"/>
             </a:solidFill>
@@ -4101,6 +3731,71 @@
           </a:fontRef>
         </p:style>
         <p:txBody>
+          <a:bodyPr rtlCol="0" anchor="ctr" wrap="square"/>
+          <a:lstStyle/>
+          <a:p>
+            <a:pPr algn="ctr" rtl="1"/>
+            <a:r>
+              <a:rPr sz="1400" b="1">
+                <a:solidFill>
+                  <a:srgbClr val="333333"/>
+                </a:solidFill>
+                <a:latin typeface="Arial"/>
+              </a:rPr>
+              <a:t>البيانات</a:t>
+            </a:r>
+          </a:p>
+          <a:p>
+            <a:pPr algn="ctr" rtl="0"/>
+            <a:r>
+              <a:rPr sz="1000">
+                <a:solidFill>
+                  <a:srgbClr val="666666"/>
+                </a:solidFill>
+                <a:latin typeface="Calibri"/>
+              </a:rPr>
+              <a:t>Data</a:t>
+            </a:r>
+          </a:p>
+        </p:txBody>
+      </p:sp>
+      <p:sp>
+        <p:nvSpPr>
+          <p:cNvPr id="4" name="Left Arrow 3"/>
+          <p:cNvSpPr/>
+          <p:nvPr/>
+        </p:nvSpPr>
+        <p:spPr>
+          <a:xfrm>
+            <a:off x="1746504" y="2926080"/>
+            <a:ext cx="128016" cy="274320"/>
+          </a:xfrm>
+          <a:prstGeom prst="leftArrow">
+            <a:avLst/>
+          </a:prstGeom>
+          <a:solidFill>
+            <a:srgbClr val="1F4E79"/>
+          </a:solidFill>
+          <a:ln>
+            <a:noFill/>
+          </a:ln>
+          <a:effectLst/>
+        </p:spPr>
+        <p:style>
+          <a:lnRef idx="1">
+            <a:schemeClr val="accent1"/>
+          </a:lnRef>
+          <a:fillRef idx="3">
+            <a:schemeClr val="accent1"/>
+          </a:fillRef>
+          <a:effectRef idx="2">
+            <a:schemeClr val="accent1"/>
+          </a:effectRef>
+          <a:fontRef idx="minor">
+            <a:schemeClr val="lt1"/>
+          </a:fontRef>
+        </p:style>
+        <p:txBody>
           <a:bodyPr rtlCol="0" anchor="ctr"/>
           <a:lstStyle/>
           <a:p>
@@ -4110,14 +3805,747 @@
       </p:sp>
       <p:sp>
         <p:nvSpPr>
-          <p:cNvPr id="3" name="TextBox 2"/>
+          <p:cNvPr id="5" name="Rounded Rectangle 4"/>
+          <p:cNvSpPr/>
+          <p:nvPr/>
+        </p:nvSpPr>
+        <p:spPr>
+          <a:xfrm>
+            <a:off x="1883664" y="2377440"/>
+            <a:ext cx="1234440" cy="1371600"/>
+          </a:xfrm>
+          <a:prstGeom prst="roundRect">
+            <a:avLst/>
+          </a:prstGeom>
+          <a:solidFill>
+            <a:srgbClr val="E2EFDA"/>
+          </a:solidFill>
+          <a:ln w="12700">
+            <a:solidFill>
+              <a:srgbClr val="1F4E79"/>
+            </a:solidFill>
+          </a:ln>
+          <a:effectLst/>
+        </p:spPr>
+        <p:style>
+          <a:lnRef idx="1">
+            <a:schemeClr val="accent1"/>
+          </a:lnRef>
+          <a:fillRef idx="3">
+            <a:schemeClr val="accent1"/>
+          </a:fillRef>
+          <a:effectRef idx="2">
+            <a:schemeClr val="accent1"/>
+          </a:effectRef>
+          <a:fontRef idx="minor">
+            <a:schemeClr val="lt1"/>
+          </a:fontRef>
+        </p:style>
+        <p:txBody>
+          <a:bodyPr rtlCol="0" anchor="ctr" wrap="square"/>
+          <a:lstStyle/>
+          <a:p>
+            <a:pPr algn="ctr" rtl="1"/>
+            <a:r>
+              <a:rPr sz="1400" b="1">
+                <a:solidFill>
+                  <a:srgbClr val="333333"/>
+                </a:solidFill>
+                <a:latin typeface="Arial"/>
+              </a:rPr>
+              <a:t>التخزين</a:t>
+            </a:r>
+          </a:p>
+          <a:p>
+            <a:pPr algn="ctr" rtl="0"/>
+            <a:r>
+              <a:rPr sz="1000">
+                <a:solidFill>
+                  <a:srgbClr val="666666"/>
+                </a:solidFill>
+                <a:latin typeface="Calibri"/>
+              </a:rPr>
+              <a:t>Storage</a:t>
+            </a:r>
+          </a:p>
+        </p:txBody>
+      </p:sp>
+      <p:sp>
+        <p:nvSpPr>
+          <p:cNvPr id="6" name="Left Arrow 5"/>
+          <p:cNvSpPr/>
+          <p:nvPr/>
+        </p:nvSpPr>
+        <p:spPr>
+          <a:xfrm>
+            <a:off x="3127248" y="2926080"/>
+            <a:ext cx="128016" cy="274320"/>
+          </a:xfrm>
+          <a:prstGeom prst="leftArrow">
+            <a:avLst/>
+          </a:prstGeom>
+          <a:solidFill>
+            <a:srgbClr val="1F4E79"/>
+          </a:solidFill>
+          <a:ln>
+            <a:noFill/>
+          </a:ln>
+          <a:effectLst/>
+        </p:spPr>
+        <p:style>
+          <a:lnRef idx="1">
+            <a:schemeClr val="accent1"/>
+          </a:lnRef>
+          <a:fillRef idx="3">
+            <a:schemeClr val="accent1"/>
+          </a:fillRef>
+          <a:effectRef idx="2">
+            <a:schemeClr val="accent1"/>
+          </a:effectRef>
+          <a:fontRef idx="minor">
+            <a:schemeClr val="lt1"/>
+          </a:fontRef>
+        </p:style>
+        <p:txBody>
+          <a:bodyPr rtlCol="0" anchor="ctr"/>
+          <a:lstStyle/>
+          <a:p>
+            <a:pPr algn="ctr"/>
+          </a:p>
+        </p:txBody>
+      </p:sp>
+      <p:sp>
+        <p:nvSpPr>
+          <p:cNvPr id="7" name="Rounded Rectangle 6"/>
+          <p:cNvSpPr/>
+          <p:nvPr/>
+        </p:nvSpPr>
+        <p:spPr>
+          <a:xfrm>
+            <a:off x="3264408" y="2377440"/>
+            <a:ext cx="1234440" cy="1371600"/>
+          </a:xfrm>
+          <a:prstGeom prst="roundRect">
+            <a:avLst/>
+          </a:prstGeom>
+          <a:solidFill>
+            <a:srgbClr val="FDE9D9"/>
+          </a:solidFill>
+          <a:ln w="12700">
+            <a:solidFill>
+              <a:srgbClr val="1F4E79"/>
+            </a:solidFill>
+          </a:ln>
+          <a:effectLst/>
+        </p:spPr>
+        <p:style>
+          <a:lnRef idx="1">
+            <a:schemeClr val="accent1"/>
+          </a:lnRef>
+          <a:fillRef idx="3">
+            <a:schemeClr val="accent1"/>
+          </a:fillRef>
+          <a:effectRef idx="2">
+            <a:schemeClr val="accent1"/>
+          </a:effectRef>
+          <a:fontRef idx="minor">
+            <a:schemeClr val="lt1"/>
+          </a:fontRef>
+        </p:style>
+        <p:txBody>
+          <a:bodyPr rtlCol="0" anchor="ctr" wrap="square"/>
+          <a:lstStyle/>
+          <a:p>
+            <a:pPr algn="ctr" rtl="1"/>
+            <a:r>
+              <a:rPr sz="1400" b="1">
+                <a:solidFill>
+                  <a:srgbClr val="333333"/>
+                </a:solidFill>
+                <a:latin typeface="Arial"/>
+              </a:rPr>
+              <a:t>الخصائص</a:t>
+            </a:r>
+          </a:p>
+          <a:p>
+            <a:pPr algn="ctr" rtl="0"/>
+            <a:r>
+              <a:rPr sz="1000">
+                <a:solidFill>
+                  <a:srgbClr val="666666"/>
+                </a:solidFill>
+                <a:latin typeface="Calibri"/>
+              </a:rPr>
+              <a:t>Features</a:t>
+            </a:r>
+          </a:p>
+        </p:txBody>
+      </p:sp>
+      <p:sp>
+        <p:nvSpPr>
+          <p:cNvPr id="8" name="Left Arrow 7"/>
+          <p:cNvSpPr/>
+          <p:nvPr/>
+        </p:nvSpPr>
+        <p:spPr>
+          <a:xfrm>
+            <a:off x="4507992" y="2926080"/>
+            <a:ext cx="128016" cy="274320"/>
+          </a:xfrm>
+          <a:prstGeom prst="leftArrow">
+            <a:avLst/>
+          </a:prstGeom>
+          <a:solidFill>
+            <a:srgbClr val="1F4E79"/>
+          </a:solidFill>
+          <a:ln>
+            <a:noFill/>
+          </a:ln>
+          <a:effectLst/>
+        </p:spPr>
+        <p:style>
+          <a:lnRef idx="1">
+            <a:schemeClr val="accent1"/>
+          </a:lnRef>
+          <a:fillRef idx="3">
+            <a:schemeClr val="accent1"/>
+          </a:fillRef>
+          <a:effectRef idx="2">
+            <a:schemeClr val="accent1"/>
+          </a:effectRef>
+          <a:fontRef idx="minor">
+            <a:schemeClr val="lt1"/>
+          </a:fontRef>
+        </p:style>
+        <p:txBody>
+          <a:bodyPr rtlCol="0" anchor="ctr"/>
+          <a:lstStyle/>
+          <a:p>
+            <a:pPr algn="ctr"/>
+          </a:p>
+        </p:txBody>
+      </p:sp>
+      <p:sp>
+        <p:nvSpPr>
+          <p:cNvPr id="9" name="Rounded Rectangle 8"/>
+          <p:cNvSpPr/>
+          <p:nvPr/>
+        </p:nvSpPr>
+        <p:spPr>
+          <a:xfrm>
+            <a:off x="4645152" y="2377440"/>
+            <a:ext cx="1234440" cy="1371600"/>
+          </a:xfrm>
+          <a:prstGeom prst="roundRect">
+            <a:avLst/>
+          </a:prstGeom>
+          <a:solidFill>
+            <a:srgbClr val="EDEDED"/>
+          </a:solidFill>
+          <a:ln w="12700">
+            <a:solidFill>
+              <a:srgbClr val="1F4E79"/>
+            </a:solidFill>
+          </a:ln>
+          <a:effectLst/>
+        </p:spPr>
+        <p:style>
+          <a:lnRef idx="1">
+            <a:schemeClr val="accent1"/>
+          </a:lnRef>
+          <a:fillRef idx="3">
+            <a:schemeClr val="accent1"/>
+          </a:fillRef>
+          <a:effectRef idx="2">
+            <a:schemeClr val="accent1"/>
+          </a:effectRef>
+          <a:fontRef idx="minor">
+            <a:schemeClr val="lt1"/>
+          </a:fontRef>
+        </p:style>
+        <p:txBody>
+          <a:bodyPr rtlCol="0" anchor="ctr" wrap="square"/>
+          <a:lstStyle/>
+          <a:p>
+            <a:pPr algn="ctr" rtl="1"/>
+            <a:r>
+              <a:rPr sz="1400" b="1">
+                <a:solidFill>
+                  <a:srgbClr val="333333"/>
+                </a:solidFill>
+                <a:latin typeface="Arial"/>
+              </a:rPr>
+              <a:t>الفهارس المتجهية</a:t>
+            </a:r>
+          </a:p>
+          <a:p>
+            <a:pPr algn="ctr" rtl="0"/>
+            <a:r>
+              <a:rPr sz="1000">
+                <a:solidFill>
+                  <a:srgbClr val="666666"/>
+                </a:solidFill>
+                <a:latin typeface="Calibri"/>
+              </a:rPr>
+              <a:t>Vector Indexes</a:t>
+            </a:r>
+          </a:p>
+        </p:txBody>
+      </p:sp>
+      <p:sp>
+        <p:nvSpPr>
+          <p:cNvPr id="10" name="Left Arrow 9"/>
+          <p:cNvSpPr/>
+          <p:nvPr/>
+        </p:nvSpPr>
+        <p:spPr>
+          <a:xfrm>
+            <a:off x="5888736" y="2926080"/>
+            <a:ext cx="128016" cy="274320"/>
+          </a:xfrm>
+          <a:prstGeom prst="leftArrow">
+            <a:avLst/>
+          </a:prstGeom>
+          <a:solidFill>
+            <a:srgbClr val="1F4E79"/>
+          </a:solidFill>
+          <a:ln>
+            <a:noFill/>
+          </a:ln>
+          <a:effectLst/>
+        </p:spPr>
+        <p:style>
+          <a:lnRef idx="1">
+            <a:schemeClr val="accent1"/>
+          </a:lnRef>
+          <a:fillRef idx="3">
+            <a:schemeClr val="accent1"/>
+          </a:fillRef>
+          <a:effectRef idx="2">
+            <a:schemeClr val="accent1"/>
+          </a:effectRef>
+          <a:fontRef idx="minor">
+            <a:schemeClr val="lt1"/>
+          </a:fontRef>
+        </p:style>
+        <p:txBody>
+          <a:bodyPr rtlCol="0" anchor="ctr"/>
+          <a:lstStyle/>
+          <a:p>
+            <a:pPr algn="ctr"/>
+          </a:p>
+        </p:txBody>
+      </p:sp>
+      <p:sp>
+        <p:nvSpPr>
+          <p:cNvPr id="11" name="Rounded Rectangle 10"/>
+          <p:cNvSpPr/>
+          <p:nvPr/>
+        </p:nvSpPr>
+        <p:spPr>
+          <a:xfrm>
+            <a:off x="6025896" y="2377440"/>
+            <a:ext cx="1234440" cy="1371600"/>
+          </a:xfrm>
+          <a:prstGeom prst="roundRect">
+            <a:avLst/>
+          </a:prstGeom>
+          <a:solidFill>
+            <a:srgbClr val="DCE6F1"/>
+          </a:solidFill>
+          <a:ln w="12700">
+            <a:solidFill>
+              <a:srgbClr val="1F4E79"/>
+            </a:solidFill>
+          </a:ln>
+          <a:effectLst/>
+        </p:spPr>
+        <p:style>
+          <a:lnRef idx="1">
+            <a:schemeClr val="accent1"/>
+          </a:lnRef>
+          <a:fillRef idx="3">
+            <a:schemeClr val="accent1"/>
+          </a:fillRef>
+          <a:effectRef idx="2">
+            <a:schemeClr val="accent1"/>
+          </a:effectRef>
+          <a:fontRef idx="minor">
+            <a:schemeClr val="lt1"/>
+          </a:fontRef>
+        </p:style>
+        <p:txBody>
+          <a:bodyPr rtlCol="0" anchor="ctr" wrap="square"/>
+          <a:lstStyle/>
+          <a:p>
+            <a:pPr algn="ctr" rtl="1"/>
+            <a:r>
+              <a:rPr sz="1400" b="1">
+                <a:solidFill>
+                  <a:srgbClr val="333333"/>
+                </a:solidFill>
+                <a:latin typeface="Arial"/>
+              </a:rPr>
+              <a:t>التصنيف</a:t>
+            </a:r>
+          </a:p>
+          <a:p>
+            <a:pPr algn="ctr" rtl="0"/>
+            <a:r>
+              <a:rPr sz="1000">
+                <a:solidFill>
+                  <a:srgbClr val="666666"/>
+                </a:solidFill>
+                <a:latin typeface="Calibri"/>
+              </a:rPr>
+              <a:t>Labeling</a:t>
+            </a:r>
+          </a:p>
+        </p:txBody>
+      </p:sp>
+      <p:sp>
+        <p:nvSpPr>
+          <p:cNvPr id="12" name="Left Arrow 11"/>
+          <p:cNvSpPr/>
+          <p:nvPr/>
+        </p:nvSpPr>
+        <p:spPr>
+          <a:xfrm>
+            <a:off x="7269480" y="2926080"/>
+            <a:ext cx="128016" cy="274320"/>
+          </a:xfrm>
+          <a:prstGeom prst="leftArrow">
+            <a:avLst/>
+          </a:prstGeom>
+          <a:solidFill>
+            <a:srgbClr val="1F4E79"/>
+          </a:solidFill>
+          <a:ln>
+            <a:noFill/>
+          </a:ln>
+          <a:effectLst/>
+        </p:spPr>
+        <p:style>
+          <a:lnRef idx="1">
+            <a:schemeClr val="accent1"/>
+          </a:lnRef>
+          <a:fillRef idx="3">
+            <a:schemeClr val="accent1"/>
+          </a:fillRef>
+          <a:effectRef idx="2">
+            <a:schemeClr val="accent1"/>
+          </a:effectRef>
+          <a:fontRef idx="minor">
+            <a:schemeClr val="lt1"/>
+          </a:fontRef>
+        </p:style>
+        <p:txBody>
+          <a:bodyPr rtlCol="0" anchor="ctr"/>
+          <a:lstStyle/>
+          <a:p>
+            <a:pPr algn="ctr"/>
+          </a:p>
+        </p:txBody>
+      </p:sp>
+      <p:sp>
+        <p:nvSpPr>
+          <p:cNvPr id="13" name="Rounded Rectangle 12"/>
+          <p:cNvSpPr/>
+          <p:nvPr/>
+        </p:nvSpPr>
+        <p:spPr>
+          <a:xfrm>
+            <a:off x="7406640" y="2377440"/>
+            <a:ext cx="1234440" cy="1371600"/>
+          </a:xfrm>
+          <a:prstGeom prst="roundRect">
+            <a:avLst/>
+          </a:prstGeom>
+          <a:solidFill>
+            <a:srgbClr val="E2EFDA"/>
+          </a:solidFill>
+          <a:ln w="12700">
+            <a:solidFill>
+              <a:srgbClr val="1F4E79"/>
+            </a:solidFill>
+          </a:ln>
+          <a:effectLst/>
+        </p:spPr>
+        <p:style>
+          <a:lnRef idx="1">
+            <a:schemeClr val="accent1"/>
+          </a:lnRef>
+          <a:fillRef idx="3">
+            <a:schemeClr val="accent1"/>
+          </a:fillRef>
+          <a:effectRef idx="2">
+            <a:schemeClr val="accent1"/>
+          </a:effectRef>
+          <a:fontRef idx="minor">
+            <a:schemeClr val="lt1"/>
+          </a:fontRef>
+        </p:style>
+        <p:txBody>
+          <a:bodyPr rtlCol="0" anchor="ctr" wrap="square"/>
+          <a:lstStyle/>
+          <a:p>
+            <a:pPr algn="ctr" rtl="1"/>
+            <a:r>
+              <a:rPr sz="1400" b="1">
+                <a:solidFill>
+                  <a:srgbClr val="333333"/>
+                </a:solidFill>
+                <a:latin typeface="Arial"/>
+              </a:rPr>
+              <a:t>الحوكمة</a:t>
+            </a:r>
+          </a:p>
+          <a:p>
+            <a:pPr algn="ctr" rtl="0"/>
+            <a:r>
+              <a:rPr sz="1000">
+                <a:solidFill>
+                  <a:srgbClr val="666666"/>
+                </a:solidFill>
+                <a:latin typeface="Calibri"/>
+              </a:rPr>
+              <a:t>Governance</a:t>
+            </a:r>
+          </a:p>
+        </p:txBody>
+      </p:sp>
+      <p:sp>
+        <p:nvSpPr>
+          <p:cNvPr id="14" name="Left Arrow 13"/>
+          <p:cNvSpPr/>
+          <p:nvPr/>
+        </p:nvSpPr>
+        <p:spPr>
+          <a:xfrm>
+            <a:off x="8650224" y="2926080"/>
+            <a:ext cx="128016" cy="274320"/>
+          </a:xfrm>
+          <a:prstGeom prst="leftArrow">
+            <a:avLst/>
+          </a:prstGeom>
+          <a:solidFill>
+            <a:srgbClr val="1F4E79"/>
+          </a:solidFill>
+          <a:ln>
+            <a:noFill/>
+          </a:ln>
+          <a:effectLst/>
+        </p:spPr>
+        <p:style>
+          <a:lnRef idx="1">
+            <a:schemeClr val="accent1"/>
+          </a:lnRef>
+          <a:fillRef idx="3">
+            <a:schemeClr val="accent1"/>
+          </a:fillRef>
+          <a:effectRef idx="2">
+            <a:schemeClr val="accent1"/>
+          </a:effectRef>
+          <a:fontRef idx="minor">
+            <a:schemeClr val="lt1"/>
+          </a:fontRef>
+        </p:style>
+        <p:txBody>
+          <a:bodyPr rtlCol="0" anchor="ctr"/>
+          <a:lstStyle/>
+          <a:p>
+            <a:pPr algn="ctr"/>
+          </a:p>
+        </p:txBody>
+      </p:sp>
+      <p:sp>
+        <p:nvSpPr>
+          <p:cNvPr id="15" name="Rounded Rectangle 14"/>
+          <p:cNvSpPr/>
+          <p:nvPr/>
+        </p:nvSpPr>
+        <p:spPr>
+          <a:xfrm>
+            <a:off x="8787384" y="2377440"/>
+            <a:ext cx="1234440" cy="1371600"/>
+          </a:xfrm>
+          <a:prstGeom prst="roundRect">
+            <a:avLst/>
+          </a:prstGeom>
+          <a:solidFill>
+            <a:srgbClr val="FDE9D9"/>
+          </a:solidFill>
+          <a:ln w="12700">
+            <a:solidFill>
+              <a:srgbClr val="1F4E79"/>
+            </a:solidFill>
+          </a:ln>
+          <a:effectLst/>
+        </p:spPr>
+        <p:style>
+          <a:lnRef idx="1">
+            <a:schemeClr val="accent1"/>
+          </a:lnRef>
+          <a:fillRef idx="3">
+            <a:schemeClr val="accent1"/>
+          </a:fillRef>
+          <a:effectRef idx="2">
+            <a:schemeClr val="accent1"/>
+          </a:effectRef>
+          <a:fontRef idx="minor">
+            <a:schemeClr val="lt1"/>
+          </a:fontRef>
+        </p:style>
+        <p:txBody>
+          <a:bodyPr rtlCol="0" anchor="ctr" wrap="square"/>
+          <a:lstStyle/>
+          <a:p>
+            <a:pPr algn="ctr" rtl="1"/>
+            <a:r>
+              <a:rPr sz="1400" b="1">
+                <a:solidFill>
+                  <a:srgbClr val="333333"/>
+                </a:solidFill>
+                <a:latin typeface="Arial"/>
+              </a:rPr>
+              <a:t>MLOps</a:t>
+            </a:r>
+          </a:p>
+          <a:p>
+            <a:pPr algn="ctr" rtl="0"/>
+            <a:r>
+              <a:rPr sz="1000">
+                <a:solidFill>
+                  <a:srgbClr val="666666"/>
+                </a:solidFill>
+                <a:latin typeface="Calibri"/>
+              </a:rPr>
+              <a:t>MLOps</a:t>
+            </a:r>
+          </a:p>
+        </p:txBody>
+      </p:sp>
+      <p:sp>
+        <p:nvSpPr>
+          <p:cNvPr id="16" name="Left Arrow 15"/>
+          <p:cNvSpPr/>
+          <p:nvPr/>
+        </p:nvSpPr>
+        <p:spPr>
+          <a:xfrm>
+            <a:off x="10030968" y="2926080"/>
+            <a:ext cx="128016" cy="274320"/>
+          </a:xfrm>
+          <a:prstGeom prst="leftArrow">
+            <a:avLst/>
+          </a:prstGeom>
+          <a:solidFill>
+            <a:srgbClr val="1F4E79"/>
+          </a:solidFill>
+          <a:ln>
+            <a:noFill/>
+          </a:ln>
+          <a:effectLst/>
+        </p:spPr>
+        <p:style>
+          <a:lnRef idx="1">
+            <a:schemeClr val="accent1"/>
+          </a:lnRef>
+          <a:fillRef idx="3">
+            <a:schemeClr val="accent1"/>
+          </a:fillRef>
+          <a:effectRef idx="2">
+            <a:schemeClr val="accent1"/>
+          </a:effectRef>
+          <a:fontRef idx="minor">
+            <a:schemeClr val="lt1"/>
+          </a:fontRef>
+        </p:style>
+        <p:txBody>
+          <a:bodyPr rtlCol="0" anchor="ctr"/>
+          <a:lstStyle/>
+          <a:p>
+            <a:pPr algn="ctr"/>
+          </a:p>
+        </p:txBody>
+      </p:sp>
+      <p:sp>
+        <p:nvSpPr>
+          <p:cNvPr id="17" name="Rounded Rectangle 16"/>
+          <p:cNvSpPr/>
+          <p:nvPr/>
+        </p:nvSpPr>
+        <p:spPr>
+          <a:xfrm>
+            <a:off x="10168128" y="2377440"/>
+            <a:ext cx="1234440" cy="1371600"/>
+          </a:xfrm>
+          <a:prstGeom prst="roundRect">
+            <a:avLst/>
+          </a:prstGeom>
+          <a:solidFill>
+            <a:srgbClr val="EDEDED"/>
+          </a:solidFill>
+          <a:ln w="12700">
+            <a:solidFill>
+              <a:srgbClr val="1F4E79"/>
+            </a:solidFill>
+          </a:ln>
+          <a:effectLst/>
+        </p:spPr>
+        <p:style>
+          <a:lnRef idx="1">
+            <a:schemeClr val="accent1"/>
+          </a:lnRef>
+          <a:fillRef idx="3">
+            <a:schemeClr val="accent1"/>
+          </a:fillRef>
+          <a:effectRef idx="2">
+            <a:schemeClr val="accent1"/>
+          </a:effectRef>
+          <a:fontRef idx="minor">
+            <a:schemeClr val="lt1"/>
+          </a:fontRef>
+        </p:style>
+        <p:txBody>
+          <a:bodyPr rtlCol="0" anchor="ctr" wrap="square"/>
+          <a:lstStyle/>
+          <a:p>
+            <a:pPr algn="ctr" rtl="1"/>
+            <a:r>
+              <a:rPr sz="1400" b="1">
+                <a:solidFill>
+                  <a:srgbClr val="333333"/>
+                </a:solidFill>
+                <a:latin typeface="Arial"/>
+              </a:rPr>
+              <a:t>المختبر</a:t>
+            </a:r>
+          </a:p>
+          <a:p>
+            <a:pPr algn="ctr" rtl="0"/>
+            <a:r>
+              <a:rPr sz="1000">
+                <a:solidFill>
+                  <a:srgbClr val="666666"/>
+                </a:solidFill>
+                <a:latin typeface="Calibri"/>
+              </a:rPr>
+              <a:t>Lab</a:t>
+            </a:r>
+          </a:p>
+        </p:txBody>
+      </p:sp>
+      <p:sp>
+        <p:nvSpPr>
+          <p:cNvPr id="18" name="TextBox 17"/>
           <p:cNvSpPr txBox="1"/>
           <p:nvPr/>
         </p:nvSpPr>
         <p:spPr>
           <a:xfrm>
-            <a:off x="640080" y="182880"/>
-            <a:ext cx="10972800" cy="640080"/>
+            <a:off x="640080" y="6126480"/>
+            <a:ext cx="10972800" cy="548640"/>
           </a:xfrm>
           <a:prstGeom prst="rect">
             <a:avLst/>
@@ -4132,29 +4560,33 @@
           <a:p>
             <a:pPr algn="r" rtl="1"/>
             <a:r>
-              <a:rPr sz="3200" b="1">
-                <a:solidFill>
-                  <a:srgbClr val="1F3B5C"/>
+              <a:rPr sz="1400">
+                <a:solidFill>
+                  <a:srgbClr val="666666"/>
                 </a:solidFill>
                 <a:latin typeface="Arial"/>
-                <a:cs typeface="Arial"/>
-                <a:ea typeface="Calibri"/>
-              </a:rPr>
-              <a:t>إجابات الاختبار / Quiz Answers</a:t>
-            </a:r>
-          </a:p>
-        </p:txBody>
-      </p:sp>
-      <p:sp>
-        <p:nvSpPr>
-          <p:cNvPr id="4" name="TextBox 3"/>
+              </a:rPr>
+              <a:t>رحلة الوحدة الثانية من البيانات الخام إلى نقطة نهاية RAG.</a:t>
+            </a:r>
+          </a:p>
+          <a:p>
+            <a:pPr algn="r" rtl="0"/>
+            <a:r>
+              <a:t>Module 02 journey: from raw data to a RAG endpoint.</a:t>
+            </a:r>
+          </a:p>
+        </p:txBody>
+      </p:sp>
+      <p:sp>
+        <p:nvSpPr>
+          <p:cNvPr id="19" name="TextBox 18"/>
           <p:cNvSpPr txBox="1"/>
           <p:nvPr/>
         </p:nvSpPr>
         <p:spPr>
           <a:xfrm>
-            <a:off x="640080" y="1280160"/>
-            <a:ext cx="10972800" cy="5212080"/>
+            <a:off x="640080" y="6400800"/>
+            <a:ext cx="8686800" cy="320040"/>
           </a:xfrm>
           <a:prstGeom prst="rect">
             <a:avLst/>
@@ -4167,185 +4599,29 @@
           </a:bodyPr>
           <a:lstStyle/>
           <a:p>
-            <a:pPr algn="r" rtl="1">
-              <a:spcBef>
-                <a:spcPts val="200"/>
-              </a:spcBef>
-              <a:spcAft>
-                <a:spcPts val="1000"/>
-              </a:spcAft>
-            </a:pPr>
-            <a:r>
-              <a:rPr sz="1800">
-                <a:solidFill>
-                  <a:srgbClr val="333333"/>
+            <a:pPr algn="r" rtl="1"/>
+            <a:r>
+              <a:rPr sz="1000" b="0">
+                <a:solidFill>
+                  <a:srgbClr val="666666"/>
                 </a:solidFill>
                 <a:latin typeface="Arial"/>
-                <a:cs typeface="Arial"/>
-                <a:ea typeface="Calibri"/>
-              </a:rPr>
-              <a:t>• 1. ETL يحوّل قبل التحميل؛ ELT يحمّل أولاً ثم يحوّل داخل المنصة الهدف.</a:t>
-            </a:r>
-          </a:p>
-          <a:p>
-            <a:pPr algn="r" rtl="0">
-              <a:spcBef>
-                <a:spcPts val="200"/>
-              </a:spcBef>
-              <a:spcAft>
-                <a:spcPts val="1000"/>
-              </a:spcAft>
-            </a:pPr>
-            <a:r>
-              <a:rPr sz="1500">
-                <a:solidFill>
-                  <a:srgbClr val="666666"/>
-                </a:solidFill>
-                <a:latin typeface="Calibri"/>
-                <a:cs typeface="Arial"/>
-                <a:ea typeface="Calibri"/>
-              </a:rPr>
-              <a:t>• ETL transforms before loading; ELT loads first and transforms inside the target platform.</a:t>
-            </a:r>
-          </a:p>
-          <a:p>
-            <a:pPr algn="r" rtl="1">
-              <a:spcBef>
-                <a:spcPts val="200"/>
-              </a:spcBef>
-              <a:spcAft>
-                <a:spcPts val="1000"/>
-              </a:spcAft>
-            </a:pPr>
-            <a:r>
-              <a:rPr sz="1800">
-                <a:solidFill>
-                  <a:srgbClr val="333333"/>
-                </a:solidFill>
-                <a:latin typeface="Arial"/>
-                <a:cs typeface="Arial"/>
-                <a:ea typeface="Calibri"/>
-              </a:rPr>
-              <a:t>• 2. تجميعات على مستوى الأعمال جاهزة للتحليل.</a:t>
-            </a:r>
-          </a:p>
-          <a:p>
-            <a:pPr algn="r" rtl="0">
-              <a:spcBef>
-                <a:spcPts val="200"/>
-              </a:spcBef>
-              <a:spcAft>
-                <a:spcPts val="1000"/>
-              </a:spcAft>
-            </a:pPr>
-            <a:r>
-              <a:rPr sz="1500">
-                <a:solidFill>
-                  <a:srgbClr val="666666"/>
-                </a:solidFill>
-                <a:latin typeface="Calibri"/>
-                <a:cs typeface="Arial"/>
-                <a:ea typeface="Calibri"/>
-              </a:rPr>
-              <a:t>• Business-level aggregates that are analytics-ready.</a:t>
-            </a:r>
-          </a:p>
-          <a:p>
-            <a:pPr algn="r" rtl="1">
-              <a:spcBef>
-                <a:spcPts val="200"/>
-              </a:spcBef>
-              <a:spcAft>
-                <a:spcPts val="1000"/>
-              </a:spcAft>
-            </a:pPr>
-            <a:r>
-              <a:rPr sz="1800">
-                <a:solidFill>
-                  <a:srgbClr val="333333"/>
-                </a:solidFill>
-                <a:latin typeface="Arial"/>
-                <a:cs typeface="Arial"/>
-                <a:ea typeface="Calibri"/>
-              </a:rPr>
-              <a:t>• 3. شبكة البيانات Data Mesh.</a:t>
-            </a:r>
-          </a:p>
-          <a:p>
-            <a:pPr algn="r" rtl="0">
-              <a:spcBef>
-                <a:spcPts val="200"/>
-              </a:spcBef>
-              <a:spcAft>
-                <a:spcPts val="1000"/>
-              </a:spcAft>
-            </a:pPr>
-            <a:r>
-              <a:rPr sz="1500">
-                <a:solidFill>
-                  <a:srgbClr val="666666"/>
-                </a:solidFill>
-                <a:latin typeface="Calibri"/>
-                <a:cs typeface="Arial"/>
-                <a:ea typeface="Calibri"/>
-              </a:rPr>
-              <a:t>• Data mesh.</a:t>
-            </a:r>
-          </a:p>
-          <a:p>
-            <a:pPr algn="r" rtl="1">
-              <a:spcBef>
-                <a:spcPts val="200"/>
-              </a:spcBef>
-              <a:spcAft>
-                <a:spcPts val="1000"/>
-              </a:spcAft>
-            </a:pPr>
-            <a:r>
-              <a:rPr sz="1800">
-                <a:solidFill>
-                  <a:srgbClr val="333333"/>
-                </a:solidFill>
-                <a:latin typeface="Arial"/>
-                <a:cs typeface="Arial"/>
-                <a:ea typeface="Calibri"/>
-              </a:rPr>
-              <a:t>• 4. Parquet — تنسيق عمودي يقلل الحجم ويسرّع القراءة.</a:t>
-            </a:r>
-          </a:p>
-          <a:p>
-            <a:pPr algn="r" rtl="0">
-              <a:spcBef>
-                <a:spcPts val="200"/>
-              </a:spcBef>
-              <a:spcAft>
-                <a:spcPts val="1000"/>
-              </a:spcAft>
-            </a:pPr>
-            <a:r>
-              <a:rPr sz="1500">
-                <a:solidFill>
-                  <a:srgbClr val="666666"/>
-                </a:solidFill>
-                <a:latin typeface="Calibri"/>
-                <a:cs typeface="Arial"/>
-                <a:ea typeface="Calibri"/>
-              </a:rPr>
-              <a:t>• Parquet — columnar, smaller and faster for analytical reads.</a:t>
-            </a:r>
-          </a:p>
-        </p:txBody>
-      </p:sp>
-      <p:sp>
-        <p:nvSpPr>
-          <p:cNvPr id="5" name="TextBox 4"/>
+              </a:rPr>
+              <a:t>Module 02 — Data &amp; AI Engineering Track  |  الوحدة الثانية</a:t>
+            </a:r>
+          </a:p>
+        </p:txBody>
+      </p:sp>
+      <p:sp>
+        <p:nvSpPr>
+          <p:cNvPr id="20" name="TextBox 19"/>
           <p:cNvSpPr txBox="1"/>
           <p:nvPr/>
         </p:nvSpPr>
         <p:spPr>
           <a:xfrm>
-            <a:off x="640080" y="6400800"/>
-            <a:ext cx="8686800" cy="320040"/>
+            <a:off x="9601200" y="6400800"/>
+            <a:ext cx="1920240" cy="320040"/>
           </a:xfrm>
           <a:prstGeom prst="rect">
             <a:avLst/>
@@ -4358,202 +4634,15 @@
           </a:bodyPr>
           <a:lstStyle/>
           <a:p>
-            <a:pPr algn="r" rtl="1"/>
+            <a:pPr algn="l" rtl="0"/>
             <a:r>
               <a:rPr sz="1000" b="0">
                 <a:solidFill>
                   <a:srgbClr val="666666"/>
                 </a:solidFill>
-                <a:latin typeface="Arial"/>
-                <a:cs typeface="Arial"/>
-                <a:ea typeface="Calibri"/>
-              </a:rPr>
-              <a:t>Module 02 — Data &amp; AI Engineering Track  |  الوحدة الثانية</a:t>
-            </a:r>
-          </a:p>
-        </p:txBody>
-      </p:sp>
-      <p:sp>
-        <p:nvSpPr>
-          <p:cNvPr id="6" name="TextBox 5"/>
-          <p:cNvSpPr txBox="1"/>
-          <p:nvPr/>
-        </p:nvSpPr>
-        <p:spPr>
-          <a:xfrm>
-            <a:off x="9601200" y="6400800"/>
-            <a:ext cx="1920240" cy="320040"/>
-          </a:xfrm>
-          <a:prstGeom prst="rect">
-            <a:avLst/>
-          </a:prstGeom>
-          <a:noFill/>
-        </p:spPr>
-        <p:txBody>
-          <a:bodyPr wrap="square">
-            <a:spAutoFit/>
-          </a:bodyPr>
-          <a:lstStyle/>
-          <a:p>
-            <a:pPr algn="l" rtl="0"/>
-            <a:r>
-              <a:rPr sz="1000" b="0">
-                <a:solidFill>
-                  <a:srgbClr val="666666"/>
-                </a:solidFill>
                 <a:latin typeface="Calibri"/>
-                <a:cs typeface="Arial"/>
-                <a:ea typeface="Calibri"/>
-              </a:rPr>
-              <a:t>V06  •  9/13</a:t>
-            </a:r>
-          </a:p>
-        </p:txBody>
-      </p:sp>
-      <p:sp>
-        <p:nvSpPr>
-          <p:cNvPr id="7" name="TextBox 6"/>
-          <p:cNvSpPr txBox="1"/>
-          <p:nvPr/>
-        </p:nvSpPr>
-        <p:spPr>
-          <a:xfrm>
-            <a:off x="640080" y="6400800"/>
-            <a:ext cx="8686800" cy="320040"/>
-          </a:xfrm>
-          <a:prstGeom prst="rect">
-            <a:avLst/>
-          </a:prstGeom>
-          <a:noFill/>
-        </p:spPr>
-        <p:txBody>
-          <a:bodyPr wrap="square">
-            <a:spAutoFit/>
-          </a:bodyPr>
-          <a:lstStyle/>
-          <a:p>
-            <a:pPr algn="r" rtl="1"/>
-            <a:r>
-              <a:rPr sz="1000" b="0">
-                <a:solidFill>
-                  <a:srgbClr val="666666"/>
-                </a:solidFill>
-                <a:latin typeface="Arial"/>
-                <a:cs typeface="Arial"/>
-                <a:ea typeface="Calibri"/>
-              </a:rPr>
-              <a:t>Module 02 — Data &amp; AI Engineering Track  |  الوحدة الثانية</a:t>
-            </a:r>
-          </a:p>
-        </p:txBody>
-      </p:sp>
-      <p:sp>
-        <p:nvSpPr>
-          <p:cNvPr id="8" name="TextBox 7"/>
-          <p:cNvSpPr txBox="1"/>
-          <p:nvPr/>
-        </p:nvSpPr>
-        <p:spPr>
-          <a:xfrm>
-            <a:off x="9601200" y="6400800"/>
-            <a:ext cx="1920240" cy="320040"/>
-          </a:xfrm>
-          <a:prstGeom prst="rect">
-            <a:avLst/>
-          </a:prstGeom>
-          <a:noFill/>
-        </p:spPr>
-        <p:txBody>
-          <a:bodyPr wrap="square">
-            <a:spAutoFit/>
-          </a:bodyPr>
-          <a:lstStyle/>
-          <a:p>
-            <a:pPr algn="l" rtl="0"/>
-            <a:r>
-              <a:rPr sz="1000" b="0">
-                <a:solidFill>
-                  <a:srgbClr val="666666"/>
-                </a:solidFill>
-                <a:latin typeface="Calibri"/>
-                <a:cs typeface="Arial"/>
-                <a:ea typeface="Calibri"/>
-              </a:rPr>
-              <a:t>06_  •  11/12</a:t>
-            </a:r>
-          </a:p>
-        </p:txBody>
-      </p:sp>
-      <p:sp>
-        <p:nvSpPr>
-          <p:cNvPr id="9" name="TextBox 8"/>
-          <p:cNvSpPr txBox="1"/>
-          <p:nvPr/>
-        </p:nvSpPr>
-        <p:spPr>
-          <a:xfrm>
-            <a:off x="640080" y="6400800"/>
-            <a:ext cx="8686800" cy="320040"/>
-          </a:xfrm>
-          <a:prstGeom prst="rect">
-            <a:avLst/>
-          </a:prstGeom>
-          <a:noFill/>
-        </p:spPr>
-        <p:txBody>
-          <a:bodyPr wrap="square">
-            <a:spAutoFit/>
-          </a:bodyPr>
-          <a:lstStyle/>
-          <a:p>
-            <a:pPr algn="r" rtl="1"/>
-            <a:r>
-              <a:rPr sz="1000" b="0">
-                <a:solidFill>
-                  <a:srgbClr val="666666"/>
-                </a:solidFill>
-                <a:latin typeface="Arial"/>
-                <a:cs typeface="Arial"/>
-                <a:ea typeface="Calibri"/>
-              </a:rPr>
-              <a:t>Module 02 — Data &amp; AI Engineering Track  |  الوحدة الثانية</a:t>
-            </a:r>
-          </a:p>
-        </p:txBody>
-      </p:sp>
-      <p:sp>
-        <p:nvSpPr>
-          <p:cNvPr id="10" name="TextBox 9"/>
-          <p:cNvSpPr txBox="1"/>
-          <p:nvPr/>
-        </p:nvSpPr>
-        <p:spPr>
-          <a:xfrm>
-            <a:off x="9601200" y="6400800"/>
-            <a:ext cx="1920240" cy="320040"/>
-          </a:xfrm>
-          <a:prstGeom prst="rect">
-            <a:avLst/>
-          </a:prstGeom>
-          <a:noFill/>
-        </p:spPr>
-        <p:txBody>
-          <a:bodyPr wrap="square">
-            <a:spAutoFit/>
-          </a:bodyPr>
-          <a:lstStyle/>
-          <a:p>
-            <a:pPr algn="l" rtl="0"/>
-            <a:r>
-              <a:rPr sz="1000" b="0">
-                <a:solidFill>
-                  <a:srgbClr val="666666"/>
-                </a:solidFill>
-                <a:latin typeface="Calibri"/>
-                <a:cs typeface="Arial"/>
-                <a:ea typeface="Calibri"/>
-              </a:rPr>
-              <a:t>06_  •  11/12</a:t>
+              </a:rPr>
+              <a:t>V06  •  3/12</a:t>
             </a:r>
           </a:p>
         </p:txBody>
@@ -4659,10 +4748,8 @@
                   <a:srgbClr val="1F3B5C"/>
                 </a:solidFill>
                 <a:latin typeface="Arial"/>
-                <a:cs typeface="Arial"/>
-                <a:ea typeface="Calibri"/>
-              </a:rPr>
-              <a:t>للاستزادة / Further Reading</a:t>
+              </a:rPr>
+              <a:t>وحدات المقرر / Course Modules</a:t>
             </a:r>
           </a:p>
         </p:txBody>
@@ -4698,36 +4785,13 @@
               </a:spcAft>
             </a:pPr>
             <a:r>
-              <a:rPr sz="2000">
+              <a:rPr sz="1600">
                 <a:solidFill>
                   <a:srgbClr val="333333"/>
                 </a:solidFill>
                 <a:latin typeface="Arial"/>
-                <a:cs typeface="Arial"/>
-                <a:ea typeface="Calibri"/>
-              </a:rPr>
-              <a:t>• توثيق Databricks — المعمارية المتدرِّجة Medallion.</a:t>
-            </a:r>
-          </a:p>
-          <a:p>
-            <a:pPr algn="r" rtl="0">
-              <a:spcBef>
-                <a:spcPts val="200"/>
-              </a:spcBef>
-              <a:spcAft>
-                <a:spcPts val="1000"/>
-              </a:spcAft>
-            </a:pPr>
-            <a:r>
-              <a:rPr sz="1700">
-                <a:solidFill>
-                  <a:srgbClr val="666666"/>
-                </a:solidFill>
-                <a:latin typeface="Calibri"/>
-                <a:cs typeface="Arial"/>
-                <a:ea typeface="Calibri"/>
-              </a:rPr>
-              <a:t>• Databricks docs — Medallion architecture.</a:t>
+              </a:rPr>
+              <a:t>• V06 — أساسيات البيانات / Data Fundamentals</a:t>
             </a:r>
           </a:p>
           <a:p>
@@ -4740,36 +4804,13 @@
               </a:spcAft>
             </a:pPr>
             <a:r>
-              <a:rPr sz="2000">
+              <a:rPr sz="1600">
                 <a:solidFill>
                   <a:srgbClr val="333333"/>
                 </a:solidFill>
                 <a:latin typeface="Arial"/>
-                <a:cs typeface="Arial"/>
-                <a:ea typeface="Calibri"/>
-              </a:rPr>
-              <a:t>• مقالات Data Mesh — Zhamak Dehghani.</a:t>
-            </a:r>
-          </a:p>
-          <a:p>
-            <a:pPr algn="r" rtl="0">
-              <a:spcBef>
-                <a:spcPts val="200"/>
-              </a:spcBef>
-              <a:spcAft>
-                <a:spcPts val="1000"/>
-              </a:spcAft>
-            </a:pPr>
-            <a:r>
-              <a:rPr sz="1700">
-                <a:solidFill>
-                  <a:srgbClr val="666666"/>
-                </a:solidFill>
-                <a:latin typeface="Calibri"/>
-                <a:cs typeface="Arial"/>
-                <a:ea typeface="Calibri"/>
-              </a:rPr>
-              <a:t>• Data Mesh articles — Zhamak Dehghani.</a:t>
+              </a:rPr>
+              <a:t>• V07 — المستودعات والبحيرات ومعمارية Lakehouse / Warehouses, Data Lakes &amp; Lakehouse</a:t>
             </a:r>
           </a:p>
           <a:p>
@@ -4782,19 +4823,17 @@
               </a:spcAft>
             </a:pPr>
             <a:r>
-              <a:rPr sz="2000">
+              <a:rPr sz="1600">
                 <a:solidFill>
                   <a:srgbClr val="333333"/>
                 </a:solidFill>
                 <a:latin typeface="Arial"/>
-                <a:cs typeface="Arial"/>
-                <a:ea typeface="Calibri"/>
-              </a:rPr>
-              <a:t>• توثيق Apache Parquet.</a:t>
-            </a:r>
-          </a:p>
-          <a:p>
-            <a:pPr algn="r" rtl="0">
+              </a:rPr>
+              <a:t>• V08 — هندسة الخصائص ومخازنها / Feature Engineering &amp; Feature Stores</a:t>
+            </a:r>
+          </a:p>
+          <a:p>
+            <a:pPr algn="r" rtl="1">
               <a:spcBef>
                 <a:spcPts val="200"/>
               </a:spcBef>
@@ -4803,15 +4842,70 @@
               </a:spcAft>
             </a:pPr>
             <a:r>
-              <a:rPr sz="1700">
-                <a:solidFill>
-                  <a:srgbClr val="666666"/>
-                </a:solidFill>
-                <a:latin typeface="Calibri"/>
-                <a:cs typeface="Arial"/>
-                <a:ea typeface="Calibri"/>
-              </a:rPr>
-              <a:t>• Apache Parquet documentation.</a:t>
+              <a:rPr sz="1600">
+                <a:solidFill>
+                  <a:srgbClr val="333333"/>
+                </a:solidFill>
+                <a:latin typeface="Arial"/>
+              </a:rPr>
+              <a:t>• V09 — قواعد البيانات المتجهية + RAG التطبيقي / Vector Databases + Applied RAG</a:t>
+            </a:r>
+          </a:p>
+          <a:p>
+            <a:pPr algn="r" rtl="1">
+              <a:spcBef>
+                <a:spcPts val="200"/>
+              </a:spcBef>
+              <a:spcAft>
+                <a:spcPts val="1000"/>
+              </a:spcAft>
+            </a:pPr>
+            <a:r>
+              <a:rPr sz="1600">
+                <a:solidFill>
+                  <a:srgbClr val="333333"/>
+                </a:solidFill>
+                <a:latin typeface="Arial"/>
+              </a:rPr>
+              <a:t>• V10 — تصنيف البيانات على نطاق واسع / Labeling at Scale</a:t>
+            </a:r>
+          </a:p>
+          <a:p>
+            <a:pPr algn="r" rtl="1">
+              <a:spcBef>
+                <a:spcPts val="200"/>
+              </a:spcBef>
+              <a:spcAft>
+                <a:spcPts val="1000"/>
+              </a:spcAft>
+            </a:pPr>
+            <a:r>
+              <a:rPr sz="1600">
+                <a:solidFill>
+                  <a:srgbClr val="333333"/>
+                </a:solidFill>
+                <a:latin typeface="Arial"/>
+              </a:rPr>
+              <a:t>• V11 — حوكمة البيانات وسلسلة العهدة والفهرسة / Data Governance, Lineage &amp; Cataloging</a:t>
+            </a:r>
+          </a:p>
+          <a:p>
+            <a:pPr algn="r" rtl="1">
+              <a:spcBef>
+                <a:spcPts val="200"/>
+              </a:spcBef>
+              <a:spcAft>
+                <a:spcPts val="1000"/>
+              </a:spcAft>
+            </a:pPr>
+            <a:r>
+              <a:rPr sz="1600">
+                <a:solidFill>
+                  <a:srgbClr val="333333"/>
+                </a:solidFill>
+                <a:latin typeface="Arial"/>
+              </a:rPr>
+              <a:t>• V12 — أساسيات MLOps + تمهيد للمختبر / MLOps Fundamentals + Lab Introduction</a:t>
             </a:r>
           </a:p>
         </p:txBody>
@@ -4845,8 +4939,6 @@
                   <a:srgbClr val="666666"/>
                 </a:solidFill>
                 <a:latin typeface="Arial"/>
-                <a:cs typeface="Arial"/>
-                <a:ea typeface="Calibri"/>
               </a:rPr>
               <a:t>Module 02 — Data &amp; AI Engineering Track  |  الوحدة الثانية</a:t>
             </a:r>
@@ -4882,158 +4974,8 @@
                   <a:srgbClr val="666666"/>
                 </a:solidFill>
                 <a:latin typeface="Calibri"/>
-                <a:cs typeface="Arial"/>
-                <a:ea typeface="Calibri"/>
-              </a:rPr>
-              <a:t>V06  •  10/13</a:t>
-            </a:r>
-          </a:p>
-        </p:txBody>
-      </p:sp>
-      <p:sp>
-        <p:nvSpPr>
-          <p:cNvPr id="7" name="TextBox 6"/>
-          <p:cNvSpPr txBox="1"/>
-          <p:nvPr/>
-        </p:nvSpPr>
-        <p:spPr>
-          <a:xfrm>
-            <a:off x="640080" y="6400800"/>
-            <a:ext cx="8686800" cy="320040"/>
-          </a:xfrm>
-          <a:prstGeom prst="rect">
-            <a:avLst/>
-          </a:prstGeom>
-          <a:noFill/>
-        </p:spPr>
-        <p:txBody>
-          <a:bodyPr wrap="square">
-            <a:spAutoFit/>
-          </a:bodyPr>
-          <a:lstStyle/>
-          <a:p>
-            <a:pPr algn="r" rtl="1"/>
-            <a:r>
-              <a:rPr sz="1000" b="0">
-                <a:solidFill>
-                  <a:srgbClr val="666666"/>
-                </a:solidFill>
-                <a:latin typeface="Arial"/>
-                <a:cs typeface="Arial"/>
-                <a:ea typeface="Calibri"/>
-              </a:rPr>
-              <a:t>Module 02 — Data &amp; AI Engineering Track  |  الوحدة الثانية</a:t>
-            </a:r>
-          </a:p>
-        </p:txBody>
-      </p:sp>
-      <p:sp>
-        <p:nvSpPr>
-          <p:cNvPr id="8" name="TextBox 7"/>
-          <p:cNvSpPr txBox="1"/>
-          <p:nvPr/>
-        </p:nvSpPr>
-        <p:spPr>
-          <a:xfrm>
-            <a:off x="9601200" y="6400800"/>
-            <a:ext cx="1920240" cy="320040"/>
-          </a:xfrm>
-          <a:prstGeom prst="rect">
-            <a:avLst/>
-          </a:prstGeom>
-          <a:noFill/>
-        </p:spPr>
-        <p:txBody>
-          <a:bodyPr wrap="square">
-            <a:spAutoFit/>
-          </a:bodyPr>
-          <a:lstStyle/>
-          <a:p>
-            <a:pPr algn="l" rtl="0"/>
-            <a:r>
-              <a:rPr sz="1000" b="0">
-                <a:solidFill>
-                  <a:srgbClr val="666666"/>
-                </a:solidFill>
-                <a:latin typeface="Calibri"/>
-                <a:cs typeface="Arial"/>
-                <a:ea typeface="Calibri"/>
-              </a:rPr>
-              <a:t>06_  •  12/12</a:t>
-            </a:r>
-          </a:p>
-        </p:txBody>
-      </p:sp>
-      <p:sp>
-        <p:nvSpPr>
-          <p:cNvPr id="9" name="TextBox 8"/>
-          <p:cNvSpPr txBox="1"/>
-          <p:nvPr/>
-        </p:nvSpPr>
-        <p:spPr>
-          <a:xfrm>
-            <a:off x="640080" y="6400800"/>
-            <a:ext cx="8686800" cy="320040"/>
-          </a:xfrm>
-          <a:prstGeom prst="rect">
-            <a:avLst/>
-          </a:prstGeom>
-          <a:noFill/>
-        </p:spPr>
-        <p:txBody>
-          <a:bodyPr wrap="square">
-            <a:spAutoFit/>
-          </a:bodyPr>
-          <a:lstStyle/>
-          <a:p>
-            <a:pPr algn="r" rtl="1"/>
-            <a:r>
-              <a:rPr sz="1000" b="0">
-                <a:solidFill>
-                  <a:srgbClr val="666666"/>
-                </a:solidFill>
-                <a:latin typeface="Arial"/>
-                <a:cs typeface="Arial"/>
-                <a:ea typeface="Calibri"/>
-              </a:rPr>
-              <a:t>Module 02 — Data &amp; AI Engineering Track  |  الوحدة الثانية</a:t>
-            </a:r>
-          </a:p>
-        </p:txBody>
-      </p:sp>
-      <p:sp>
-        <p:nvSpPr>
-          <p:cNvPr id="10" name="TextBox 9"/>
-          <p:cNvSpPr txBox="1"/>
-          <p:nvPr/>
-        </p:nvSpPr>
-        <p:spPr>
-          <a:xfrm>
-            <a:off x="9601200" y="6400800"/>
-            <a:ext cx="1920240" cy="320040"/>
-          </a:xfrm>
-          <a:prstGeom prst="rect">
-            <a:avLst/>
-          </a:prstGeom>
-          <a:noFill/>
-        </p:spPr>
-        <p:txBody>
-          <a:bodyPr wrap="square">
-            <a:spAutoFit/>
-          </a:bodyPr>
-          <a:lstStyle/>
-          <a:p>
-            <a:pPr algn="l" rtl="0"/>
-            <a:r>
-              <a:rPr sz="1000" b="0">
-                <a:solidFill>
-                  <a:srgbClr val="666666"/>
-                </a:solidFill>
-                <a:latin typeface="Calibri"/>
-                <a:cs typeface="Arial"/>
-                <a:ea typeface="Calibri"/>
-              </a:rPr>
-              <a:t>06_  •  12/12</a:t>
+              </a:rPr>
+              <a:t>V06  •  4/12</a:t>
             </a:r>
           </a:p>
         </p:txBody>
@@ -5139,8 +5081,6 @@
                   <a:srgbClr val="1F3B5C"/>
                 </a:solidFill>
                 <a:latin typeface="Arial"/>
-                <a:cs typeface="Arial"/>
-                <a:ea typeface="Calibri"/>
               </a:rPr>
               <a:t>أجندة العرض / Agenda</a:t>
             </a:r>
@@ -5183,14 +5123,12 @@
                   <a:srgbClr val="333333"/>
                 </a:solidFill>
                 <a:latin typeface="Arial"/>
-                <a:cs typeface="Arial"/>
-                <a:ea typeface="Calibri"/>
               </a:rPr>
               <a:t>• V06 — أساسيات البيانات</a:t>
             </a:r>
           </a:p>
           <a:p>
-            <a:pPr algn="r" rtl="0">
+            <a:pPr algn="l" rtl="0">
               <a:spcBef>
                 <a:spcPts val="200"/>
               </a:spcBef>
@@ -5204,8 +5142,6 @@
                   <a:srgbClr val="666666"/>
                 </a:solidFill>
                 <a:latin typeface="Calibri"/>
-                <a:cs typeface="Arial"/>
-                <a:ea typeface="Calibri"/>
               </a:rPr>
               <a:t>• V06 — Data Fundamentals</a:t>
             </a:r>
@@ -5225,8 +5161,6 @@
                   <a:srgbClr val="333333"/>
                 </a:solidFill>
                 <a:latin typeface="Arial"/>
-                <a:cs typeface="Arial"/>
-                <a:ea typeface="Calibri"/>
               </a:rPr>
               <a:t>• خريطة المسار / Roadmap</a:t>
             </a:r>
@@ -5246,8 +5180,6 @@
                   <a:srgbClr val="333333"/>
                 </a:solidFill>
                 <a:latin typeface="Arial"/>
-                <a:cs typeface="Arial"/>
-                <a:ea typeface="Calibri"/>
               </a:rPr>
               <a:t>• أنواع البيانات / Data Types</a:t>
             </a:r>
@@ -5267,8 +5199,6 @@
                   <a:srgbClr val="333333"/>
                 </a:solidFill>
                 <a:latin typeface="Arial"/>
-                <a:cs typeface="Arial"/>
-                <a:ea typeface="Calibri"/>
               </a:rPr>
               <a:t>• التنسيقات / Formats</a:t>
             </a:r>
@@ -5288,8 +5218,6 @@
                   <a:srgbClr val="333333"/>
                 </a:solidFill>
                 <a:latin typeface="Arial"/>
-                <a:cs typeface="Arial"/>
-                <a:ea typeface="Calibri"/>
               </a:rPr>
               <a:t>• أنابيب ETL / ELT</a:t>
             </a:r>
@@ -5309,8 +5237,6 @@
                   <a:srgbClr val="333333"/>
                 </a:solidFill>
                 <a:latin typeface="Arial"/>
-                <a:cs typeface="Arial"/>
-                <a:ea typeface="Calibri"/>
               </a:rPr>
               <a:t>• مقارنة أنماط المعالجة / Processing Patterns</a:t>
             </a:r>
@@ -5330,8 +5256,6 @@
                   <a:srgbClr val="333333"/>
                 </a:solidFill>
                 <a:latin typeface="Arial"/>
-                <a:cs typeface="Arial"/>
-                <a:ea typeface="Calibri"/>
               </a:rPr>
               <a:t>• جدول المقارنة السريع / Quick Comparison</a:t>
             </a:r>
@@ -5367,8 +5291,6 @@
                   <a:srgbClr val="666666"/>
                 </a:solidFill>
                 <a:latin typeface="Arial"/>
-                <a:cs typeface="Arial"/>
-                <a:ea typeface="Calibri"/>
               </a:rPr>
               <a:t>Module 02 — Data &amp; AI Engineering Track  |  الوحدة الثانية</a:t>
             </a:r>
@@ -5404,158 +5326,8 @@
                   <a:srgbClr val="666666"/>
                 </a:solidFill>
                 <a:latin typeface="Calibri"/>
-                <a:cs typeface="Arial"/>
-                <a:ea typeface="Calibri"/>
-              </a:rPr>
-              <a:t>V06  •  2/13</a:t>
-            </a:r>
-          </a:p>
-        </p:txBody>
-      </p:sp>
-      <p:sp>
-        <p:nvSpPr>
-          <p:cNvPr id="7" name="TextBox 6"/>
-          <p:cNvSpPr txBox="1"/>
-          <p:nvPr/>
-        </p:nvSpPr>
-        <p:spPr>
-          <a:xfrm>
-            <a:off x="640080" y="6400800"/>
-            <a:ext cx="8686800" cy="320040"/>
-          </a:xfrm>
-          <a:prstGeom prst="rect">
-            <a:avLst/>
-          </a:prstGeom>
-          <a:noFill/>
-        </p:spPr>
-        <p:txBody>
-          <a:bodyPr wrap="square">
-            <a:spAutoFit/>
-          </a:bodyPr>
-          <a:lstStyle/>
-          <a:p>
-            <a:pPr algn="r" rtl="1"/>
-            <a:r>
-              <a:rPr sz="1000" b="0">
-                <a:solidFill>
-                  <a:srgbClr val="666666"/>
-                </a:solidFill>
-                <a:latin typeface="Arial"/>
-                <a:cs typeface="Arial"/>
-                <a:ea typeface="Calibri"/>
-              </a:rPr>
-              <a:t>Module 02 — Data &amp; AI Engineering Track  |  الوحدة الثانية</a:t>
-            </a:r>
-          </a:p>
-        </p:txBody>
-      </p:sp>
-      <p:sp>
-        <p:nvSpPr>
-          <p:cNvPr id="8" name="TextBox 7"/>
-          <p:cNvSpPr txBox="1"/>
-          <p:nvPr/>
-        </p:nvSpPr>
-        <p:spPr>
-          <a:xfrm>
-            <a:off x="9601200" y="6400800"/>
-            <a:ext cx="1920240" cy="320040"/>
-          </a:xfrm>
-          <a:prstGeom prst="rect">
-            <a:avLst/>
-          </a:prstGeom>
-          <a:noFill/>
-        </p:spPr>
-        <p:txBody>
-          <a:bodyPr wrap="square">
-            <a:spAutoFit/>
-          </a:bodyPr>
-          <a:lstStyle/>
-          <a:p>
-            <a:pPr algn="l" rtl="0"/>
-            <a:r>
-              <a:rPr sz="1000" b="0">
-                <a:solidFill>
-                  <a:srgbClr val="666666"/>
-                </a:solidFill>
-                <a:latin typeface="Calibri"/>
-                <a:cs typeface="Arial"/>
-                <a:ea typeface="Calibri"/>
-              </a:rPr>
-              <a:t>06_  •  2/12</a:t>
-            </a:r>
-          </a:p>
-        </p:txBody>
-      </p:sp>
-      <p:sp>
-        <p:nvSpPr>
-          <p:cNvPr id="9" name="TextBox 8"/>
-          <p:cNvSpPr txBox="1"/>
-          <p:nvPr/>
-        </p:nvSpPr>
-        <p:spPr>
-          <a:xfrm>
-            <a:off x="640080" y="6400800"/>
-            <a:ext cx="8686800" cy="320040"/>
-          </a:xfrm>
-          <a:prstGeom prst="rect">
-            <a:avLst/>
-          </a:prstGeom>
-          <a:noFill/>
-        </p:spPr>
-        <p:txBody>
-          <a:bodyPr wrap="square">
-            <a:spAutoFit/>
-          </a:bodyPr>
-          <a:lstStyle/>
-          <a:p>
-            <a:pPr algn="r" rtl="1"/>
-            <a:r>
-              <a:rPr sz="1000" b="0">
-                <a:solidFill>
-                  <a:srgbClr val="666666"/>
-                </a:solidFill>
-                <a:latin typeface="Arial"/>
-                <a:cs typeface="Arial"/>
-                <a:ea typeface="Calibri"/>
-              </a:rPr>
-              <a:t>Module 02 — Data &amp; AI Engineering Track  |  الوحدة الثانية</a:t>
-            </a:r>
-          </a:p>
-        </p:txBody>
-      </p:sp>
-      <p:sp>
-        <p:nvSpPr>
-          <p:cNvPr id="10" name="TextBox 9"/>
-          <p:cNvSpPr txBox="1"/>
-          <p:nvPr/>
-        </p:nvSpPr>
-        <p:spPr>
-          <a:xfrm>
-            <a:off x="9601200" y="6400800"/>
-            <a:ext cx="1920240" cy="320040"/>
-          </a:xfrm>
-          <a:prstGeom prst="rect">
-            <a:avLst/>
-          </a:prstGeom>
-          <a:noFill/>
-        </p:spPr>
-        <p:txBody>
-          <a:bodyPr wrap="square">
-            <a:spAutoFit/>
-          </a:bodyPr>
-          <a:lstStyle/>
-          <a:p>
-            <a:pPr algn="l" rtl="0"/>
-            <a:r>
-              <a:rPr sz="1000" b="0">
-                <a:solidFill>
-                  <a:srgbClr val="666666"/>
-                </a:solidFill>
-                <a:latin typeface="Calibri"/>
-                <a:cs typeface="Arial"/>
-                <a:ea typeface="Calibri"/>
-              </a:rPr>
-              <a:t>06_  •  2/12</a:t>
+              </a:rPr>
+              <a:t>V06  •  2/12</a:t>
             </a:r>
           </a:p>
         </p:txBody>
@@ -5588,59 +5360,22 @@
       <p:grpSpPr/>
       <p:sp>
         <p:nvSpPr>
-          <p:cNvPr id="2" name="TextBox 1"/>
-          <p:cNvSpPr txBox="1"/>
+          <p:cNvPr id="2" name="Rectangle 1"/>
+          <p:cNvSpPr/>
           <p:nvPr/>
         </p:nvSpPr>
         <p:spPr>
           <a:xfrm>
-            <a:off x="640080" y="137160"/>
-            <a:ext cx="10972800" cy="640080"/>
+            <a:off x="0" y="0"/>
+            <a:ext cx="12191695" cy="1005840"/>
           </a:xfrm>
           <a:prstGeom prst="rect">
             <a:avLst/>
           </a:prstGeom>
-          <a:noFill/>
-        </p:spPr>
-        <p:txBody>
-          <a:bodyPr wrap="none">
-            <a:spAutoFit/>
-          </a:bodyPr>
-          <a:lstStyle/>
-          <a:p>
-            <a:pPr algn="r" rtl="1"/>
-            <a:r>
-              <a:rPr sz="3000" b="1">
-                <a:solidFill>
-                  <a:srgbClr val="1F3B5C"/>
-                </a:solidFill>
-                <a:latin typeface="Arial"/>
-                <a:cs typeface="Arial"/>
-                <a:ea typeface="Calibri"/>
-              </a:rPr>
-              <a:t>خريطة المسار / Track Roadmap</a:t>
-            </a:r>
-          </a:p>
-        </p:txBody>
-      </p:sp>
-      <p:sp>
-        <p:nvSpPr>
-          <p:cNvPr id="3" name="Rounded Rectangle 2"/>
-          <p:cNvSpPr/>
-          <p:nvPr/>
-        </p:nvSpPr>
-        <p:spPr>
-          <a:xfrm>
-            <a:off x="502920" y="2377440"/>
-            <a:ext cx="1234440" cy="1371600"/>
-          </a:xfrm>
-          <a:prstGeom prst="roundRect">
-            <a:avLst/>
-          </a:prstGeom>
           <a:solidFill>
-            <a:srgbClr val="DCE6F1"/>
+            <a:srgbClr val="FFFFFF"/>
           </a:solidFill>
-          <a:ln w="12700">
+          <a:ln w="25400">
             <a:solidFill>
               <a:srgbClr val="1F4E79"/>
             </a:solidFill>
@@ -5662,75 +5397,6 @@
           </a:fontRef>
         </p:style>
         <p:txBody>
-          <a:bodyPr rtlCol="0" anchor="ctr" wrap="square"/>
-          <a:lstStyle/>
-          <a:p>
-            <a:pPr algn="ctr" rtl="1"/>
-            <a:r>
-              <a:rPr sz="1400" b="1">
-                <a:solidFill>
-                  <a:srgbClr val="333333"/>
-                </a:solidFill>
-                <a:latin typeface="Arial"/>
-                <a:cs typeface="Arial"/>
-                <a:ea typeface="Calibri"/>
-              </a:rPr>
-              <a:t>البيانات</a:t>
-            </a:r>
-          </a:p>
-          <a:p>
-            <a:pPr algn="ctr" rtl="0"/>
-            <a:r>
-              <a:rPr sz="1000">
-                <a:solidFill>
-                  <a:srgbClr val="666666"/>
-                </a:solidFill>
-                <a:latin typeface="Calibri"/>
-                <a:cs typeface="Arial"/>
-                <a:ea typeface="Calibri"/>
-              </a:rPr>
-              <a:t>Data</a:t>
-            </a:r>
-          </a:p>
-        </p:txBody>
-      </p:sp>
-      <p:sp>
-        <p:nvSpPr>
-          <p:cNvPr id="4" name="Left Arrow 3"/>
-          <p:cNvSpPr/>
-          <p:nvPr/>
-        </p:nvSpPr>
-        <p:spPr>
-          <a:xfrm>
-            <a:off x="1746504" y="2926080"/>
-            <a:ext cx="128016" cy="274320"/>
-          </a:xfrm>
-          <a:prstGeom prst="leftArrow">
-            <a:avLst/>
-          </a:prstGeom>
-          <a:solidFill>
-            <a:srgbClr val="1F4E79"/>
-          </a:solidFill>
-          <a:ln>
-            <a:noFill/>
-          </a:ln>
-          <a:effectLst/>
-        </p:spPr>
-        <p:style>
-          <a:lnRef idx="1">
-            <a:schemeClr val="accent1"/>
-          </a:lnRef>
-          <a:fillRef idx="3">
-            <a:schemeClr val="accent1"/>
-          </a:fillRef>
-          <a:effectRef idx="2">
-            <a:schemeClr val="accent1"/>
-          </a:effectRef>
-          <a:fontRef idx="minor">
-            <a:schemeClr val="lt1"/>
-          </a:fontRef>
-        </p:style>
-        <p:txBody>
           <a:bodyPr rtlCol="0" anchor="ctr"/>
           <a:lstStyle/>
           <a:p>
@@ -5740,775 +5406,14 @@
       </p:sp>
       <p:sp>
         <p:nvSpPr>
-          <p:cNvPr id="5" name="Rounded Rectangle 4"/>
-          <p:cNvSpPr/>
-          <p:nvPr/>
-        </p:nvSpPr>
-        <p:spPr>
-          <a:xfrm>
-            <a:off x="1883664" y="2377440"/>
-            <a:ext cx="1234440" cy="1371600"/>
-          </a:xfrm>
-          <a:prstGeom prst="roundRect">
-            <a:avLst/>
-          </a:prstGeom>
-          <a:solidFill>
-            <a:srgbClr val="E2EFDA"/>
-          </a:solidFill>
-          <a:ln w="12700">
-            <a:solidFill>
-              <a:srgbClr val="1F4E79"/>
-            </a:solidFill>
-          </a:ln>
-          <a:effectLst/>
-        </p:spPr>
-        <p:style>
-          <a:lnRef idx="1">
-            <a:schemeClr val="accent1"/>
-          </a:lnRef>
-          <a:fillRef idx="3">
-            <a:schemeClr val="accent1"/>
-          </a:fillRef>
-          <a:effectRef idx="2">
-            <a:schemeClr val="accent1"/>
-          </a:effectRef>
-          <a:fontRef idx="minor">
-            <a:schemeClr val="lt1"/>
-          </a:fontRef>
-        </p:style>
-        <p:txBody>
-          <a:bodyPr rtlCol="0" anchor="ctr" wrap="square"/>
-          <a:lstStyle/>
-          <a:p>
-            <a:pPr algn="ctr" rtl="1"/>
-            <a:r>
-              <a:rPr sz="1400" b="1">
-                <a:solidFill>
-                  <a:srgbClr val="333333"/>
-                </a:solidFill>
-                <a:latin typeface="Arial"/>
-                <a:cs typeface="Arial"/>
-                <a:ea typeface="Calibri"/>
-              </a:rPr>
-              <a:t>التخزين</a:t>
-            </a:r>
-          </a:p>
-          <a:p>
-            <a:pPr algn="ctr" rtl="0"/>
-            <a:r>
-              <a:rPr sz="1000">
-                <a:solidFill>
-                  <a:srgbClr val="666666"/>
-                </a:solidFill>
-                <a:latin typeface="Calibri"/>
-                <a:cs typeface="Arial"/>
-                <a:ea typeface="Calibri"/>
-              </a:rPr>
-              <a:t>Storage</a:t>
-            </a:r>
-          </a:p>
-        </p:txBody>
-      </p:sp>
-      <p:sp>
-        <p:nvSpPr>
-          <p:cNvPr id="6" name="Left Arrow 5"/>
-          <p:cNvSpPr/>
-          <p:nvPr/>
-        </p:nvSpPr>
-        <p:spPr>
-          <a:xfrm>
-            <a:off x="3127248" y="2926080"/>
-            <a:ext cx="128016" cy="274320"/>
-          </a:xfrm>
-          <a:prstGeom prst="leftArrow">
-            <a:avLst/>
-          </a:prstGeom>
-          <a:solidFill>
-            <a:srgbClr val="1F4E79"/>
-          </a:solidFill>
-          <a:ln>
-            <a:noFill/>
-          </a:ln>
-          <a:effectLst/>
-        </p:spPr>
-        <p:style>
-          <a:lnRef idx="1">
-            <a:schemeClr val="accent1"/>
-          </a:lnRef>
-          <a:fillRef idx="3">
-            <a:schemeClr val="accent1"/>
-          </a:fillRef>
-          <a:effectRef idx="2">
-            <a:schemeClr val="accent1"/>
-          </a:effectRef>
-          <a:fontRef idx="minor">
-            <a:schemeClr val="lt1"/>
-          </a:fontRef>
-        </p:style>
-        <p:txBody>
-          <a:bodyPr rtlCol="0" anchor="ctr"/>
-          <a:lstStyle/>
-          <a:p>
-            <a:pPr algn="ctr"/>
-          </a:p>
-        </p:txBody>
-      </p:sp>
-      <p:sp>
-        <p:nvSpPr>
-          <p:cNvPr id="7" name="Rounded Rectangle 6"/>
-          <p:cNvSpPr/>
-          <p:nvPr/>
-        </p:nvSpPr>
-        <p:spPr>
-          <a:xfrm>
-            <a:off x="3264408" y="2377440"/>
-            <a:ext cx="1234440" cy="1371600"/>
-          </a:xfrm>
-          <a:prstGeom prst="roundRect">
-            <a:avLst/>
-          </a:prstGeom>
-          <a:solidFill>
-            <a:srgbClr val="FDE9D9"/>
-          </a:solidFill>
-          <a:ln w="12700">
-            <a:solidFill>
-              <a:srgbClr val="1F4E79"/>
-            </a:solidFill>
-          </a:ln>
-          <a:effectLst/>
-        </p:spPr>
-        <p:style>
-          <a:lnRef idx="1">
-            <a:schemeClr val="accent1"/>
-          </a:lnRef>
-          <a:fillRef idx="3">
-            <a:schemeClr val="accent1"/>
-          </a:fillRef>
-          <a:effectRef idx="2">
-            <a:schemeClr val="accent1"/>
-          </a:effectRef>
-          <a:fontRef idx="minor">
-            <a:schemeClr val="lt1"/>
-          </a:fontRef>
-        </p:style>
-        <p:txBody>
-          <a:bodyPr rtlCol="0" anchor="ctr" wrap="square"/>
-          <a:lstStyle/>
-          <a:p>
-            <a:pPr algn="ctr" rtl="1"/>
-            <a:r>
-              <a:rPr sz="1400" b="1">
-                <a:solidFill>
-                  <a:srgbClr val="333333"/>
-                </a:solidFill>
-                <a:latin typeface="Arial"/>
-                <a:cs typeface="Arial"/>
-                <a:ea typeface="Calibri"/>
-              </a:rPr>
-              <a:t>الخصائص</a:t>
-            </a:r>
-          </a:p>
-          <a:p>
-            <a:pPr algn="ctr" rtl="0"/>
-            <a:r>
-              <a:rPr sz="1000">
-                <a:solidFill>
-                  <a:srgbClr val="666666"/>
-                </a:solidFill>
-                <a:latin typeface="Calibri"/>
-                <a:cs typeface="Arial"/>
-                <a:ea typeface="Calibri"/>
-              </a:rPr>
-              <a:t>Features</a:t>
-            </a:r>
-          </a:p>
-        </p:txBody>
-      </p:sp>
-      <p:sp>
-        <p:nvSpPr>
-          <p:cNvPr id="8" name="Left Arrow 7"/>
-          <p:cNvSpPr/>
-          <p:nvPr/>
-        </p:nvSpPr>
-        <p:spPr>
-          <a:xfrm>
-            <a:off x="4507992" y="2926080"/>
-            <a:ext cx="128016" cy="274320"/>
-          </a:xfrm>
-          <a:prstGeom prst="leftArrow">
-            <a:avLst/>
-          </a:prstGeom>
-          <a:solidFill>
-            <a:srgbClr val="1F4E79"/>
-          </a:solidFill>
-          <a:ln>
-            <a:noFill/>
-          </a:ln>
-          <a:effectLst/>
-        </p:spPr>
-        <p:style>
-          <a:lnRef idx="1">
-            <a:schemeClr val="accent1"/>
-          </a:lnRef>
-          <a:fillRef idx="3">
-            <a:schemeClr val="accent1"/>
-          </a:fillRef>
-          <a:effectRef idx="2">
-            <a:schemeClr val="accent1"/>
-          </a:effectRef>
-          <a:fontRef idx="minor">
-            <a:schemeClr val="lt1"/>
-          </a:fontRef>
-        </p:style>
-        <p:txBody>
-          <a:bodyPr rtlCol="0" anchor="ctr"/>
-          <a:lstStyle/>
-          <a:p>
-            <a:pPr algn="ctr"/>
-          </a:p>
-        </p:txBody>
-      </p:sp>
-      <p:sp>
-        <p:nvSpPr>
-          <p:cNvPr id="9" name="Rounded Rectangle 8"/>
-          <p:cNvSpPr/>
-          <p:nvPr/>
-        </p:nvSpPr>
-        <p:spPr>
-          <a:xfrm>
-            <a:off x="4645152" y="2377440"/>
-            <a:ext cx="1234440" cy="1371600"/>
-          </a:xfrm>
-          <a:prstGeom prst="roundRect">
-            <a:avLst/>
-          </a:prstGeom>
-          <a:solidFill>
-            <a:srgbClr val="EDEDED"/>
-          </a:solidFill>
-          <a:ln w="12700">
-            <a:solidFill>
-              <a:srgbClr val="1F4E79"/>
-            </a:solidFill>
-          </a:ln>
-          <a:effectLst/>
-        </p:spPr>
-        <p:style>
-          <a:lnRef idx="1">
-            <a:schemeClr val="accent1"/>
-          </a:lnRef>
-          <a:fillRef idx="3">
-            <a:schemeClr val="accent1"/>
-          </a:fillRef>
-          <a:effectRef idx="2">
-            <a:schemeClr val="accent1"/>
-          </a:effectRef>
-          <a:fontRef idx="minor">
-            <a:schemeClr val="lt1"/>
-          </a:fontRef>
-        </p:style>
-        <p:txBody>
-          <a:bodyPr rtlCol="0" anchor="ctr" wrap="square"/>
-          <a:lstStyle/>
-          <a:p>
-            <a:pPr algn="ctr" rtl="1"/>
-            <a:r>
-              <a:rPr sz="1400" b="1">
-                <a:solidFill>
-                  <a:srgbClr val="333333"/>
-                </a:solidFill>
-                <a:latin typeface="Arial"/>
-                <a:cs typeface="Arial"/>
-                <a:ea typeface="Calibri"/>
-              </a:rPr>
-              <a:t>الفهارس المتجهية</a:t>
-            </a:r>
-          </a:p>
-          <a:p>
-            <a:pPr algn="ctr" rtl="0"/>
-            <a:r>
-              <a:rPr sz="1000">
-                <a:solidFill>
-                  <a:srgbClr val="666666"/>
-                </a:solidFill>
-                <a:latin typeface="Calibri"/>
-                <a:cs typeface="Arial"/>
-                <a:ea typeface="Calibri"/>
-              </a:rPr>
-              <a:t>Vector Indexes</a:t>
-            </a:r>
-          </a:p>
-        </p:txBody>
-      </p:sp>
-      <p:sp>
-        <p:nvSpPr>
-          <p:cNvPr id="10" name="Left Arrow 9"/>
-          <p:cNvSpPr/>
-          <p:nvPr/>
-        </p:nvSpPr>
-        <p:spPr>
-          <a:xfrm>
-            <a:off x="5888736" y="2926080"/>
-            <a:ext cx="128016" cy="274320"/>
-          </a:xfrm>
-          <a:prstGeom prst="leftArrow">
-            <a:avLst/>
-          </a:prstGeom>
-          <a:solidFill>
-            <a:srgbClr val="1F4E79"/>
-          </a:solidFill>
-          <a:ln>
-            <a:noFill/>
-          </a:ln>
-          <a:effectLst/>
-        </p:spPr>
-        <p:style>
-          <a:lnRef idx="1">
-            <a:schemeClr val="accent1"/>
-          </a:lnRef>
-          <a:fillRef idx="3">
-            <a:schemeClr val="accent1"/>
-          </a:fillRef>
-          <a:effectRef idx="2">
-            <a:schemeClr val="accent1"/>
-          </a:effectRef>
-          <a:fontRef idx="minor">
-            <a:schemeClr val="lt1"/>
-          </a:fontRef>
-        </p:style>
-        <p:txBody>
-          <a:bodyPr rtlCol="0" anchor="ctr"/>
-          <a:lstStyle/>
-          <a:p>
-            <a:pPr algn="ctr"/>
-          </a:p>
-        </p:txBody>
-      </p:sp>
-      <p:sp>
-        <p:nvSpPr>
-          <p:cNvPr id="11" name="Rounded Rectangle 10"/>
-          <p:cNvSpPr/>
-          <p:nvPr/>
-        </p:nvSpPr>
-        <p:spPr>
-          <a:xfrm>
-            <a:off x="6025896" y="2377440"/>
-            <a:ext cx="1234440" cy="1371600"/>
-          </a:xfrm>
-          <a:prstGeom prst="roundRect">
-            <a:avLst/>
-          </a:prstGeom>
-          <a:solidFill>
-            <a:srgbClr val="DCE6F1"/>
-          </a:solidFill>
-          <a:ln w="12700">
-            <a:solidFill>
-              <a:srgbClr val="1F4E79"/>
-            </a:solidFill>
-          </a:ln>
-          <a:effectLst/>
-        </p:spPr>
-        <p:style>
-          <a:lnRef idx="1">
-            <a:schemeClr val="accent1"/>
-          </a:lnRef>
-          <a:fillRef idx="3">
-            <a:schemeClr val="accent1"/>
-          </a:fillRef>
-          <a:effectRef idx="2">
-            <a:schemeClr val="accent1"/>
-          </a:effectRef>
-          <a:fontRef idx="minor">
-            <a:schemeClr val="lt1"/>
-          </a:fontRef>
-        </p:style>
-        <p:txBody>
-          <a:bodyPr rtlCol="0" anchor="ctr" wrap="square"/>
-          <a:lstStyle/>
-          <a:p>
-            <a:pPr algn="ctr" rtl="1"/>
-            <a:r>
-              <a:rPr sz="1400" b="1">
-                <a:solidFill>
-                  <a:srgbClr val="333333"/>
-                </a:solidFill>
-                <a:latin typeface="Arial"/>
-                <a:cs typeface="Arial"/>
-                <a:ea typeface="Calibri"/>
-              </a:rPr>
-              <a:t>التصنيف</a:t>
-            </a:r>
-          </a:p>
-          <a:p>
-            <a:pPr algn="ctr" rtl="0"/>
-            <a:r>
-              <a:rPr sz="1000">
-                <a:solidFill>
-                  <a:srgbClr val="666666"/>
-                </a:solidFill>
-                <a:latin typeface="Calibri"/>
-                <a:cs typeface="Arial"/>
-                <a:ea typeface="Calibri"/>
-              </a:rPr>
-              <a:t>Labeling</a:t>
-            </a:r>
-          </a:p>
-        </p:txBody>
-      </p:sp>
-      <p:sp>
-        <p:nvSpPr>
-          <p:cNvPr id="12" name="Left Arrow 11"/>
-          <p:cNvSpPr/>
-          <p:nvPr/>
-        </p:nvSpPr>
-        <p:spPr>
-          <a:xfrm>
-            <a:off x="7269480" y="2926080"/>
-            <a:ext cx="128016" cy="274320"/>
-          </a:xfrm>
-          <a:prstGeom prst="leftArrow">
-            <a:avLst/>
-          </a:prstGeom>
-          <a:solidFill>
-            <a:srgbClr val="1F4E79"/>
-          </a:solidFill>
-          <a:ln>
-            <a:noFill/>
-          </a:ln>
-          <a:effectLst/>
-        </p:spPr>
-        <p:style>
-          <a:lnRef idx="1">
-            <a:schemeClr val="accent1"/>
-          </a:lnRef>
-          <a:fillRef idx="3">
-            <a:schemeClr val="accent1"/>
-          </a:fillRef>
-          <a:effectRef idx="2">
-            <a:schemeClr val="accent1"/>
-          </a:effectRef>
-          <a:fontRef idx="minor">
-            <a:schemeClr val="lt1"/>
-          </a:fontRef>
-        </p:style>
-        <p:txBody>
-          <a:bodyPr rtlCol="0" anchor="ctr"/>
-          <a:lstStyle/>
-          <a:p>
-            <a:pPr algn="ctr"/>
-          </a:p>
-        </p:txBody>
-      </p:sp>
-      <p:sp>
-        <p:nvSpPr>
-          <p:cNvPr id="13" name="Rounded Rectangle 12"/>
-          <p:cNvSpPr/>
-          <p:nvPr/>
-        </p:nvSpPr>
-        <p:spPr>
-          <a:xfrm>
-            <a:off x="7406640" y="2377440"/>
-            <a:ext cx="1234440" cy="1371600"/>
-          </a:xfrm>
-          <a:prstGeom prst="roundRect">
-            <a:avLst/>
-          </a:prstGeom>
-          <a:solidFill>
-            <a:srgbClr val="E2EFDA"/>
-          </a:solidFill>
-          <a:ln w="12700">
-            <a:solidFill>
-              <a:srgbClr val="1F4E79"/>
-            </a:solidFill>
-          </a:ln>
-          <a:effectLst/>
-        </p:spPr>
-        <p:style>
-          <a:lnRef idx="1">
-            <a:schemeClr val="accent1"/>
-          </a:lnRef>
-          <a:fillRef idx="3">
-            <a:schemeClr val="accent1"/>
-          </a:fillRef>
-          <a:effectRef idx="2">
-            <a:schemeClr val="accent1"/>
-          </a:effectRef>
-          <a:fontRef idx="minor">
-            <a:schemeClr val="lt1"/>
-          </a:fontRef>
-        </p:style>
-        <p:txBody>
-          <a:bodyPr rtlCol="0" anchor="ctr" wrap="square"/>
-          <a:lstStyle/>
-          <a:p>
-            <a:pPr algn="ctr" rtl="1"/>
-            <a:r>
-              <a:rPr sz="1400" b="1">
-                <a:solidFill>
-                  <a:srgbClr val="333333"/>
-                </a:solidFill>
-                <a:latin typeface="Arial"/>
-                <a:cs typeface="Arial"/>
-                <a:ea typeface="Calibri"/>
-              </a:rPr>
-              <a:t>الحوكمة</a:t>
-            </a:r>
-          </a:p>
-          <a:p>
-            <a:pPr algn="ctr" rtl="0"/>
-            <a:r>
-              <a:rPr sz="1000">
-                <a:solidFill>
-                  <a:srgbClr val="666666"/>
-                </a:solidFill>
-                <a:latin typeface="Calibri"/>
-                <a:cs typeface="Arial"/>
-                <a:ea typeface="Calibri"/>
-              </a:rPr>
-              <a:t>Governance</a:t>
-            </a:r>
-          </a:p>
-        </p:txBody>
-      </p:sp>
-      <p:sp>
-        <p:nvSpPr>
-          <p:cNvPr id="14" name="Left Arrow 13"/>
-          <p:cNvSpPr/>
-          <p:nvPr/>
-        </p:nvSpPr>
-        <p:spPr>
-          <a:xfrm>
-            <a:off x="8650224" y="2926080"/>
-            <a:ext cx="128016" cy="274320"/>
-          </a:xfrm>
-          <a:prstGeom prst="leftArrow">
-            <a:avLst/>
-          </a:prstGeom>
-          <a:solidFill>
-            <a:srgbClr val="1F4E79"/>
-          </a:solidFill>
-          <a:ln>
-            <a:noFill/>
-          </a:ln>
-          <a:effectLst/>
-        </p:spPr>
-        <p:style>
-          <a:lnRef idx="1">
-            <a:schemeClr val="accent1"/>
-          </a:lnRef>
-          <a:fillRef idx="3">
-            <a:schemeClr val="accent1"/>
-          </a:fillRef>
-          <a:effectRef idx="2">
-            <a:schemeClr val="accent1"/>
-          </a:effectRef>
-          <a:fontRef idx="minor">
-            <a:schemeClr val="lt1"/>
-          </a:fontRef>
-        </p:style>
-        <p:txBody>
-          <a:bodyPr rtlCol="0" anchor="ctr"/>
-          <a:lstStyle/>
-          <a:p>
-            <a:pPr algn="ctr"/>
-          </a:p>
-        </p:txBody>
-      </p:sp>
-      <p:sp>
-        <p:nvSpPr>
-          <p:cNvPr id="15" name="Rounded Rectangle 14"/>
-          <p:cNvSpPr/>
-          <p:nvPr/>
-        </p:nvSpPr>
-        <p:spPr>
-          <a:xfrm>
-            <a:off x="8787384" y="2377440"/>
-            <a:ext cx="1234440" cy="1371600"/>
-          </a:xfrm>
-          <a:prstGeom prst="roundRect">
-            <a:avLst/>
-          </a:prstGeom>
-          <a:solidFill>
-            <a:srgbClr val="FDE9D9"/>
-          </a:solidFill>
-          <a:ln w="12700">
-            <a:solidFill>
-              <a:srgbClr val="1F4E79"/>
-            </a:solidFill>
-          </a:ln>
-          <a:effectLst/>
-        </p:spPr>
-        <p:style>
-          <a:lnRef idx="1">
-            <a:schemeClr val="accent1"/>
-          </a:lnRef>
-          <a:fillRef idx="3">
-            <a:schemeClr val="accent1"/>
-          </a:fillRef>
-          <a:effectRef idx="2">
-            <a:schemeClr val="accent1"/>
-          </a:effectRef>
-          <a:fontRef idx="minor">
-            <a:schemeClr val="lt1"/>
-          </a:fontRef>
-        </p:style>
-        <p:txBody>
-          <a:bodyPr rtlCol="0" anchor="ctr" wrap="square"/>
-          <a:lstStyle/>
-          <a:p>
-            <a:pPr algn="ctr" rtl="0"/>
-            <a:r>
-              <a:rPr sz="1400" b="1">
-                <a:solidFill>
-                  <a:srgbClr val="333333"/>
-                </a:solidFill>
-                <a:latin typeface="Calibri"/>
-                <a:cs typeface="Arial"/>
-                <a:ea typeface="Calibri"/>
-              </a:rPr>
-              <a:t>MLOps</a:t>
-            </a:r>
-          </a:p>
-          <a:p>
-            <a:pPr algn="ctr" rtl="0"/>
-            <a:r>
-              <a:rPr sz="1000">
-                <a:solidFill>
-                  <a:srgbClr val="666666"/>
-                </a:solidFill>
-                <a:latin typeface="Calibri"/>
-                <a:cs typeface="Arial"/>
-                <a:ea typeface="Calibri"/>
-              </a:rPr>
-              <a:t>MLOps</a:t>
-            </a:r>
-          </a:p>
-        </p:txBody>
-      </p:sp>
-      <p:sp>
-        <p:nvSpPr>
-          <p:cNvPr id="16" name="Left Arrow 15"/>
-          <p:cNvSpPr/>
-          <p:nvPr/>
-        </p:nvSpPr>
-        <p:spPr>
-          <a:xfrm>
-            <a:off x="10030968" y="2926080"/>
-            <a:ext cx="128016" cy="274320"/>
-          </a:xfrm>
-          <a:prstGeom prst="leftArrow">
-            <a:avLst/>
-          </a:prstGeom>
-          <a:solidFill>
-            <a:srgbClr val="1F4E79"/>
-          </a:solidFill>
-          <a:ln>
-            <a:noFill/>
-          </a:ln>
-          <a:effectLst/>
-        </p:spPr>
-        <p:style>
-          <a:lnRef idx="1">
-            <a:schemeClr val="accent1"/>
-          </a:lnRef>
-          <a:fillRef idx="3">
-            <a:schemeClr val="accent1"/>
-          </a:fillRef>
-          <a:effectRef idx="2">
-            <a:schemeClr val="accent1"/>
-          </a:effectRef>
-          <a:fontRef idx="minor">
-            <a:schemeClr val="lt1"/>
-          </a:fontRef>
-        </p:style>
-        <p:txBody>
-          <a:bodyPr rtlCol="0" anchor="ctr"/>
-          <a:lstStyle/>
-          <a:p>
-            <a:pPr algn="ctr"/>
-          </a:p>
-        </p:txBody>
-      </p:sp>
-      <p:sp>
-        <p:nvSpPr>
-          <p:cNvPr id="17" name="Rounded Rectangle 16"/>
-          <p:cNvSpPr/>
-          <p:nvPr/>
-        </p:nvSpPr>
-        <p:spPr>
-          <a:xfrm>
-            <a:off x="10168128" y="2377440"/>
-            <a:ext cx="1234440" cy="1371600"/>
-          </a:xfrm>
-          <a:prstGeom prst="roundRect">
-            <a:avLst/>
-          </a:prstGeom>
-          <a:solidFill>
-            <a:srgbClr val="EDEDED"/>
-          </a:solidFill>
-          <a:ln w="12700">
-            <a:solidFill>
-              <a:srgbClr val="1F4E79"/>
-            </a:solidFill>
-          </a:ln>
-          <a:effectLst/>
-        </p:spPr>
-        <p:style>
-          <a:lnRef idx="1">
-            <a:schemeClr val="accent1"/>
-          </a:lnRef>
-          <a:fillRef idx="3">
-            <a:schemeClr val="accent1"/>
-          </a:fillRef>
-          <a:effectRef idx="2">
-            <a:schemeClr val="accent1"/>
-          </a:effectRef>
-          <a:fontRef idx="minor">
-            <a:schemeClr val="lt1"/>
-          </a:fontRef>
-        </p:style>
-        <p:txBody>
-          <a:bodyPr rtlCol="0" anchor="ctr" wrap="square"/>
-          <a:lstStyle/>
-          <a:p>
-            <a:pPr algn="ctr" rtl="1"/>
-            <a:r>
-              <a:rPr sz="1400" b="1">
-                <a:solidFill>
-                  <a:srgbClr val="333333"/>
-                </a:solidFill>
-                <a:latin typeface="Arial"/>
-                <a:cs typeface="Arial"/>
-                <a:ea typeface="Calibri"/>
-              </a:rPr>
-              <a:t>المختبر</a:t>
-            </a:r>
-          </a:p>
-          <a:p>
-            <a:pPr algn="ctr" rtl="0"/>
-            <a:r>
-              <a:rPr sz="1000">
-                <a:solidFill>
-                  <a:srgbClr val="666666"/>
-                </a:solidFill>
-                <a:latin typeface="Calibri"/>
-                <a:cs typeface="Arial"/>
-                <a:ea typeface="Calibri"/>
-              </a:rPr>
-              <a:t>Lab</a:t>
-            </a:r>
-          </a:p>
-        </p:txBody>
-      </p:sp>
-      <p:sp>
-        <p:nvSpPr>
-          <p:cNvPr id="18" name="TextBox 17"/>
+          <p:cNvPr id="3" name="TextBox 2"/>
           <p:cNvSpPr txBox="1"/>
           <p:nvPr/>
         </p:nvSpPr>
         <p:spPr>
           <a:xfrm>
-            <a:off x="640080" y="6126480"/>
-            <a:ext cx="10972800" cy="548640"/>
+            <a:off x="640080" y="182880"/>
+            <a:ext cx="10972800" cy="640080"/>
           </a:xfrm>
           <a:prstGeom prst="rect">
             <a:avLst/>
@@ -6523,40 +5428,27 @@
           <a:p>
             <a:pPr algn="r" rtl="1"/>
             <a:r>
-              <a:rPr sz="1400">
-                <a:solidFill>
-                  <a:srgbClr val="666666"/>
+              <a:rPr sz="3200" b="1">
+                <a:solidFill>
+                  <a:srgbClr val="1F3B5C"/>
                 </a:solidFill>
                 <a:latin typeface="Arial"/>
-                <a:cs typeface="Arial"/>
-                <a:ea typeface="Calibri"/>
-              </a:rPr>
-              <a:t>رحلة الوحدة الثانية من البيانات الخام إلى نقطة نهاية RAG.</a:t>
-            </a:r>
-          </a:p>
-          <a:p>
-            <a:pPr algn="r" rtl="0"/>
-            <a:r>
-              <a:rPr>
-                <a:latin typeface="Calibri"/>
-                <a:cs typeface="Arial"/>
-                <a:ea typeface="Calibri"/>
-              </a:rPr>
-              <a:t>Module 02 journey: from raw data to a RAG endpoint.</a:t>
-            </a:r>
-          </a:p>
-        </p:txBody>
-      </p:sp>
-      <p:sp>
-        <p:nvSpPr>
-          <p:cNvPr id="19" name="TextBox 18"/>
+              </a:rPr>
+              <a:t>أنواع البيانات / Data Types</a:t>
+            </a:r>
+          </a:p>
+        </p:txBody>
+      </p:sp>
+      <p:sp>
+        <p:nvSpPr>
+          <p:cNvPr id="4" name="TextBox 3"/>
           <p:cNvSpPr txBox="1"/>
           <p:nvPr/>
         </p:nvSpPr>
         <p:spPr>
           <a:xfrm>
-            <a:off x="640080" y="6400800"/>
-            <a:ext cx="8686800" cy="320040"/>
+            <a:off x="640080" y="1280160"/>
+            <a:ext cx="10972800" cy="5212080"/>
           </a:xfrm>
           <a:prstGeom prst="rect">
             <a:avLst/>
@@ -6569,31 +5461,93 @@
           </a:bodyPr>
           <a:lstStyle/>
           <a:p>
-            <a:pPr algn="r" rtl="1"/>
-            <a:r>
-              <a:rPr sz="1000" b="0">
+            <a:pPr algn="r" rtl="1">
+              <a:spcBef>
+                <a:spcPts val="200"/>
+              </a:spcBef>
+              <a:spcAft>
+                <a:spcPts val="1000"/>
+              </a:spcAft>
+            </a:pPr>
+            <a:r>
+              <a:rPr sz="1900">
+                <a:solidFill>
+                  <a:srgbClr val="333333"/>
+                </a:solidFill>
+                <a:latin typeface="Arial"/>
+              </a:rPr>
+              <a:t>• بيانات مهيكلة (جداول)، شبه مهيكلة (JSON/XML)، غير مهيكلة (نصوص، صور، صوت).</a:t>
+            </a:r>
+          </a:p>
+          <a:p>
+            <a:pPr algn="l" rtl="0">
+              <a:spcBef>
+                <a:spcPts val="200"/>
+              </a:spcBef>
+              <a:spcAft>
+                <a:spcPts val="1000"/>
+              </a:spcAft>
+            </a:pPr>
+            <a:r>
+              <a:rPr sz="1600">
                 <a:solidFill>
                   <a:srgbClr val="666666"/>
                 </a:solidFill>
+                <a:latin typeface="Calibri"/>
+              </a:rPr>
+              <a:t>• Structured (tables), semi-structured (JSON/XML), unstructured (text, images, audio).</a:t>
+            </a:r>
+          </a:p>
+          <a:p>
+            <a:pPr algn="r" rtl="1">
+              <a:spcBef>
+                <a:spcPts val="200"/>
+              </a:spcBef>
+              <a:spcAft>
+                <a:spcPts val="1000"/>
+              </a:spcAft>
+            </a:pPr>
+            <a:r>
+              <a:rPr sz="1900">
+                <a:solidFill>
+                  <a:srgbClr val="333333"/>
+                </a:solidFill>
                 <a:latin typeface="Arial"/>
-                <a:cs typeface="Arial"/>
-                <a:ea typeface="Calibri"/>
-              </a:rPr>
-              <a:t>Module 02 — Data &amp; AI Engineering Track  |  الوحدة الثانية</a:t>
-            </a:r>
-          </a:p>
-        </p:txBody>
-      </p:sp>
-      <p:sp>
-        <p:nvSpPr>
-          <p:cNvPr id="20" name="TextBox 19"/>
+              </a:rPr>
+              <a:t>• اختيار النوع يحدد أدوات التخزين والمعالجة المناسبة.</a:t>
+            </a:r>
+          </a:p>
+          <a:p>
+            <a:pPr algn="l" rtl="0">
+              <a:spcBef>
+                <a:spcPts val="200"/>
+              </a:spcBef>
+              <a:spcAft>
+                <a:spcPts val="1000"/>
+              </a:spcAft>
+            </a:pPr>
+            <a:r>
+              <a:rPr sz="1600">
+                <a:solidFill>
+                  <a:srgbClr val="666666"/>
+                </a:solidFill>
+                <a:latin typeface="Calibri"/>
+              </a:rPr>
+              <a:t>• The data type determines the right storage and processing tools.</a:t>
+            </a:r>
+          </a:p>
+        </p:txBody>
+      </p:sp>
+      <p:sp>
+        <p:nvSpPr>
+          <p:cNvPr id="5" name="TextBox 4"/>
           <p:cNvSpPr txBox="1"/>
           <p:nvPr/>
         </p:nvSpPr>
         <p:spPr>
           <a:xfrm>
-            <a:off x="9601200" y="6400800"/>
-            <a:ext cx="1920240" cy="320040"/>
+            <a:off x="640080" y="6400800"/>
+            <a:ext cx="8686800" cy="320040"/>
           </a:xfrm>
           <a:prstGeom prst="rect">
             <a:avLst/>
@@ -6606,31 +5560,29 @@
           </a:bodyPr>
           <a:lstStyle/>
           <a:p>
-            <a:pPr algn="l" rtl="0"/>
+            <a:pPr algn="r" rtl="1"/>
             <a:r>
               <a:rPr sz="1000" b="0">
                 <a:solidFill>
                   <a:srgbClr val="666666"/>
                 </a:solidFill>
-                <a:latin typeface="Calibri"/>
-                <a:cs typeface="Arial"/>
-                <a:ea typeface="Calibri"/>
-              </a:rPr>
-              <a:t>06_  •  3/12</a:t>
-            </a:r>
-          </a:p>
-        </p:txBody>
-      </p:sp>
-      <p:sp>
-        <p:nvSpPr>
-          <p:cNvPr id="21" name="TextBox 20"/>
+                <a:latin typeface="Arial"/>
+              </a:rPr>
+              <a:t>Module 02 — Data &amp; AI Engineering Track  |  الوحدة الثانية</a:t>
+            </a:r>
+          </a:p>
+        </p:txBody>
+      </p:sp>
+      <p:sp>
+        <p:nvSpPr>
+          <p:cNvPr id="6" name="TextBox 5"/>
           <p:cNvSpPr txBox="1"/>
           <p:nvPr/>
         </p:nvSpPr>
         <p:spPr>
           <a:xfrm>
-            <a:off x="640080" y="6400800"/>
-            <a:ext cx="8686800" cy="320040"/>
+            <a:off x="9601200" y="6400800"/>
+            <a:ext cx="1920240" cy="320040"/>
           </a:xfrm>
           <a:prstGeom prst="rect">
             <a:avLst/>
@@ -6643,54 +5595,15 @@
           </a:bodyPr>
           <a:lstStyle/>
           <a:p>
-            <a:pPr algn="r" rtl="1"/>
+            <a:pPr algn="l" rtl="0"/>
             <a:r>
               <a:rPr sz="1000" b="0">
                 <a:solidFill>
                   <a:srgbClr val="666666"/>
                 </a:solidFill>
-                <a:latin typeface="Arial"/>
-                <a:cs typeface="Arial"/>
-                <a:ea typeface="Calibri"/>
-              </a:rPr>
-              <a:t>Module 02 — Data &amp; AI Engineering Track  |  الوحدة الثانية</a:t>
-            </a:r>
-          </a:p>
-        </p:txBody>
-      </p:sp>
-      <p:sp>
-        <p:nvSpPr>
-          <p:cNvPr id="22" name="TextBox 21"/>
-          <p:cNvSpPr txBox="1"/>
-          <p:nvPr/>
-        </p:nvSpPr>
-        <p:spPr>
-          <a:xfrm>
-            <a:off x="9601200" y="6400800"/>
-            <a:ext cx="1920240" cy="320040"/>
-          </a:xfrm>
-          <a:prstGeom prst="rect">
-            <a:avLst/>
-          </a:prstGeom>
-          <a:noFill/>
-        </p:spPr>
-        <p:txBody>
-          <a:bodyPr wrap="square">
-            <a:spAutoFit/>
-          </a:bodyPr>
-          <a:lstStyle/>
-          <a:p>
-            <a:pPr algn="l" rtl="0"/>
-            <a:r>
-              <a:rPr sz="1000" b="0">
-                <a:solidFill>
-                  <a:srgbClr val="666666"/>
-                </a:solidFill>
                 <a:latin typeface="Calibri"/>
-                <a:cs typeface="Arial"/>
-                <a:ea typeface="Calibri"/>
-              </a:rPr>
-              <a:t>06_  •  3/12</a:t>
+              </a:rPr>
+              <a:t>V06  •  5/12</a:t>
             </a:r>
           </a:p>
         </p:txBody>
@@ -6796,10 +5709,8 @@
                   <a:srgbClr val="1F3B5C"/>
                 </a:solidFill>
                 <a:latin typeface="Arial"/>
-                <a:cs typeface="Arial"/>
-                <a:ea typeface="Calibri"/>
-              </a:rPr>
-              <a:t>وحدات المقرر / Course Modules</a:t>
+              </a:rPr>
+              <a:t>التنسيقات / Formats</a:t>
             </a:r>
           </a:p>
         </p:txBody>
@@ -6835,15 +5746,32 @@
               </a:spcAft>
             </a:pPr>
             <a:r>
+              <a:rPr sz="1900">
+                <a:solidFill>
+                  <a:srgbClr val="333333"/>
+                </a:solidFill>
+                <a:latin typeface="Arial"/>
+              </a:rPr>
+              <a:t>• CSV للتبادل البسيط، JSON للواجهات البرمجية، Parquet وAvro للتحليلات والأنابيب.</a:t>
+            </a:r>
+          </a:p>
+          <a:p>
+            <a:pPr algn="l" rtl="0">
+              <a:spcBef>
+                <a:spcPts val="200"/>
+              </a:spcBef>
+              <a:spcAft>
+                <a:spcPts val="1000"/>
+              </a:spcAft>
+            </a:pPr>
+            <a:r>
               <a:rPr sz="1600">
                 <a:solidFill>
-                  <a:srgbClr val="333333"/>
-                </a:solidFill>
-                <a:latin typeface="Arial"/>
-                <a:cs typeface="Arial"/>
-                <a:ea typeface="Calibri"/>
-              </a:rPr>
-              <a:t>• V06 — أساسيات البيانات / Data Fundamentals</a:t>
+                  <a:srgbClr val="666666"/>
+                </a:solidFill>
+                <a:latin typeface="Calibri"/>
+              </a:rPr>
+              <a:t>• CSV for simple exchange, JSON for APIs, Parquet and Avro for analytics and pipelines.</a:t>
             </a:r>
           </a:p>
           <a:p>
@@ -6856,19 +5784,17 @@
               </a:spcAft>
             </a:pPr>
             <a:r>
-              <a:rPr sz="1600">
+              <a:rPr sz="1900">
                 <a:solidFill>
                   <a:srgbClr val="333333"/>
                 </a:solidFill>
                 <a:latin typeface="Arial"/>
-                <a:cs typeface="Arial"/>
-                <a:ea typeface="Calibri"/>
-              </a:rPr>
-              <a:t>• V07 — المستودعات والبحيرات ومعمارية Lakehouse / Warehouses, Data Lakes &amp; Lakehouse</a:t>
-            </a:r>
-          </a:p>
-          <a:p>
-            <a:pPr algn="r" rtl="1">
+              </a:rPr>
+              <a:t>• التنسيقات العمودية (Parquet) تقلل الحجم وتسرّع القراءة التحليلية.</a:t>
+            </a:r>
+          </a:p>
+          <a:p>
+            <a:pPr algn="l" rtl="0">
               <a:spcBef>
                 <a:spcPts val="200"/>
               </a:spcBef>
@@ -6879,97 +5805,11 @@
             <a:r>
               <a:rPr sz="1600">
                 <a:solidFill>
-                  <a:srgbClr val="333333"/>
-                </a:solidFill>
-                <a:latin typeface="Arial"/>
-                <a:cs typeface="Arial"/>
-                <a:ea typeface="Calibri"/>
-              </a:rPr>
-              <a:t>• V08 — هندسة الخصائص ومخازنها / Feature Engineering &amp; Feature Stores</a:t>
-            </a:r>
-          </a:p>
-          <a:p>
-            <a:pPr algn="r" rtl="1">
-              <a:spcBef>
-                <a:spcPts val="200"/>
-              </a:spcBef>
-              <a:spcAft>
-                <a:spcPts val="1000"/>
-              </a:spcAft>
-            </a:pPr>
-            <a:r>
-              <a:rPr sz="1600">
-                <a:solidFill>
-                  <a:srgbClr val="333333"/>
-                </a:solidFill>
-                <a:latin typeface="Arial"/>
-                <a:cs typeface="Arial"/>
-                <a:ea typeface="Calibri"/>
-              </a:rPr>
-              <a:t>• V09 — قواعد البيانات المتجهية + RAG التطبيقي / Vector Databases + Applied RAG</a:t>
-            </a:r>
-          </a:p>
-          <a:p>
-            <a:pPr algn="r" rtl="1">
-              <a:spcBef>
-                <a:spcPts val="200"/>
-              </a:spcBef>
-              <a:spcAft>
-                <a:spcPts val="1000"/>
-              </a:spcAft>
-            </a:pPr>
-            <a:r>
-              <a:rPr sz="1600">
-                <a:solidFill>
-                  <a:srgbClr val="333333"/>
-                </a:solidFill>
-                <a:latin typeface="Arial"/>
-                <a:cs typeface="Arial"/>
-                <a:ea typeface="Calibri"/>
-              </a:rPr>
-              <a:t>• V10 — تصنيف البيانات على نطاق واسع / Labeling at Scale</a:t>
-            </a:r>
-          </a:p>
-          <a:p>
-            <a:pPr algn="r" rtl="1">
-              <a:spcBef>
-                <a:spcPts val="200"/>
-              </a:spcBef>
-              <a:spcAft>
-                <a:spcPts val="1000"/>
-              </a:spcAft>
-            </a:pPr>
-            <a:r>
-              <a:rPr sz="1600">
-                <a:solidFill>
-                  <a:srgbClr val="333333"/>
-                </a:solidFill>
-                <a:latin typeface="Arial"/>
-                <a:cs typeface="Arial"/>
-                <a:ea typeface="Calibri"/>
-              </a:rPr>
-              <a:t>• V11 — حوكمة البيانات وسلسلة العهدة والفهرسة / Data Governance, Lineage &amp; Cataloging</a:t>
-            </a:r>
-          </a:p>
-          <a:p>
-            <a:pPr algn="r" rtl="1">
-              <a:spcBef>
-                <a:spcPts val="200"/>
-              </a:spcBef>
-              <a:spcAft>
-                <a:spcPts val="1000"/>
-              </a:spcAft>
-            </a:pPr>
-            <a:r>
-              <a:rPr sz="1600">
-                <a:solidFill>
-                  <a:srgbClr val="333333"/>
-                </a:solidFill>
-                <a:latin typeface="Arial"/>
-                <a:cs typeface="Arial"/>
-                <a:ea typeface="Calibri"/>
-              </a:rPr>
-              <a:t>• V12 — أساسيات MLOps + تمهيد للمختبر / MLOps Fundamentals + Lab Introduction</a:t>
+                  <a:srgbClr val="666666"/>
+                </a:solidFill>
+                <a:latin typeface="Calibri"/>
+              </a:rPr>
+              <a:t>• Columnar formats (Parquet) reduce size and speed up analytical reads.</a:t>
             </a:r>
           </a:p>
         </p:txBody>
@@ -7003,8 +5843,6 @@
                   <a:srgbClr val="666666"/>
                 </a:solidFill>
                 <a:latin typeface="Arial"/>
-                <a:cs typeface="Arial"/>
-                <a:ea typeface="Calibri"/>
               </a:rPr>
               <a:t>Module 02 — Data &amp; AI Engineering Track  |  الوحدة الثانية</a:t>
             </a:r>
@@ -7040,84 +5878,8 @@
                   <a:srgbClr val="666666"/>
                 </a:solidFill>
                 <a:latin typeface="Calibri"/>
-                <a:cs typeface="Arial"/>
-                <a:ea typeface="Calibri"/>
-              </a:rPr>
-              <a:t>06_  •  4/12</a:t>
-            </a:r>
-          </a:p>
-        </p:txBody>
-      </p:sp>
-      <p:sp>
-        <p:nvSpPr>
-          <p:cNvPr id="7" name="TextBox 6"/>
-          <p:cNvSpPr txBox="1"/>
-          <p:nvPr/>
-        </p:nvSpPr>
-        <p:spPr>
-          <a:xfrm>
-            <a:off x="640080" y="6400800"/>
-            <a:ext cx="8686800" cy="320040"/>
-          </a:xfrm>
-          <a:prstGeom prst="rect">
-            <a:avLst/>
-          </a:prstGeom>
-          <a:noFill/>
-        </p:spPr>
-        <p:txBody>
-          <a:bodyPr wrap="square">
-            <a:spAutoFit/>
-          </a:bodyPr>
-          <a:lstStyle/>
-          <a:p>
-            <a:pPr algn="r" rtl="1"/>
-            <a:r>
-              <a:rPr sz="1000" b="0">
-                <a:solidFill>
-                  <a:srgbClr val="666666"/>
-                </a:solidFill>
-                <a:latin typeface="Arial"/>
-                <a:cs typeface="Arial"/>
-                <a:ea typeface="Calibri"/>
-              </a:rPr>
-              <a:t>Module 02 — Data &amp; AI Engineering Track  |  الوحدة الثانية</a:t>
-            </a:r>
-          </a:p>
-        </p:txBody>
-      </p:sp>
-      <p:sp>
-        <p:nvSpPr>
-          <p:cNvPr id="8" name="TextBox 7"/>
-          <p:cNvSpPr txBox="1"/>
-          <p:nvPr/>
-        </p:nvSpPr>
-        <p:spPr>
-          <a:xfrm>
-            <a:off x="9601200" y="6400800"/>
-            <a:ext cx="1920240" cy="320040"/>
-          </a:xfrm>
-          <a:prstGeom prst="rect">
-            <a:avLst/>
-          </a:prstGeom>
-          <a:noFill/>
-        </p:spPr>
-        <p:txBody>
-          <a:bodyPr wrap="square">
-            <a:spAutoFit/>
-          </a:bodyPr>
-          <a:lstStyle/>
-          <a:p>
-            <a:pPr algn="l" rtl="0"/>
-            <a:r>
-              <a:rPr sz="1000" b="0">
-                <a:solidFill>
-                  <a:srgbClr val="666666"/>
-                </a:solidFill>
-                <a:latin typeface="Calibri"/>
-                <a:cs typeface="Arial"/>
-                <a:ea typeface="Calibri"/>
-              </a:rPr>
-              <a:t>06_  •  4/12</a:t>
+              </a:rPr>
+              <a:t>V06  •  6/12</a:t>
             </a:r>
           </a:p>
         </p:txBody>
@@ -7223,10 +5985,8 @@
                   <a:srgbClr val="1F3B5C"/>
                 </a:solidFill>
                 <a:latin typeface="Arial"/>
-                <a:cs typeface="Arial"/>
-                <a:ea typeface="Calibri"/>
-              </a:rPr>
-              <a:t>أنواع البيانات / Data Types</a:t>
+              </a:rPr>
+              <a:t>أنابيب ETL / ELT</a:t>
             </a:r>
           </a:p>
         </p:txBody>
@@ -7267,14 +6027,12 @@
                   <a:srgbClr val="333333"/>
                 </a:solidFill>
                 <a:latin typeface="Arial"/>
-                <a:cs typeface="Arial"/>
-                <a:ea typeface="Calibri"/>
-              </a:rPr>
-              <a:t>• بيانات مهيكلة (جداول)، شبه مهيكلة (JSON/XML)، غير مهيكلة (نصوص، صور، صوت).</a:t>
-            </a:r>
-          </a:p>
-          <a:p>
-            <a:pPr algn="r" rtl="0">
+              </a:rPr>
+              <a:t>• ETL: التحويل قبل التحميل؛ ELT: التحميل أولاً ثم التحويل داخل المنصة المستهدفة.</a:t>
+            </a:r>
+          </a:p>
+          <a:p>
+            <a:pPr algn="l" rtl="0">
               <a:spcBef>
                 <a:spcPts val="200"/>
               </a:spcBef>
@@ -7288,10 +6046,8 @@
                   <a:srgbClr val="666666"/>
                 </a:solidFill>
                 <a:latin typeface="Calibri"/>
-                <a:cs typeface="Arial"/>
-                <a:ea typeface="Calibri"/>
-              </a:rPr>
-              <a:t>• Structured (tables), semi-structured (JSON/XML), unstructured (text, images, audio).</a:t>
+              </a:rPr>
+              <a:t>• ETL: transform before loading; ELT: load first, transform inside the target platform.</a:t>
             </a:r>
           </a:p>
           <a:p>
@@ -7309,14 +6065,12 @@
                   <a:srgbClr val="333333"/>
                 </a:solidFill>
                 <a:latin typeface="Arial"/>
-                <a:cs typeface="Arial"/>
-                <a:ea typeface="Calibri"/>
-              </a:rPr>
-              <a:t>• اختيار النوع يحدد أدوات التخزين والمعالجة المناسبة.</a:t>
-            </a:r>
-          </a:p>
-          <a:p>
-            <a:pPr algn="r" rtl="0">
+              </a:rPr>
+              <a:t>• ELT هو النمط السائد في بيئات Lakehouse الحديثة.</a:t>
+            </a:r>
+          </a:p>
+          <a:p>
+            <a:pPr algn="l" rtl="0">
               <a:spcBef>
                 <a:spcPts val="200"/>
               </a:spcBef>
@@ -7330,10 +6084,8 @@
                   <a:srgbClr val="666666"/>
                 </a:solidFill>
                 <a:latin typeface="Calibri"/>
-                <a:cs typeface="Arial"/>
-                <a:ea typeface="Calibri"/>
-              </a:rPr>
-              <a:t>• The data type determines the right storage and processing tools.</a:t>
+              </a:rPr>
+              <a:t>• ELT is the dominant pattern in modern lakehouse environments.</a:t>
             </a:r>
           </a:p>
         </p:txBody>
@@ -7367,8 +6119,6 @@
                   <a:srgbClr val="666666"/>
                 </a:solidFill>
                 <a:latin typeface="Arial"/>
-                <a:cs typeface="Arial"/>
-                <a:ea typeface="Calibri"/>
               </a:rPr>
               <a:t>Module 02 — Data &amp; AI Engineering Track  |  الوحدة الثانية</a:t>
             </a:r>
@@ -7404,158 +6154,8 @@
                   <a:srgbClr val="666666"/>
                 </a:solidFill>
                 <a:latin typeface="Calibri"/>
-                <a:cs typeface="Arial"/>
-                <a:ea typeface="Calibri"/>
-              </a:rPr>
-              <a:t>V06  •  3/13</a:t>
-            </a:r>
-          </a:p>
-        </p:txBody>
-      </p:sp>
-      <p:sp>
-        <p:nvSpPr>
-          <p:cNvPr id="7" name="TextBox 6"/>
-          <p:cNvSpPr txBox="1"/>
-          <p:nvPr/>
-        </p:nvSpPr>
-        <p:spPr>
-          <a:xfrm>
-            <a:off x="640080" y="6400800"/>
-            <a:ext cx="8686800" cy="320040"/>
-          </a:xfrm>
-          <a:prstGeom prst="rect">
-            <a:avLst/>
-          </a:prstGeom>
-          <a:noFill/>
-        </p:spPr>
-        <p:txBody>
-          <a:bodyPr wrap="square">
-            <a:spAutoFit/>
-          </a:bodyPr>
-          <a:lstStyle/>
-          <a:p>
-            <a:pPr algn="r" rtl="1"/>
-            <a:r>
-              <a:rPr sz="1000" b="0">
-                <a:solidFill>
-                  <a:srgbClr val="666666"/>
-                </a:solidFill>
-                <a:latin typeface="Arial"/>
-                <a:cs typeface="Arial"/>
-                <a:ea typeface="Calibri"/>
-              </a:rPr>
-              <a:t>Module 02 — Data &amp; AI Engineering Track  |  الوحدة الثانية</a:t>
-            </a:r>
-          </a:p>
-        </p:txBody>
-      </p:sp>
-      <p:sp>
-        <p:nvSpPr>
-          <p:cNvPr id="8" name="TextBox 7"/>
-          <p:cNvSpPr txBox="1"/>
-          <p:nvPr/>
-        </p:nvSpPr>
-        <p:spPr>
-          <a:xfrm>
-            <a:off x="9601200" y="6400800"/>
-            <a:ext cx="1920240" cy="320040"/>
-          </a:xfrm>
-          <a:prstGeom prst="rect">
-            <a:avLst/>
-          </a:prstGeom>
-          <a:noFill/>
-        </p:spPr>
-        <p:txBody>
-          <a:bodyPr wrap="square">
-            <a:spAutoFit/>
-          </a:bodyPr>
-          <a:lstStyle/>
-          <a:p>
-            <a:pPr algn="l" rtl="0"/>
-            <a:r>
-              <a:rPr sz="1000" b="0">
-                <a:solidFill>
-                  <a:srgbClr val="666666"/>
-                </a:solidFill>
-                <a:latin typeface="Calibri"/>
-                <a:cs typeface="Arial"/>
-                <a:ea typeface="Calibri"/>
-              </a:rPr>
-              <a:t>06_  •  5/12</a:t>
-            </a:r>
-          </a:p>
-        </p:txBody>
-      </p:sp>
-      <p:sp>
-        <p:nvSpPr>
-          <p:cNvPr id="9" name="TextBox 8"/>
-          <p:cNvSpPr txBox="1"/>
-          <p:nvPr/>
-        </p:nvSpPr>
-        <p:spPr>
-          <a:xfrm>
-            <a:off x="640080" y="6400800"/>
-            <a:ext cx="8686800" cy="320040"/>
-          </a:xfrm>
-          <a:prstGeom prst="rect">
-            <a:avLst/>
-          </a:prstGeom>
-          <a:noFill/>
-        </p:spPr>
-        <p:txBody>
-          <a:bodyPr wrap="square">
-            <a:spAutoFit/>
-          </a:bodyPr>
-          <a:lstStyle/>
-          <a:p>
-            <a:pPr algn="r" rtl="1"/>
-            <a:r>
-              <a:rPr sz="1000" b="0">
-                <a:solidFill>
-                  <a:srgbClr val="666666"/>
-                </a:solidFill>
-                <a:latin typeface="Arial"/>
-                <a:cs typeface="Arial"/>
-                <a:ea typeface="Calibri"/>
-              </a:rPr>
-              <a:t>Module 02 — Data &amp; AI Engineering Track  |  الوحدة الثانية</a:t>
-            </a:r>
-          </a:p>
-        </p:txBody>
-      </p:sp>
-      <p:sp>
-        <p:nvSpPr>
-          <p:cNvPr id="10" name="TextBox 9"/>
-          <p:cNvSpPr txBox="1"/>
-          <p:nvPr/>
-        </p:nvSpPr>
-        <p:spPr>
-          <a:xfrm>
-            <a:off x="9601200" y="6400800"/>
-            <a:ext cx="1920240" cy="320040"/>
-          </a:xfrm>
-          <a:prstGeom prst="rect">
-            <a:avLst/>
-          </a:prstGeom>
-          <a:noFill/>
-        </p:spPr>
-        <p:txBody>
-          <a:bodyPr wrap="square">
-            <a:spAutoFit/>
-          </a:bodyPr>
-          <a:lstStyle/>
-          <a:p>
-            <a:pPr algn="l" rtl="0"/>
-            <a:r>
-              <a:rPr sz="1000" b="0">
-                <a:solidFill>
-                  <a:srgbClr val="666666"/>
-                </a:solidFill>
-                <a:latin typeface="Calibri"/>
-                <a:cs typeface="Arial"/>
-                <a:ea typeface="Calibri"/>
-              </a:rPr>
-              <a:t>06_  •  5/12</a:t>
+              </a:rPr>
+              <a:t>V06  •  7/12</a:t>
             </a:r>
           </a:p>
         </p:txBody>
@@ -7661,10 +6261,8 @@
                   <a:srgbClr val="1F3B5C"/>
                 </a:solidFill>
                 <a:latin typeface="Arial"/>
-                <a:cs typeface="Arial"/>
-                <a:ea typeface="Calibri"/>
-              </a:rPr>
-              <a:t>التنسيقات / Formats</a:t>
+              </a:rPr>
+              <a:t>مقارنة أنماط المعالجة / Processing Patterns</a:t>
             </a:r>
           </a:p>
         </p:txBody>
@@ -7700,19 +6298,17 @@
               </a:spcAft>
             </a:pPr>
             <a:r>
-              <a:rPr sz="1900">
+              <a:rPr sz="1800">
                 <a:solidFill>
                   <a:srgbClr val="333333"/>
                 </a:solidFill>
                 <a:latin typeface="Arial"/>
-                <a:cs typeface="Arial"/>
-                <a:ea typeface="Calibri"/>
-              </a:rPr>
-              <a:t>• CSV للتبادل البسيط، JSON للواجهات البرمجية، Parquet وAvro للتحليلات والأنابيب.</a:t>
-            </a:r>
-          </a:p>
-          <a:p>
-            <a:pPr algn="r" rtl="0">
+              </a:rPr>
+              <a:t>• المعمارية المتدرِّجة Medallion (Lakehouse): Bronze خام → Silver منقَّى → Gold جاهز للتحليل؛ إدارة مركزية؛ الأنسب للتحليلات وخطوط AI/ML/RAG.</a:t>
+            </a:r>
+          </a:p>
+          <a:p>
+            <a:pPr algn="l" rtl="0">
               <a:spcBef>
                 <a:spcPts val="200"/>
               </a:spcBef>
@@ -7721,15 +6317,13 @@
               </a:spcAft>
             </a:pPr>
             <a:r>
-              <a:rPr sz="1600">
+              <a:rPr sz="1500">
                 <a:solidFill>
                   <a:srgbClr val="666666"/>
                 </a:solidFill>
                 <a:latin typeface="Calibri"/>
-                <a:cs typeface="Arial"/>
-                <a:ea typeface="Calibri"/>
-              </a:rPr>
-              <a:t>• CSV for simple exchange, JSON for APIs, Parquet and Avro for analytics and pipelines.</a:t>
+              </a:rPr>
+              <a:t>• Medallion (Lakehouse): raw Bronze → cleansed Silver → analytics-ready Gold; central ownership; best for analytics and AI/ML/RAG pipelines.</a:t>
             </a:r>
           </a:p>
           <a:p>
@@ -7742,19 +6336,17 @@
               </a:spcAft>
             </a:pPr>
             <a:r>
-              <a:rPr sz="1900">
+              <a:rPr sz="1800">
                 <a:solidFill>
                   <a:srgbClr val="333333"/>
                 </a:solidFill>
                 <a:latin typeface="Arial"/>
-                <a:cs typeface="Arial"/>
-                <a:ea typeface="Calibri"/>
-              </a:rPr>
-              <a:t>• التنسيقات العمودية (Parquet) تقلل الحجم وتسرّع القراءة التحليلية.</a:t>
-            </a:r>
-          </a:p>
-          <a:p>
-            <a:pPr algn="r" rtl="0">
+              </a:rPr>
+              <a:t>• مستودع البيانات: ETL/ELT → Staging → المستودع → أسواق البيانات؛ حوكمة مركزية؛ الأنسب للتقارير وذكاء الأعمال.</a:t>
+            </a:r>
+          </a:p>
+          <a:p>
+            <a:pPr algn="l" rtl="0">
               <a:spcBef>
                 <a:spcPts val="200"/>
               </a:spcBef>
@@ -7763,15 +6355,51 @@
               </a:spcAft>
             </a:pPr>
             <a:r>
-              <a:rPr sz="1600">
+              <a:rPr sz="1500">
                 <a:solidFill>
                   <a:srgbClr val="666666"/>
                 </a:solidFill>
                 <a:latin typeface="Calibri"/>
-                <a:cs typeface="Arial"/>
-                <a:ea typeface="Calibri"/>
-              </a:rPr>
-              <a:t>• Columnar formats (Parquet) reduce size and speed up analytical reads.</a:t>
+              </a:rPr>
+              <a:t>• Data warehouse: ETL/ELT → staging → warehouse → data marts; central governance; best for reporting and BI.</a:t>
+            </a:r>
+          </a:p>
+          <a:p>
+            <a:pPr algn="r" rtl="1">
+              <a:spcBef>
+                <a:spcPts val="200"/>
+              </a:spcBef>
+              <a:spcAft>
+                <a:spcPts val="1000"/>
+              </a:spcAft>
+            </a:pPr>
+            <a:r>
+              <a:rPr sz="1800">
+                <a:solidFill>
+                  <a:srgbClr val="333333"/>
+                </a:solidFill>
+                <a:latin typeface="Arial"/>
+              </a:rPr>
+              <a:t>• شبكة البيانات Data Mesh: ملكية لامركزية بالمجالات؛ منتجات بيانات بعقود (مخطط، أمان، SLA) وكتالوج موحد؛ الأنسب للمؤسسات الكبيرة.</a:t>
+            </a:r>
+          </a:p>
+          <a:p>
+            <a:pPr algn="l" rtl="0">
+              <a:spcBef>
+                <a:spcPts val="200"/>
+              </a:spcBef>
+              <a:spcAft>
+                <a:spcPts val="1000"/>
+              </a:spcAft>
+            </a:pPr>
+            <a:r>
+              <a:rPr sz="1500">
+                <a:solidFill>
+                  <a:srgbClr val="666666"/>
+                </a:solidFill>
+                <a:latin typeface="Calibri"/>
+              </a:rPr>
+              <a:t>• Data mesh: decentralized domain ownership; data products with contracts (schema, security, SLA) and a unified catalog; best for large organizations.</a:t>
             </a:r>
           </a:p>
         </p:txBody>
@@ -7805,8 +6433,6 @@
                   <a:srgbClr val="666666"/>
                 </a:solidFill>
                 <a:latin typeface="Arial"/>
-                <a:cs typeface="Arial"/>
-                <a:ea typeface="Calibri"/>
               </a:rPr>
               <a:t>Module 02 — Data &amp; AI Engineering Track  |  الوحدة الثانية</a:t>
             </a:r>
@@ -7842,158 +6468,8 @@
                   <a:srgbClr val="666666"/>
                 </a:solidFill>
                 <a:latin typeface="Calibri"/>
-                <a:cs typeface="Arial"/>
-                <a:ea typeface="Calibri"/>
-              </a:rPr>
-              <a:t>V06  •  4/13</a:t>
-            </a:r>
-          </a:p>
-        </p:txBody>
-      </p:sp>
-      <p:sp>
-        <p:nvSpPr>
-          <p:cNvPr id="7" name="TextBox 6"/>
-          <p:cNvSpPr txBox="1"/>
-          <p:nvPr/>
-        </p:nvSpPr>
-        <p:spPr>
-          <a:xfrm>
-            <a:off x="640080" y="6400800"/>
-            <a:ext cx="8686800" cy="320040"/>
-          </a:xfrm>
-          <a:prstGeom prst="rect">
-            <a:avLst/>
-          </a:prstGeom>
-          <a:noFill/>
-        </p:spPr>
-        <p:txBody>
-          <a:bodyPr wrap="square">
-            <a:spAutoFit/>
-          </a:bodyPr>
-          <a:lstStyle/>
-          <a:p>
-            <a:pPr algn="r" rtl="1"/>
-            <a:r>
-              <a:rPr sz="1000" b="0">
-                <a:solidFill>
-                  <a:srgbClr val="666666"/>
-                </a:solidFill>
-                <a:latin typeface="Arial"/>
-                <a:cs typeface="Arial"/>
-                <a:ea typeface="Calibri"/>
-              </a:rPr>
-              <a:t>Module 02 — Data &amp; AI Engineering Track  |  الوحدة الثانية</a:t>
-            </a:r>
-          </a:p>
-        </p:txBody>
-      </p:sp>
-      <p:sp>
-        <p:nvSpPr>
-          <p:cNvPr id="8" name="TextBox 7"/>
-          <p:cNvSpPr txBox="1"/>
-          <p:nvPr/>
-        </p:nvSpPr>
-        <p:spPr>
-          <a:xfrm>
-            <a:off x="9601200" y="6400800"/>
-            <a:ext cx="1920240" cy="320040"/>
-          </a:xfrm>
-          <a:prstGeom prst="rect">
-            <a:avLst/>
-          </a:prstGeom>
-          <a:noFill/>
-        </p:spPr>
-        <p:txBody>
-          <a:bodyPr wrap="square">
-            <a:spAutoFit/>
-          </a:bodyPr>
-          <a:lstStyle/>
-          <a:p>
-            <a:pPr algn="l" rtl="0"/>
-            <a:r>
-              <a:rPr sz="1000" b="0">
-                <a:solidFill>
-                  <a:srgbClr val="666666"/>
-                </a:solidFill>
-                <a:latin typeface="Calibri"/>
-                <a:cs typeface="Arial"/>
-                <a:ea typeface="Calibri"/>
-              </a:rPr>
-              <a:t>06_  •  6/12</a:t>
-            </a:r>
-          </a:p>
-        </p:txBody>
-      </p:sp>
-      <p:sp>
-        <p:nvSpPr>
-          <p:cNvPr id="9" name="TextBox 8"/>
-          <p:cNvSpPr txBox="1"/>
-          <p:nvPr/>
-        </p:nvSpPr>
-        <p:spPr>
-          <a:xfrm>
-            <a:off x="640080" y="6400800"/>
-            <a:ext cx="8686800" cy="320040"/>
-          </a:xfrm>
-          <a:prstGeom prst="rect">
-            <a:avLst/>
-          </a:prstGeom>
-          <a:noFill/>
-        </p:spPr>
-        <p:txBody>
-          <a:bodyPr wrap="square">
-            <a:spAutoFit/>
-          </a:bodyPr>
-          <a:lstStyle/>
-          <a:p>
-            <a:pPr algn="r" rtl="1"/>
-            <a:r>
-              <a:rPr sz="1000" b="0">
-                <a:solidFill>
-                  <a:srgbClr val="666666"/>
-                </a:solidFill>
-                <a:latin typeface="Arial"/>
-                <a:cs typeface="Arial"/>
-                <a:ea typeface="Calibri"/>
-              </a:rPr>
-              <a:t>Module 02 — Data &amp; AI Engineering Track  |  الوحدة الثانية</a:t>
-            </a:r>
-          </a:p>
-        </p:txBody>
-      </p:sp>
-      <p:sp>
-        <p:nvSpPr>
-          <p:cNvPr id="10" name="TextBox 9"/>
-          <p:cNvSpPr txBox="1"/>
-          <p:nvPr/>
-        </p:nvSpPr>
-        <p:spPr>
-          <a:xfrm>
-            <a:off x="9601200" y="6400800"/>
-            <a:ext cx="1920240" cy="320040"/>
-          </a:xfrm>
-          <a:prstGeom prst="rect">
-            <a:avLst/>
-          </a:prstGeom>
-          <a:noFill/>
-        </p:spPr>
-        <p:txBody>
-          <a:bodyPr wrap="square">
-            <a:spAutoFit/>
-          </a:bodyPr>
-          <a:lstStyle/>
-          <a:p>
-            <a:pPr algn="l" rtl="0"/>
-            <a:r>
-              <a:rPr sz="1000" b="0">
-                <a:solidFill>
-                  <a:srgbClr val="666666"/>
-                </a:solidFill>
-                <a:latin typeface="Calibri"/>
-                <a:cs typeface="Arial"/>
-                <a:ea typeface="Calibri"/>
-              </a:rPr>
-              <a:t>06_  •  6/12</a:t>
+              </a:rPr>
+              <a:t>V06  •  8/12</a:t>
             </a:r>
           </a:p>
         </p:txBody>
@@ -8099,926 +6575,6 @@
                   <a:srgbClr val="1F3B5C"/>
                 </a:solidFill>
                 <a:latin typeface="Arial"/>
-                <a:cs typeface="Arial"/>
-                <a:ea typeface="Calibri"/>
-              </a:rPr>
-              <a:t>أنابيب ETL / ELT</a:t>
-            </a:r>
-          </a:p>
-        </p:txBody>
-      </p:sp>
-      <p:sp>
-        <p:nvSpPr>
-          <p:cNvPr id="4" name="TextBox 3"/>
-          <p:cNvSpPr txBox="1"/>
-          <p:nvPr/>
-        </p:nvSpPr>
-        <p:spPr>
-          <a:xfrm>
-            <a:off x="640080" y="1280160"/>
-            <a:ext cx="10972800" cy="5212080"/>
-          </a:xfrm>
-          <a:prstGeom prst="rect">
-            <a:avLst/>
-          </a:prstGeom>
-          <a:noFill/>
-        </p:spPr>
-        <p:txBody>
-          <a:bodyPr wrap="square">
-            <a:spAutoFit/>
-          </a:bodyPr>
-          <a:lstStyle/>
-          <a:p>
-            <a:pPr algn="r" rtl="1">
-              <a:spcBef>
-                <a:spcPts val="200"/>
-              </a:spcBef>
-              <a:spcAft>
-                <a:spcPts val="1000"/>
-              </a:spcAft>
-            </a:pPr>
-            <a:r>
-              <a:rPr sz="1900">
-                <a:solidFill>
-                  <a:srgbClr val="333333"/>
-                </a:solidFill>
-                <a:latin typeface="Arial"/>
-                <a:cs typeface="Arial"/>
-                <a:ea typeface="Calibri"/>
-              </a:rPr>
-              <a:t>• ETL: التحويل قبل التحميل؛ ELT: التحميل أولاً ثم التحويل داخل المنصة المستهدفة.</a:t>
-            </a:r>
-          </a:p>
-          <a:p>
-            <a:pPr algn="r" rtl="0">
-              <a:spcBef>
-                <a:spcPts val="200"/>
-              </a:spcBef>
-              <a:spcAft>
-                <a:spcPts val="1000"/>
-              </a:spcAft>
-            </a:pPr>
-            <a:r>
-              <a:rPr sz="1600">
-                <a:solidFill>
-                  <a:srgbClr val="666666"/>
-                </a:solidFill>
-                <a:latin typeface="Calibri"/>
-                <a:cs typeface="Arial"/>
-                <a:ea typeface="Calibri"/>
-              </a:rPr>
-              <a:t>• ETL: transform before loading; ELT: load first, transform inside the target platform.</a:t>
-            </a:r>
-          </a:p>
-          <a:p>
-            <a:pPr algn="r" rtl="1">
-              <a:spcBef>
-                <a:spcPts val="200"/>
-              </a:spcBef>
-              <a:spcAft>
-                <a:spcPts val="1000"/>
-              </a:spcAft>
-            </a:pPr>
-            <a:r>
-              <a:rPr sz="1900">
-                <a:solidFill>
-                  <a:srgbClr val="333333"/>
-                </a:solidFill>
-                <a:latin typeface="Arial"/>
-                <a:cs typeface="Arial"/>
-                <a:ea typeface="Calibri"/>
-              </a:rPr>
-              <a:t>• ELT هو النمط السائد في بيئات Lakehouse الحديثة.</a:t>
-            </a:r>
-          </a:p>
-          <a:p>
-            <a:pPr algn="r" rtl="0">
-              <a:spcBef>
-                <a:spcPts val="200"/>
-              </a:spcBef>
-              <a:spcAft>
-                <a:spcPts val="1000"/>
-              </a:spcAft>
-            </a:pPr>
-            <a:r>
-              <a:rPr sz="1600">
-                <a:solidFill>
-                  <a:srgbClr val="666666"/>
-                </a:solidFill>
-                <a:latin typeface="Calibri"/>
-                <a:cs typeface="Arial"/>
-                <a:ea typeface="Calibri"/>
-              </a:rPr>
-              <a:t>• ELT is the dominant pattern in modern lakehouse environments.</a:t>
-            </a:r>
-          </a:p>
-        </p:txBody>
-      </p:sp>
-      <p:sp>
-        <p:nvSpPr>
-          <p:cNvPr id="5" name="TextBox 4"/>
-          <p:cNvSpPr txBox="1"/>
-          <p:nvPr/>
-        </p:nvSpPr>
-        <p:spPr>
-          <a:xfrm>
-            <a:off x="640080" y="6400800"/>
-            <a:ext cx="8686800" cy="320040"/>
-          </a:xfrm>
-          <a:prstGeom prst="rect">
-            <a:avLst/>
-          </a:prstGeom>
-          <a:noFill/>
-        </p:spPr>
-        <p:txBody>
-          <a:bodyPr wrap="square">
-            <a:spAutoFit/>
-          </a:bodyPr>
-          <a:lstStyle/>
-          <a:p>
-            <a:pPr algn="r" rtl="1"/>
-            <a:r>
-              <a:rPr sz="1000" b="0">
-                <a:solidFill>
-                  <a:srgbClr val="666666"/>
-                </a:solidFill>
-                <a:latin typeface="Arial"/>
-                <a:cs typeface="Arial"/>
-                <a:ea typeface="Calibri"/>
-              </a:rPr>
-              <a:t>Module 02 — Data &amp; AI Engineering Track  |  الوحدة الثانية</a:t>
-            </a:r>
-          </a:p>
-        </p:txBody>
-      </p:sp>
-      <p:sp>
-        <p:nvSpPr>
-          <p:cNvPr id="6" name="TextBox 5"/>
-          <p:cNvSpPr txBox="1"/>
-          <p:nvPr/>
-        </p:nvSpPr>
-        <p:spPr>
-          <a:xfrm>
-            <a:off x="9601200" y="6400800"/>
-            <a:ext cx="1920240" cy="320040"/>
-          </a:xfrm>
-          <a:prstGeom prst="rect">
-            <a:avLst/>
-          </a:prstGeom>
-          <a:noFill/>
-        </p:spPr>
-        <p:txBody>
-          <a:bodyPr wrap="square">
-            <a:spAutoFit/>
-          </a:bodyPr>
-          <a:lstStyle/>
-          <a:p>
-            <a:pPr algn="l" rtl="0"/>
-            <a:r>
-              <a:rPr sz="1000" b="0">
-                <a:solidFill>
-                  <a:srgbClr val="666666"/>
-                </a:solidFill>
-                <a:latin typeface="Calibri"/>
-                <a:cs typeface="Arial"/>
-                <a:ea typeface="Calibri"/>
-              </a:rPr>
-              <a:t>V06  •  5/13</a:t>
-            </a:r>
-          </a:p>
-        </p:txBody>
-      </p:sp>
-      <p:sp>
-        <p:nvSpPr>
-          <p:cNvPr id="7" name="TextBox 6"/>
-          <p:cNvSpPr txBox="1"/>
-          <p:nvPr/>
-        </p:nvSpPr>
-        <p:spPr>
-          <a:xfrm>
-            <a:off x="640080" y="6400800"/>
-            <a:ext cx="8686800" cy="320040"/>
-          </a:xfrm>
-          <a:prstGeom prst="rect">
-            <a:avLst/>
-          </a:prstGeom>
-          <a:noFill/>
-        </p:spPr>
-        <p:txBody>
-          <a:bodyPr wrap="square">
-            <a:spAutoFit/>
-          </a:bodyPr>
-          <a:lstStyle/>
-          <a:p>
-            <a:pPr algn="r" rtl="1"/>
-            <a:r>
-              <a:rPr sz="1000" b="0">
-                <a:solidFill>
-                  <a:srgbClr val="666666"/>
-                </a:solidFill>
-                <a:latin typeface="Arial"/>
-                <a:cs typeface="Arial"/>
-                <a:ea typeface="Calibri"/>
-              </a:rPr>
-              <a:t>Module 02 — Data &amp; AI Engineering Track  |  الوحدة الثانية</a:t>
-            </a:r>
-          </a:p>
-        </p:txBody>
-      </p:sp>
-      <p:sp>
-        <p:nvSpPr>
-          <p:cNvPr id="8" name="TextBox 7"/>
-          <p:cNvSpPr txBox="1"/>
-          <p:nvPr/>
-        </p:nvSpPr>
-        <p:spPr>
-          <a:xfrm>
-            <a:off x="9601200" y="6400800"/>
-            <a:ext cx="1920240" cy="320040"/>
-          </a:xfrm>
-          <a:prstGeom prst="rect">
-            <a:avLst/>
-          </a:prstGeom>
-          <a:noFill/>
-        </p:spPr>
-        <p:txBody>
-          <a:bodyPr wrap="square">
-            <a:spAutoFit/>
-          </a:bodyPr>
-          <a:lstStyle/>
-          <a:p>
-            <a:pPr algn="l" rtl="0"/>
-            <a:r>
-              <a:rPr sz="1000" b="0">
-                <a:solidFill>
-                  <a:srgbClr val="666666"/>
-                </a:solidFill>
-                <a:latin typeface="Calibri"/>
-                <a:cs typeface="Arial"/>
-                <a:ea typeface="Calibri"/>
-              </a:rPr>
-              <a:t>06_  •  7/12</a:t>
-            </a:r>
-          </a:p>
-        </p:txBody>
-      </p:sp>
-      <p:sp>
-        <p:nvSpPr>
-          <p:cNvPr id="9" name="TextBox 8"/>
-          <p:cNvSpPr txBox="1"/>
-          <p:nvPr/>
-        </p:nvSpPr>
-        <p:spPr>
-          <a:xfrm>
-            <a:off x="640080" y="6400800"/>
-            <a:ext cx="8686800" cy="320040"/>
-          </a:xfrm>
-          <a:prstGeom prst="rect">
-            <a:avLst/>
-          </a:prstGeom>
-          <a:noFill/>
-        </p:spPr>
-        <p:txBody>
-          <a:bodyPr wrap="square">
-            <a:spAutoFit/>
-          </a:bodyPr>
-          <a:lstStyle/>
-          <a:p>
-            <a:pPr algn="r" rtl="1"/>
-            <a:r>
-              <a:rPr sz="1000" b="0">
-                <a:solidFill>
-                  <a:srgbClr val="666666"/>
-                </a:solidFill>
-                <a:latin typeface="Arial"/>
-                <a:cs typeface="Arial"/>
-                <a:ea typeface="Calibri"/>
-              </a:rPr>
-              <a:t>Module 02 — Data &amp; AI Engineering Track  |  الوحدة الثانية</a:t>
-            </a:r>
-          </a:p>
-        </p:txBody>
-      </p:sp>
-      <p:sp>
-        <p:nvSpPr>
-          <p:cNvPr id="10" name="TextBox 9"/>
-          <p:cNvSpPr txBox="1"/>
-          <p:nvPr/>
-        </p:nvSpPr>
-        <p:spPr>
-          <a:xfrm>
-            <a:off x="9601200" y="6400800"/>
-            <a:ext cx="1920240" cy="320040"/>
-          </a:xfrm>
-          <a:prstGeom prst="rect">
-            <a:avLst/>
-          </a:prstGeom>
-          <a:noFill/>
-        </p:spPr>
-        <p:txBody>
-          <a:bodyPr wrap="square">
-            <a:spAutoFit/>
-          </a:bodyPr>
-          <a:lstStyle/>
-          <a:p>
-            <a:pPr algn="l" rtl="0"/>
-            <a:r>
-              <a:rPr sz="1000" b="0">
-                <a:solidFill>
-                  <a:srgbClr val="666666"/>
-                </a:solidFill>
-                <a:latin typeface="Calibri"/>
-                <a:cs typeface="Arial"/>
-                <a:ea typeface="Calibri"/>
-              </a:rPr>
-              <a:t>06_  •  7/12</a:t>
-            </a:r>
-          </a:p>
-        </p:txBody>
-      </p:sp>
-    </p:spTree>
-  </p:cSld>
-  <p:clrMapOvr>
-    <a:masterClrMapping/>
-  </p:clrMapOvr>
-</p:sld>
-</file>
-
-<file path=ppt/slides/slide8.xml><?xml version="1.0" encoding="utf-8"?>
-<p:sld xmlns:a="http://schemas.openxmlformats.org/drawingml/2006/main" xmlns:p="http://schemas.openxmlformats.org/presentationml/2006/main" xmlns:r="http://schemas.openxmlformats.org/officeDocument/2006/relationships">
-  <p:cSld>
-    <p:bg>
-      <p:bgPr>
-        <a:solidFill>
-          <a:srgbClr val="FFFFFF"/>
-        </a:solidFill>
-        <a:effectLst/>
-      </p:bgPr>
-    </p:bg>
-    <p:spTree>
-      <p:nvGrpSpPr>
-        <p:cNvPr id="1" name=""/>
-        <p:cNvGrpSpPr/>
-        <p:nvPr/>
-      </p:nvGrpSpPr>
-      <p:grpSpPr/>
-      <p:sp>
-        <p:nvSpPr>
-          <p:cNvPr id="2" name="Rectangle 1"/>
-          <p:cNvSpPr/>
-          <p:nvPr/>
-        </p:nvSpPr>
-        <p:spPr>
-          <a:xfrm>
-            <a:off x="0" y="0"/>
-            <a:ext cx="12191695" cy="1005840"/>
-          </a:xfrm>
-          <a:prstGeom prst="rect">
-            <a:avLst/>
-          </a:prstGeom>
-          <a:solidFill>
-            <a:srgbClr val="FFFFFF"/>
-          </a:solidFill>
-          <a:ln w="25400">
-            <a:solidFill>
-              <a:srgbClr val="1F4E79"/>
-            </a:solidFill>
-          </a:ln>
-          <a:effectLst/>
-        </p:spPr>
-        <p:style>
-          <a:lnRef idx="1">
-            <a:schemeClr val="accent1"/>
-          </a:lnRef>
-          <a:fillRef idx="3">
-            <a:schemeClr val="accent1"/>
-          </a:fillRef>
-          <a:effectRef idx="2">
-            <a:schemeClr val="accent1"/>
-          </a:effectRef>
-          <a:fontRef idx="minor">
-            <a:schemeClr val="lt1"/>
-          </a:fontRef>
-        </p:style>
-        <p:txBody>
-          <a:bodyPr rtlCol="0" anchor="ctr"/>
-          <a:lstStyle/>
-          <a:p>
-            <a:pPr algn="ctr"/>
-          </a:p>
-        </p:txBody>
-      </p:sp>
-      <p:sp>
-        <p:nvSpPr>
-          <p:cNvPr id="3" name="TextBox 2"/>
-          <p:cNvSpPr txBox="1"/>
-          <p:nvPr/>
-        </p:nvSpPr>
-        <p:spPr>
-          <a:xfrm>
-            <a:off x="640080" y="182880"/>
-            <a:ext cx="10972800" cy="640080"/>
-          </a:xfrm>
-          <a:prstGeom prst="rect">
-            <a:avLst/>
-          </a:prstGeom>
-          <a:noFill/>
-        </p:spPr>
-        <p:txBody>
-          <a:bodyPr wrap="square">
-            <a:spAutoFit/>
-          </a:bodyPr>
-          <a:lstStyle/>
-          <a:p>
-            <a:pPr algn="r" rtl="1"/>
-            <a:r>
-              <a:rPr sz="3200" b="1">
-                <a:solidFill>
-                  <a:srgbClr val="1F3B5C"/>
-                </a:solidFill>
-                <a:latin typeface="Arial"/>
-                <a:cs typeface="Arial"/>
-                <a:ea typeface="Calibri"/>
-              </a:rPr>
-              <a:t>مقارنة أنماط المعالجة / Processing Patterns</a:t>
-            </a:r>
-          </a:p>
-        </p:txBody>
-      </p:sp>
-      <p:sp>
-        <p:nvSpPr>
-          <p:cNvPr id="4" name="TextBox 3"/>
-          <p:cNvSpPr txBox="1"/>
-          <p:nvPr/>
-        </p:nvSpPr>
-        <p:spPr>
-          <a:xfrm>
-            <a:off x="640080" y="1280160"/>
-            <a:ext cx="10972800" cy="5212080"/>
-          </a:xfrm>
-          <a:prstGeom prst="rect">
-            <a:avLst/>
-          </a:prstGeom>
-          <a:noFill/>
-        </p:spPr>
-        <p:txBody>
-          <a:bodyPr wrap="square">
-            <a:spAutoFit/>
-          </a:bodyPr>
-          <a:lstStyle/>
-          <a:p>
-            <a:pPr algn="r" rtl="1">
-              <a:spcBef>
-                <a:spcPts val="200"/>
-              </a:spcBef>
-              <a:spcAft>
-                <a:spcPts val="1000"/>
-              </a:spcAft>
-            </a:pPr>
-            <a:r>
-              <a:rPr sz="1800">
-                <a:solidFill>
-                  <a:srgbClr val="333333"/>
-                </a:solidFill>
-                <a:latin typeface="Arial"/>
-                <a:cs typeface="Arial"/>
-                <a:ea typeface="Calibri"/>
-              </a:rPr>
-              <a:t>• المعمارية المتدرِّجة Medallion (Lakehouse): Bronze خام → Silver منقَّى → Gold جاهز للتحليل؛ إدارة مركزية؛ الأنسب للتحليلات وخطوط AI/ML/RAG.</a:t>
-            </a:r>
-          </a:p>
-          <a:p>
-            <a:pPr algn="r" rtl="0">
-              <a:spcBef>
-                <a:spcPts val="200"/>
-              </a:spcBef>
-              <a:spcAft>
-                <a:spcPts val="1000"/>
-              </a:spcAft>
-            </a:pPr>
-            <a:r>
-              <a:rPr sz="1500">
-                <a:solidFill>
-                  <a:srgbClr val="666666"/>
-                </a:solidFill>
-                <a:latin typeface="Calibri"/>
-                <a:cs typeface="Arial"/>
-                <a:ea typeface="Calibri"/>
-              </a:rPr>
-              <a:t>• Medallion (Lakehouse): raw Bronze → cleansed Silver → analytics-ready Gold; central ownership; best for analytics and AI/ML/RAG pipelines.</a:t>
-            </a:r>
-          </a:p>
-          <a:p>
-            <a:pPr algn="r" rtl="1">
-              <a:spcBef>
-                <a:spcPts val="200"/>
-              </a:spcBef>
-              <a:spcAft>
-                <a:spcPts val="1000"/>
-              </a:spcAft>
-            </a:pPr>
-            <a:r>
-              <a:rPr sz="1800">
-                <a:solidFill>
-                  <a:srgbClr val="333333"/>
-                </a:solidFill>
-                <a:latin typeface="Arial"/>
-                <a:cs typeface="Arial"/>
-                <a:ea typeface="Calibri"/>
-              </a:rPr>
-              <a:t>• مستودع البيانات: ETL/ELT → Staging → المستودع → أسواق البيانات؛ حوكمة مركزية؛ الأنسب للتقارير وذكاء الأعمال.</a:t>
-            </a:r>
-          </a:p>
-          <a:p>
-            <a:pPr algn="r" rtl="0">
-              <a:spcBef>
-                <a:spcPts val="200"/>
-              </a:spcBef>
-              <a:spcAft>
-                <a:spcPts val="1000"/>
-              </a:spcAft>
-            </a:pPr>
-            <a:r>
-              <a:rPr sz="1500">
-                <a:solidFill>
-                  <a:srgbClr val="666666"/>
-                </a:solidFill>
-                <a:latin typeface="Calibri"/>
-                <a:cs typeface="Arial"/>
-                <a:ea typeface="Calibri"/>
-              </a:rPr>
-              <a:t>• Data warehouse: ETL/ELT → staging → warehouse → data marts; central governance; best for reporting and BI.</a:t>
-            </a:r>
-          </a:p>
-          <a:p>
-            <a:pPr algn="r" rtl="1">
-              <a:spcBef>
-                <a:spcPts val="200"/>
-              </a:spcBef>
-              <a:spcAft>
-                <a:spcPts val="1000"/>
-              </a:spcAft>
-            </a:pPr>
-            <a:r>
-              <a:rPr sz="1800">
-                <a:solidFill>
-                  <a:srgbClr val="333333"/>
-                </a:solidFill>
-                <a:latin typeface="Arial"/>
-                <a:cs typeface="Arial"/>
-                <a:ea typeface="Calibri"/>
-              </a:rPr>
-              <a:t>• شبكة البيانات Data Mesh: ملكية لامركزية بالمجالات؛ منتجات بيانات بعقود (مخطط، أمان، SLA) وكتالوج موحد؛ الأنسب للمؤسسات الكبيرة.</a:t>
-            </a:r>
-          </a:p>
-          <a:p>
-            <a:pPr algn="r" rtl="0">
-              <a:spcBef>
-                <a:spcPts val="200"/>
-              </a:spcBef>
-              <a:spcAft>
-                <a:spcPts val="1000"/>
-              </a:spcAft>
-            </a:pPr>
-            <a:r>
-              <a:rPr sz="1500">
-                <a:solidFill>
-                  <a:srgbClr val="666666"/>
-                </a:solidFill>
-                <a:latin typeface="Calibri"/>
-                <a:cs typeface="Arial"/>
-                <a:ea typeface="Calibri"/>
-              </a:rPr>
-              <a:t>• Data mesh: decentralized domain ownership; data products with contracts (schema, security, SLA) and a unified catalog; best for large organizations.</a:t>
-            </a:r>
-          </a:p>
-        </p:txBody>
-      </p:sp>
-      <p:sp>
-        <p:nvSpPr>
-          <p:cNvPr id="5" name="TextBox 4"/>
-          <p:cNvSpPr txBox="1"/>
-          <p:nvPr/>
-        </p:nvSpPr>
-        <p:spPr>
-          <a:xfrm>
-            <a:off x="640080" y="6400800"/>
-            <a:ext cx="8686800" cy="320040"/>
-          </a:xfrm>
-          <a:prstGeom prst="rect">
-            <a:avLst/>
-          </a:prstGeom>
-          <a:noFill/>
-        </p:spPr>
-        <p:txBody>
-          <a:bodyPr wrap="square">
-            <a:spAutoFit/>
-          </a:bodyPr>
-          <a:lstStyle/>
-          <a:p>
-            <a:pPr algn="r" rtl="1"/>
-            <a:r>
-              <a:rPr sz="1000" b="0">
-                <a:solidFill>
-                  <a:srgbClr val="666666"/>
-                </a:solidFill>
-                <a:latin typeface="Arial"/>
-                <a:cs typeface="Arial"/>
-                <a:ea typeface="Calibri"/>
-              </a:rPr>
-              <a:t>Module 02 — Data &amp; AI Engineering Track  |  الوحدة الثانية</a:t>
-            </a:r>
-          </a:p>
-        </p:txBody>
-      </p:sp>
-      <p:sp>
-        <p:nvSpPr>
-          <p:cNvPr id="6" name="TextBox 5"/>
-          <p:cNvSpPr txBox="1"/>
-          <p:nvPr/>
-        </p:nvSpPr>
-        <p:spPr>
-          <a:xfrm>
-            <a:off x="9601200" y="6400800"/>
-            <a:ext cx="1920240" cy="320040"/>
-          </a:xfrm>
-          <a:prstGeom prst="rect">
-            <a:avLst/>
-          </a:prstGeom>
-          <a:noFill/>
-        </p:spPr>
-        <p:txBody>
-          <a:bodyPr wrap="square">
-            <a:spAutoFit/>
-          </a:bodyPr>
-          <a:lstStyle/>
-          <a:p>
-            <a:pPr algn="l" rtl="0"/>
-            <a:r>
-              <a:rPr sz="1000" b="0">
-                <a:solidFill>
-                  <a:srgbClr val="666666"/>
-                </a:solidFill>
-                <a:latin typeface="Calibri"/>
-                <a:cs typeface="Arial"/>
-                <a:ea typeface="Calibri"/>
-              </a:rPr>
-              <a:t>V06  •  6/13</a:t>
-            </a:r>
-          </a:p>
-        </p:txBody>
-      </p:sp>
-      <p:sp>
-        <p:nvSpPr>
-          <p:cNvPr id="7" name="TextBox 6"/>
-          <p:cNvSpPr txBox="1"/>
-          <p:nvPr/>
-        </p:nvSpPr>
-        <p:spPr>
-          <a:xfrm>
-            <a:off x="640080" y="6400800"/>
-            <a:ext cx="8686800" cy="320040"/>
-          </a:xfrm>
-          <a:prstGeom prst="rect">
-            <a:avLst/>
-          </a:prstGeom>
-          <a:noFill/>
-        </p:spPr>
-        <p:txBody>
-          <a:bodyPr wrap="square">
-            <a:spAutoFit/>
-          </a:bodyPr>
-          <a:lstStyle/>
-          <a:p>
-            <a:pPr algn="r" rtl="1"/>
-            <a:r>
-              <a:rPr sz="1000" b="0">
-                <a:solidFill>
-                  <a:srgbClr val="666666"/>
-                </a:solidFill>
-                <a:latin typeface="Arial"/>
-                <a:cs typeface="Arial"/>
-                <a:ea typeface="Calibri"/>
-              </a:rPr>
-              <a:t>Module 02 — Data &amp; AI Engineering Track  |  الوحدة الثانية</a:t>
-            </a:r>
-          </a:p>
-        </p:txBody>
-      </p:sp>
-      <p:sp>
-        <p:nvSpPr>
-          <p:cNvPr id="8" name="TextBox 7"/>
-          <p:cNvSpPr txBox="1"/>
-          <p:nvPr/>
-        </p:nvSpPr>
-        <p:spPr>
-          <a:xfrm>
-            <a:off x="9601200" y="6400800"/>
-            <a:ext cx="1920240" cy="320040"/>
-          </a:xfrm>
-          <a:prstGeom prst="rect">
-            <a:avLst/>
-          </a:prstGeom>
-          <a:noFill/>
-        </p:spPr>
-        <p:txBody>
-          <a:bodyPr wrap="square">
-            <a:spAutoFit/>
-          </a:bodyPr>
-          <a:lstStyle/>
-          <a:p>
-            <a:pPr algn="l" rtl="0"/>
-            <a:r>
-              <a:rPr sz="1000" b="0">
-                <a:solidFill>
-                  <a:srgbClr val="666666"/>
-                </a:solidFill>
-                <a:latin typeface="Calibri"/>
-                <a:cs typeface="Arial"/>
-                <a:ea typeface="Calibri"/>
-              </a:rPr>
-              <a:t>06_  •  8/12</a:t>
-            </a:r>
-          </a:p>
-        </p:txBody>
-      </p:sp>
-      <p:sp>
-        <p:nvSpPr>
-          <p:cNvPr id="9" name="TextBox 8"/>
-          <p:cNvSpPr txBox="1"/>
-          <p:nvPr/>
-        </p:nvSpPr>
-        <p:spPr>
-          <a:xfrm>
-            <a:off x="640080" y="6400800"/>
-            <a:ext cx="8686800" cy="320040"/>
-          </a:xfrm>
-          <a:prstGeom prst="rect">
-            <a:avLst/>
-          </a:prstGeom>
-          <a:noFill/>
-        </p:spPr>
-        <p:txBody>
-          <a:bodyPr wrap="square">
-            <a:spAutoFit/>
-          </a:bodyPr>
-          <a:lstStyle/>
-          <a:p>
-            <a:pPr algn="r" rtl="1"/>
-            <a:r>
-              <a:rPr sz="1000" b="0">
-                <a:solidFill>
-                  <a:srgbClr val="666666"/>
-                </a:solidFill>
-                <a:latin typeface="Arial"/>
-                <a:cs typeface="Arial"/>
-                <a:ea typeface="Calibri"/>
-              </a:rPr>
-              <a:t>Module 02 — Data &amp; AI Engineering Track  |  الوحدة الثانية</a:t>
-            </a:r>
-          </a:p>
-        </p:txBody>
-      </p:sp>
-      <p:sp>
-        <p:nvSpPr>
-          <p:cNvPr id="10" name="TextBox 9"/>
-          <p:cNvSpPr txBox="1"/>
-          <p:nvPr/>
-        </p:nvSpPr>
-        <p:spPr>
-          <a:xfrm>
-            <a:off x="9601200" y="6400800"/>
-            <a:ext cx="1920240" cy="320040"/>
-          </a:xfrm>
-          <a:prstGeom prst="rect">
-            <a:avLst/>
-          </a:prstGeom>
-          <a:noFill/>
-        </p:spPr>
-        <p:txBody>
-          <a:bodyPr wrap="square">
-            <a:spAutoFit/>
-          </a:bodyPr>
-          <a:lstStyle/>
-          <a:p>
-            <a:pPr algn="l" rtl="0"/>
-            <a:r>
-              <a:rPr sz="1000" b="0">
-                <a:solidFill>
-                  <a:srgbClr val="666666"/>
-                </a:solidFill>
-                <a:latin typeface="Calibri"/>
-                <a:cs typeface="Arial"/>
-                <a:ea typeface="Calibri"/>
-              </a:rPr>
-              <a:t>06_  •  8/12</a:t>
-            </a:r>
-          </a:p>
-        </p:txBody>
-      </p:sp>
-    </p:spTree>
-  </p:cSld>
-  <p:clrMapOvr>
-    <a:masterClrMapping/>
-  </p:clrMapOvr>
-</p:sld>
-</file>
-
-<file path=ppt/slides/slide9.xml><?xml version="1.0" encoding="utf-8"?>
-<p:sld xmlns:a="http://schemas.openxmlformats.org/drawingml/2006/main" xmlns:p="http://schemas.openxmlformats.org/presentationml/2006/main" xmlns:r="http://schemas.openxmlformats.org/officeDocument/2006/relationships">
-  <p:cSld>
-    <p:bg>
-      <p:bgPr>
-        <a:solidFill>
-          <a:srgbClr val="FFFFFF"/>
-        </a:solidFill>
-        <a:effectLst/>
-      </p:bgPr>
-    </p:bg>
-    <p:spTree>
-      <p:nvGrpSpPr>
-        <p:cNvPr id="1" name=""/>
-        <p:cNvGrpSpPr/>
-        <p:nvPr/>
-      </p:nvGrpSpPr>
-      <p:grpSpPr/>
-      <p:sp>
-        <p:nvSpPr>
-          <p:cNvPr id="2" name="Rectangle 1"/>
-          <p:cNvSpPr/>
-          <p:nvPr/>
-        </p:nvSpPr>
-        <p:spPr>
-          <a:xfrm>
-            <a:off x="0" y="0"/>
-            <a:ext cx="12191695" cy="1005840"/>
-          </a:xfrm>
-          <a:prstGeom prst="rect">
-            <a:avLst/>
-          </a:prstGeom>
-          <a:solidFill>
-            <a:srgbClr val="FFFFFF"/>
-          </a:solidFill>
-          <a:ln w="25400">
-            <a:solidFill>
-              <a:srgbClr val="1F4E79"/>
-            </a:solidFill>
-          </a:ln>
-          <a:effectLst/>
-        </p:spPr>
-        <p:style>
-          <a:lnRef idx="1">
-            <a:schemeClr val="accent1"/>
-          </a:lnRef>
-          <a:fillRef idx="3">
-            <a:schemeClr val="accent1"/>
-          </a:fillRef>
-          <a:effectRef idx="2">
-            <a:schemeClr val="accent1"/>
-          </a:effectRef>
-          <a:fontRef idx="minor">
-            <a:schemeClr val="lt1"/>
-          </a:fontRef>
-        </p:style>
-        <p:txBody>
-          <a:bodyPr rtlCol="0" anchor="ctr"/>
-          <a:lstStyle/>
-          <a:p>
-            <a:pPr algn="ctr"/>
-          </a:p>
-        </p:txBody>
-      </p:sp>
-      <p:sp>
-        <p:nvSpPr>
-          <p:cNvPr id="3" name="TextBox 2"/>
-          <p:cNvSpPr txBox="1"/>
-          <p:nvPr/>
-        </p:nvSpPr>
-        <p:spPr>
-          <a:xfrm>
-            <a:off x="640080" y="182880"/>
-            <a:ext cx="10972800" cy="640080"/>
-          </a:xfrm>
-          <a:prstGeom prst="rect">
-            <a:avLst/>
-          </a:prstGeom>
-          <a:noFill/>
-        </p:spPr>
-        <p:txBody>
-          <a:bodyPr wrap="square">
-            <a:spAutoFit/>
-          </a:bodyPr>
-          <a:lstStyle/>
-          <a:p>
-            <a:pPr algn="r" rtl="1"/>
-            <a:r>
-              <a:rPr sz="3200" b="1">
-                <a:solidFill>
-                  <a:srgbClr val="1F3B5C"/>
-                </a:solidFill>
-                <a:latin typeface="Arial"/>
-                <a:cs typeface="Arial"/>
-                <a:ea typeface="Calibri"/>
               </a:rPr>
               <a:t>جدول المقارنة: Medallion / المستودع / Data Mesh</a:t>
             </a:r>
@@ -9058,9 +6614,10 @@
                       <a:pPr algn="ctr" rtl="1"/>
                       <a:r>
                         <a:rPr sz="1400" b="1">
+                          <a:solidFill>
+                            <a:srgbClr val="FFFFFF"/>
+                          </a:solidFill>
                           <a:latin typeface="Arial"/>
-                          <a:cs typeface="Arial"/>
-                          <a:ea typeface="Calibri"/>
                         </a:rPr>
                         <a:t>المعيار</a:t>
                       </a:r>
@@ -9077,12 +6634,13 @@
                     <a:bodyPr/>
                     <a:lstStyle/>
                     <a:p>
-                      <a:pPr algn="ctr" rtl="0"/>
+                      <a:pPr algn="ctr" rtl="1"/>
                       <a:r>
                         <a:rPr sz="1400" b="1">
-                          <a:latin typeface="Calibri"/>
-                          <a:cs typeface="Arial"/>
-                          <a:ea typeface="Calibri"/>
+                          <a:solidFill>
+                            <a:srgbClr val="FFFFFF"/>
+                          </a:solidFill>
+                          <a:latin typeface="Arial"/>
                         </a:rPr>
                         <a:t>Medallion</a:t>
                       </a:r>
@@ -9102,9 +6660,10 @@
                       <a:pPr algn="ctr" rtl="1"/>
                       <a:r>
                         <a:rPr sz="1400" b="1">
+                          <a:solidFill>
+                            <a:srgbClr val="FFFFFF"/>
+                          </a:solidFill>
                           <a:latin typeface="Arial"/>
-                          <a:cs typeface="Arial"/>
-                          <a:ea typeface="Calibri"/>
                         </a:rPr>
                         <a:t>المستودع</a:t>
                       </a:r>
@@ -9121,12 +6680,13 @@
                     <a:bodyPr/>
                     <a:lstStyle/>
                     <a:p>
-                      <a:pPr algn="ctr" rtl="0"/>
+                      <a:pPr algn="ctr" rtl="1"/>
                       <a:r>
                         <a:rPr sz="1400" b="1">
-                          <a:latin typeface="Calibri"/>
-                          <a:cs typeface="Arial"/>
-                          <a:ea typeface="Calibri"/>
+                          <a:solidFill>
+                            <a:srgbClr val="FFFFFF"/>
+                          </a:solidFill>
+                          <a:latin typeface="Arial"/>
                         </a:rPr>
                         <a:t>Data Mesh</a:t>
                       </a:r>
@@ -9147,10 +6707,11 @@
                     <a:p>
                       <a:pPr algn="ctr" rtl="1"/>
                       <a:r>
-                        <a:rPr sz="1200" b="0">
+                        <a:rPr sz="1200">
+                          <a:solidFill>
+                            <a:srgbClr val="333333"/>
+                          </a:solidFill>
                           <a:latin typeface="Arial"/>
-                          <a:cs typeface="Arial"/>
-                          <a:ea typeface="Calibri"/>
                         </a:rPr>
                         <a:t>الفكرة</a:t>
                       </a:r>
@@ -9169,10 +6730,11 @@
                     <a:p>
                       <a:pPr algn="ctr" rtl="1"/>
                       <a:r>
-                        <a:rPr sz="1200" b="0">
+                        <a:rPr sz="1200">
+                          <a:solidFill>
+                            <a:srgbClr val="333333"/>
+                          </a:solidFill>
                           <a:latin typeface="Arial"/>
-                          <a:cs typeface="Arial"/>
-                          <a:ea typeface="Calibri"/>
                         </a:rPr>
                         <a:t>طبقات Bronze→Silver→Gold</a:t>
                       </a:r>
@@ -9189,12 +6751,13 @@
                     <a:bodyPr/>
                     <a:lstStyle/>
                     <a:p>
-                      <a:pPr algn="ctr" rtl="0"/>
+                      <a:pPr algn="ctr" rtl="1"/>
                       <a:r>
-                        <a:rPr sz="1200" b="0">
-                          <a:latin typeface="Calibri"/>
-                          <a:cs typeface="Arial"/>
-                          <a:ea typeface="Calibri"/>
+                        <a:rPr sz="1200">
+                          <a:solidFill>
+                            <a:srgbClr val="333333"/>
+                          </a:solidFill>
+                          <a:latin typeface="Arial"/>
                         </a:rPr>
                         <a:t>Staging→Warehouse→Marts</a:t>
                       </a:r>
@@ -9213,10 +6776,11 @@
                     <a:p>
                       <a:pPr algn="ctr" rtl="1"/>
                       <a:r>
-                        <a:rPr sz="1200" b="0">
+                        <a:rPr sz="1200">
+                          <a:solidFill>
+                            <a:srgbClr val="333333"/>
+                          </a:solidFill>
                           <a:latin typeface="Arial"/>
-                          <a:cs typeface="Arial"/>
-                          <a:ea typeface="Calibri"/>
                         </a:rPr>
                         <a:t>منتجات بالمجالات</a:t>
                       </a:r>
@@ -9237,10 +6801,11 @@
                     <a:p>
                       <a:pPr algn="ctr" rtl="1"/>
                       <a:r>
-                        <a:rPr sz="1200" b="0">
+                        <a:rPr sz="1200">
+                          <a:solidFill>
+                            <a:srgbClr val="333333"/>
+                          </a:solidFill>
                           <a:latin typeface="Arial"/>
-                          <a:cs typeface="Arial"/>
-                          <a:ea typeface="Calibri"/>
                         </a:rPr>
                         <a:t>المالك</a:t>
                       </a:r>
@@ -9259,10 +6824,11 @@
                     <a:p>
                       <a:pPr algn="ctr" rtl="1"/>
                       <a:r>
-                        <a:rPr sz="1200" b="0">
+                        <a:rPr sz="1200">
+                          <a:solidFill>
+                            <a:srgbClr val="333333"/>
+                          </a:solidFill>
                           <a:latin typeface="Arial"/>
-                          <a:cs typeface="Arial"/>
-                          <a:ea typeface="Calibri"/>
                         </a:rPr>
                         <a:t>هندسة مركزية</a:t>
                       </a:r>
@@ -9281,10 +6847,11 @@
                     <a:p>
                       <a:pPr algn="ctr" rtl="1"/>
                       <a:r>
-                        <a:rPr sz="1200" b="0">
+                        <a:rPr sz="1200">
+                          <a:solidFill>
+                            <a:srgbClr val="333333"/>
+                          </a:solidFill>
                           <a:latin typeface="Arial"/>
-                          <a:cs typeface="Arial"/>
-                          <a:ea typeface="Calibri"/>
                         </a:rPr>
                         <a:t>فرق BI</a:t>
                       </a:r>
@@ -9303,10 +6870,11 @@
                     <a:p>
                       <a:pPr algn="ctr" rtl="1"/>
                       <a:r>
-                        <a:rPr sz="1200" b="0">
+                        <a:rPr sz="1200">
+                          <a:solidFill>
+                            <a:srgbClr val="333333"/>
+                          </a:solidFill>
                           <a:latin typeface="Arial"/>
-                          <a:cs typeface="Arial"/>
-                          <a:ea typeface="Calibri"/>
                         </a:rPr>
                         <a:t>فرق المجالات</a:t>
                       </a:r>
@@ -9327,10 +6895,11 @@
                     <a:p>
                       <a:pPr algn="ctr" rtl="1"/>
                       <a:r>
-                        <a:rPr sz="1200" b="0">
+                        <a:rPr sz="1200">
+                          <a:solidFill>
+                            <a:srgbClr val="333333"/>
+                          </a:solidFill>
                           <a:latin typeface="Arial"/>
-                          <a:cs typeface="Arial"/>
-                          <a:ea typeface="Calibri"/>
                         </a:rPr>
                         <a:t>الأنسب</a:t>
                       </a:r>
@@ -9349,10 +6918,11 @@
                     <a:p>
                       <a:pPr algn="ctr" rtl="1"/>
                       <a:r>
-                        <a:rPr sz="1200" b="0">
+                        <a:rPr sz="1200">
+                          <a:solidFill>
+                            <a:srgbClr val="333333"/>
+                          </a:solidFill>
                           <a:latin typeface="Arial"/>
-                          <a:cs typeface="Arial"/>
-                          <a:ea typeface="Calibri"/>
                         </a:rPr>
                         <a:t>تحليلات و AI/RAG</a:t>
                       </a:r>
@@ -9371,10 +6941,11 @@
                     <a:p>
                       <a:pPr algn="ctr" rtl="1"/>
                       <a:r>
-                        <a:rPr sz="1200" b="0">
+                        <a:rPr sz="1200">
+                          <a:solidFill>
+                            <a:srgbClr val="333333"/>
+                          </a:solidFill>
                           <a:latin typeface="Arial"/>
-                          <a:cs typeface="Arial"/>
-                          <a:ea typeface="Calibri"/>
                         </a:rPr>
                         <a:t>تقارير BI</a:t>
                       </a:r>
@@ -9393,10 +6964,11 @@
                     <a:p>
                       <a:pPr algn="ctr" rtl="1"/>
                       <a:r>
-                        <a:rPr sz="1200" b="0">
+                        <a:rPr sz="1200">
+                          <a:solidFill>
+                            <a:srgbClr val="333333"/>
+                          </a:solidFill>
                           <a:latin typeface="Arial"/>
-                          <a:cs typeface="Arial"/>
-                          <a:ea typeface="Calibri"/>
                         </a:rPr>
                         <a:t>مؤسسات كبيرة</a:t>
                       </a:r>
@@ -9417,10 +6989,11 @@
                     <a:p>
                       <a:pPr algn="ctr" rtl="1"/>
                       <a:r>
-                        <a:rPr sz="1200" b="0">
+                        <a:rPr sz="1200">
+                          <a:solidFill>
+                            <a:srgbClr val="333333"/>
+                          </a:solidFill>
                           <a:latin typeface="Arial"/>
-                          <a:cs typeface="Arial"/>
-                          <a:ea typeface="Calibri"/>
                         </a:rPr>
                         <a:t>الحوكمة</a:t>
                       </a:r>
@@ -9439,10 +7012,11 @@
                     <a:p>
                       <a:pPr algn="ctr" rtl="1"/>
                       <a:r>
-                        <a:rPr sz="1200" b="0">
+                        <a:rPr sz="1200">
+                          <a:solidFill>
+                            <a:srgbClr val="333333"/>
+                          </a:solidFill>
                           <a:latin typeface="Arial"/>
-                          <a:cs typeface="Arial"/>
-                          <a:ea typeface="Calibri"/>
                         </a:rPr>
                         <a:t>جودة بين الطبقات</a:t>
                       </a:r>
@@ -9461,10 +7035,11 @@
                     <a:p>
                       <a:pPr algn="ctr" rtl="1"/>
                       <a:r>
-                        <a:rPr sz="1200" b="0">
+                        <a:rPr sz="1200">
+                          <a:solidFill>
+                            <a:srgbClr val="333333"/>
+                          </a:solidFill>
                           <a:latin typeface="Arial"/>
-                          <a:cs typeface="Arial"/>
-                          <a:ea typeface="Calibri"/>
                         </a:rPr>
                         <a:t>مركزية</a:t>
                       </a:r>
@@ -9483,10 +7058,11 @@
                     <a:p>
                       <a:pPr algn="ctr" rtl="1"/>
                       <a:r>
-                        <a:rPr sz="1200" b="0">
+                        <a:rPr sz="1200">
+                          <a:solidFill>
+                            <a:srgbClr val="333333"/>
+                          </a:solidFill>
                           <a:latin typeface="Arial"/>
-                          <a:cs typeface="Arial"/>
-                          <a:ea typeface="Calibri"/>
                         </a:rPr>
                         <a:t>موحدة + عقود</a:t>
                       </a:r>
@@ -9532,8 +7108,6 @@
                   <a:srgbClr val="666666"/>
                 </a:solidFill>
                 <a:latin typeface="Arial"/>
-                <a:cs typeface="Arial"/>
-                <a:ea typeface="Calibri"/>
               </a:rPr>
               <a:t>Module 02 — Data &amp; AI Engineering Track  |  الوحدة الثانية</a:t>
             </a:r>
@@ -9569,24 +7143,94 @@
                   <a:srgbClr val="666666"/>
                 </a:solidFill>
                 <a:latin typeface="Calibri"/>
-                <a:cs typeface="Arial"/>
-                <a:ea typeface="Calibri"/>
-              </a:rPr>
-              <a:t>V06  •  7/13</a:t>
-            </a:r>
-          </a:p>
-        </p:txBody>
-      </p:sp>
-      <p:sp>
-        <p:nvSpPr>
-          <p:cNvPr id="7" name="TextBox 6"/>
+              </a:rPr>
+              <a:t>V06  •  9/12</a:t>
+            </a:r>
+          </a:p>
+        </p:txBody>
+      </p:sp>
+    </p:spTree>
+  </p:cSld>
+  <p:clrMapOvr>
+    <a:masterClrMapping/>
+  </p:clrMapOvr>
+</p:sld>
+</file>
+
+<file path=ppt/slides/slide8.xml><?xml version="1.0" encoding="utf-8"?>
+<p:sld xmlns:a="http://schemas.openxmlformats.org/drawingml/2006/main" xmlns:p="http://schemas.openxmlformats.org/presentationml/2006/main" xmlns:r="http://schemas.openxmlformats.org/officeDocument/2006/relationships">
+  <p:cSld>
+    <p:bg>
+      <p:bgPr>
+        <a:solidFill>
+          <a:srgbClr val="FFFFFF"/>
+        </a:solidFill>
+        <a:effectLst/>
+      </p:bgPr>
+    </p:bg>
+    <p:spTree>
+      <p:nvGrpSpPr>
+        <p:cNvPr id="1" name=""/>
+        <p:cNvGrpSpPr/>
+        <p:nvPr/>
+      </p:nvGrpSpPr>
+      <p:grpSpPr/>
+      <p:sp>
+        <p:nvSpPr>
+          <p:cNvPr id="2" name="Rectangle 1"/>
+          <p:cNvSpPr/>
+          <p:nvPr/>
+        </p:nvSpPr>
+        <p:spPr>
+          <a:xfrm>
+            <a:off x="0" y="0"/>
+            <a:ext cx="12191695" cy="1005840"/>
+          </a:xfrm>
+          <a:prstGeom prst="rect">
+            <a:avLst/>
+          </a:prstGeom>
+          <a:solidFill>
+            <a:srgbClr val="FFFFFF"/>
+          </a:solidFill>
+          <a:ln w="25400">
+            <a:solidFill>
+              <a:srgbClr val="1F4E79"/>
+            </a:solidFill>
+          </a:ln>
+          <a:effectLst/>
+        </p:spPr>
+        <p:style>
+          <a:lnRef idx="1">
+            <a:schemeClr val="accent1"/>
+          </a:lnRef>
+          <a:fillRef idx="3">
+            <a:schemeClr val="accent1"/>
+          </a:fillRef>
+          <a:effectRef idx="2">
+            <a:schemeClr val="accent1"/>
+          </a:effectRef>
+          <a:fontRef idx="minor">
+            <a:schemeClr val="lt1"/>
+          </a:fontRef>
+        </p:style>
+        <p:txBody>
+          <a:bodyPr rtlCol="0" anchor="ctr"/>
+          <a:lstStyle/>
+          <a:p>
+            <a:pPr algn="ctr"/>
+          </a:p>
+        </p:txBody>
+      </p:sp>
+      <p:sp>
+        <p:nvSpPr>
+          <p:cNvPr id="3" name="TextBox 2"/>
           <p:cNvSpPr txBox="1"/>
           <p:nvPr/>
         </p:nvSpPr>
         <p:spPr>
           <a:xfrm>
-            <a:off x="640080" y="6400800"/>
-            <a:ext cx="8686800" cy="320040"/>
+            <a:off x="640080" y="182880"/>
+            <a:ext cx="10972800" cy="640080"/>
           </a:xfrm>
           <a:prstGeom prst="rect">
             <a:avLst/>
@@ -9601,29 +7245,27 @@
           <a:p>
             <a:pPr algn="r" rtl="1"/>
             <a:r>
-              <a:rPr sz="1000" b="0">
-                <a:solidFill>
-                  <a:srgbClr val="666666"/>
+              <a:rPr sz="3200" b="1">
+                <a:solidFill>
+                  <a:srgbClr val="1F3B5C"/>
                 </a:solidFill>
                 <a:latin typeface="Arial"/>
-                <a:cs typeface="Arial"/>
-                <a:ea typeface="Calibri"/>
-              </a:rPr>
-              <a:t>Module 02 — Data &amp; AI Engineering Track  |  الوحدة الثانية</a:t>
-            </a:r>
-          </a:p>
-        </p:txBody>
-      </p:sp>
-      <p:sp>
-        <p:nvSpPr>
-          <p:cNvPr id="8" name="TextBox 7"/>
+              </a:rPr>
+              <a:t>اختبار قصير / Quick Quiz</a:t>
+            </a:r>
+          </a:p>
+        </p:txBody>
+      </p:sp>
+      <p:sp>
+        <p:nvSpPr>
+          <p:cNvPr id="4" name="TextBox 3"/>
           <p:cNvSpPr txBox="1"/>
           <p:nvPr/>
         </p:nvSpPr>
         <p:spPr>
           <a:xfrm>
-            <a:off x="9601200" y="6400800"/>
-            <a:ext cx="1920240" cy="320040"/>
+            <a:off x="640080" y="1280160"/>
+            <a:ext cx="10972800" cy="5212080"/>
           </a:xfrm>
           <a:prstGeom prst="rect">
             <a:avLst/>
@@ -9636,24 +7278,162 @@
           </a:bodyPr>
           <a:lstStyle/>
           <a:p>
-            <a:pPr algn="l" rtl="0"/>
-            <a:r>
-              <a:rPr sz="1000" b="0">
+            <a:pPr algn="r" rtl="1">
+              <a:spcBef>
+                <a:spcPts val="200"/>
+              </a:spcBef>
+              <a:spcAft>
+                <a:spcPts val="1000"/>
+              </a:spcAft>
+            </a:pPr>
+            <a:r>
+              <a:rPr sz="2000">
+                <a:solidFill>
+                  <a:srgbClr val="333333"/>
+                </a:solidFill>
+                <a:latin typeface="Arial"/>
+              </a:rPr>
+              <a:t>• 1. ما الفرق الجوهري بين ETL وELT؟</a:t>
+            </a:r>
+          </a:p>
+          <a:p>
+            <a:pPr algn="l" rtl="0">
+              <a:spcBef>
+                <a:spcPts val="200"/>
+              </a:spcBef>
+              <a:spcAft>
+                <a:spcPts val="1000"/>
+              </a:spcAft>
+            </a:pPr>
+            <a:r>
+              <a:rPr sz="1700">
                 <a:solidFill>
                   <a:srgbClr val="666666"/>
                 </a:solidFill>
                 <a:latin typeface="Calibri"/>
-                <a:cs typeface="Arial"/>
-                <a:ea typeface="Calibri"/>
-              </a:rPr>
-              <a:t>06_  •  9/12</a:t>
-            </a:r>
-          </a:p>
-        </p:txBody>
-      </p:sp>
-      <p:sp>
-        <p:nvSpPr>
-          <p:cNvPr id="9" name="TextBox 8"/>
+              </a:rPr>
+              <a:t>• What is the key difference between ETL and ELT?</a:t>
+            </a:r>
+          </a:p>
+          <a:p>
+            <a:pPr algn="r" rtl="1">
+              <a:spcBef>
+                <a:spcPts val="200"/>
+              </a:spcBef>
+              <a:spcAft>
+                <a:spcPts val="1000"/>
+              </a:spcAft>
+            </a:pPr>
+            <a:r>
+              <a:rPr sz="2000">
+                <a:solidFill>
+                  <a:srgbClr val="333333"/>
+                </a:solidFill>
+                <a:latin typeface="Arial"/>
+              </a:rPr>
+              <a:t>• 2. أين تُستخدم طبقة Gold في المعمارية المتدرِّجة؟</a:t>
+            </a:r>
+          </a:p>
+          <a:p>
+            <a:pPr algn="l" rtl="0">
+              <a:spcBef>
+                <a:spcPts val="200"/>
+              </a:spcBef>
+              <a:spcAft>
+                <a:spcPts val="1000"/>
+              </a:spcAft>
+            </a:pPr>
+            <a:r>
+              <a:rPr sz="1700">
+                <a:solidFill>
+                  <a:srgbClr val="666666"/>
+                </a:solidFill>
+                <a:latin typeface="Calibri"/>
+              </a:rPr>
+              <a:t>• Where is the Gold layer used in the Medallion architecture?</a:t>
+            </a:r>
+          </a:p>
+          <a:p>
+            <a:pPr algn="r" rtl="1">
+              <a:spcBef>
+                <a:spcPts val="200"/>
+              </a:spcBef>
+              <a:spcAft>
+                <a:spcPts val="1000"/>
+              </a:spcAft>
+            </a:pPr>
+            <a:r>
+              <a:rPr sz="2000">
+                <a:solidFill>
+                  <a:srgbClr val="333333"/>
+                </a:solidFill>
+                <a:latin typeface="Arial"/>
+              </a:rPr>
+              <a:t>• 3. أي نمط يناسب مؤسسة كبيرة بفرق مستقلة وملكية لامركزية؟</a:t>
+            </a:r>
+          </a:p>
+          <a:p>
+            <a:pPr algn="l" rtl="0">
+              <a:spcBef>
+                <a:spcPts val="200"/>
+              </a:spcBef>
+              <a:spcAft>
+                <a:spcPts val="1000"/>
+              </a:spcAft>
+            </a:pPr>
+            <a:r>
+              <a:rPr sz="1700">
+                <a:solidFill>
+                  <a:srgbClr val="666666"/>
+                </a:solidFill>
+                <a:latin typeface="Calibri"/>
+              </a:rPr>
+              <a:t>• Which pattern suits a large organization with independent, decentralized teams?</a:t>
+            </a:r>
+          </a:p>
+          <a:p>
+            <a:pPr algn="r" rtl="1">
+              <a:spcBef>
+                <a:spcPts val="200"/>
+              </a:spcBef>
+              <a:spcAft>
+                <a:spcPts val="1000"/>
+              </a:spcAft>
+            </a:pPr>
+            <a:r>
+              <a:rPr sz="2000">
+                <a:solidFill>
+                  <a:srgbClr val="333333"/>
+                </a:solidFill>
+                <a:latin typeface="Arial"/>
+              </a:rPr>
+              <a:t>• 4. ما التنسيق الأنسب للتحليلات عالية الأداء ولماذا؟</a:t>
+            </a:r>
+          </a:p>
+          <a:p>
+            <a:pPr algn="l" rtl="0">
+              <a:spcBef>
+                <a:spcPts val="200"/>
+              </a:spcBef>
+              <a:spcAft>
+                <a:spcPts val="1000"/>
+              </a:spcAft>
+            </a:pPr>
+            <a:r>
+              <a:rPr sz="1700">
+                <a:solidFill>
+                  <a:srgbClr val="666666"/>
+                </a:solidFill>
+                <a:latin typeface="Calibri"/>
+              </a:rPr>
+              <a:t>• Which format suits high-performance analytics and why?</a:t>
+            </a:r>
+          </a:p>
+        </p:txBody>
+      </p:sp>
+      <p:sp>
+        <p:nvSpPr>
+          <p:cNvPr id="5" name="TextBox 4"/>
           <p:cNvSpPr txBox="1"/>
           <p:nvPr/>
         </p:nvSpPr>
@@ -9680,8 +7460,6 @@
                   <a:srgbClr val="666666"/>
                 </a:solidFill>
                 <a:latin typeface="Arial"/>
-                <a:cs typeface="Arial"/>
-                <a:ea typeface="Calibri"/>
               </a:rPr>
               <a:t>Module 02 — Data &amp; AI Engineering Track  |  الوحدة الثانية</a:t>
             </a:r>
@@ -9690,7 +7468,7 @@
       </p:sp>
       <p:sp>
         <p:nvSpPr>
-          <p:cNvPr id="10" name="TextBox 9"/>
+          <p:cNvPr id="6" name="TextBox 5"/>
           <p:cNvSpPr txBox="1"/>
           <p:nvPr/>
         </p:nvSpPr>
@@ -9717,10 +7495,360 @@
                   <a:srgbClr val="666666"/>
                 </a:solidFill>
                 <a:latin typeface="Calibri"/>
-                <a:cs typeface="Arial"/>
-                <a:ea typeface="Calibri"/>
-              </a:rPr>
-              <a:t>06_  •  9/12</a:t>
+              </a:rPr>
+              <a:t>V06  •  10/12</a:t>
+            </a:r>
+          </a:p>
+        </p:txBody>
+      </p:sp>
+    </p:spTree>
+  </p:cSld>
+  <p:clrMapOvr>
+    <a:masterClrMapping/>
+  </p:clrMapOvr>
+</p:sld>
+</file>
+
+<file path=ppt/slides/slide9.xml><?xml version="1.0" encoding="utf-8"?>
+<p:sld xmlns:a="http://schemas.openxmlformats.org/drawingml/2006/main" xmlns:p="http://schemas.openxmlformats.org/presentationml/2006/main" xmlns:r="http://schemas.openxmlformats.org/officeDocument/2006/relationships">
+  <p:cSld>
+    <p:bg>
+      <p:bgPr>
+        <a:solidFill>
+          <a:srgbClr val="FFFFFF"/>
+        </a:solidFill>
+        <a:effectLst/>
+      </p:bgPr>
+    </p:bg>
+    <p:spTree>
+      <p:nvGrpSpPr>
+        <p:cNvPr id="1" name=""/>
+        <p:cNvGrpSpPr/>
+        <p:nvPr/>
+      </p:nvGrpSpPr>
+      <p:grpSpPr/>
+      <p:sp>
+        <p:nvSpPr>
+          <p:cNvPr id="2" name="Rectangle 1"/>
+          <p:cNvSpPr/>
+          <p:nvPr/>
+        </p:nvSpPr>
+        <p:spPr>
+          <a:xfrm>
+            <a:off x="0" y="0"/>
+            <a:ext cx="12191695" cy="1005840"/>
+          </a:xfrm>
+          <a:prstGeom prst="rect">
+            <a:avLst/>
+          </a:prstGeom>
+          <a:solidFill>
+            <a:srgbClr val="FFFFFF"/>
+          </a:solidFill>
+          <a:ln w="25400">
+            <a:solidFill>
+              <a:srgbClr val="1F4E79"/>
+            </a:solidFill>
+          </a:ln>
+          <a:effectLst/>
+        </p:spPr>
+        <p:style>
+          <a:lnRef idx="1">
+            <a:schemeClr val="accent1"/>
+          </a:lnRef>
+          <a:fillRef idx="3">
+            <a:schemeClr val="accent1"/>
+          </a:fillRef>
+          <a:effectRef idx="2">
+            <a:schemeClr val="accent1"/>
+          </a:effectRef>
+          <a:fontRef idx="minor">
+            <a:schemeClr val="lt1"/>
+          </a:fontRef>
+        </p:style>
+        <p:txBody>
+          <a:bodyPr rtlCol="0" anchor="ctr"/>
+          <a:lstStyle/>
+          <a:p>
+            <a:pPr algn="ctr"/>
+          </a:p>
+        </p:txBody>
+      </p:sp>
+      <p:sp>
+        <p:nvSpPr>
+          <p:cNvPr id="3" name="TextBox 2"/>
+          <p:cNvSpPr txBox="1"/>
+          <p:nvPr/>
+        </p:nvSpPr>
+        <p:spPr>
+          <a:xfrm>
+            <a:off x="640080" y="182880"/>
+            <a:ext cx="10972800" cy="640080"/>
+          </a:xfrm>
+          <a:prstGeom prst="rect">
+            <a:avLst/>
+          </a:prstGeom>
+          <a:noFill/>
+        </p:spPr>
+        <p:txBody>
+          <a:bodyPr wrap="square">
+            <a:spAutoFit/>
+          </a:bodyPr>
+          <a:lstStyle/>
+          <a:p>
+            <a:pPr algn="r" rtl="1"/>
+            <a:r>
+              <a:rPr sz="3200" b="1">
+                <a:solidFill>
+                  <a:srgbClr val="1F3B5C"/>
+                </a:solidFill>
+                <a:latin typeface="Arial"/>
+              </a:rPr>
+              <a:t>إجابات الاختبار / Quiz Answers</a:t>
+            </a:r>
+          </a:p>
+        </p:txBody>
+      </p:sp>
+      <p:sp>
+        <p:nvSpPr>
+          <p:cNvPr id="4" name="TextBox 3"/>
+          <p:cNvSpPr txBox="1"/>
+          <p:nvPr/>
+        </p:nvSpPr>
+        <p:spPr>
+          <a:xfrm>
+            <a:off x="640080" y="1280160"/>
+            <a:ext cx="10972800" cy="5212080"/>
+          </a:xfrm>
+          <a:prstGeom prst="rect">
+            <a:avLst/>
+          </a:prstGeom>
+          <a:noFill/>
+        </p:spPr>
+        <p:txBody>
+          <a:bodyPr wrap="square">
+            <a:spAutoFit/>
+          </a:bodyPr>
+          <a:lstStyle/>
+          <a:p>
+            <a:pPr algn="r" rtl="1">
+              <a:spcBef>
+                <a:spcPts val="200"/>
+              </a:spcBef>
+              <a:spcAft>
+                <a:spcPts val="1000"/>
+              </a:spcAft>
+            </a:pPr>
+            <a:r>
+              <a:rPr sz="1800">
+                <a:solidFill>
+                  <a:srgbClr val="333333"/>
+                </a:solidFill>
+                <a:latin typeface="Arial"/>
+              </a:rPr>
+              <a:t>• 1. ETL يحوّل قبل التحميل؛ ELT يحمّل أولاً ثم يحوّل داخل المنصة الهدف.</a:t>
+            </a:r>
+          </a:p>
+          <a:p>
+            <a:pPr algn="l" rtl="0">
+              <a:spcBef>
+                <a:spcPts val="200"/>
+              </a:spcBef>
+              <a:spcAft>
+                <a:spcPts val="1000"/>
+              </a:spcAft>
+            </a:pPr>
+            <a:r>
+              <a:rPr sz="1500">
+                <a:solidFill>
+                  <a:srgbClr val="666666"/>
+                </a:solidFill>
+                <a:latin typeface="Calibri"/>
+              </a:rPr>
+              <a:t>• ETL transforms before loading; ELT loads first and transforms inside the target platform.</a:t>
+            </a:r>
+          </a:p>
+          <a:p>
+            <a:pPr algn="r" rtl="1">
+              <a:spcBef>
+                <a:spcPts val="200"/>
+              </a:spcBef>
+              <a:spcAft>
+                <a:spcPts val="1000"/>
+              </a:spcAft>
+            </a:pPr>
+            <a:r>
+              <a:rPr sz="1800">
+                <a:solidFill>
+                  <a:srgbClr val="333333"/>
+                </a:solidFill>
+                <a:latin typeface="Arial"/>
+              </a:rPr>
+              <a:t>• 2. تجميعات على مستوى الأعمال جاهزة للتحليل.</a:t>
+            </a:r>
+          </a:p>
+          <a:p>
+            <a:pPr algn="l" rtl="0">
+              <a:spcBef>
+                <a:spcPts val="200"/>
+              </a:spcBef>
+              <a:spcAft>
+                <a:spcPts val="1000"/>
+              </a:spcAft>
+            </a:pPr>
+            <a:r>
+              <a:rPr sz="1500">
+                <a:solidFill>
+                  <a:srgbClr val="666666"/>
+                </a:solidFill>
+                <a:latin typeface="Calibri"/>
+              </a:rPr>
+              <a:t>• Business-level aggregates that are analytics-ready.</a:t>
+            </a:r>
+          </a:p>
+          <a:p>
+            <a:pPr algn="r" rtl="1">
+              <a:spcBef>
+                <a:spcPts val="200"/>
+              </a:spcBef>
+              <a:spcAft>
+                <a:spcPts val="1000"/>
+              </a:spcAft>
+            </a:pPr>
+            <a:r>
+              <a:rPr sz="1800">
+                <a:solidFill>
+                  <a:srgbClr val="333333"/>
+                </a:solidFill>
+                <a:latin typeface="Arial"/>
+              </a:rPr>
+              <a:t>• 3. شبكة البيانات Data Mesh.</a:t>
+            </a:r>
+          </a:p>
+          <a:p>
+            <a:pPr algn="l" rtl="0">
+              <a:spcBef>
+                <a:spcPts val="200"/>
+              </a:spcBef>
+              <a:spcAft>
+                <a:spcPts val="1000"/>
+              </a:spcAft>
+            </a:pPr>
+            <a:r>
+              <a:rPr sz="1500">
+                <a:solidFill>
+                  <a:srgbClr val="666666"/>
+                </a:solidFill>
+                <a:latin typeface="Calibri"/>
+              </a:rPr>
+              <a:t>• Data mesh.</a:t>
+            </a:r>
+          </a:p>
+          <a:p>
+            <a:pPr algn="r" rtl="1">
+              <a:spcBef>
+                <a:spcPts val="200"/>
+              </a:spcBef>
+              <a:spcAft>
+                <a:spcPts val="1000"/>
+              </a:spcAft>
+            </a:pPr>
+            <a:r>
+              <a:rPr sz="1800">
+                <a:solidFill>
+                  <a:srgbClr val="333333"/>
+                </a:solidFill>
+                <a:latin typeface="Arial"/>
+              </a:rPr>
+              <a:t>• 4. Parquet — تنسيق عمودي يقلل الحجم ويسرّع القراءة.</a:t>
+            </a:r>
+          </a:p>
+          <a:p>
+            <a:pPr algn="l" rtl="0">
+              <a:spcBef>
+                <a:spcPts val="200"/>
+              </a:spcBef>
+              <a:spcAft>
+                <a:spcPts val="1000"/>
+              </a:spcAft>
+            </a:pPr>
+            <a:r>
+              <a:rPr sz="1500">
+                <a:solidFill>
+                  <a:srgbClr val="666666"/>
+                </a:solidFill>
+                <a:latin typeface="Calibri"/>
+              </a:rPr>
+              <a:t>• Parquet — columnar, smaller and faster for analytical reads.</a:t>
+            </a:r>
+          </a:p>
+        </p:txBody>
+      </p:sp>
+      <p:sp>
+        <p:nvSpPr>
+          <p:cNvPr id="5" name="TextBox 4"/>
+          <p:cNvSpPr txBox="1"/>
+          <p:nvPr/>
+        </p:nvSpPr>
+        <p:spPr>
+          <a:xfrm>
+            <a:off x="640080" y="6400800"/>
+            <a:ext cx="8686800" cy="320040"/>
+          </a:xfrm>
+          <a:prstGeom prst="rect">
+            <a:avLst/>
+          </a:prstGeom>
+          <a:noFill/>
+        </p:spPr>
+        <p:txBody>
+          <a:bodyPr wrap="square">
+            <a:spAutoFit/>
+          </a:bodyPr>
+          <a:lstStyle/>
+          <a:p>
+            <a:pPr algn="r" rtl="1"/>
+            <a:r>
+              <a:rPr sz="1000" b="0">
+                <a:solidFill>
+                  <a:srgbClr val="666666"/>
+                </a:solidFill>
+                <a:latin typeface="Arial"/>
+              </a:rPr>
+              <a:t>Module 02 — Data &amp; AI Engineering Track  |  الوحدة الثانية</a:t>
+            </a:r>
+          </a:p>
+        </p:txBody>
+      </p:sp>
+      <p:sp>
+        <p:nvSpPr>
+          <p:cNvPr id="6" name="TextBox 5"/>
+          <p:cNvSpPr txBox="1"/>
+          <p:nvPr/>
+        </p:nvSpPr>
+        <p:spPr>
+          <a:xfrm>
+            <a:off x="9601200" y="6400800"/>
+            <a:ext cx="1920240" cy="320040"/>
+          </a:xfrm>
+          <a:prstGeom prst="rect">
+            <a:avLst/>
+          </a:prstGeom>
+          <a:noFill/>
+        </p:spPr>
+        <p:txBody>
+          <a:bodyPr wrap="square">
+            <a:spAutoFit/>
+          </a:bodyPr>
+          <a:lstStyle/>
+          <a:p>
+            <a:pPr algn="l" rtl="0"/>
+            <a:r>
+              <a:rPr sz="1000" b="0">
+                <a:solidFill>
+                  <a:srgbClr val="666666"/>
+                </a:solidFill>
+                <a:latin typeface="Calibri"/>
+              </a:rPr>
+              <a:t>V06  •  11/12</a:t>
             </a:r>
           </a:p>
         </p:txBody>

--- a/output/Module02_V06_Updated.pptx
+++ b/output/Module02_V06_Updated.pptx
@@ -11,6 +11,7 @@
     <p:sldId id="267" r:id="rId18"/>
     <p:sldId id="258" r:id="rId9"/>
     <p:sldId id="259" r:id="rId10"/>
+    <p:sldId id="268" r:id="rId19"/>
     <p:sldId id="260" r:id="rId11"/>
     <p:sldId id="261" r:id="rId12"/>
     <p:sldId id="262" r:id="rId13"/>
@@ -3312,7 +3313,7 @@
                 </a:solidFill>
                 <a:latin typeface="Calibri"/>
               </a:rPr>
-              <a:t>V06  •  1/12</a:t>
+              <a:t>V06  •  1/13</a:t>
             </a:r>
           </a:p>
         </p:txBody>
@@ -3626,7 +3627,7 @@
                 </a:solidFill>
                 <a:latin typeface="Calibri"/>
               </a:rPr>
-              <a:t>V06  •  12/12</a:t>
+              <a:t>V06  •  13/13</a:t>
             </a:r>
           </a:p>
         </p:txBody>
@@ -4642,7 +4643,7 @@
                 </a:solidFill>
                 <a:latin typeface="Calibri"/>
               </a:rPr>
-              <a:t>V06  •  3/12</a:t>
+              <a:t>V06  •  3/13</a:t>
             </a:r>
           </a:p>
         </p:txBody>
@@ -4975,7 +4976,648 @@
                 </a:solidFill>
                 <a:latin typeface="Calibri"/>
               </a:rPr>
-              <a:t>V06  •  4/12</a:t>
+              <a:t>V06  •  4/13</a:t>
+            </a:r>
+          </a:p>
+        </p:txBody>
+      </p:sp>
+    </p:spTree>
+  </p:cSld>
+  <p:clrMapOvr>
+    <a:masterClrMapping/>
+  </p:clrMapOvr>
+</p:sld>
+</file>
+
+<file path=ppt/slides/slide13.xml><?xml version="1.0" encoding="utf-8"?>
+<p:sld xmlns:a="http://schemas.openxmlformats.org/drawingml/2006/main" xmlns:p="http://schemas.openxmlformats.org/presentationml/2006/main" xmlns:r="http://schemas.openxmlformats.org/officeDocument/2006/relationships">
+  <p:cSld>
+    <p:bg>
+      <p:bgPr>
+        <a:solidFill>
+          <a:srgbClr val="FFFFFF"/>
+        </a:solidFill>
+        <a:effectLst/>
+      </p:bgPr>
+    </p:bg>
+    <p:spTree>
+      <p:nvGrpSpPr>
+        <p:cNvPr id="1" name=""/>
+        <p:cNvGrpSpPr/>
+        <p:nvPr/>
+      </p:nvGrpSpPr>
+      <p:grpSpPr/>
+      <p:sp>
+        <p:nvSpPr>
+          <p:cNvPr id="2" name="TextBox 1"/>
+          <p:cNvSpPr txBox="1"/>
+          <p:nvPr/>
+        </p:nvSpPr>
+        <p:spPr>
+          <a:xfrm>
+            <a:off x="640080" y="137160"/>
+            <a:ext cx="10972800" cy="640080"/>
+          </a:xfrm>
+          <a:prstGeom prst="rect">
+            <a:avLst/>
+          </a:prstGeom>
+          <a:noFill/>
+        </p:spPr>
+        <p:txBody>
+          <a:bodyPr wrap="none">
+            <a:spAutoFit/>
+          </a:bodyPr>
+          <a:lstStyle/>
+          <a:p>
+            <a:pPr algn="r" rtl="1"/>
+            <a:r>
+              <a:rPr sz="3000" b="1">
+                <a:solidFill>
+                  <a:srgbClr val="1F3B5C"/>
+                </a:solidFill>
+                <a:latin typeface="Arial"/>
+              </a:rPr>
+              <a:t>طيف البيانات والتنسيقات / Data Spectrum &amp; Formats</a:t>
+            </a:r>
+          </a:p>
+        </p:txBody>
+      </p:sp>
+      <p:sp>
+        <p:nvSpPr>
+          <p:cNvPr id="3" name="Rounded Rectangle 2"/>
+          <p:cNvSpPr/>
+          <p:nvPr/>
+        </p:nvSpPr>
+        <p:spPr>
+          <a:xfrm>
+            <a:off x="640080" y="1325880"/>
+            <a:ext cx="3520440" cy="960120"/>
+          </a:xfrm>
+          <a:prstGeom prst="roundRect">
+            <a:avLst/>
+          </a:prstGeom>
+          <a:solidFill>
+            <a:srgbClr val="DCE6F1"/>
+          </a:solidFill>
+          <a:ln w="12700">
+            <a:solidFill>
+              <a:srgbClr val="1F4E79"/>
+            </a:solidFill>
+          </a:ln>
+          <a:effectLst/>
+        </p:spPr>
+        <p:style>
+          <a:lnRef idx="1">
+            <a:schemeClr val="accent1"/>
+          </a:lnRef>
+          <a:fillRef idx="3">
+            <a:schemeClr val="accent1"/>
+          </a:fillRef>
+          <a:effectRef idx="2">
+            <a:schemeClr val="accent1"/>
+          </a:effectRef>
+          <a:fontRef idx="minor">
+            <a:schemeClr val="lt1"/>
+          </a:fontRef>
+        </p:style>
+        <p:txBody>
+          <a:bodyPr rtlCol="0" anchor="ctr" wrap="square"/>
+          <a:lstStyle/>
+          <a:p>
+            <a:pPr algn="ctr" rtl="1"/>
+            <a:r>
+              <a:rPr sz="1800" b="1">
+                <a:solidFill>
+                  <a:srgbClr val="333333"/>
+                </a:solidFill>
+                <a:latin typeface="Arial"/>
+              </a:rPr>
+              <a:t>مهيكلة</a:t>
+            </a:r>
+          </a:p>
+          <a:p>
+            <a:pPr algn="ctr" rtl="0"/>
+            <a:r>
+              <a:rPr sz="1300">
+                <a:solidFill>
+                  <a:srgbClr val="666666"/>
+                </a:solidFill>
+                <a:latin typeface="Calibri"/>
+              </a:rPr>
+              <a:t>Structured</a:t>
+            </a:r>
+          </a:p>
+        </p:txBody>
+      </p:sp>
+      <p:sp>
+        <p:nvSpPr>
+          <p:cNvPr id="4" name="Rounded Rectangle 3"/>
+          <p:cNvSpPr/>
+          <p:nvPr/>
+        </p:nvSpPr>
+        <p:spPr>
+          <a:xfrm>
+            <a:off x="640080" y="2468880"/>
+            <a:ext cx="3520440" cy="914400"/>
+          </a:xfrm>
+          <a:prstGeom prst="roundRect">
+            <a:avLst/>
+          </a:prstGeom>
+          <a:solidFill>
+            <a:srgbClr val="EDEDED"/>
+          </a:solidFill>
+          <a:ln w="12700">
+            <a:solidFill>
+              <a:srgbClr val="1F4E79"/>
+            </a:solidFill>
+          </a:ln>
+          <a:effectLst/>
+        </p:spPr>
+        <p:style>
+          <a:lnRef idx="1">
+            <a:schemeClr val="accent1"/>
+          </a:lnRef>
+          <a:fillRef idx="3">
+            <a:schemeClr val="accent1"/>
+          </a:fillRef>
+          <a:effectRef idx="2">
+            <a:schemeClr val="accent1"/>
+          </a:effectRef>
+          <a:fontRef idx="minor">
+            <a:schemeClr val="lt1"/>
+          </a:fontRef>
+        </p:style>
+        <p:txBody>
+          <a:bodyPr rtlCol="0" anchor="ctr" wrap="square"/>
+          <a:lstStyle/>
+          <a:p>
+            <a:pPr algn="ctr" rtl="1"/>
+            <a:r>
+              <a:rPr sz="1400" b="1">
+                <a:solidFill>
+                  <a:srgbClr val="333333"/>
+                </a:solidFill>
+                <a:latin typeface="Arial"/>
+              </a:rPr>
+              <a:t>جداول / Tables</a:t>
+            </a:r>
+          </a:p>
+          <a:p>
+            <a:pPr algn="ctr" rtl="0"/>
+            <a:r>
+              <a:rPr sz="1200">
+                <a:solidFill>
+                  <a:srgbClr val="666666"/>
+                </a:solidFill>
+                <a:latin typeface="Calibri"/>
+              </a:rPr>
+              <a:t>CSV • Parquet</a:t>
+            </a:r>
+          </a:p>
+        </p:txBody>
+      </p:sp>
+      <p:sp>
+        <p:nvSpPr>
+          <p:cNvPr id="5" name="Rounded Rectangle 4"/>
+          <p:cNvSpPr/>
+          <p:nvPr/>
+        </p:nvSpPr>
+        <p:spPr>
+          <a:xfrm>
+            <a:off x="4343400" y="1325880"/>
+            <a:ext cx="3520440" cy="960120"/>
+          </a:xfrm>
+          <a:prstGeom prst="roundRect">
+            <a:avLst/>
+          </a:prstGeom>
+          <a:solidFill>
+            <a:srgbClr val="E2EFDA"/>
+          </a:solidFill>
+          <a:ln w="12700">
+            <a:solidFill>
+              <a:srgbClr val="1F4E79"/>
+            </a:solidFill>
+          </a:ln>
+          <a:effectLst/>
+        </p:spPr>
+        <p:style>
+          <a:lnRef idx="1">
+            <a:schemeClr val="accent1"/>
+          </a:lnRef>
+          <a:fillRef idx="3">
+            <a:schemeClr val="accent1"/>
+          </a:fillRef>
+          <a:effectRef idx="2">
+            <a:schemeClr val="accent1"/>
+          </a:effectRef>
+          <a:fontRef idx="minor">
+            <a:schemeClr val="lt1"/>
+          </a:fontRef>
+        </p:style>
+        <p:txBody>
+          <a:bodyPr rtlCol="0" anchor="ctr" wrap="square"/>
+          <a:lstStyle/>
+          <a:p>
+            <a:pPr algn="ctr" rtl="1"/>
+            <a:r>
+              <a:rPr sz="1800" b="1">
+                <a:solidFill>
+                  <a:srgbClr val="333333"/>
+                </a:solidFill>
+                <a:latin typeface="Arial"/>
+              </a:rPr>
+              <a:t>شبه مهيكلة</a:t>
+            </a:r>
+          </a:p>
+          <a:p>
+            <a:pPr algn="ctr" rtl="0"/>
+            <a:r>
+              <a:rPr sz="1300">
+                <a:solidFill>
+                  <a:srgbClr val="666666"/>
+                </a:solidFill>
+                <a:latin typeface="Calibri"/>
+              </a:rPr>
+              <a:t>Semi-structured</a:t>
+            </a:r>
+          </a:p>
+        </p:txBody>
+      </p:sp>
+      <p:sp>
+        <p:nvSpPr>
+          <p:cNvPr id="6" name="Rounded Rectangle 5"/>
+          <p:cNvSpPr/>
+          <p:nvPr/>
+        </p:nvSpPr>
+        <p:spPr>
+          <a:xfrm>
+            <a:off x="4343400" y="2468880"/>
+            <a:ext cx="3520440" cy="914400"/>
+          </a:xfrm>
+          <a:prstGeom prst="roundRect">
+            <a:avLst/>
+          </a:prstGeom>
+          <a:solidFill>
+            <a:srgbClr val="EDEDED"/>
+          </a:solidFill>
+          <a:ln w="12700">
+            <a:solidFill>
+              <a:srgbClr val="1F4E79"/>
+            </a:solidFill>
+          </a:ln>
+          <a:effectLst/>
+        </p:spPr>
+        <p:style>
+          <a:lnRef idx="1">
+            <a:schemeClr val="accent1"/>
+          </a:lnRef>
+          <a:fillRef idx="3">
+            <a:schemeClr val="accent1"/>
+          </a:fillRef>
+          <a:effectRef idx="2">
+            <a:schemeClr val="accent1"/>
+          </a:effectRef>
+          <a:fontRef idx="minor">
+            <a:schemeClr val="lt1"/>
+          </a:fontRef>
+        </p:style>
+        <p:txBody>
+          <a:bodyPr rtlCol="0" anchor="ctr" wrap="square"/>
+          <a:lstStyle/>
+          <a:p>
+            <a:pPr algn="ctr" rtl="1"/>
+            <a:r>
+              <a:rPr sz="1400" b="1">
+                <a:solidFill>
+                  <a:srgbClr val="333333"/>
+                </a:solidFill>
+                <a:latin typeface="Arial"/>
+              </a:rPr>
+              <a:t>سجلات مرنة / Flexible records</a:t>
+            </a:r>
+          </a:p>
+          <a:p>
+            <a:pPr algn="ctr" rtl="0"/>
+            <a:r>
+              <a:rPr sz="1200">
+                <a:solidFill>
+                  <a:srgbClr val="666666"/>
+                </a:solidFill>
+                <a:latin typeface="Calibri"/>
+              </a:rPr>
+              <a:t>JSON • Avro</a:t>
+            </a:r>
+          </a:p>
+        </p:txBody>
+      </p:sp>
+      <p:sp>
+        <p:nvSpPr>
+          <p:cNvPr id="7" name="Rounded Rectangle 6"/>
+          <p:cNvSpPr/>
+          <p:nvPr/>
+        </p:nvSpPr>
+        <p:spPr>
+          <a:xfrm>
+            <a:off x="8046720" y="1325880"/>
+            <a:ext cx="3520440" cy="960120"/>
+          </a:xfrm>
+          <a:prstGeom prst="roundRect">
+            <a:avLst/>
+          </a:prstGeom>
+          <a:solidFill>
+            <a:srgbClr val="FDE9D9"/>
+          </a:solidFill>
+          <a:ln w="12700">
+            <a:solidFill>
+              <a:srgbClr val="1F4E79"/>
+            </a:solidFill>
+          </a:ln>
+          <a:effectLst/>
+        </p:spPr>
+        <p:style>
+          <a:lnRef idx="1">
+            <a:schemeClr val="accent1"/>
+          </a:lnRef>
+          <a:fillRef idx="3">
+            <a:schemeClr val="accent1"/>
+          </a:fillRef>
+          <a:effectRef idx="2">
+            <a:schemeClr val="accent1"/>
+          </a:effectRef>
+          <a:fontRef idx="minor">
+            <a:schemeClr val="lt1"/>
+          </a:fontRef>
+        </p:style>
+        <p:txBody>
+          <a:bodyPr rtlCol="0" anchor="ctr" wrap="square"/>
+          <a:lstStyle/>
+          <a:p>
+            <a:pPr algn="ctr" rtl="1"/>
+            <a:r>
+              <a:rPr sz="1800" b="1">
+                <a:solidFill>
+                  <a:srgbClr val="333333"/>
+                </a:solidFill>
+                <a:latin typeface="Arial"/>
+              </a:rPr>
+              <a:t>غير مهيكلة</a:t>
+            </a:r>
+          </a:p>
+          <a:p>
+            <a:pPr algn="ctr" rtl="0"/>
+            <a:r>
+              <a:rPr sz="1300">
+                <a:solidFill>
+                  <a:srgbClr val="666666"/>
+                </a:solidFill>
+                <a:latin typeface="Calibri"/>
+              </a:rPr>
+              <a:t>Unstructured</a:t>
+            </a:r>
+          </a:p>
+        </p:txBody>
+      </p:sp>
+      <p:sp>
+        <p:nvSpPr>
+          <p:cNvPr id="8" name="Rounded Rectangle 7"/>
+          <p:cNvSpPr/>
+          <p:nvPr/>
+        </p:nvSpPr>
+        <p:spPr>
+          <a:xfrm>
+            <a:off x="8046720" y="2468880"/>
+            <a:ext cx="3520440" cy="914400"/>
+          </a:xfrm>
+          <a:prstGeom prst="roundRect">
+            <a:avLst/>
+          </a:prstGeom>
+          <a:solidFill>
+            <a:srgbClr val="EDEDED"/>
+          </a:solidFill>
+          <a:ln w="12700">
+            <a:solidFill>
+              <a:srgbClr val="1F4E79"/>
+            </a:solidFill>
+          </a:ln>
+          <a:effectLst/>
+        </p:spPr>
+        <p:style>
+          <a:lnRef idx="1">
+            <a:schemeClr val="accent1"/>
+          </a:lnRef>
+          <a:fillRef idx="3">
+            <a:schemeClr val="accent1"/>
+          </a:fillRef>
+          <a:effectRef idx="2">
+            <a:schemeClr val="accent1"/>
+          </a:effectRef>
+          <a:fontRef idx="minor">
+            <a:schemeClr val="lt1"/>
+          </a:fontRef>
+        </p:style>
+        <p:txBody>
+          <a:bodyPr rtlCol="0" anchor="ctr" wrap="square"/>
+          <a:lstStyle/>
+          <a:p>
+            <a:pPr algn="ctr" rtl="1"/>
+            <a:r>
+              <a:rPr sz="1400" b="1">
+                <a:solidFill>
+                  <a:srgbClr val="333333"/>
+                </a:solidFill>
+                <a:latin typeface="Arial"/>
+              </a:rPr>
+              <a:t>نصوص وصور وصوت / Text, images, audio</a:t>
+            </a:r>
+          </a:p>
+          <a:p>
+            <a:pPr algn="ctr" rtl="0"/>
+            <a:r>
+              <a:rPr sz="1200">
+                <a:solidFill>
+                  <a:srgbClr val="666666"/>
+                </a:solidFill>
+                <a:latin typeface="Calibri"/>
+              </a:rPr>
+              <a:t>PDF • JPG • MP3</a:t>
+            </a:r>
+          </a:p>
+        </p:txBody>
+      </p:sp>
+      <p:sp>
+        <p:nvSpPr>
+          <p:cNvPr id="9" name="Rounded Rectangle 8"/>
+          <p:cNvSpPr/>
+          <p:nvPr/>
+        </p:nvSpPr>
+        <p:spPr>
+          <a:xfrm>
+            <a:off x="1463040" y="4160520"/>
+            <a:ext cx="9235440" cy="777240"/>
+          </a:xfrm>
+          <a:prstGeom prst="roundRect">
+            <a:avLst/>
+          </a:prstGeom>
+          <a:solidFill>
+            <a:srgbClr val="DCE6F1"/>
+          </a:solidFill>
+          <a:ln w="12700">
+            <a:solidFill>
+              <a:srgbClr val="1F4E79"/>
+            </a:solidFill>
+          </a:ln>
+          <a:effectLst/>
+        </p:spPr>
+        <p:style>
+          <a:lnRef idx="1">
+            <a:schemeClr val="accent1"/>
+          </a:lnRef>
+          <a:fillRef idx="3">
+            <a:schemeClr val="accent1"/>
+          </a:fillRef>
+          <a:effectRef idx="2">
+            <a:schemeClr val="accent1"/>
+          </a:effectRef>
+          <a:fontRef idx="minor">
+            <a:schemeClr val="lt1"/>
+          </a:fontRef>
+        </p:style>
+        <p:txBody>
+          <a:bodyPr rtlCol="0" anchor="ctr" wrap="square"/>
+          <a:lstStyle/>
+          <a:p>
+            <a:pPr algn="ctr" rtl="1"/>
+            <a:r>
+              <a:rPr sz="1500" b="1">
+                <a:solidFill>
+                  <a:srgbClr val="333333"/>
+                </a:solidFill>
+                <a:latin typeface="Arial"/>
+              </a:rPr>
+              <a:t>اختر التنسيق حسب الاستخدام: تبادل بسيط ← تحليلات سريعة ← محتوى غني</a:t>
+            </a:r>
+          </a:p>
+          <a:p>
+            <a:pPr algn="ctr" rtl="0"/>
+            <a:r>
+              <a:rPr sz="1200">
+                <a:solidFill>
+                  <a:srgbClr val="666666"/>
+                </a:solidFill>
+                <a:latin typeface="Calibri"/>
+              </a:rPr>
+              <a:t>Choose the format for the job: simple exchange ← fast analytics ← rich content</a:t>
+            </a:r>
+          </a:p>
+        </p:txBody>
+      </p:sp>
+      <p:sp>
+        <p:nvSpPr>
+          <p:cNvPr id="10" name="TextBox 9"/>
+          <p:cNvSpPr txBox="1"/>
+          <p:nvPr/>
+        </p:nvSpPr>
+        <p:spPr>
+          <a:xfrm>
+            <a:off x="640080" y="6126480"/>
+            <a:ext cx="10972800" cy="548640"/>
+          </a:xfrm>
+          <a:prstGeom prst="rect">
+            <a:avLst/>
+          </a:prstGeom>
+          <a:noFill/>
+        </p:spPr>
+        <p:txBody>
+          <a:bodyPr wrap="square">
+            <a:spAutoFit/>
+          </a:bodyPr>
+          <a:lstStyle/>
+          <a:p>
+            <a:pPr algn="r" rtl="1"/>
+            <a:r>
+              <a:rPr sz="1400">
+                <a:solidFill>
+                  <a:srgbClr val="666666"/>
+                </a:solidFill>
+                <a:latin typeface="Arial"/>
+              </a:rPr>
+              <a:t>Parquet عمودي للتحليلات؛ JSON مرن للواجهات؛ الملفات الغنية تحتاج استخراج محتوى.</a:t>
+            </a:r>
+          </a:p>
+          <a:p>
+            <a:pPr algn="r" rtl="0"/>
+            <a:r>
+              <a:t>Parquet is columnar for analytics; JSON is flexible for APIs; rich files need content extraction.</a:t>
+            </a:r>
+          </a:p>
+        </p:txBody>
+      </p:sp>
+      <p:sp>
+        <p:nvSpPr>
+          <p:cNvPr id="11" name="TextBox 10"/>
+          <p:cNvSpPr txBox="1"/>
+          <p:nvPr/>
+        </p:nvSpPr>
+        <p:spPr>
+          <a:xfrm>
+            <a:off x="640080" y="6400800"/>
+            <a:ext cx="8686800" cy="320040"/>
+          </a:xfrm>
+          <a:prstGeom prst="rect">
+            <a:avLst/>
+          </a:prstGeom>
+          <a:noFill/>
+        </p:spPr>
+        <p:txBody>
+          <a:bodyPr wrap="square">
+            <a:spAutoFit/>
+          </a:bodyPr>
+          <a:lstStyle/>
+          <a:p>
+            <a:pPr algn="r" rtl="1"/>
+            <a:r>
+              <a:rPr sz="1000" b="0">
+                <a:solidFill>
+                  <a:srgbClr val="666666"/>
+                </a:solidFill>
+                <a:latin typeface="Arial"/>
+              </a:rPr>
+              <a:t>Module 02 — Data &amp; AI Engineering Track  |  الوحدة الثانية</a:t>
+            </a:r>
+          </a:p>
+        </p:txBody>
+      </p:sp>
+      <p:sp>
+        <p:nvSpPr>
+          <p:cNvPr id="12" name="TextBox 11"/>
+          <p:cNvSpPr txBox="1"/>
+          <p:nvPr/>
+        </p:nvSpPr>
+        <p:spPr>
+          <a:xfrm>
+            <a:off x="9601200" y="6400800"/>
+            <a:ext cx="1920240" cy="320040"/>
+          </a:xfrm>
+          <a:prstGeom prst="rect">
+            <a:avLst/>
+          </a:prstGeom>
+          <a:noFill/>
+        </p:spPr>
+        <p:txBody>
+          <a:bodyPr wrap="square">
+            <a:spAutoFit/>
+          </a:bodyPr>
+          <a:lstStyle/>
+          <a:p>
+            <a:pPr algn="l" rtl="0"/>
+            <a:r>
+              <a:rPr sz="1000" b="0">
+                <a:solidFill>
+                  <a:srgbClr val="666666"/>
+                </a:solidFill>
+                <a:latin typeface="Calibri"/>
+              </a:rPr>
+              <a:t>V06  •  7/13</a:t>
             </a:r>
           </a:p>
         </p:txBody>
@@ -5327,7 +5969,7 @@
                 </a:solidFill>
                 <a:latin typeface="Calibri"/>
               </a:rPr>
-              <a:t>V06  •  2/12</a:t>
+              <a:t>V06  •  2/13</a:t>
             </a:r>
           </a:p>
         </p:txBody>
@@ -5603,7 +6245,7 @@
                 </a:solidFill>
                 <a:latin typeface="Calibri"/>
               </a:rPr>
-              <a:t>V06  •  5/12</a:t>
+              <a:t>V06  •  5/13</a:t>
             </a:r>
           </a:p>
         </p:txBody>
@@ -5879,7 +6521,7 @@
                 </a:solidFill>
                 <a:latin typeface="Calibri"/>
               </a:rPr>
-              <a:t>V06  •  6/12</a:t>
+              <a:t>V06  •  6/13</a:t>
             </a:r>
           </a:p>
         </p:txBody>
@@ -6155,7 +6797,7 @@
                 </a:solidFill>
                 <a:latin typeface="Calibri"/>
               </a:rPr>
-              <a:t>V06  •  7/12</a:t>
+              <a:t>V06  •  8/13</a:t>
             </a:r>
           </a:p>
         </p:txBody>
@@ -6469,7 +7111,7 @@
                 </a:solidFill>
                 <a:latin typeface="Calibri"/>
               </a:rPr>
-              <a:t>V06  •  8/12</a:t>
+              <a:t>V06  •  9/13</a:t>
             </a:r>
           </a:p>
         </p:txBody>
@@ -7144,7 +7786,7 @@
                 </a:solidFill>
                 <a:latin typeface="Calibri"/>
               </a:rPr>
-              <a:t>V06  •  9/12</a:t>
+              <a:t>V06  •  10/13</a:t>
             </a:r>
           </a:p>
         </p:txBody>
@@ -7496,7 +8138,7 @@
                 </a:solidFill>
                 <a:latin typeface="Calibri"/>
               </a:rPr>
-              <a:t>V06  •  10/12</a:t>
+              <a:t>V06  •  11/13</a:t>
             </a:r>
           </a:p>
         </p:txBody>
@@ -7848,7 +8490,7 @@
                 </a:solidFill>
                 <a:latin typeface="Calibri"/>
               </a:rPr>
-              <a:t>V06  •  11/12</a:t>
+              <a:t>V06  •  12/13</a:t>
             </a:r>
           </a:p>
         </p:txBody>
